--- a/멀티모달_화재감지_모니터링_설치매뉴얼.pptx
+++ b/멀티모달_화재감지_모니터링_설치매뉴얼.pptx
@@ -19,6 +19,8 @@
     <p:sldId id="267" r:id="rId18"/>
     <p:sldId id="268" r:id="rId19"/>
     <p:sldId id="269" r:id="rId20"/>
+    <p:sldId id="270" r:id="rId21"/>
+    <p:sldId id="271" r:id="rId22"/>
   </p:sldIdLst>
   <p:sldSz cx="12191695" cy="6858000" type="screen4x3"/>
   <p:notesSz cx="6858000" cy="9144000"/>
@@ -6997,7 +6999,7 @@
     <p:bg>
       <p:bgPr>
         <a:solidFill>
-          <a:srgbClr val="0F1B2D"/>
+          <a:srgbClr val="FFFFFF"/>
         </a:solidFill>
         <a:effectLst/>
       </p:bgPr>
@@ -7048,7 +7050,7 @@
                 <a:ea typeface="맑은 고딕"/>
                 <a:cs typeface="맑은 고딕"/>
               </a:rPr>
-              <a:t>12  TROUBLESHOOTING</a:t>
+              <a:t>12  TRAINING PIPELINE</a:t>
             </a:r>
           </a:p>
         </p:txBody>
@@ -7086,59 +7088,59 @@
             <a:r>
               <a:rPr sz="3000" b="1" i="0">
                 <a:solidFill>
-                  <a:srgbClr val="FFFFFF"/>
-                </a:solidFill>
-                <a:latin typeface="맑은 고딕"/>
-                <a:ea typeface="맑은 고딕"/>
-                <a:cs typeface="맑은 고딕"/>
-              </a:rPr>
-              <a:t>자주 겪는 문제</a:t>
-            </a:r>
-          </a:p>
-        </p:txBody>
-      </p:sp>
-      <p:sp>
-        <p:nvSpPr>
-          <p:cNvPr id="4" name="Rounded Rectangle 3"/>
-          <p:cNvSpPr/>
-          <p:nvPr/>
-        </p:nvSpPr>
-        <p:spPr>
-          <a:xfrm>
-            <a:off x="658368" y="1783080"/>
-            <a:ext cx="10874959" cy="1042415"/>
-          </a:xfrm>
-          <a:prstGeom prst="roundRect">
-            <a:avLst>
-              <a:gd name="adj" fmla="val 6000"/>
-            </a:avLst>
-          </a:prstGeom>
-          <a:solidFill>
-            <a:srgbClr val="1C2B45"/>
-          </a:solidFill>
-          <a:ln>
-            <a:noFill/>
-          </a:ln>
-          <a:effectLst/>
-        </p:spPr>
-        <p:style>
-          <a:lnRef idx="1">
-            <a:schemeClr val="accent1"/>
-          </a:lnRef>
-          <a:fillRef idx="3">
-            <a:schemeClr val="accent1"/>
-          </a:fillRef>
-          <a:effectRef idx="2">
-            <a:schemeClr val="accent1"/>
-          </a:effectRef>
-          <a:fontRef idx="minor">
-            <a:schemeClr val="lt1"/>
-          </a:fontRef>
-        </p:style>
-        <p:txBody>
-          <a:bodyPr rtlCol="0" anchor="ctr"/>
-          <a:lstStyle/>
-          <a:p/>
+                  <a:srgbClr val="1A2435"/>
+                </a:solidFill>
+                <a:latin typeface="맑은 고딕"/>
+                <a:ea typeface="맑은 고딕"/>
+                <a:cs typeface="맑은 고딕"/>
+              </a:rPr>
+              <a:t>모델은 어디서 만들어지는가</a:t>
+            </a:r>
+          </a:p>
+        </p:txBody>
+      </p:sp>
+      <p:sp>
+        <p:nvSpPr>
+          <p:cNvPr id="4" name="TextBox 3"/>
+          <p:cNvSpPr txBox="1"/>
+          <p:nvPr/>
+        </p:nvSpPr>
+        <p:spPr>
+          <a:xfrm>
+            <a:off x="658368" y="1572768"/>
+            <a:ext cx="10515600" cy="320040"/>
+          </a:xfrm>
+          <a:prstGeom prst="rect">
+            <a:avLst/>
+          </a:prstGeom>
+          <a:noFill/>
+        </p:spPr>
+        <p:txBody>
+          <a:bodyPr wrap="square" lIns="0" rIns="0" tIns="0" bIns="0" anchor="t">
+            <a:spAutoFit/>
+          </a:bodyPr>
+          <a:lstStyle/>
+          <a:p>
+            <a:pPr algn="l">
+              <a:spcBef>
+                <a:spcPts val="0"/>
+              </a:spcBef>
+              <a:spcAft>
+                <a:spcPts val="0"/>
+              </a:spcAft>
+            </a:pPr>
+            <a:r>
+              <a:rPr sz="1400" b="0" i="0">
+                <a:solidFill>
+                  <a:srgbClr val="667085"/>
+                </a:solidFill>
+                <a:latin typeface="맑은 고딕"/>
+                <a:ea typeface="맑은 고딕"/>
+                <a:cs typeface="맑은 고딕"/>
+              </a:rPr>
+              <a:t>운영 시스템이 쓰는 모델은 별도 폴더 D:\autoencoder 에서 만듭니다. conda 환경도 otg 로 다릅니다.</a:t>
+            </a:r>
+          </a:p>
         </p:txBody>
       </p:sp>
       <p:sp>
@@ -7149,8 +7151,8 @@
         </p:nvSpPr>
         <p:spPr>
           <a:xfrm>
-            <a:off x="932688" y="2093976"/>
-            <a:ext cx="402336" cy="402336"/>
+            <a:off x="658368" y="2103120"/>
+            <a:ext cx="329184" cy="329184"/>
           </a:xfrm>
           <a:prstGeom prst="ellipse">
             <a:avLst/>
@@ -7183,7 +7185,7 @@
           <a:p>
             <a:pPr algn="ctr"/>
             <a:r>
-              <a:rPr sz="1400" b="1" i="0">
+              <a:rPr sz="1200" b="1" i="0">
                 <a:solidFill>
                   <a:srgbClr val="FFFFFF"/>
                 </a:solidFill>
@@ -7204,38 +7206,38 @@
         </p:nvSpPr>
         <p:spPr>
           <a:xfrm>
-            <a:off x="1517904" y="1965960"/>
-            <a:ext cx="3200400" cy="274320"/>
-          </a:xfrm>
-          <a:prstGeom prst="rect">
-            <a:avLst/>
-          </a:prstGeom>
-          <a:noFill/>
-        </p:spPr>
-        <p:txBody>
-          <a:bodyPr wrap="square" lIns="0" rIns="0" tIns="0" bIns="0" anchor="t">
-            <a:spAutoFit/>
-          </a:bodyPr>
-          <a:lstStyle/>
-          <a:p>
-            <a:pPr algn="l">
-              <a:spcBef>
-                <a:spcPts val="0"/>
-              </a:spcBef>
-              <a:spcAft>
-                <a:spcPts val="0"/>
-              </a:spcAft>
-            </a:pPr>
-            <a:r>
-              <a:rPr sz="1400" b="1" i="0">
-                <a:solidFill>
-                  <a:srgbClr val="FFFFFF"/>
-                </a:solidFill>
-                <a:latin typeface="맑은 고딕"/>
-                <a:ea typeface="맑은 고딕"/>
-                <a:cs typeface="맑은 고딕"/>
-              </a:rPr>
-              <a:t>점수가 계속 같은 값</a:t>
+            <a:off x="1133856" y="2084831"/>
+            <a:ext cx="2286000" cy="256032"/>
+          </a:xfrm>
+          <a:prstGeom prst="rect">
+            <a:avLst/>
+          </a:prstGeom>
+          <a:noFill/>
+        </p:spPr>
+        <p:txBody>
+          <a:bodyPr wrap="square" lIns="0" rIns="0" tIns="0" bIns="0" anchor="t">
+            <a:spAutoFit/>
+          </a:bodyPr>
+          <a:lstStyle/>
+          <a:p>
+            <a:pPr algn="l">
+              <a:spcBef>
+                <a:spcPts val="0"/>
+              </a:spcBef>
+              <a:spcAft>
+                <a:spcPts val="0"/>
+              </a:spcAft>
+            </a:pPr>
+            <a:r>
+              <a:rPr sz="1150" b="1" i="0">
+                <a:solidFill>
+                  <a:srgbClr val="1A2435"/>
+                </a:solidFill>
+                <a:latin typeface="Consolas"/>
+                <a:ea typeface="Consolas"/>
+                <a:cs typeface="Consolas"/>
+              </a:rPr>
+              <a:t>download_ir_raw.py</a:t>
             </a:r>
           </a:p>
         </p:txBody>
@@ -7248,41 +7250,38 @@
         </p:nvSpPr>
         <p:spPr>
           <a:xfrm>
-            <a:off x="1517904" y="2313432"/>
-            <a:ext cx="3200400" cy="365760"/>
-          </a:xfrm>
-          <a:prstGeom prst="rect">
-            <a:avLst/>
-          </a:prstGeom>
-          <a:noFill/>
-        </p:spPr>
-        <p:txBody>
-          <a:bodyPr wrap="square" lIns="0" rIns="0" tIns="0" bIns="0" anchor="t">
-            <a:spAutoFit/>
-          </a:bodyPr>
-          <a:lstStyle/>
-          <a:p>
-            <a:pPr algn="l">
-              <a:lnSpc>
-                <a:spcPct val="115000"/>
-              </a:lnSpc>
-              <a:spcBef>
-                <a:spcPts val="0"/>
-              </a:spcBef>
-              <a:spcAft>
-                <a:spcPts val="0"/>
-              </a:spcAft>
-            </a:pPr>
-            <a:r>
-              <a:rPr sz="1050" b="0" i="0">
-                <a:solidFill>
-                  <a:srgbClr val="F4A261"/>
-                </a:solidFill>
-                <a:latin typeface="맑은 고딕"/>
-                <a:ea typeface="맑은 고딕"/>
-                <a:cs typeface="맑은 고딕"/>
-              </a:rPr>
-              <a:t>현장 서버의 파일이 갱신되지 않는 경우입니다.</a:t>
+            <a:off x="3493008" y="2093976"/>
+            <a:ext cx="2148840" cy="256032"/>
+          </a:xfrm>
+          <a:prstGeom prst="rect">
+            <a:avLst/>
+          </a:prstGeom>
+          <a:noFill/>
+        </p:spPr>
+        <p:txBody>
+          <a:bodyPr wrap="square" lIns="0" rIns="0" tIns="0" bIns="0" anchor="t">
+            <a:spAutoFit/>
+          </a:bodyPr>
+          <a:lstStyle/>
+          <a:p>
+            <a:pPr algn="l">
+              <a:spcBef>
+                <a:spcPts val="0"/>
+              </a:spcBef>
+              <a:spcAft>
+                <a:spcPts val="0"/>
+              </a:spcAft>
+            </a:pPr>
+            <a:r>
+              <a:rPr sz="1000" b="0" i="0">
+                <a:solidFill>
+                  <a:srgbClr val="E4572E"/>
+                </a:solidFill>
+                <a:latin typeface="Consolas"/>
+                <a:ea typeface="Consolas"/>
+                <a:cs typeface="Consolas"/>
+              </a:rPr>
+              <a:t>서버 → ir_raw</a:t>
             </a:r>
           </a:p>
         </p:txBody>
@@ -7295,99 +7294,52 @@
         </p:nvSpPr>
         <p:spPr>
           <a:xfrm>
-            <a:off x="4956048" y="2075688"/>
-            <a:ext cx="6309360" cy="548640"/>
-          </a:xfrm>
-          <a:prstGeom prst="rect">
-            <a:avLst/>
-          </a:prstGeom>
-          <a:noFill/>
-        </p:spPr>
-        <p:txBody>
-          <a:bodyPr wrap="square" lIns="0" rIns="0" tIns="0" bIns="0" anchor="t">
-            <a:spAutoFit/>
-          </a:bodyPr>
-          <a:lstStyle/>
-          <a:p>
-            <a:pPr algn="l">
-              <a:lnSpc>
-                <a:spcPct val="125000"/>
-              </a:lnSpc>
-              <a:spcBef>
-                <a:spcPts val="0"/>
-              </a:spcBef>
-              <a:spcAft>
-                <a:spcPts val="0"/>
-              </a:spcAft>
-            </a:pPr>
-            <a:r>
-              <a:rPr sz="1200" b="0" i="0">
-                <a:solidFill>
-                  <a:srgbClr val="C8D3E3"/>
-                </a:solidFill>
-                <a:latin typeface="맑은 고딕"/>
-                <a:ea typeface="맑은 고딕"/>
-                <a:cs typeface="맑은 고딕"/>
-              </a:rPr>
-              <a:t>debug_logs 의 ts 값을 확인하십시오. 며칠 전 날짜라면 현장 장비의 업로드를 점검합니다.</a:t>
-            </a:r>
-          </a:p>
-        </p:txBody>
-      </p:sp>
-      <p:sp>
-        <p:nvSpPr>
-          <p:cNvPr id="9" name="Rounded Rectangle 8"/>
+            <a:off x="1133856" y="2377439"/>
+            <a:ext cx="6035040" cy="256032"/>
+          </a:xfrm>
+          <a:prstGeom prst="rect">
+            <a:avLst/>
+          </a:prstGeom>
+          <a:noFill/>
+        </p:spPr>
+        <p:txBody>
+          <a:bodyPr wrap="square" lIns="0" rIns="0" tIns="0" bIns="0" anchor="t">
+            <a:spAutoFit/>
+          </a:bodyPr>
+          <a:lstStyle/>
+          <a:p>
+            <a:pPr algn="l">
+              <a:spcBef>
+                <a:spcPts val="0"/>
+              </a:spcBef>
+              <a:spcAft>
+                <a:spcPts val="0"/>
+              </a:spcAft>
+            </a:pPr>
+            <a:r>
+              <a:rPr sz="1100" b="0" i="0">
+                <a:solidFill>
+                  <a:srgbClr val="667085"/>
+                </a:solidFill>
+                <a:latin typeface="맑은 고딕"/>
+                <a:ea typeface="맑은 고딕"/>
+                <a:cs typeface="맑은 고딕"/>
+              </a:rPr>
+              <a:t>현장 서버에서 raw 파일을 내려받습니다.</a:t>
+            </a:r>
+          </a:p>
+        </p:txBody>
+      </p:sp>
+      <p:sp>
+        <p:nvSpPr>
+          <p:cNvPr id="9" name="Oval 8"/>
           <p:cNvSpPr/>
           <p:nvPr/>
         </p:nvSpPr>
         <p:spPr>
           <a:xfrm>
-            <a:off x="658368" y="2935224"/>
-            <a:ext cx="10874959" cy="1042415"/>
-          </a:xfrm>
-          <a:prstGeom prst="roundRect">
-            <a:avLst>
-              <a:gd name="adj" fmla="val 6000"/>
-            </a:avLst>
-          </a:prstGeom>
-          <a:solidFill>
-            <a:srgbClr val="1C2B45"/>
-          </a:solidFill>
-          <a:ln>
-            <a:noFill/>
-          </a:ln>
-          <a:effectLst/>
-        </p:spPr>
-        <p:style>
-          <a:lnRef idx="1">
-            <a:schemeClr val="accent1"/>
-          </a:lnRef>
-          <a:fillRef idx="3">
-            <a:schemeClr val="accent1"/>
-          </a:fillRef>
-          <a:effectRef idx="2">
-            <a:schemeClr val="accent1"/>
-          </a:effectRef>
-          <a:fontRef idx="minor">
-            <a:schemeClr val="lt1"/>
-          </a:fontRef>
-        </p:style>
-        <p:txBody>
-          <a:bodyPr rtlCol="0" anchor="ctr"/>
-          <a:lstStyle/>
-          <a:p/>
-        </p:txBody>
-      </p:sp>
-      <p:sp>
-        <p:nvSpPr>
-          <p:cNvPr id="10" name="Oval 9"/>
-          <p:cNvSpPr/>
-          <p:nvPr/>
-        </p:nvSpPr>
-        <p:spPr>
-          <a:xfrm>
-            <a:off x="932688" y="3246120"/>
-            <a:ext cx="402336" cy="402336"/>
+            <a:off x="658368" y="2743200"/>
+            <a:ext cx="329184" cy="329184"/>
           </a:xfrm>
           <a:prstGeom prst="ellipse">
             <a:avLst/>
@@ -7420,7 +7372,7 @@
           <a:p>
             <a:pPr algn="ctr"/>
             <a:r>
-              <a:rPr sz="1400" b="1" i="0">
+              <a:rPr sz="1200" b="1" i="0">
                 <a:solidFill>
                   <a:srgbClr val="FFFFFF"/>
                 </a:solidFill>
@@ -7435,44 +7387,88 @@
       </p:sp>
       <p:sp>
         <p:nvSpPr>
+          <p:cNvPr id="10" name="TextBox 9"/>
+          <p:cNvSpPr txBox="1"/>
+          <p:nvPr/>
+        </p:nvSpPr>
+        <p:spPr>
+          <a:xfrm>
+            <a:off x="1133856" y="2724912"/>
+            <a:ext cx="2286000" cy="256032"/>
+          </a:xfrm>
+          <a:prstGeom prst="rect">
+            <a:avLst/>
+          </a:prstGeom>
+          <a:noFill/>
+        </p:spPr>
+        <p:txBody>
+          <a:bodyPr wrap="square" lIns="0" rIns="0" tIns="0" bIns="0" anchor="t">
+            <a:spAutoFit/>
+          </a:bodyPr>
+          <a:lstStyle/>
+          <a:p>
+            <a:pPr algn="l">
+              <a:spcBef>
+                <a:spcPts val="0"/>
+              </a:spcBef>
+              <a:spcAft>
+                <a:spcPts val="0"/>
+              </a:spcAft>
+            </a:pPr>
+            <a:r>
+              <a:rPr sz="1150" b="1" i="0">
+                <a:solidFill>
+                  <a:srgbClr val="1A2435"/>
+                </a:solidFill>
+                <a:latin typeface="Consolas"/>
+                <a:ea typeface="Consolas"/>
+                <a:cs typeface="Consolas"/>
+              </a:rPr>
+              <a:t>conv_raw.py</a:t>
+            </a:r>
+          </a:p>
+        </p:txBody>
+      </p:sp>
+      <p:sp>
+        <p:nvSpPr>
           <p:cNvPr id="11" name="TextBox 10"/>
           <p:cNvSpPr txBox="1"/>
           <p:nvPr/>
         </p:nvSpPr>
         <p:spPr>
           <a:xfrm>
-            <a:off x="1517904" y="3118104"/>
-            <a:ext cx="3200400" cy="274320"/>
-          </a:xfrm>
-          <a:prstGeom prst="rect">
-            <a:avLst/>
-          </a:prstGeom>
-          <a:noFill/>
-        </p:spPr>
-        <p:txBody>
-          <a:bodyPr wrap="square" lIns="0" rIns="0" tIns="0" bIns="0" anchor="t">
-            <a:spAutoFit/>
-          </a:bodyPr>
-          <a:lstStyle/>
-          <a:p>
-            <a:pPr algn="l">
-              <a:spcBef>
-                <a:spcPts val="0"/>
-              </a:spcBef>
-              <a:spcAft>
-                <a:spcPts val="0"/>
-              </a:spcAft>
-            </a:pPr>
-            <a:r>
-              <a:rPr sz="1400" b="1" i="0">
-                <a:solidFill>
-                  <a:srgbClr val="FFFFFF"/>
-                </a:solidFill>
-                <a:latin typeface="맑은 고딕"/>
-                <a:ea typeface="맑은 고딕"/>
-                <a:cs typeface="맑은 고딕"/>
-              </a:rPr>
-              <a:t>db_utils 임포트 오류</a:t>
+            <a:off x="3493008" y="2734056"/>
+            <a:ext cx="2148840" cy="256032"/>
+          </a:xfrm>
+          <a:prstGeom prst="rect">
+            <a:avLst/>
+          </a:prstGeom>
+          <a:noFill/>
+        </p:spPr>
+        <p:txBody>
+          <a:bodyPr wrap="square" lIns="0" rIns="0" tIns="0" bIns="0" anchor="t">
+            <a:spAutoFit/>
+          </a:bodyPr>
+          <a:lstStyle/>
+          <a:p>
+            <a:pPr algn="l">
+              <a:spcBef>
+                <a:spcPts val="0"/>
+              </a:spcBef>
+              <a:spcAft>
+                <a:spcPts val="0"/>
+              </a:spcAft>
+            </a:pPr>
+            <a:r>
+              <a:rPr sz="1000" b="0" i="0">
+                <a:solidFill>
+                  <a:srgbClr val="E4572E"/>
+                </a:solidFill>
+                <a:latin typeface="Consolas"/>
+                <a:ea typeface="Consolas"/>
+                <a:cs typeface="Consolas"/>
+              </a:rPr>
+              <a:t>ir_raw → step_0</a:t>
             </a:r>
           </a:p>
         </p:txBody>
@@ -7485,146 +7481,52 @@
         </p:nvSpPr>
         <p:spPr>
           <a:xfrm>
-            <a:off x="1517904" y="3465576"/>
-            <a:ext cx="3200400" cy="365760"/>
-          </a:xfrm>
-          <a:prstGeom prst="rect">
-            <a:avLst/>
-          </a:prstGeom>
-          <a:noFill/>
-        </p:spPr>
-        <p:txBody>
-          <a:bodyPr wrap="square" lIns="0" rIns="0" tIns="0" bIns="0" anchor="t">
-            <a:spAutoFit/>
-          </a:bodyPr>
-          <a:lstStyle/>
-          <a:p>
-            <a:pPr algn="l">
-              <a:lnSpc>
-                <a:spcPct val="115000"/>
-              </a:lnSpc>
-              <a:spcBef>
-                <a:spcPts val="0"/>
-              </a:spcBef>
-              <a:spcAft>
-                <a:spcPts val="0"/>
-              </a:spcAft>
-            </a:pPr>
-            <a:r>
-              <a:rPr sz="1050" b="0" i="0">
-                <a:solidFill>
-                  <a:srgbClr val="F4A261"/>
-                </a:solidFill>
-                <a:latin typeface="맑은 고딕"/>
-                <a:ea typeface="맑은 고딕"/>
-                <a:cs typeface="맑은 고딕"/>
-              </a:rPr>
-              <a:t>PyPI 의 동명 패키지가 대신 잡힌 경우입니다.</a:t>
-            </a:r>
-          </a:p>
-        </p:txBody>
-      </p:sp>
-      <p:sp>
-        <p:nvSpPr>
-          <p:cNvPr id="13" name="TextBox 12"/>
-          <p:cNvSpPr txBox="1"/>
-          <p:nvPr/>
-        </p:nvSpPr>
-        <p:spPr>
-          <a:xfrm>
-            <a:off x="4956048" y="3227832"/>
-            <a:ext cx="6309360" cy="548640"/>
-          </a:xfrm>
-          <a:prstGeom prst="rect">
-            <a:avLst/>
-          </a:prstGeom>
-          <a:noFill/>
-        </p:spPr>
-        <p:txBody>
-          <a:bodyPr wrap="square" lIns="0" rIns="0" tIns="0" bIns="0" anchor="t">
-            <a:spAutoFit/>
-          </a:bodyPr>
-          <a:lstStyle/>
-          <a:p>
-            <a:pPr algn="l">
-              <a:lnSpc>
-                <a:spcPct val="125000"/>
-              </a:lnSpc>
-              <a:spcBef>
-                <a:spcPts val="0"/>
-              </a:spcBef>
-              <a:spcAft>
-                <a:spcPts val="0"/>
-              </a:spcAft>
-            </a:pPr>
-            <a:r>
-              <a:rPr sz="1200" b="0" i="0">
-                <a:solidFill>
-                  <a:srgbClr val="C8D3E3"/>
-                </a:solidFill>
-                <a:latin typeface="맑은 고딕"/>
-                <a:ea typeface="맑은 고딕"/>
-                <a:cs typeface="맑은 고딕"/>
-              </a:rPr>
-              <a:t>pip uninstall db_utils 로 제거하고, ROOT_PATH 가 올바른지 확인합니다.</a:t>
-            </a:r>
-          </a:p>
-        </p:txBody>
-      </p:sp>
-      <p:sp>
-        <p:nvSpPr>
-          <p:cNvPr id="14" name="Rounded Rectangle 13"/>
+            <a:off x="1133856" y="3017520"/>
+            <a:ext cx="6035040" cy="256032"/>
+          </a:xfrm>
+          <a:prstGeom prst="rect">
+            <a:avLst/>
+          </a:prstGeom>
+          <a:noFill/>
+        </p:spPr>
+        <p:txBody>
+          <a:bodyPr wrap="square" lIns="0" rIns="0" tIns="0" bIns="0" anchor="t">
+            <a:spAutoFit/>
+          </a:bodyPr>
+          <a:lstStyle/>
+          <a:p>
+            <a:pPr algn="l">
+              <a:spcBef>
+                <a:spcPts val="0"/>
+              </a:spcBef>
+              <a:spcAft>
+                <a:spcPts val="0"/>
+              </a:spcAft>
+            </a:pPr>
+            <a:r>
+              <a:rPr sz="1100" b="0" i="0">
+                <a:solidFill>
+                  <a:srgbClr val="667085"/>
+                </a:solidFill>
+                <a:latin typeface="맑은 고딕"/>
+                <a:ea typeface="맑은 고딕"/>
+                <a:cs typeface="맑은 고딕"/>
+              </a:rPr>
+              <a:t>raw 값을 온도 값으로 변환합니다.</a:t>
+            </a:r>
+          </a:p>
+        </p:txBody>
+      </p:sp>
+      <p:sp>
+        <p:nvSpPr>
+          <p:cNvPr id="13" name="Oval 12"/>
           <p:cNvSpPr/>
           <p:nvPr/>
         </p:nvSpPr>
         <p:spPr>
           <a:xfrm>
-            <a:off x="658368" y="4087368"/>
-            <a:ext cx="10874959" cy="1042415"/>
-          </a:xfrm>
-          <a:prstGeom prst="roundRect">
-            <a:avLst>
-              <a:gd name="adj" fmla="val 6000"/>
-            </a:avLst>
-          </a:prstGeom>
-          <a:solidFill>
-            <a:srgbClr val="1C2B45"/>
-          </a:solidFill>
-          <a:ln>
-            <a:noFill/>
-          </a:ln>
-          <a:effectLst/>
-        </p:spPr>
-        <p:style>
-          <a:lnRef idx="1">
-            <a:schemeClr val="accent1"/>
-          </a:lnRef>
-          <a:fillRef idx="3">
-            <a:schemeClr val="accent1"/>
-          </a:fillRef>
-          <a:effectRef idx="2">
-            <a:schemeClr val="accent1"/>
-          </a:effectRef>
-          <a:fontRef idx="minor">
-            <a:schemeClr val="lt1"/>
-          </a:fontRef>
-        </p:style>
-        <p:txBody>
-          <a:bodyPr rtlCol="0" anchor="ctr"/>
-          <a:lstStyle/>
-          <a:p/>
-        </p:txBody>
-      </p:sp>
-      <p:sp>
-        <p:nvSpPr>
-          <p:cNvPr id="15" name="Oval 14"/>
-          <p:cNvSpPr/>
-          <p:nvPr/>
-        </p:nvSpPr>
-        <p:spPr>
-          <a:xfrm>
-            <a:off x="932688" y="4398264"/>
-            <a:ext cx="402336" cy="402336"/>
+            <a:off x="658368" y="3383280"/>
+            <a:ext cx="329184" cy="329184"/>
           </a:xfrm>
           <a:prstGeom prst="ellipse">
             <a:avLst/>
@@ -7657,7 +7559,7 @@
           <a:p>
             <a:pPr algn="ctr"/>
             <a:r>
-              <a:rPr sz="1400" b="1" i="0">
+              <a:rPr sz="1200" b="1" i="0">
                 <a:solidFill>
                   <a:srgbClr val="FFFFFF"/>
                 </a:solidFill>
@@ -7672,196 +7574,146 @@
       </p:sp>
       <p:sp>
         <p:nvSpPr>
+          <p:cNvPr id="14" name="TextBox 13"/>
+          <p:cNvSpPr txBox="1"/>
+          <p:nvPr/>
+        </p:nvSpPr>
+        <p:spPr>
+          <a:xfrm>
+            <a:off x="1133856" y="3364992"/>
+            <a:ext cx="2286000" cy="256032"/>
+          </a:xfrm>
+          <a:prstGeom prst="rect">
+            <a:avLst/>
+          </a:prstGeom>
+          <a:noFill/>
+        </p:spPr>
+        <p:txBody>
+          <a:bodyPr wrap="square" lIns="0" rIns="0" tIns="0" bIns="0" anchor="t">
+            <a:spAutoFit/>
+          </a:bodyPr>
+          <a:lstStyle/>
+          <a:p>
+            <a:pPr algn="l">
+              <a:spcBef>
+                <a:spcPts val="0"/>
+              </a:spcBef>
+              <a:spcAft>
+                <a:spcPts val="0"/>
+              </a:spcAft>
+            </a:pPr>
+            <a:r>
+              <a:rPr sz="1150" b="1" i="0">
+                <a:solidFill>
+                  <a:srgbClr val="1A2435"/>
+                </a:solidFill>
+                <a:latin typeface="Consolas"/>
+                <a:ea typeface="Consolas"/>
+                <a:cs typeface="Consolas"/>
+              </a:rPr>
+              <a:t>gen-samples.py</a:t>
+            </a:r>
+          </a:p>
+        </p:txBody>
+      </p:sp>
+      <p:sp>
+        <p:nvSpPr>
+          <p:cNvPr id="15" name="TextBox 14"/>
+          <p:cNvSpPr txBox="1"/>
+          <p:nvPr/>
+        </p:nvSpPr>
+        <p:spPr>
+          <a:xfrm>
+            <a:off x="3493008" y="3374136"/>
+            <a:ext cx="2148840" cy="256032"/>
+          </a:xfrm>
+          <a:prstGeom prst="rect">
+            <a:avLst/>
+          </a:prstGeom>
+          <a:noFill/>
+        </p:spPr>
+        <p:txBody>
+          <a:bodyPr wrap="square" lIns="0" rIns="0" tIns="0" bIns="0" anchor="t">
+            <a:spAutoFit/>
+          </a:bodyPr>
+          <a:lstStyle/>
+          <a:p>
+            <a:pPr algn="l">
+              <a:spcBef>
+                <a:spcPts val="0"/>
+              </a:spcBef>
+              <a:spcAft>
+                <a:spcPts val="0"/>
+              </a:spcAft>
+            </a:pPr>
+            <a:r>
+              <a:rPr sz="1000" b="0" i="0">
+                <a:solidFill>
+                  <a:srgbClr val="E4572E"/>
+                </a:solidFill>
+                <a:latin typeface="Consolas"/>
+                <a:ea typeface="Consolas"/>
+                <a:cs typeface="Consolas"/>
+              </a:rPr>
+              <a:t>step_0 → step_1</a:t>
+            </a:r>
+          </a:p>
+        </p:txBody>
+      </p:sp>
+      <p:sp>
+        <p:nvSpPr>
           <p:cNvPr id="16" name="TextBox 15"/>
           <p:cNvSpPr txBox="1"/>
           <p:nvPr/>
         </p:nvSpPr>
         <p:spPr>
           <a:xfrm>
-            <a:off x="1517904" y="4270248"/>
-            <a:ext cx="3200400" cy="274320"/>
-          </a:xfrm>
-          <a:prstGeom prst="rect">
-            <a:avLst/>
-          </a:prstGeom>
-          <a:noFill/>
-        </p:spPr>
-        <p:txBody>
-          <a:bodyPr wrap="square" lIns="0" rIns="0" tIns="0" bIns="0" anchor="t">
-            <a:spAutoFit/>
-          </a:bodyPr>
-          <a:lstStyle/>
-          <a:p>
-            <a:pPr algn="l">
-              <a:spcBef>
-                <a:spcPts val="0"/>
-              </a:spcBef>
-              <a:spcAft>
-                <a:spcPts val="0"/>
-              </a:spcAft>
-            </a:pPr>
-            <a:r>
-              <a:rPr sz="1400" b="1" i="0">
-                <a:solidFill>
-                  <a:srgbClr val="FFFFFF"/>
-                </a:solidFill>
-                <a:latin typeface="맑은 고딕"/>
-                <a:ea typeface="맑은 고딕"/>
-                <a:cs typeface="맑은 고딕"/>
-              </a:rPr>
-              <a:t>env.ini 를 찾을 수 없음</a:t>
-            </a:r>
-          </a:p>
-        </p:txBody>
-      </p:sp>
-      <p:sp>
-        <p:nvSpPr>
-          <p:cNvPr id="17" name="TextBox 16"/>
-          <p:cNvSpPr txBox="1"/>
-          <p:nvPr/>
-        </p:nvSpPr>
-        <p:spPr>
-          <a:xfrm>
-            <a:off x="1517904" y="4617720"/>
-            <a:ext cx="3200400" cy="365760"/>
-          </a:xfrm>
-          <a:prstGeom prst="rect">
-            <a:avLst/>
-          </a:prstGeom>
-          <a:noFill/>
-        </p:spPr>
-        <p:txBody>
-          <a:bodyPr wrap="square" lIns="0" rIns="0" tIns="0" bIns="0" anchor="t">
-            <a:spAutoFit/>
-          </a:bodyPr>
-          <a:lstStyle/>
-          <a:p>
-            <a:pPr algn="l">
-              <a:lnSpc>
-                <a:spcPct val="115000"/>
-              </a:lnSpc>
-              <a:spcBef>
-                <a:spcPts val="0"/>
-              </a:spcBef>
-              <a:spcAft>
-                <a:spcPts val="0"/>
-              </a:spcAft>
-            </a:pPr>
-            <a:r>
-              <a:rPr sz="1050" b="0" i="0">
-                <a:solidFill>
-                  <a:srgbClr val="F4A261"/>
-                </a:solidFill>
-                <a:latin typeface="맑은 고딕"/>
-                <a:ea typeface="맑은 고딕"/>
-                <a:cs typeface="맑은 고딕"/>
-              </a:rPr>
-              <a:t>otg_monitoring.ini 의 ROOT_PATH 가 잘못된 경우입니다.</a:t>
-            </a:r>
-          </a:p>
-        </p:txBody>
-      </p:sp>
-      <p:sp>
-        <p:nvSpPr>
-          <p:cNvPr id="18" name="TextBox 17"/>
-          <p:cNvSpPr txBox="1"/>
-          <p:nvPr/>
-        </p:nvSpPr>
-        <p:spPr>
-          <a:xfrm>
-            <a:off x="4956048" y="4379976"/>
-            <a:ext cx="6309360" cy="548640"/>
-          </a:xfrm>
-          <a:prstGeom prst="rect">
-            <a:avLst/>
-          </a:prstGeom>
-          <a:noFill/>
-        </p:spPr>
-        <p:txBody>
-          <a:bodyPr wrap="square" lIns="0" rIns="0" tIns="0" bIns="0" anchor="t">
-            <a:spAutoFit/>
-          </a:bodyPr>
-          <a:lstStyle/>
-          <a:p>
-            <a:pPr algn="l">
-              <a:lnSpc>
-                <a:spcPct val="125000"/>
-              </a:lnSpc>
-              <a:spcBef>
-                <a:spcPts val="0"/>
-              </a:spcBef>
-              <a:spcAft>
-                <a:spcPts val="0"/>
-              </a:spcAft>
-            </a:pPr>
-            <a:r>
-              <a:rPr sz="1200" b="0" i="0">
-                <a:solidFill>
-                  <a:srgbClr val="C8D3E3"/>
-                </a:solidFill>
-                <a:latin typeface="맑은 고딕"/>
-                <a:ea typeface="맑은 고딕"/>
-                <a:cs typeface="맑은 고딕"/>
-              </a:rPr>
-              <a:t>메시지에 표시된 경로와 실제 폴더를 대조합니다.</a:t>
-            </a:r>
-          </a:p>
-        </p:txBody>
-      </p:sp>
-      <p:sp>
-        <p:nvSpPr>
-          <p:cNvPr id="19" name="Rounded Rectangle 18"/>
+            <a:off x="1133856" y="3657600"/>
+            <a:ext cx="6035040" cy="256032"/>
+          </a:xfrm>
+          <a:prstGeom prst="rect">
+            <a:avLst/>
+          </a:prstGeom>
+          <a:noFill/>
+        </p:spPr>
+        <p:txBody>
+          <a:bodyPr wrap="square" lIns="0" rIns="0" tIns="0" bIns="0" anchor="t">
+            <a:spAutoFit/>
+          </a:bodyPr>
+          <a:lstStyle/>
+          <a:p>
+            <a:pPr algn="l">
+              <a:spcBef>
+                <a:spcPts val="0"/>
+              </a:spcBef>
+              <a:spcAft>
+                <a:spcPts val="0"/>
+              </a:spcAft>
+            </a:pPr>
+            <a:r>
+              <a:rPr sz="1100" b="0" i="0">
+                <a:solidFill>
+                  <a:srgbClr val="667085"/>
+                </a:solidFill>
+                <a:latin typeface="맑은 고딕"/>
+                <a:ea typeface="맑은 고딕"/>
+                <a:cs typeface="맑은 고딕"/>
+              </a:rPr>
+              <a:t>160x120 을 64개 격자 값으로 축약합니다.</a:t>
+            </a:r>
+          </a:p>
+        </p:txBody>
+      </p:sp>
+      <p:sp>
+        <p:nvSpPr>
+          <p:cNvPr id="17" name="Oval 16"/>
           <p:cNvSpPr/>
           <p:nvPr/>
         </p:nvSpPr>
         <p:spPr>
           <a:xfrm>
-            <a:off x="658368" y="5239512"/>
-            <a:ext cx="10874959" cy="1042415"/>
-          </a:xfrm>
-          <a:prstGeom prst="roundRect">
-            <a:avLst>
-              <a:gd name="adj" fmla="val 6000"/>
-            </a:avLst>
-          </a:prstGeom>
-          <a:solidFill>
-            <a:srgbClr val="1C2B45"/>
-          </a:solidFill>
-          <a:ln>
-            <a:noFill/>
-          </a:ln>
-          <a:effectLst/>
-        </p:spPr>
-        <p:style>
-          <a:lnRef idx="1">
-            <a:schemeClr val="accent1"/>
-          </a:lnRef>
-          <a:fillRef idx="3">
-            <a:schemeClr val="accent1"/>
-          </a:fillRef>
-          <a:effectRef idx="2">
-            <a:schemeClr val="accent1"/>
-          </a:effectRef>
-          <a:fontRef idx="minor">
-            <a:schemeClr val="lt1"/>
-          </a:fontRef>
-        </p:style>
-        <p:txBody>
-          <a:bodyPr rtlCol="0" anchor="ctr"/>
-          <a:lstStyle/>
-          <a:p/>
-        </p:txBody>
-      </p:sp>
-      <p:sp>
-        <p:nvSpPr>
-          <p:cNvPr id="20" name="Oval 19"/>
-          <p:cNvSpPr/>
-          <p:nvPr/>
-        </p:nvSpPr>
-        <p:spPr>
-          <a:xfrm>
-            <a:off x="932688" y="5550407"/>
-            <a:ext cx="402336" cy="402336"/>
+            <a:off x="658368" y="4023360"/>
+            <a:ext cx="329184" cy="329184"/>
           </a:xfrm>
           <a:prstGeom prst="ellipse">
             <a:avLst/>
@@ -7894,73 +7746,623 @@
           <a:p>
             <a:pPr algn="ctr"/>
             <a:r>
+              <a:rPr sz="1200" b="1" i="0">
+                <a:solidFill>
+                  <a:srgbClr val="FFFFFF"/>
+                </a:solidFill>
+                <a:latin typeface="맑은 고딕"/>
+                <a:ea typeface="맑은 고딕"/>
+                <a:cs typeface="맑은 고딕"/>
+              </a:rPr>
+              <a:t>4</a:t>
+            </a:r>
+          </a:p>
+        </p:txBody>
+      </p:sp>
+      <p:sp>
+        <p:nvSpPr>
+          <p:cNvPr id="18" name="TextBox 17"/>
+          <p:cNvSpPr txBox="1"/>
+          <p:nvPr/>
+        </p:nvSpPr>
+        <p:spPr>
+          <a:xfrm>
+            <a:off x="1133856" y="4005072"/>
+            <a:ext cx="2286000" cy="256032"/>
+          </a:xfrm>
+          <a:prstGeom prst="rect">
+            <a:avLst/>
+          </a:prstGeom>
+          <a:noFill/>
+        </p:spPr>
+        <p:txBody>
+          <a:bodyPr wrap="square" lIns="0" rIns="0" tIns="0" bIns="0" anchor="t">
+            <a:spAutoFit/>
+          </a:bodyPr>
+          <a:lstStyle/>
+          <a:p>
+            <a:pPr algn="l">
+              <a:spcBef>
+                <a:spcPts val="0"/>
+              </a:spcBef>
+              <a:spcAft>
+                <a:spcPts val="0"/>
+              </a:spcAft>
+            </a:pPr>
+            <a:r>
+              <a:rPr sz="1150" b="1" i="0">
+                <a:solidFill>
+                  <a:srgbClr val="1A2435"/>
+                </a:solidFill>
+                <a:latin typeface="Consolas"/>
+                <a:ea typeface="Consolas"/>
+                <a:cs typeface="Consolas"/>
+              </a:rPr>
+              <a:t>apply_median.py</a:t>
+            </a:r>
+          </a:p>
+        </p:txBody>
+      </p:sp>
+      <p:sp>
+        <p:nvSpPr>
+          <p:cNvPr id="19" name="TextBox 18"/>
+          <p:cNvSpPr txBox="1"/>
+          <p:nvPr/>
+        </p:nvSpPr>
+        <p:spPr>
+          <a:xfrm>
+            <a:off x="3493008" y="4014216"/>
+            <a:ext cx="2148840" cy="256032"/>
+          </a:xfrm>
+          <a:prstGeom prst="rect">
+            <a:avLst/>
+          </a:prstGeom>
+          <a:noFill/>
+        </p:spPr>
+        <p:txBody>
+          <a:bodyPr wrap="square" lIns="0" rIns="0" tIns="0" bIns="0" anchor="t">
+            <a:spAutoFit/>
+          </a:bodyPr>
+          <a:lstStyle/>
+          <a:p>
+            <a:pPr algn="l">
+              <a:spcBef>
+                <a:spcPts val="0"/>
+              </a:spcBef>
+              <a:spcAft>
+                <a:spcPts val="0"/>
+              </a:spcAft>
+            </a:pPr>
+            <a:r>
+              <a:rPr sz="1000" b="0" i="0">
+                <a:solidFill>
+                  <a:srgbClr val="E4572E"/>
+                </a:solidFill>
+                <a:latin typeface="Consolas"/>
+                <a:ea typeface="Consolas"/>
+                <a:cs typeface="Consolas"/>
+              </a:rPr>
+              <a:t>step_1 → step_2</a:t>
+            </a:r>
+          </a:p>
+        </p:txBody>
+      </p:sp>
+      <p:sp>
+        <p:nvSpPr>
+          <p:cNvPr id="20" name="TextBox 19"/>
+          <p:cNvSpPr txBox="1"/>
+          <p:nvPr/>
+        </p:nvSpPr>
+        <p:spPr>
+          <a:xfrm>
+            <a:off x="1133856" y="4297680"/>
+            <a:ext cx="6035040" cy="256032"/>
+          </a:xfrm>
+          <a:prstGeom prst="rect">
+            <a:avLst/>
+          </a:prstGeom>
+          <a:noFill/>
+        </p:spPr>
+        <p:txBody>
+          <a:bodyPr wrap="square" lIns="0" rIns="0" tIns="0" bIns="0" anchor="t">
+            <a:spAutoFit/>
+          </a:bodyPr>
+          <a:lstStyle/>
+          <a:p>
+            <a:pPr algn="l">
+              <a:spcBef>
+                <a:spcPts val="0"/>
+              </a:spcBef>
+              <a:spcAft>
+                <a:spcPts val="0"/>
+              </a:spcAft>
+            </a:pPr>
+            <a:r>
+              <a:rPr sz="1100" b="0" i="0">
+                <a:solidFill>
+                  <a:srgbClr val="667085"/>
+                </a:solidFill>
+                <a:latin typeface="맑은 고딕"/>
+                <a:ea typeface="맑은 고딕"/>
+                <a:cs typeface="맑은 고딕"/>
+              </a:rPr>
+              <a:t>median 필터로 노이즈를 제거합니다.</a:t>
+            </a:r>
+          </a:p>
+        </p:txBody>
+      </p:sp>
+      <p:sp>
+        <p:nvSpPr>
+          <p:cNvPr id="21" name="Oval 20"/>
+          <p:cNvSpPr/>
+          <p:nvPr/>
+        </p:nvSpPr>
+        <p:spPr>
+          <a:xfrm>
+            <a:off x="658368" y="4663440"/>
+            <a:ext cx="329184" cy="329184"/>
+          </a:xfrm>
+          <a:prstGeom prst="ellipse">
+            <a:avLst/>
+          </a:prstGeom>
+          <a:solidFill>
+            <a:srgbClr val="E4572E"/>
+          </a:solidFill>
+          <a:ln>
+            <a:noFill/>
+          </a:ln>
+          <a:effectLst/>
+        </p:spPr>
+        <p:style>
+          <a:lnRef idx="1">
+            <a:schemeClr val="accent1"/>
+          </a:lnRef>
+          <a:fillRef idx="3">
+            <a:schemeClr val="accent1"/>
+          </a:fillRef>
+          <a:effectRef idx="2">
+            <a:schemeClr val="accent1"/>
+          </a:effectRef>
+          <a:fontRef idx="minor">
+            <a:schemeClr val="lt1"/>
+          </a:fontRef>
+        </p:style>
+        <p:txBody>
+          <a:bodyPr rtlCol="0" anchor="ctr" lIns="0" rIns="0" tIns="0" bIns="0"/>
+          <a:lstStyle/>
+          <a:p>
+            <a:pPr algn="ctr"/>
+            <a:r>
+              <a:rPr sz="1200" b="1" i="0">
+                <a:solidFill>
+                  <a:srgbClr val="FFFFFF"/>
+                </a:solidFill>
+                <a:latin typeface="맑은 고딕"/>
+                <a:ea typeface="맑은 고딕"/>
+                <a:cs typeface="맑은 고딕"/>
+              </a:rPr>
+              <a:t>5</a:t>
+            </a:r>
+          </a:p>
+        </p:txBody>
+      </p:sp>
+      <p:sp>
+        <p:nvSpPr>
+          <p:cNvPr id="22" name="TextBox 21"/>
+          <p:cNvSpPr txBox="1"/>
+          <p:nvPr/>
+        </p:nvSpPr>
+        <p:spPr>
+          <a:xfrm>
+            <a:off x="1133856" y="4645152"/>
+            <a:ext cx="2286000" cy="256032"/>
+          </a:xfrm>
+          <a:prstGeom prst="rect">
+            <a:avLst/>
+          </a:prstGeom>
+          <a:noFill/>
+        </p:spPr>
+        <p:txBody>
+          <a:bodyPr wrap="square" lIns="0" rIns="0" tIns="0" bIns="0" anchor="t">
+            <a:spAutoFit/>
+          </a:bodyPr>
+          <a:lstStyle/>
+          <a:p>
+            <a:pPr algn="l">
+              <a:spcBef>
+                <a:spcPts val="0"/>
+              </a:spcBef>
+              <a:spcAft>
+                <a:spcPts val="0"/>
+              </a:spcAft>
+            </a:pPr>
+            <a:r>
+              <a:rPr sz="1150" b="1" i="0">
+                <a:solidFill>
+                  <a:srgbClr val="1A2435"/>
+                </a:solidFill>
+                <a:latin typeface="Consolas"/>
+                <a:ea typeface="Consolas"/>
+                <a:cs typeface="Consolas"/>
+              </a:rPr>
+              <a:t>apply_mask_extract.py</a:t>
+            </a:r>
+          </a:p>
+        </p:txBody>
+      </p:sp>
+      <p:sp>
+        <p:nvSpPr>
+          <p:cNvPr id="23" name="TextBox 22"/>
+          <p:cNvSpPr txBox="1"/>
+          <p:nvPr/>
+        </p:nvSpPr>
+        <p:spPr>
+          <a:xfrm>
+            <a:off x="3493008" y="4654296"/>
+            <a:ext cx="2148840" cy="256032"/>
+          </a:xfrm>
+          <a:prstGeom prst="rect">
+            <a:avLst/>
+          </a:prstGeom>
+          <a:noFill/>
+        </p:spPr>
+        <p:txBody>
+          <a:bodyPr wrap="square" lIns="0" rIns="0" tIns="0" bIns="0" anchor="t">
+            <a:spAutoFit/>
+          </a:bodyPr>
+          <a:lstStyle/>
+          <a:p>
+            <a:pPr algn="l">
+              <a:spcBef>
+                <a:spcPts val="0"/>
+              </a:spcBef>
+              <a:spcAft>
+                <a:spcPts val="0"/>
+              </a:spcAft>
+            </a:pPr>
+            <a:r>
+              <a:rPr sz="1000" b="0" i="0">
+                <a:solidFill>
+                  <a:srgbClr val="E4572E"/>
+                </a:solidFill>
+                <a:latin typeface="Consolas"/>
+                <a:ea typeface="Consolas"/>
+                <a:cs typeface="Consolas"/>
+              </a:rPr>
+              <a:t>step_2 → step_3</a:t>
+            </a:r>
+          </a:p>
+        </p:txBody>
+      </p:sp>
+      <p:sp>
+        <p:nvSpPr>
+          <p:cNvPr id="24" name="TextBox 23"/>
+          <p:cNvSpPr txBox="1"/>
+          <p:nvPr/>
+        </p:nvSpPr>
+        <p:spPr>
+          <a:xfrm>
+            <a:off x="1133856" y="4937760"/>
+            <a:ext cx="6035040" cy="256032"/>
+          </a:xfrm>
+          <a:prstGeom prst="rect">
+            <a:avLst/>
+          </a:prstGeom>
+          <a:noFill/>
+        </p:spPr>
+        <p:txBody>
+          <a:bodyPr wrap="square" lIns="0" rIns="0" tIns="0" bIns="0" anchor="t">
+            <a:spAutoFit/>
+          </a:bodyPr>
+          <a:lstStyle/>
+          <a:p>
+            <a:pPr algn="l">
+              <a:spcBef>
+                <a:spcPts val="0"/>
+              </a:spcBef>
+              <a:spcAft>
+                <a:spcPts val="0"/>
+              </a:spcAft>
+            </a:pPr>
+            <a:r>
+              <a:rPr sz="1100" b="0" i="0">
+                <a:solidFill>
+                  <a:srgbClr val="667085"/>
+                </a:solidFill>
+                <a:latin typeface="맑은 고딕"/>
+                <a:ea typeface="맑은 고딕"/>
+                <a:cs typeface="맑은 고딕"/>
+              </a:rPr>
+              <a:t>mach_area_mask.ini 의 설비 영역만 추출합니다.</a:t>
+            </a:r>
+          </a:p>
+        </p:txBody>
+      </p:sp>
+      <p:sp>
+        <p:nvSpPr>
+          <p:cNvPr id="25" name="Oval 24"/>
+          <p:cNvSpPr/>
+          <p:nvPr/>
+        </p:nvSpPr>
+        <p:spPr>
+          <a:xfrm>
+            <a:off x="658368" y="5303520"/>
+            <a:ext cx="329184" cy="329184"/>
+          </a:xfrm>
+          <a:prstGeom prst="ellipse">
+            <a:avLst/>
+          </a:prstGeom>
+          <a:solidFill>
+            <a:srgbClr val="2A9D8F"/>
+          </a:solidFill>
+          <a:ln>
+            <a:noFill/>
+          </a:ln>
+          <a:effectLst/>
+        </p:spPr>
+        <p:style>
+          <a:lnRef idx="1">
+            <a:schemeClr val="accent1"/>
+          </a:lnRef>
+          <a:fillRef idx="3">
+            <a:schemeClr val="accent1"/>
+          </a:fillRef>
+          <a:effectRef idx="2">
+            <a:schemeClr val="accent1"/>
+          </a:effectRef>
+          <a:fontRef idx="minor">
+            <a:schemeClr val="lt1"/>
+          </a:fontRef>
+        </p:style>
+        <p:txBody>
+          <a:bodyPr rtlCol="0" anchor="ctr" lIns="0" rIns="0" tIns="0" bIns="0"/>
+          <a:lstStyle/>
+          <a:p>
+            <a:pPr algn="ctr"/>
+            <a:r>
+              <a:rPr sz="1200" b="1" i="0">
+                <a:solidFill>
+                  <a:srgbClr val="FFFFFF"/>
+                </a:solidFill>
+                <a:latin typeface="맑은 고딕"/>
+                <a:ea typeface="맑은 고딕"/>
+                <a:cs typeface="맑은 고딕"/>
+              </a:rPr>
+              <a:t>6</a:t>
+            </a:r>
+          </a:p>
+        </p:txBody>
+      </p:sp>
+      <p:sp>
+        <p:nvSpPr>
+          <p:cNvPr id="26" name="TextBox 25"/>
+          <p:cNvSpPr txBox="1"/>
+          <p:nvPr/>
+        </p:nvSpPr>
+        <p:spPr>
+          <a:xfrm>
+            <a:off x="1133856" y="5285232"/>
+            <a:ext cx="2286000" cy="256032"/>
+          </a:xfrm>
+          <a:prstGeom prst="rect">
+            <a:avLst/>
+          </a:prstGeom>
+          <a:noFill/>
+        </p:spPr>
+        <p:txBody>
+          <a:bodyPr wrap="square" lIns="0" rIns="0" tIns="0" bIns="0" anchor="t">
+            <a:spAutoFit/>
+          </a:bodyPr>
+          <a:lstStyle/>
+          <a:p>
+            <a:pPr algn="l">
+              <a:spcBef>
+                <a:spcPts val="0"/>
+              </a:spcBef>
+              <a:spcAft>
+                <a:spcPts val="0"/>
+              </a:spcAft>
+            </a:pPr>
+            <a:r>
+              <a:rPr sz="1150" b="1" i="0">
+                <a:solidFill>
+                  <a:srgbClr val="1A2435"/>
+                </a:solidFill>
+                <a:latin typeface="Consolas"/>
+                <a:ea typeface="Consolas"/>
+                <a:cs typeface="Consolas"/>
+              </a:rPr>
+              <a:t>autoencoder-7.py</a:t>
+            </a:r>
+          </a:p>
+        </p:txBody>
+      </p:sp>
+      <p:sp>
+        <p:nvSpPr>
+          <p:cNvPr id="27" name="TextBox 26"/>
+          <p:cNvSpPr txBox="1"/>
+          <p:nvPr/>
+        </p:nvSpPr>
+        <p:spPr>
+          <a:xfrm>
+            <a:off x="3493008" y="5294376"/>
+            <a:ext cx="2148840" cy="256032"/>
+          </a:xfrm>
+          <a:prstGeom prst="rect">
+            <a:avLst/>
+          </a:prstGeom>
+          <a:noFill/>
+        </p:spPr>
+        <p:txBody>
+          <a:bodyPr wrap="square" lIns="0" rIns="0" tIns="0" bIns="0" anchor="t">
+            <a:spAutoFit/>
+          </a:bodyPr>
+          <a:lstStyle/>
+          <a:p>
+            <a:pPr algn="l">
+              <a:spcBef>
+                <a:spcPts val="0"/>
+              </a:spcBef>
+              <a:spcAft>
+                <a:spcPts val="0"/>
+              </a:spcAft>
+            </a:pPr>
+            <a:r>
+              <a:rPr sz="1000" b="0" i="0">
+                <a:solidFill>
+                  <a:srgbClr val="2A9D8F"/>
+                </a:solidFill>
+                <a:latin typeface="Consolas"/>
+                <a:ea typeface="Consolas"/>
+                <a:cs typeface="Consolas"/>
+              </a:rPr>
+              <a:t>step_3 → saved_models</a:t>
+            </a:r>
+          </a:p>
+        </p:txBody>
+      </p:sp>
+      <p:sp>
+        <p:nvSpPr>
+          <p:cNvPr id="28" name="TextBox 27"/>
+          <p:cNvSpPr txBox="1"/>
+          <p:nvPr/>
+        </p:nvSpPr>
+        <p:spPr>
+          <a:xfrm>
+            <a:off x="1133856" y="5577840"/>
+            <a:ext cx="6035040" cy="256032"/>
+          </a:xfrm>
+          <a:prstGeom prst="rect">
+            <a:avLst/>
+          </a:prstGeom>
+          <a:noFill/>
+        </p:spPr>
+        <p:txBody>
+          <a:bodyPr wrap="square" lIns="0" rIns="0" tIns="0" bIns="0" anchor="t">
+            <a:spAutoFit/>
+          </a:bodyPr>
+          <a:lstStyle/>
+          <a:p>
+            <a:pPr algn="l">
+              <a:spcBef>
+                <a:spcPts val="0"/>
+              </a:spcBef>
+              <a:spcAft>
+                <a:spcPts val="0"/>
+              </a:spcAft>
+            </a:pPr>
+            <a:r>
+              <a:rPr sz="1100" b="0" i="0">
+                <a:solidFill>
+                  <a:srgbClr val="667085"/>
+                </a:solidFill>
+                <a:latin typeface="맑은 고딕"/>
+                <a:ea typeface="맑은 고딕"/>
+                <a:cs typeface="맑은 고딕"/>
+              </a:rPr>
+              <a:t>오토인코더를 학습해 모델을 저장합니다.</a:t>
+            </a:r>
+          </a:p>
+        </p:txBody>
+      </p:sp>
+      <p:sp>
+        <p:nvSpPr>
+          <p:cNvPr id="29" name="TextBox 28"/>
+          <p:cNvSpPr txBox="1"/>
+          <p:nvPr/>
+        </p:nvSpPr>
+        <p:spPr>
+          <a:xfrm>
+            <a:off x="7699248" y="2048256"/>
+            <a:ext cx="3575304" cy="274320"/>
+          </a:xfrm>
+          <a:prstGeom prst="rect">
+            <a:avLst/>
+          </a:prstGeom>
+          <a:noFill/>
+        </p:spPr>
+        <p:txBody>
+          <a:bodyPr wrap="square" lIns="0" rIns="0" tIns="0" bIns="0" anchor="t">
+            <a:spAutoFit/>
+          </a:bodyPr>
+          <a:lstStyle/>
+          <a:p>
+            <a:pPr algn="l">
+              <a:spcBef>
+                <a:spcPts val="0"/>
+              </a:spcBef>
+              <a:spcAft>
+                <a:spcPts val="0"/>
+              </a:spcAft>
+            </a:pPr>
+            <a:r>
               <a:rPr sz="1400" b="1" i="0">
                 <a:solidFill>
-                  <a:srgbClr val="FFFFFF"/>
-                </a:solidFill>
-                <a:latin typeface="맑은 고딕"/>
-                <a:ea typeface="맑은 고딕"/>
-                <a:cs typeface="맑은 고딕"/>
-              </a:rPr>
-              <a:t>4</a:t>
-            </a:r>
-          </a:p>
-        </p:txBody>
-      </p:sp>
-      <p:sp>
-        <p:nvSpPr>
-          <p:cNvPr id="21" name="TextBox 20"/>
-          <p:cNvSpPr txBox="1"/>
-          <p:nvPr/>
-        </p:nvSpPr>
-        <p:spPr>
-          <a:xfrm>
-            <a:off x="1517904" y="5422392"/>
-            <a:ext cx="3200400" cy="274320"/>
-          </a:xfrm>
-          <a:prstGeom prst="rect">
-            <a:avLst/>
-          </a:prstGeom>
-          <a:noFill/>
-        </p:spPr>
-        <p:txBody>
-          <a:bodyPr wrap="square" lIns="0" rIns="0" tIns="0" bIns="0" anchor="t">
-            <a:spAutoFit/>
-          </a:bodyPr>
-          <a:lstStyle/>
-          <a:p>
-            <a:pPr algn="l">
-              <a:spcBef>
-                <a:spcPts val="0"/>
-              </a:spcBef>
-              <a:spcAft>
-                <a:spcPts val="0"/>
-              </a:spcAft>
-            </a:pPr>
-            <a:r>
-              <a:rPr sz="1400" b="1" i="0">
-                <a:solidFill>
-                  <a:srgbClr val="FFFFFF"/>
-                </a:solidFill>
-                <a:latin typeface="맑은 고딕"/>
-                <a:ea typeface="맑은 고딕"/>
-                <a:cs typeface="맑은 고딕"/>
-              </a:rPr>
-              <a:t>프로세스가 6개보다 적음</a:t>
-            </a:r>
-          </a:p>
-        </p:txBody>
-      </p:sp>
-      <p:sp>
-        <p:nvSpPr>
-          <p:cNvPr id="22" name="TextBox 21"/>
-          <p:cNvSpPr txBox="1"/>
-          <p:nvPr/>
-        </p:nvSpPr>
-        <p:spPr>
-          <a:xfrm>
-            <a:off x="1517904" y="5769864"/>
-            <a:ext cx="3200400" cy="365760"/>
+                  <a:srgbClr val="1A2435"/>
+                </a:solidFill>
+                <a:latin typeface="맑은 고딕"/>
+                <a:ea typeface="맑은 고딕"/>
+                <a:cs typeface="맑은 고딕"/>
+              </a:rPr>
+              <a:t>한 번에 실행</a:t>
+            </a:r>
+          </a:p>
+        </p:txBody>
+      </p:sp>
+      <p:sp>
+        <p:nvSpPr>
+          <p:cNvPr id="30" name="Rounded Rectangle 29"/>
+          <p:cNvSpPr/>
+          <p:nvPr/>
+        </p:nvSpPr>
+        <p:spPr>
+          <a:xfrm>
+            <a:off x="7699248" y="2395728"/>
+            <a:ext cx="3575304" cy="1051941"/>
+          </a:xfrm>
+          <a:prstGeom prst="roundRect">
+            <a:avLst>
+              <a:gd name="adj" fmla="val 5000"/>
+            </a:avLst>
+          </a:prstGeom>
+          <a:solidFill>
+            <a:srgbClr val="142033"/>
+          </a:solidFill>
+          <a:ln>
+            <a:noFill/>
+          </a:ln>
+          <a:effectLst/>
+        </p:spPr>
+        <p:style>
+          <a:lnRef idx="1">
+            <a:schemeClr val="accent1"/>
+          </a:lnRef>
+          <a:fillRef idx="3">
+            <a:schemeClr val="accent1"/>
+          </a:fillRef>
+          <a:effectRef idx="2">
+            <a:schemeClr val="accent1"/>
+          </a:effectRef>
+          <a:fontRef idx="minor">
+            <a:schemeClr val="lt1"/>
+          </a:fontRef>
+        </p:style>
+        <p:txBody>
+          <a:bodyPr rtlCol="0" anchor="ctr"/>
+          <a:lstStyle/>
+          <a:p/>
+        </p:txBody>
+      </p:sp>
+      <p:sp>
+        <p:nvSpPr>
+          <p:cNvPr id="31" name="TextBox 30"/>
+          <p:cNvSpPr txBox="1"/>
+          <p:nvPr/>
+        </p:nvSpPr>
+        <p:spPr>
+          <a:xfrm>
+            <a:off x="7900416" y="2596896"/>
+            <a:ext cx="3172968" cy="649605"/>
           </a:xfrm>
           <a:prstGeom prst="rect">
             <a:avLst/>
@@ -7975,79 +8377,275 @@
           <a:p>
             <a:pPr algn="l">
               <a:lnSpc>
-                <a:spcPct val="115000"/>
+                <a:spcPct val="100000"/>
               </a:lnSpc>
               <a:spcBef>
                 <a:spcPts val="0"/>
               </a:spcBef>
               <a:spcAft>
-                <a:spcPts val="0"/>
-              </a:spcAft>
-            </a:pPr>
-            <a:r>
-              <a:rPr sz="1050" b="0" i="0">
+                <a:spcPts val="150"/>
+              </a:spcAft>
+            </a:pPr>
+            <a:r>
+              <a:rPr sz="1100" b="0" i="0">
                 <a:solidFill>
                   <a:srgbClr val="F4A261"/>
                 </a:solidFill>
-                <a:latin typeface="맑은 고딕"/>
-                <a:ea typeface="맑은 고딕"/>
-                <a:cs typeface="맑은 고딕"/>
-              </a:rPr>
-              <a:t>특정 스크립트만 기동 직후 종료된 경우입니다.</a:t>
-            </a:r>
-          </a:p>
-        </p:txBody>
-      </p:sp>
-      <p:sp>
-        <p:nvSpPr>
-          <p:cNvPr id="23" name="TextBox 22"/>
-          <p:cNvSpPr txBox="1"/>
-          <p:nvPr/>
-        </p:nvSpPr>
-        <p:spPr>
-          <a:xfrm>
-            <a:off x="4956048" y="5532120"/>
-            <a:ext cx="6309360" cy="548640"/>
-          </a:xfrm>
-          <a:prstGeom prst="rect">
-            <a:avLst/>
-          </a:prstGeom>
-          <a:noFill/>
-        </p:spPr>
-        <p:txBody>
-          <a:bodyPr wrap="square" lIns="0" rIns="0" tIns="0" bIns="0" anchor="t">
-            <a:spAutoFit/>
-          </a:bodyPr>
-          <a:lstStyle/>
+                <a:latin typeface="Consolas"/>
+                <a:ea typeface="Consolas"/>
+                <a:cs typeface="Consolas"/>
+              </a:rPr>
+              <a:t>$ conda activate otg</a:t>
+            </a:r>
+          </a:p>
           <a:p>
             <a:pPr algn="l">
               <a:lnSpc>
-                <a:spcPct val="125000"/>
+                <a:spcPct val="100000"/>
               </a:lnSpc>
               <a:spcBef>
                 <a:spcPts val="0"/>
               </a:spcBef>
               <a:spcAft>
-                <a:spcPts val="0"/>
-              </a:spcAft>
-            </a:pPr>
-            <a:r>
-              <a:rPr sz="1200" b="0" i="0">
-                <a:solidFill>
-                  <a:srgbClr val="C8D3E3"/>
-                </a:solidFill>
-                <a:latin typeface="맑은 고딕"/>
-                <a:ea typeface="맑은 고딕"/>
-                <a:cs typeface="맑은 고딕"/>
-              </a:rPr>
-              <a:t>debug_logs 에서 해당 프로세스 로그의 마지막 줄을 확인합니다.</a:t>
-            </a:r>
-          </a:p>
-        </p:txBody>
-      </p:sp>
-      <p:sp>
-        <p:nvSpPr>
-          <p:cNvPr id="24" name="TextBox 23"/>
+                <a:spcPts val="150"/>
+              </a:spcAft>
+            </a:pPr>
+            <a:r>
+              <a:rPr sz="1100" b="0" i="0">
+                <a:solidFill>
+                  <a:srgbClr val="F4A261"/>
+                </a:solidFill>
+                <a:latin typeface="Consolas"/>
+                <a:ea typeface="Consolas"/>
+                <a:cs typeface="Consolas"/>
+              </a:rPr>
+              <a:t>$ cd /d D:\autoencoder</a:t>
+            </a:r>
+          </a:p>
+          <a:p>
+            <a:pPr algn="l">
+              <a:lnSpc>
+                <a:spcPct val="100000"/>
+              </a:lnSpc>
+              <a:spcBef>
+                <a:spcPts val="0"/>
+              </a:spcBef>
+              <a:spcAft>
+                <a:spcPts val="150"/>
+              </a:spcAft>
+            </a:pPr>
+            <a:r>
+              <a:rPr sz="1100" b="0" i="0">
+                <a:solidFill>
+                  <a:srgbClr val="F4A261"/>
+                </a:solidFill>
+                <a:latin typeface="Consolas"/>
+                <a:ea typeface="Consolas"/>
+                <a:cs typeface="Consolas"/>
+              </a:rPr>
+              <a:t>$ run_pipeline.bat kict1</a:t>
+            </a:r>
+          </a:p>
+        </p:txBody>
+      </p:sp>
+      <p:sp>
+        <p:nvSpPr>
+          <p:cNvPr id="32" name="Rounded Rectangle 31"/>
+          <p:cNvSpPr/>
+          <p:nvPr/>
+        </p:nvSpPr>
+        <p:spPr>
+          <a:xfrm>
+            <a:off x="7699248" y="3968496"/>
+            <a:ext cx="3575304" cy="1993392"/>
+          </a:xfrm>
+          <a:prstGeom prst="roundRect">
+            <a:avLst>
+              <a:gd name="adj" fmla="val 6000"/>
+            </a:avLst>
+          </a:prstGeom>
+          <a:solidFill>
+            <a:srgbClr val="F2F4F7"/>
+          </a:solidFill>
+          <a:ln>
+            <a:noFill/>
+          </a:ln>
+          <a:effectLst/>
+        </p:spPr>
+        <p:style>
+          <a:lnRef idx="1">
+            <a:schemeClr val="accent1"/>
+          </a:lnRef>
+          <a:fillRef idx="3">
+            <a:schemeClr val="accent1"/>
+          </a:fillRef>
+          <a:effectRef idx="2">
+            <a:schemeClr val="accent1"/>
+          </a:effectRef>
+          <a:fontRef idx="minor">
+            <a:schemeClr val="lt1"/>
+          </a:fontRef>
+        </p:style>
+        <p:txBody>
+          <a:bodyPr rtlCol="0" anchor="ctr"/>
+          <a:lstStyle/>
+          <a:p/>
+        </p:txBody>
+      </p:sp>
+      <p:sp>
+        <p:nvSpPr>
+          <p:cNvPr id="33" name="TextBox 32"/>
+          <p:cNvSpPr txBox="1"/>
+          <p:nvPr/>
+        </p:nvSpPr>
+        <p:spPr>
+          <a:xfrm>
+            <a:off x="7955279" y="4169663"/>
+            <a:ext cx="3063240" cy="274320"/>
+          </a:xfrm>
+          <a:prstGeom prst="rect">
+            <a:avLst/>
+          </a:prstGeom>
+          <a:noFill/>
+        </p:spPr>
+        <p:txBody>
+          <a:bodyPr wrap="square" lIns="0" rIns="0" tIns="0" bIns="0" anchor="t">
+            <a:spAutoFit/>
+          </a:bodyPr>
+          <a:lstStyle/>
+          <a:p>
+            <a:pPr algn="l">
+              <a:spcBef>
+                <a:spcPts val="0"/>
+              </a:spcBef>
+              <a:spcAft>
+                <a:spcPts val="0"/>
+              </a:spcAft>
+            </a:pPr>
+            <a:r>
+              <a:rPr sz="1300" b="1" i="0">
+                <a:solidFill>
+                  <a:srgbClr val="1A2435"/>
+                </a:solidFill>
+                <a:latin typeface="맑은 고딕"/>
+                <a:ea typeface="맑은 고딕"/>
+                <a:cs typeface="맑은 고딕"/>
+              </a:rPr>
+              <a:t>현장별 데이터 폴더</a:t>
+            </a:r>
+          </a:p>
+        </p:txBody>
+      </p:sp>
+      <p:sp>
+        <p:nvSpPr>
+          <p:cNvPr id="34" name="TextBox 33"/>
+          <p:cNvSpPr txBox="1"/>
+          <p:nvPr/>
+        </p:nvSpPr>
+        <p:spPr>
+          <a:xfrm>
+            <a:off x="7955279" y="4535424"/>
+            <a:ext cx="3063240" cy="1280160"/>
+          </a:xfrm>
+          <a:prstGeom prst="rect">
+            <a:avLst/>
+          </a:prstGeom>
+          <a:noFill/>
+        </p:spPr>
+        <p:txBody>
+          <a:bodyPr wrap="square" lIns="0" rIns="0" tIns="0" bIns="0" anchor="t">
+            <a:spAutoFit/>
+          </a:bodyPr>
+          <a:lstStyle/>
+          <a:p>
+            <a:pPr algn="l">
+              <a:spcBef>
+                <a:spcPts val="0"/>
+              </a:spcBef>
+              <a:spcAft>
+                <a:spcPts val="500"/>
+              </a:spcAft>
+            </a:pPr>
+            <a:r>
+              <a:rPr sz="1000" b="0" i="0">
+                <a:solidFill>
+                  <a:srgbClr val="1A2435"/>
+                </a:solidFill>
+                <a:latin typeface="Consolas"/>
+                <a:ea typeface="Consolas"/>
+                <a:cs typeface="Consolas"/>
+              </a:rPr>
+              <a:t>D:\autoencoder\&lt;user&gt;\</a:t>
+            </a:r>
+          </a:p>
+          <a:p>
+            <a:pPr algn="l">
+              <a:spcBef>
+                <a:spcPts val="0"/>
+              </a:spcBef>
+              <a:spcAft>
+                <a:spcPts val="300"/>
+              </a:spcAft>
+            </a:pPr>
+            <a:r>
+              <a:rPr sz="1000" b="0" i="0">
+                <a:solidFill>
+                  <a:srgbClr val="667085"/>
+                </a:solidFill>
+                <a:latin typeface="Consolas"/>
+                <a:ea typeface="Consolas"/>
+                <a:cs typeface="Consolas"/>
+              </a:rPr>
+              <a:t>  ir_raw  raw</a:t>
+            </a:r>
+          </a:p>
+          <a:p>
+            <a:pPr algn="l">
+              <a:spcBef>
+                <a:spcPts val="0"/>
+              </a:spcBef>
+              <a:spcAft>
+                <a:spcPts val="300"/>
+              </a:spcAft>
+            </a:pPr>
+            <a:r>
+              <a:rPr sz="1000" b="0" i="0">
+                <a:solidFill>
+                  <a:srgbClr val="667085"/>
+                </a:solidFill>
+                <a:latin typeface="Consolas"/>
+                <a:ea typeface="Consolas"/>
+                <a:cs typeface="Consolas"/>
+              </a:rPr>
+              <a:t>  step_0  step_1  step_2  step_3</a:t>
+            </a:r>
+          </a:p>
+          <a:p>
+            <a:pPr algn="l">
+              <a:spcBef>
+                <a:spcPts val="0"/>
+              </a:spcBef>
+              <a:spcAft>
+                <a:spcPts val="0"/>
+              </a:spcAft>
+            </a:pPr>
+            <a:r>
+              <a:rPr sz="1000" b="0" i="0">
+                <a:solidFill>
+                  <a:srgbClr val="2A9D8F"/>
+                </a:solidFill>
+                <a:latin typeface="Consolas"/>
+                <a:ea typeface="Consolas"/>
+                <a:cs typeface="Consolas"/>
+              </a:rPr>
+              <a:t>  saved_models</a:t>
+            </a:r>
+          </a:p>
+        </p:txBody>
+      </p:sp>
+      <p:sp>
+        <p:nvSpPr>
+          <p:cNvPr id="35" name="TextBox 34"/>
           <p:cNvSpPr txBox="1"/>
           <p:nvPr/>
         </p:nvSpPr>
@@ -8154,7 +8752,2500 @@
                 <a:ea typeface="맑은 고딕"/>
                 <a:cs typeface="맑은 고딕"/>
               </a:rPr>
-              <a:t>13  CHECKLIST</a:t>
+              <a:t>13  HANDOVER</a:t>
+            </a:r>
+          </a:p>
+        </p:txBody>
+      </p:sp>
+      <p:sp>
+        <p:nvSpPr>
+          <p:cNvPr id="3" name="TextBox 2"/>
+          <p:cNvSpPr txBox="1"/>
+          <p:nvPr/>
+        </p:nvSpPr>
+        <p:spPr>
+          <a:xfrm>
+            <a:off x="658368" y="804672"/>
+            <a:ext cx="10874959" cy="621792"/>
+          </a:xfrm>
+          <a:prstGeom prst="rect">
+            <a:avLst/>
+          </a:prstGeom>
+          <a:noFill/>
+        </p:spPr>
+        <p:txBody>
+          <a:bodyPr wrap="square" lIns="0" rIns="0" tIns="0" bIns="0" anchor="t">
+            <a:spAutoFit/>
+          </a:bodyPr>
+          <a:lstStyle/>
+          <a:p>
+            <a:pPr algn="l">
+              <a:spcBef>
+                <a:spcPts val="0"/>
+              </a:spcBef>
+              <a:spcAft>
+                <a:spcPts val="0"/>
+              </a:spcAft>
+            </a:pPr>
+            <a:r>
+              <a:rPr sz="3000" b="1" i="0">
+                <a:solidFill>
+                  <a:srgbClr val="1A2435"/>
+                </a:solidFill>
+                <a:latin typeface="맑은 고딕"/>
+                <a:ea typeface="맑은 고딕"/>
+                <a:cs typeface="맑은 고딕"/>
+              </a:rPr>
+              <a:t>학습과 운영의 관계</a:t>
+            </a:r>
+          </a:p>
+        </p:txBody>
+      </p:sp>
+      <p:sp>
+        <p:nvSpPr>
+          <p:cNvPr id="4" name="Rounded Rectangle 3"/>
+          <p:cNvSpPr/>
+          <p:nvPr/>
+        </p:nvSpPr>
+        <p:spPr>
+          <a:xfrm>
+            <a:off x="658368" y="1737360"/>
+            <a:ext cx="4297680" cy="2651760"/>
+          </a:xfrm>
+          <a:prstGeom prst="roundRect">
+            <a:avLst>
+              <a:gd name="adj" fmla="val 6000"/>
+            </a:avLst>
+          </a:prstGeom>
+          <a:solidFill>
+            <a:srgbClr val="F2F4F7"/>
+          </a:solidFill>
+          <a:ln>
+            <a:noFill/>
+          </a:ln>
+          <a:effectLst/>
+        </p:spPr>
+        <p:style>
+          <a:lnRef idx="1">
+            <a:schemeClr val="accent1"/>
+          </a:lnRef>
+          <a:fillRef idx="3">
+            <a:schemeClr val="accent1"/>
+          </a:fillRef>
+          <a:effectRef idx="2">
+            <a:schemeClr val="accent1"/>
+          </a:effectRef>
+          <a:fontRef idx="minor">
+            <a:schemeClr val="lt1"/>
+          </a:fontRef>
+        </p:style>
+        <p:txBody>
+          <a:bodyPr rtlCol="0" anchor="ctr"/>
+          <a:lstStyle/>
+          <a:p/>
+        </p:txBody>
+      </p:sp>
+      <p:sp>
+        <p:nvSpPr>
+          <p:cNvPr id="5" name="Oval 4"/>
+          <p:cNvSpPr/>
+          <p:nvPr/>
+        </p:nvSpPr>
+        <p:spPr>
+          <a:xfrm>
+            <a:off x="932688" y="1993392"/>
+            <a:ext cx="420624" cy="420624"/>
+          </a:xfrm>
+          <a:prstGeom prst="ellipse">
+            <a:avLst/>
+          </a:prstGeom>
+          <a:solidFill>
+            <a:srgbClr val="E4572E"/>
+          </a:solidFill>
+          <a:ln>
+            <a:noFill/>
+          </a:ln>
+          <a:effectLst/>
+        </p:spPr>
+        <p:style>
+          <a:lnRef idx="1">
+            <a:schemeClr val="accent1"/>
+          </a:lnRef>
+          <a:fillRef idx="3">
+            <a:schemeClr val="accent1"/>
+          </a:fillRef>
+          <a:effectRef idx="2">
+            <a:schemeClr val="accent1"/>
+          </a:effectRef>
+          <a:fontRef idx="minor">
+            <a:schemeClr val="lt1"/>
+          </a:fontRef>
+        </p:style>
+        <p:txBody>
+          <a:bodyPr rtlCol="0" anchor="ctr" lIns="0" rIns="0" tIns="0" bIns="0"/>
+          <a:lstStyle/>
+          <a:p>
+            <a:pPr algn="ctr"/>
+            <a:r>
+              <a:rPr sz="1100" b="1" i="0">
+                <a:solidFill>
+                  <a:srgbClr val="FFFFFF"/>
+                </a:solidFill>
+                <a:latin typeface="맑은 고딕"/>
+                <a:ea typeface="맑은 고딕"/>
+                <a:cs typeface="맑은 고딕"/>
+              </a:rPr>
+              <a:t>학습</a:t>
+            </a:r>
+          </a:p>
+        </p:txBody>
+      </p:sp>
+      <p:sp>
+        <p:nvSpPr>
+          <p:cNvPr id="6" name="TextBox 5"/>
+          <p:cNvSpPr txBox="1"/>
+          <p:nvPr/>
+        </p:nvSpPr>
+        <p:spPr>
+          <a:xfrm>
+            <a:off x="1481328" y="2048256"/>
+            <a:ext cx="3200400" cy="274320"/>
+          </a:xfrm>
+          <a:prstGeom prst="rect">
+            <a:avLst/>
+          </a:prstGeom>
+          <a:noFill/>
+        </p:spPr>
+        <p:txBody>
+          <a:bodyPr wrap="square" lIns="0" rIns="0" tIns="0" bIns="0" anchor="t">
+            <a:spAutoFit/>
+          </a:bodyPr>
+          <a:lstStyle/>
+          <a:p>
+            <a:pPr algn="l">
+              <a:spcBef>
+                <a:spcPts val="0"/>
+              </a:spcBef>
+              <a:spcAft>
+                <a:spcPts val="0"/>
+              </a:spcAft>
+            </a:pPr>
+            <a:r>
+              <a:rPr sz="1300" b="1" i="0">
+                <a:solidFill>
+                  <a:srgbClr val="1A2435"/>
+                </a:solidFill>
+                <a:latin typeface="Consolas"/>
+                <a:ea typeface="Consolas"/>
+                <a:cs typeface="Consolas"/>
+              </a:rPr>
+              <a:t>D:\autoencoder</a:t>
+            </a:r>
+          </a:p>
+        </p:txBody>
+      </p:sp>
+      <p:sp>
+        <p:nvSpPr>
+          <p:cNvPr id="7" name="TextBox 6"/>
+          <p:cNvSpPr txBox="1"/>
+          <p:nvPr/>
+        </p:nvSpPr>
+        <p:spPr>
+          <a:xfrm>
+            <a:off x="932688" y="2615184"/>
+            <a:ext cx="3749040" cy="1645920"/>
+          </a:xfrm>
+          <a:prstGeom prst="rect">
+            <a:avLst/>
+          </a:prstGeom>
+          <a:noFill/>
+        </p:spPr>
+        <p:txBody>
+          <a:bodyPr wrap="square" lIns="0" rIns="0" tIns="0" bIns="0" anchor="t">
+            <a:spAutoFit/>
+          </a:bodyPr>
+          <a:lstStyle/>
+          <a:p>
+            <a:pPr algn="l">
+              <a:spcBef>
+                <a:spcPts val="0"/>
+              </a:spcBef>
+              <a:spcAft>
+                <a:spcPts val="700"/>
+              </a:spcAft>
+            </a:pPr>
+            <a:r>
+              <a:rPr sz="1150" b="0" i="0">
+                <a:solidFill>
+                  <a:srgbClr val="667085"/>
+                </a:solidFill>
+                <a:latin typeface="맑은 고딕"/>
+                <a:ea typeface="맑은 고딕"/>
+                <a:cs typeface="맑은 고딕"/>
+              </a:rPr>
+              <a:t>conda 환경 : otg  (numpy 2.x)</a:t>
+            </a:r>
+          </a:p>
+          <a:p>
+            <a:pPr algn="l">
+              <a:spcBef>
+                <a:spcPts val="0"/>
+              </a:spcBef>
+              <a:spcAft>
+                <a:spcPts val="700"/>
+              </a:spcAft>
+            </a:pPr>
+            <a:r>
+              <a:rPr sz="1150" b="0" i="0">
+                <a:solidFill>
+                  <a:srgbClr val="667085"/>
+                </a:solidFill>
+                <a:latin typeface="맑은 고딕"/>
+                <a:ea typeface="맑은 고딕"/>
+                <a:cs typeface="맑은 고딕"/>
+              </a:rPr>
+              <a:t>6단계 파이프라인으로 모델을 만듭니다.</a:t>
+            </a:r>
+          </a:p>
+          <a:p>
+            <a:pPr algn="l">
+              <a:spcBef>
+                <a:spcPts val="0"/>
+              </a:spcBef>
+              <a:spcAft>
+                <a:spcPts val="700"/>
+              </a:spcAft>
+            </a:pPr>
+            <a:r>
+              <a:rPr sz="1150" b="0" i="0">
+                <a:solidFill>
+                  <a:srgbClr val="667085"/>
+                </a:solidFill>
+                <a:latin typeface="맑은 고딕"/>
+                <a:ea typeface="맑은 고딕"/>
+                <a:cs typeface="맑은 고딕"/>
+              </a:rPr>
+              <a:t>산출물은 saved_models 에 쌓입니다.</a:t>
+            </a:r>
+          </a:p>
+          <a:p>
+            <a:pPr algn="l">
+              <a:lnSpc>
+                <a:spcPct val="120000"/>
+              </a:lnSpc>
+              <a:spcBef>
+                <a:spcPts val="0"/>
+              </a:spcBef>
+              <a:spcAft>
+                <a:spcPts val="0"/>
+              </a:spcAft>
+            </a:pPr>
+            <a:r>
+              <a:rPr sz="1150" b="0" i="0">
+                <a:solidFill>
+                  <a:srgbClr val="E4572E"/>
+                </a:solidFill>
+                <a:latin typeface="맑은 고딕"/>
+                <a:ea typeface="맑은 고딕"/>
+                <a:cs typeface="맑은 고딕"/>
+              </a:rPr>
+              <a:t>프로젝트 폴더 밖이라 git 추적 대상이 아닙니다.</a:t>
+            </a:r>
+          </a:p>
+        </p:txBody>
+      </p:sp>
+      <p:sp>
+        <p:nvSpPr>
+          <p:cNvPr id="8" name="Rounded Rectangle 7"/>
+          <p:cNvSpPr/>
+          <p:nvPr/>
+        </p:nvSpPr>
+        <p:spPr>
+          <a:xfrm>
+            <a:off x="7242048" y="1737360"/>
+            <a:ext cx="4297680" cy="2651760"/>
+          </a:xfrm>
+          <a:prstGeom prst="roundRect">
+            <a:avLst>
+              <a:gd name="adj" fmla="val 6000"/>
+            </a:avLst>
+          </a:prstGeom>
+          <a:solidFill>
+            <a:srgbClr val="F2F4F7"/>
+          </a:solidFill>
+          <a:ln>
+            <a:noFill/>
+          </a:ln>
+          <a:effectLst/>
+        </p:spPr>
+        <p:style>
+          <a:lnRef idx="1">
+            <a:schemeClr val="accent1"/>
+          </a:lnRef>
+          <a:fillRef idx="3">
+            <a:schemeClr val="accent1"/>
+          </a:fillRef>
+          <a:effectRef idx="2">
+            <a:schemeClr val="accent1"/>
+          </a:effectRef>
+          <a:fontRef idx="minor">
+            <a:schemeClr val="lt1"/>
+          </a:fontRef>
+        </p:style>
+        <p:txBody>
+          <a:bodyPr rtlCol="0" anchor="ctr"/>
+          <a:lstStyle/>
+          <a:p/>
+        </p:txBody>
+      </p:sp>
+      <p:sp>
+        <p:nvSpPr>
+          <p:cNvPr id="9" name="Oval 8"/>
+          <p:cNvSpPr/>
+          <p:nvPr/>
+        </p:nvSpPr>
+        <p:spPr>
+          <a:xfrm>
+            <a:off x="7516368" y="1993392"/>
+            <a:ext cx="420624" cy="420624"/>
+          </a:xfrm>
+          <a:prstGeom prst="ellipse">
+            <a:avLst/>
+          </a:prstGeom>
+          <a:solidFill>
+            <a:srgbClr val="2A9D8F"/>
+          </a:solidFill>
+          <a:ln>
+            <a:noFill/>
+          </a:ln>
+          <a:effectLst/>
+        </p:spPr>
+        <p:style>
+          <a:lnRef idx="1">
+            <a:schemeClr val="accent1"/>
+          </a:lnRef>
+          <a:fillRef idx="3">
+            <a:schemeClr val="accent1"/>
+          </a:fillRef>
+          <a:effectRef idx="2">
+            <a:schemeClr val="accent1"/>
+          </a:effectRef>
+          <a:fontRef idx="minor">
+            <a:schemeClr val="lt1"/>
+          </a:fontRef>
+        </p:style>
+        <p:txBody>
+          <a:bodyPr rtlCol="0" anchor="ctr" lIns="0" rIns="0" tIns="0" bIns="0"/>
+          <a:lstStyle/>
+          <a:p>
+            <a:pPr algn="ctr"/>
+            <a:r>
+              <a:rPr sz="1100" b="1" i="0">
+                <a:solidFill>
+                  <a:srgbClr val="FFFFFF"/>
+                </a:solidFill>
+                <a:latin typeface="맑은 고딕"/>
+                <a:ea typeface="맑은 고딕"/>
+                <a:cs typeface="맑은 고딕"/>
+              </a:rPr>
+              <a:t>운영</a:t>
+            </a:r>
+          </a:p>
+        </p:txBody>
+      </p:sp>
+      <p:sp>
+        <p:nvSpPr>
+          <p:cNvPr id="10" name="TextBox 9"/>
+          <p:cNvSpPr txBox="1"/>
+          <p:nvPr/>
+        </p:nvSpPr>
+        <p:spPr>
+          <a:xfrm>
+            <a:off x="8065008" y="2048256"/>
+            <a:ext cx="3200400" cy="274320"/>
+          </a:xfrm>
+          <a:prstGeom prst="rect">
+            <a:avLst/>
+          </a:prstGeom>
+          <a:noFill/>
+        </p:spPr>
+        <p:txBody>
+          <a:bodyPr wrap="square" lIns="0" rIns="0" tIns="0" bIns="0" anchor="t">
+            <a:spAutoFit/>
+          </a:bodyPr>
+          <a:lstStyle/>
+          <a:p>
+            <a:pPr algn="l">
+              <a:spcBef>
+                <a:spcPts val="0"/>
+              </a:spcBef>
+              <a:spcAft>
+                <a:spcPts val="0"/>
+              </a:spcAft>
+            </a:pPr>
+            <a:r>
+              <a:rPr sz="1300" b="1" i="0">
+                <a:solidFill>
+                  <a:srgbClr val="1A2435"/>
+                </a:solidFill>
+                <a:latin typeface="Consolas"/>
+                <a:ea typeface="Consolas"/>
+                <a:cs typeface="Consolas"/>
+              </a:rPr>
+              <a:t>D:\MultiModal_FireCam</a:t>
+            </a:r>
+          </a:p>
+        </p:txBody>
+      </p:sp>
+      <p:sp>
+        <p:nvSpPr>
+          <p:cNvPr id="11" name="TextBox 10"/>
+          <p:cNvSpPr txBox="1"/>
+          <p:nvPr/>
+        </p:nvSpPr>
+        <p:spPr>
+          <a:xfrm>
+            <a:off x="7516368" y="2615184"/>
+            <a:ext cx="3749040" cy="1645920"/>
+          </a:xfrm>
+          <a:prstGeom prst="rect">
+            <a:avLst/>
+          </a:prstGeom>
+          <a:noFill/>
+        </p:spPr>
+        <p:txBody>
+          <a:bodyPr wrap="square" lIns="0" rIns="0" tIns="0" bIns="0" anchor="t">
+            <a:spAutoFit/>
+          </a:bodyPr>
+          <a:lstStyle/>
+          <a:p>
+            <a:pPr algn="l">
+              <a:spcBef>
+                <a:spcPts val="0"/>
+              </a:spcBef>
+              <a:spcAft>
+                <a:spcPts val="700"/>
+              </a:spcAft>
+            </a:pPr>
+            <a:r>
+              <a:rPr sz="1150" b="0" i="0">
+                <a:solidFill>
+                  <a:srgbClr val="667085"/>
+                </a:solidFill>
+                <a:latin typeface="맑은 고딕"/>
+                <a:ea typeface="맑은 고딕"/>
+                <a:cs typeface="맑은 고딕"/>
+              </a:rPr>
+              <a:t>conda 환경 : mmc  (numpy 1.x)</a:t>
+            </a:r>
+          </a:p>
+          <a:p>
+            <a:pPr algn="l">
+              <a:spcBef>
+                <a:spcPts val="0"/>
+              </a:spcBef>
+              <a:spcAft>
+                <a:spcPts val="700"/>
+              </a:spcAft>
+            </a:pPr>
+            <a:r>
+              <a:rPr sz="1150" b="0" i="0">
+                <a:solidFill>
+                  <a:srgbClr val="667085"/>
+                </a:solidFill>
+                <a:latin typeface="맑은 고딕"/>
+                <a:ea typeface="맑은 고딕"/>
+                <a:cs typeface="맑은 고딕"/>
+              </a:rPr>
+              <a:t>predict_machine.py 가 모델을 읽습니다.</a:t>
+            </a:r>
+          </a:p>
+          <a:p>
+            <a:pPr algn="l">
+              <a:spcBef>
+                <a:spcPts val="0"/>
+              </a:spcBef>
+              <a:spcAft>
+                <a:spcPts val="700"/>
+              </a:spcAft>
+            </a:pPr>
+            <a:r>
+              <a:rPr sz="1150" b="0" i="0">
+                <a:solidFill>
+                  <a:srgbClr val="667085"/>
+                </a:solidFill>
+                <a:latin typeface="맑은 고딕"/>
+                <a:ea typeface="맑은 고딕"/>
+                <a:cs typeface="맑은 고딕"/>
+              </a:rPr>
+              <a:t>users\&lt;user&gt;\ 에 모델을 둡니다.</a:t>
+            </a:r>
+          </a:p>
+          <a:p>
+            <a:pPr algn="l">
+              <a:lnSpc>
+                <a:spcPct val="120000"/>
+              </a:lnSpc>
+              <a:spcBef>
+                <a:spcPts val="0"/>
+              </a:spcBef>
+              <a:spcAft>
+                <a:spcPts val="0"/>
+              </a:spcAft>
+            </a:pPr>
+            <a:r>
+              <a:rPr sz="1150" b="0" i="0">
+                <a:solidFill>
+                  <a:srgbClr val="2A9D8F"/>
+                </a:solidFill>
+                <a:latin typeface="맑은 고딕"/>
+                <a:ea typeface="맑은 고딕"/>
+                <a:cs typeface="맑은 고딕"/>
+              </a:rPr>
+              <a:t>git 으로 백업됩니다.</a:t>
+            </a:r>
+          </a:p>
+        </p:txBody>
+      </p:sp>
+      <p:sp>
+        <p:nvSpPr>
+          <p:cNvPr id="12" name="Right Arrow 11"/>
+          <p:cNvSpPr/>
+          <p:nvPr/>
+        </p:nvSpPr>
+        <p:spPr>
+          <a:xfrm>
+            <a:off x="5340096" y="2871216"/>
+            <a:ext cx="1517904" cy="384048"/>
+          </a:xfrm>
+          <a:prstGeom prst="rightArrow">
+            <a:avLst/>
+          </a:prstGeom>
+          <a:solidFill>
+            <a:srgbClr val="F4A261"/>
+          </a:solidFill>
+          <a:ln>
+            <a:noFill/>
+          </a:ln>
+          <a:effectLst/>
+        </p:spPr>
+        <p:style>
+          <a:lnRef idx="1">
+            <a:schemeClr val="accent1"/>
+          </a:lnRef>
+          <a:fillRef idx="3">
+            <a:schemeClr val="accent1"/>
+          </a:fillRef>
+          <a:effectRef idx="2">
+            <a:schemeClr val="accent1"/>
+          </a:effectRef>
+          <a:fontRef idx="minor">
+            <a:schemeClr val="lt1"/>
+          </a:fontRef>
+        </p:style>
+        <p:txBody>
+          <a:bodyPr rtlCol="0" anchor="ctr"/>
+          <a:lstStyle/>
+          <a:p>
+            <a:pPr algn="ctr"/>
+          </a:p>
+        </p:txBody>
+      </p:sp>
+      <p:sp>
+        <p:nvSpPr>
+          <p:cNvPr id="13" name="TextBox 12"/>
+          <p:cNvSpPr txBox="1"/>
+          <p:nvPr/>
+        </p:nvSpPr>
+        <p:spPr>
+          <a:xfrm>
+            <a:off x="5138928" y="2395728"/>
+            <a:ext cx="1920240" cy="457200"/>
+          </a:xfrm>
+          <a:prstGeom prst="rect">
+            <a:avLst/>
+          </a:prstGeom>
+          <a:noFill/>
+        </p:spPr>
+        <p:txBody>
+          <a:bodyPr wrap="square" lIns="0" rIns="0" tIns="0" bIns="0" anchor="t">
+            <a:spAutoFit/>
+          </a:bodyPr>
+          <a:lstStyle/>
+          <a:p>
+            <a:pPr algn="ctr">
+              <a:spcBef>
+                <a:spcPts val="0"/>
+              </a:spcBef>
+              <a:spcAft>
+                <a:spcPts val="200"/>
+              </a:spcAft>
+            </a:pPr>
+            <a:r>
+              <a:rPr sz="1200" b="1" i="0">
+                <a:solidFill>
+                  <a:srgbClr val="1A2435"/>
+                </a:solidFill>
+                <a:latin typeface="맑은 고딕"/>
+                <a:ea typeface="맑은 고딕"/>
+                <a:cs typeface="맑은 고딕"/>
+              </a:rPr>
+              <a:t>복사</a:t>
+            </a:r>
+          </a:p>
+          <a:p>
+            <a:pPr algn="ctr">
+              <a:spcBef>
+                <a:spcPts val="0"/>
+              </a:spcBef>
+              <a:spcAft>
+                <a:spcPts val="0"/>
+              </a:spcAft>
+            </a:pPr>
+            <a:r>
+              <a:rPr sz="900" b="0" i="0">
+                <a:solidFill>
+                  <a:srgbClr val="667085"/>
+                </a:solidFill>
+                <a:latin typeface="Consolas"/>
+                <a:ea typeface="Consolas"/>
+                <a:cs typeface="Consolas"/>
+              </a:rPr>
+              <a:t>scaler.pkl</a:t>
+            </a:r>
+          </a:p>
+        </p:txBody>
+      </p:sp>
+      <p:sp>
+        <p:nvSpPr>
+          <p:cNvPr id="14" name="TextBox 13"/>
+          <p:cNvSpPr txBox="1"/>
+          <p:nvPr/>
+        </p:nvSpPr>
+        <p:spPr>
+          <a:xfrm>
+            <a:off x="5138928" y="3346704"/>
+            <a:ext cx="1920240" cy="274320"/>
+          </a:xfrm>
+          <a:prstGeom prst="rect">
+            <a:avLst/>
+          </a:prstGeom>
+          <a:noFill/>
+        </p:spPr>
+        <p:txBody>
+          <a:bodyPr wrap="square" lIns="0" rIns="0" tIns="0" bIns="0" anchor="t">
+            <a:spAutoFit/>
+          </a:bodyPr>
+          <a:lstStyle/>
+          <a:p>
+            <a:pPr algn="ctr">
+              <a:spcBef>
+                <a:spcPts val="0"/>
+              </a:spcBef>
+              <a:spcAft>
+                <a:spcPts val="0"/>
+              </a:spcAft>
+            </a:pPr>
+            <a:r>
+              <a:rPr sz="850" b="0" i="0">
+                <a:solidFill>
+                  <a:srgbClr val="667085"/>
+                </a:solidFill>
+                <a:latin typeface="Consolas"/>
+                <a:ea typeface="Consolas"/>
+                <a:cs typeface="Consolas"/>
+              </a:rPr>
+              <a:t>autoencoder_final.pth</a:t>
+            </a:r>
+          </a:p>
+        </p:txBody>
+      </p:sp>
+      <p:sp>
+        <p:nvSpPr>
+          <p:cNvPr id="15" name="Rounded Rectangle 14"/>
+          <p:cNvSpPr/>
+          <p:nvPr/>
+        </p:nvSpPr>
+        <p:spPr>
+          <a:xfrm>
+            <a:off x="658368" y="4626864"/>
+            <a:ext cx="3529584" cy="1426464"/>
+          </a:xfrm>
+          <a:prstGeom prst="roundRect">
+            <a:avLst>
+              <a:gd name="adj" fmla="val 6000"/>
+            </a:avLst>
+          </a:prstGeom>
+          <a:solidFill>
+            <a:srgbClr val="FDF1EC"/>
+          </a:solidFill>
+          <a:ln>
+            <a:noFill/>
+          </a:ln>
+          <a:effectLst/>
+        </p:spPr>
+        <p:style>
+          <a:lnRef idx="1">
+            <a:schemeClr val="accent1"/>
+          </a:lnRef>
+          <a:fillRef idx="3">
+            <a:schemeClr val="accent1"/>
+          </a:fillRef>
+          <a:effectRef idx="2">
+            <a:schemeClr val="accent1"/>
+          </a:effectRef>
+          <a:fontRef idx="minor">
+            <a:schemeClr val="lt1"/>
+          </a:fontRef>
+        </p:style>
+        <p:txBody>
+          <a:bodyPr rtlCol="0" anchor="ctr"/>
+          <a:lstStyle/>
+          <a:p/>
+        </p:txBody>
+      </p:sp>
+      <p:sp>
+        <p:nvSpPr>
+          <p:cNvPr id="16" name="Oval 15"/>
+          <p:cNvSpPr/>
+          <p:nvPr/>
+        </p:nvSpPr>
+        <p:spPr>
+          <a:xfrm>
+            <a:off x="896112" y="4846320"/>
+            <a:ext cx="310896" cy="310896"/>
+          </a:xfrm>
+          <a:prstGeom prst="ellipse">
+            <a:avLst/>
+          </a:prstGeom>
+          <a:solidFill>
+            <a:srgbClr val="E4572E"/>
+          </a:solidFill>
+          <a:ln>
+            <a:noFill/>
+          </a:ln>
+          <a:effectLst/>
+        </p:spPr>
+        <p:style>
+          <a:lnRef idx="1">
+            <a:schemeClr val="accent1"/>
+          </a:lnRef>
+          <a:fillRef idx="3">
+            <a:schemeClr val="accent1"/>
+          </a:fillRef>
+          <a:effectRef idx="2">
+            <a:schemeClr val="accent1"/>
+          </a:effectRef>
+          <a:fontRef idx="minor">
+            <a:schemeClr val="lt1"/>
+          </a:fontRef>
+        </p:style>
+        <p:txBody>
+          <a:bodyPr rtlCol="0" anchor="ctr" lIns="0" rIns="0" tIns="0" bIns="0"/>
+          <a:lstStyle/>
+          <a:p>
+            <a:pPr algn="ctr"/>
+            <a:r>
+              <a:rPr sz="1200" b="1" i="0">
+                <a:solidFill>
+                  <a:srgbClr val="FFFFFF"/>
+                </a:solidFill>
+                <a:latin typeface="맑은 고딕"/>
+                <a:ea typeface="맑은 고딕"/>
+                <a:cs typeface="맑은 고딕"/>
+              </a:rPr>
+              <a:t>!</a:t>
+            </a:r>
+          </a:p>
+        </p:txBody>
+      </p:sp>
+      <p:sp>
+        <p:nvSpPr>
+          <p:cNvPr id="17" name="TextBox 16"/>
+          <p:cNvSpPr txBox="1"/>
+          <p:nvPr/>
+        </p:nvSpPr>
+        <p:spPr>
+          <a:xfrm>
+            <a:off x="1316736" y="4864608"/>
+            <a:ext cx="2651760" cy="274320"/>
+          </a:xfrm>
+          <a:prstGeom prst="rect">
+            <a:avLst/>
+          </a:prstGeom>
+          <a:noFill/>
+        </p:spPr>
+        <p:txBody>
+          <a:bodyPr wrap="square" lIns="0" rIns="0" tIns="0" bIns="0" anchor="t">
+            <a:spAutoFit/>
+          </a:bodyPr>
+          <a:lstStyle/>
+          <a:p>
+            <a:pPr algn="l">
+              <a:spcBef>
+                <a:spcPts val="0"/>
+              </a:spcBef>
+              <a:spcAft>
+                <a:spcPts val="0"/>
+              </a:spcAft>
+            </a:pPr>
+            <a:r>
+              <a:rPr sz="1250" b="1" i="0">
+                <a:solidFill>
+                  <a:srgbClr val="E4572E"/>
+                </a:solidFill>
+                <a:latin typeface="맑은 고딕"/>
+                <a:ea typeface="맑은 고딕"/>
+                <a:cs typeface="맑은 고딕"/>
+              </a:rPr>
+              <a:t>같은 회차의 짝을 유지</a:t>
+            </a:r>
+          </a:p>
+        </p:txBody>
+      </p:sp>
+      <p:sp>
+        <p:nvSpPr>
+          <p:cNvPr id="18" name="TextBox 17"/>
+          <p:cNvSpPr txBox="1"/>
+          <p:nvPr/>
+        </p:nvSpPr>
+        <p:spPr>
+          <a:xfrm>
+            <a:off x="896112" y="5266944"/>
+            <a:ext cx="3054096" cy="685800"/>
+          </a:xfrm>
+          <a:prstGeom prst="rect">
+            <a:avLst/>
+          </a:prstGeom>
+          <a:noFill/>
+        </p:spPr>
+        <p:txBody>
+          <a:bodyPr wrap="square" lIns="0" rIns="0" tIns="0" bIns="0" anchor="t">
+            <a:spAutoFit/>
+          </a:bodyPr>
+          <a:lstStyle/>
+          <a:p>
+            <a:pPr algn="l">
+              <a:lnSpc>
+                <a:spcPct val="120000"/>
+              </a:lnSpc>
+              <a:spcBef>
+                <a:spcPts val="0"/>
+              </a:spcBef>
+              <a:spcAft>
+                <a:spcPts val="0"/>
+              </a:spcAft>
+            </a:pPr>
+            <a:r>
+              <a:rPr sz="1050" b="0" i="0">
+                <a:solidFill>
+                  <a:srgbClr val="1A2435"/>
+                </a:solidFill>
+                <a:latin typeface="맑은 고딕"/>
+                <a:ea typeface="맑은 고딕"/>
+                <a:cs typeface="맑은 고딕"/>
+              </a:rPr>
+              <a:t>scaler 와 autoencoder 는 한 번의 학습에서 함께 나온 것이어야 합니다. 따로 복사하면 점수가 조용히 틀어집니다.</a:t>
+            </a:r>
+          </a:p>
+        </p:txBody>
+      </p:sp>
+      <p:sp>
+        <p:nvSpPr>
+          <p:cNvPr id="19" name="Rounded Rectangle 18"/>
+          <p:cNvSpPr/>
+          <p:nvPr/>
+        </p:nvSpPr>
+        <p:spPr>
+          <a:xfrm>
+            <a:off x="4425696" y="4626864"/>
+            <a:ext cx="3529584" cy="1426464"/>
+          </a:xfrm>
+          <a:prstGeom prst="roundRect">
+            <a:avLst>
+              <a:gd name="adj" fmla="val 6000"/>
+            </a:avLst>
+          </a:prstGeom>
+          <a:solidFill>
+            <a:srgbClr val="FDF1EC"/>
+          </a:solidFill>
+          <a:ln>
+            <a:noFill/>
+          </a:ln>
+          <a:effectLst/>
+        </p:spPr>
+        <p:style>
+          <a:lnRef idx="1">
+            <a:schemeClr val="accent1"/>
+          </a:lnRef>
+          <a:fillRef idx="3">
+            <a:schemeClr val="accent1"/>
+          </a:fillRef>
+          <a:effectRef idx="2">
+            <a:schemeClr val="accent1"/>
+          </a:effectRef>
+          <a:fontRef idx="minor">
+            <a:schemeClr val="lt1"/>
+          </a:fontRef>
+        </p:style>
+        <p:txBody>
+          <a:bodyPr rtlCol="0" anchor="ctr"/>
+          <a:lstStyle/>
+          <a:p/>
+        </p:txBody>
+      </p:sp>
+      <p:sp>
+        <p:nvSpPr>
+          <p:cNvPr id="20" name="Oval 19"/>
+          <p:cNvSpPr/>
+          <p:nvPr/>
+        </p:nvSpPr>
+        <p:spPr>
+          <a:xfrm>
+            <a:off x="4663440" y="4846320"/>
+            <a:ext cx="310896" cy="310896"/>
+          </a:xfrm>
+          <a:prstGeom prst="ellipse">
+            <a:avLst/>
+          </a:prstGeom>
+          <a:solidFill>
+            <a:srgbClr val="E4572E"/>
+          </a:solidFill>
+          <a:ln>
+            <a:noFill/>
+          </a:ln>
+          <a:effectLst/>
+        </p:spPr>
+        <p:style>
+          <a:lnRef idx="1">
+            <a:schemeClr val="accent1"/>
+          </a:lnRef>
+          <a:fillRef idx="3">
+            <a:schemeClr val="accent1"/>
+          </a:fillRef>
+          <a:effectRef idx="2">
+            <a:schemeClr val="accent1"/>
+          </a:effectRef>
+          <a:fontRef idx="minor">
+            <a:schemeClr val="lt1"/>
+          </a:fontRef>
+        </p:style>
+        <p:txBody>
+          <a:bodyPr rtlCol="0" anchor="ctr" lIns="0" rIns="0" tIns="0" bIns="0"/>
+          <a:lstStyle/>
+          <a:p>
+            <a:pPr algn="ctr"/>
+            <a:r>
+              <a:rPr sz="1200" b="1" i="0">
+                <a:solidFill>
+                  <a:srgbClr val="FFFFFF"/>
+                </a:solidFill>
+                <a:latin typeface="맑은 고딕"/>
+                <a:ea typeface="맑은 고딕"/>
+                <a:cs typeface="맑은 고딕"/>
+              </a:rPr>
+              <a:t>!</a:t>
+            </a:r>
+          </a:p>
+        </p:txBody>
+      </p:sp>
+      <p:sp>
+        <p:nvSpPr>
+          <p:cNvPr id="21" name="TextBox 20"/>
+          <p:cNvSpPr txBox="1"/>
+          <p:nvPr/>
+        </p:nvSpPr>
+        <p:spPr>
+          <a:xfrm>
+            <a:off x="5084064" y="4864608"/>
+            <a:ext cx="2651760" cy="274320"/>
+          </a:xfrm>
+          <a:prstGeom prst="rect">
+            <a:avLst/>
+          </a:prstGeom>
+          <a:noFill/>
+        </p:spPr>
+        <p:txBody>
+          <a:bodyPr wrap="square" lIns="0" rIns="0" tIns="0" bIns="0" anchor="t">
+            <a:spAutoFit/>
+          </a:bodyPr>
+          <a:lstStyle/>
+          <a:p>
+            <a:pPr algn="l">
+              <a:spcBef>
+                <a:spcPts val="0"/>
+              </a:spcBef>
+              <a:spcAft>
+                <a:spcPts val="0"/>
+              </a:spcAft>
+            </a:pPr>
+            <a:r>
+              <a:rPr sz="1250" b="1" i="0">
+                <a:solidFill>
+                  <a:srgbClr val="E4572E"/>
+                </a:solidFill>
+                <a:latin typeface="맑은 고딕"/>
+                <a:ea typeface="맑은 고딕"/>
+                <a:cs typeface="맑은 고딕"/>
+              </a:rPr>
+              <a:t>numpy 버전 차이</a:t>
+            </a:r>
+          </a:p>
+        </p:txBody>
+      </p:sp>
+      <p:sp>
+        <p:nvSpPr>
+          <p:cNvPr id="22" name="TextBox 21"/>
+          <p:cNvSpPr txBox="1"/>
+          <p:nvPr/>
+        </p:nvSpPr>
+        <p:spPr>
+          <a:xfrm>
+            <a:off x="4663440" y="5266944"/>
+            <a:ext cx="3054096" cy="685800"/>
+          </a:xfrm>
+          <a:prstGeom prst="rect">
+            <a:avLst/>
+          </a:prstGeom>
+          <a:noFill/>
+        </p:spPr>
+        <p:txBody>
+          <a:bodyPr wrap="square" lIns="0" rIns="0" tIns="0" bIns="0" anchor="t">
+            <a:spAutoFit/>
+          </a:bodyPr>
+          <a:lstStyle/>
+          <a:p>
+            <a:pPr algn="l">
+              <a:lnSpc>
+                <a:spcPct val="120000"/>
+              </a:lnSpc>
+              <a:spcBef>
+                <a:spcPts val="0"/>
+              </a:spcBef>
+              <a:spcAft>
+                <a:spcPts val="0"/>
+              </a:spcAft>
+            </a:pPr>
+            <a:r>
+              <a:rPr sz="1050" b="0" i="0">
+                <a:solidFill>
+                  <a:srgbClr val="1A2435"/>
+                </a:solidFill>
+                <a:latin typeface="맑은 고딕"/>
+                <a:ea typeface="맑은 고딕"/>
+                <a:cs typeface="맑은 고딕"/>
+              </a:rPr>
+              <a:t>otg(2.x)에서 만든 scaler.pkl 은 mmc(1.x)에서 읽히지 않아, 같은 폴더의 scaler.npz 로 대체합니다.</a:t>
+            </a:r>
+          </a:p>
+        </p:txBody>
+      </p:sp>
+      <p:sp>
+        <p:nvSpPr>
+          <p:cNvPr id="23" name="Rounded Rectangle 22"/>
+          <p:cNvSpPr/>
+          <p:nvPr/>
+        </p:nvSpPr>
+        <p:spPr>
+          <a:xfrm>
+            <a:off x="8193024" y="4626864"/>
+            <a:ext cx="3529584" cy="1426464"/>
+          </a:xfrm>
+          <a:prstGeom prst="roundRect">
+            <a:avLst>
+              <a:gd name="adj" fmla="val 6000"/>
+            </a:avLst>
+          </a:prstGeom>
+          <a:solidFill>
+            <a:srgbClr val="FDF1EC"/>
+          </a:solidFill>
+          <a:ln>
+            <a:noFill/>
+          </a:ln>
+          <a:effectLst/>
+        </p:spPr>
+        <p:style>
+          <a:lnRef idx="1">
+            <a:schemeClr val="accent1"/>
+          </a:lnRef>
+          <a:fillRef idx="3">
+            <a:schemeClr val="accent1"/>
+          </a:fillRef>
+          <a:effectRef idx="2">
+            <a:schemeClr val="accent1"/>
+          </a:effectRef>
+          <a:fontRef idx="minor">
+            <a:schemeClr val="lt1"/>
+          </a:fontRef>
+        </p:style>
+        <p:txBody>
+          <a:bodyPr rtlCol="0" anchor="ctr"/>
+          <a:lstStyle/>
+          <a:p/>
+        </p:txBody>
+      </p:sp>
+      <p:sp>
+        <p:nvSpPr>
+          <p:cNvPr id="24" name="Oval 23"/>
+          <p:cNvSpPr/>
+          <p:nvPr/>
+        </p:nvSpPr>
+        <p:spPr>
+          <a:xfrm>
+            <a:off x="8430768" y="4846320"/>
+            <a:ext cx="310896" cy="310896"/>
+          </a:xfrm>
+          <a:prstGeom prst="ellipse">
+            <a:avLst/>
+          </a:prstGeom>
+          <a:solidFill>
+            <a:srgbClr val="E4572E"/>
+          </a:solidFill>
+          <a:ln>
+            <a:noFill/>
+          </a:ln>
+          <a:effectLst/>
+        </p:spPr>
+        <p:style>
+          <a:lnRef idx="1">
+            <a:schemeClr val="accent1"/>
+          </a:lnRef>
+          <a:fillRef idx="3">
+            <a:schemeClr val="accent1"/>
+          </a:fillRef>
+          <a:effectRef idx="2">
+            <a:schemeClr val="accent1"/>
+          </a:effectRef>
+          <a:fontRef idx="minor">
+            <a:schemeClr val="lt1"/>
+          </a:fontRef>
+        </p:style>
+        <p:txBody>
+          <a:bodyPr rtlCol="0" anchor="ctr" lIns="0" rIns="0" tIns="0" bIns="0"/>
+          <a:lstStyle/>
+          <a:p>
+            <a:pPr algn="ctr"/>
+            <a:r>
+              <a:rPr sz="1200" b="1" i="0">
+                <a:solidFill>
+                  <a:srgbClr val="FFFFFF"/>
+                </a:solidFill>
+                <a:latin typeface="맑은 고딕"/>
+                <a:ea typeface="맑은 고딕"/>
+                <a:cs typeface="맑은 고딕"/>
+              </a:rPr>
+              <a:t>!</a:t>
+            </a:r>
+          </a:p>
+        </p:txBody>
+      </p:sp>
+      <p:sp>
+        <p:nvSpPr>
+          <p:cNvPr id="25" name="TextBox 24"/>
+          <p:cNvSpPr txBox="1"/>
+          <p:nvPr/>
+        </p:nvSpPr>
+        <p:spPr>
+          <a:xfrm>
+            <a:off x="8851392" y="4864608"/>
+            <a:ext cx="2651760" cy="274320"/>
+          </a:xfrm>
+          <a:prstGeom prst="rect">
+            <a:avLst/>
+          </a:prstGeom>
+          <a:noFill/>
+        </p:spPr>
+        <p:txBody>
+          <a:bodyPr wrap="square" lIns="0" rIns="0" tIns="0" bIns="0" anchor="t">
+            <a:spAutoFit/>
+          </a:bodyPr>
+          <a:lstStyle/>
+          <a:p>
+            <a:pPr algn="l">
+              <a:spcBef>
+                <a:spcPts val="0"/>
+              </a:spcBef>
+              <a:spcAft>
+                <a:spcPts val="0"/>
+              </a:spcAft>
+            </a:pPr>
+            <a:r>
+              <a:rPr sz="1250" b="1" i="0">
+                <a:solidFill>
+                  <a:srgbClr val="E4572E"/>
+                </a:solidFill>
+                <a:latin typeface="맑은 고딕"/>
+                <a:ea typeface="맑은 고딕"/>
+                <a:cs typeface="맑은 고딕"/>
+              </a:rPr>
+              <a:t>학습 폴더도 백업</a:t>
+            </a:r>
+          </a:p>
+        </p:txBody>
+      </p:sp>
+      <p:sp>
+        <p:nvSpPr>
+          <p:cNvPr id="26" name="TextBox 25"/>
+          <p:cNvSpPr txBox="1"/>
+          <p:nvPr/>
+        </p:nvSpPr>
+        <p:spPr>
+          <a:xfrm>
+            <a:off x="8430768" y="5266944"/>
+            <a:ext cx="3054096" cy="685800"/>
+          </a:xfrm>
+          <a:prstGeom prst="rect">
+            <a:avLst/>
+          </a:prstGeom>
+          <a:noFill/>
+        </p:spPr>
+        <p:txBody>
+          <a:bodyPr wrap="square" lIns="0" rIns="0" tIns="0" bIns="0" anchor="t">
+            <a:spAutoFit/>
+          </a:bodyPr>
+          <a:lstStyle/>
+          <a:p>
+            <a:pPr algn="l">
+              <a:lnSpc>
+                <a:spcPct val="120000"/>
+              </a:lnSpc>
+              <a:spcBef>
+                <a:spcPts val="0"/>
+              </a:spcBef>
+              <a:spcAft>
+                <a:spcPts val="0"/>
+              </a:spcAft>
+            </a:pPr>
+            <a:r>
+              <a:rPr sz="1050" b="0" i="0">
+                <a:solidFill>
+                  <a:srgbClr val="1A2435"/>
+                </a:solidFill>
+                <a:latin typeface="맑은 고딕"/>
+                <a:ea typeface="맑은 고딕"/>
+                <a:cs typeface="맑은 고딕"/>
+              </a:rPr>
+              <a:t>D:\autoencoder 는 프로젝트 밖이라 백업에서 빠지기 쉽습니다. 스크립트만이라도 보관하십시오.</a:t>
+            </a:r>
+          </a:p>
+        </p:txBody>
+      </p:sp>
+      <p:sp>
+        <p:nvSpPr>
+          <p:cNvPr id="27" name="TextBox 26"/>
+          <p:cNvSpPr txBox="1"/>
+          <p:nvPr/>
+        </p:nvSpPr>
+        <p:spPr>
+          <a:xfrm>
+            <a:off x="10618927" y="6291072"/>
+            <a:ext cx="914400" cy="274320"/>
+          </a:xfrm>
+          <a:prstGeom prst="rect">
+            <a:avLst/>
+          </a:prstGeom>
+          <a:noFill/>
+        </p:spPr>
+        <p:txBody>
+          <a:bodyPr wrap="square" lIns="0" rIns="0" tIns="0" bIns="0" anchor="t">
+            <a:spAutoFit/>
+          </a:bodyPr>
+          <a:lstStyle/>
+          <a:p>
+            <a:pPr algn="r">
+              <a:spcBef>
+                <a:spcPts val="0"/>
+              </a:spcBef>
+              <a:spcAft>
+                <a:spcPts val="0"/>
+              </a:spcAft>
+            </a:pPr>
+            <a:r>
+              <a:rPr sz="1050" b="0" i="0">
+                <a:solidFill>
+                  <a:srgbClr val="667085"/>
+                </a:solidFill>
+                <a:latin typeface="맑은 고딕"/>
+                <a:ea typeface="맑은 고딕"/>
+                <a:cs typeface="맑은 고딕"/>
+              </a:rPr>
+              <a:t>14</a:t>
+            </a:r>
+          </a:p>
+        </p:txBody>
+      </p:sp>
+    </p:spTree>
+  </p:cSld>
+  <p:clrMapOvr>
+    <a:masterClrMapping/>
+  </p:clrMapOvr>
+</p:sld>
+</file>
+
+<file path=ppt/slides/slide15.xml><?xml version="1.0" encoding="utf-8"?>
+<p:sld xmlns:a="http://schemas.openxmlformats.org/drawingml/2006/main" xmlns:p="http://schemas.openxmlformats.org/presentationml/2006/main" xmlns:r="http://schemas.openxmlformats.org/officeDocument/2006/relationships">
+  <p:cSld>
+    <p:bg>
+      <p:bgPr>
+        <a:solidFill>
+          <a:srgbClr val="0F1B2D"/>
+        </a:solidFill>
+        <a:effectLst/>
+      </p:bgPr>
+    </p:bg>
+    <p:spTree>
+      <p:nvGrpSpPr>
+        <p:cNvPr id="1" name=""/>
+        <p:cNvGrpSpPr/>
+        <p:nvPr/>
+      </p:nvGrpSpPr>
+      <p:grpSpPr/>
+      <p:sp>
+        <p:nvSpPr>
+          <p:cNvPr id="2" name="TextBox 1"/>
+          <p:cNvSpPr txBox="1"/>
+          <p:nvPr/>
+        </p:nvSpPr>
+        <p:spPr>
+          <a:xfrm>
+            <a:off x="658368" y="475488"/>
+            <a:ext cx="10874959" cy="310896"/>
+          </a:xfrm>
+          <a:prstGeom prst="rect">
+            <a:avLst/>
+          </a:prstGeom>
+          <a:noFill/>
+        </p:spPr>
+        <p:txBody>
+          <a:bodyPr wrap="square" lIns="0" rIns="0" tIns="0" bIns="0" anchor="t">
+            <a:spAutoFit/>
+          </a:bodyPr>
+          <a:lstStyle/>
+          <a:p>
+            <a:pPr algn="l">
+              <a:spcBef>
+                <a:spcPts val="0"/>
+              </a:spcBef>
+              <a:spcAft>
+                <a:spcPts val="0"/>
+              </a:spcAft>
+            </a:pPr>
+            <a:r>
+              <a:rPr sz="1250" b="1" i="0">
+                <a:solidFill>
+                  <a:srgbClr val="E4572E"/>
+                </a:solidFill>
+                <a:latin typeface="맑은 고딕"/>
+                <a:ea typeface="맑은 고딕"/>
+                <a:cs typeface="맑은 고딕"/>
+              </a:rPr>
+              <a:t>14  TROUBLESHOOTING</a:t>
+            </a:r>
+          </a:p>
+        </p:txBody>
+      </p:sp>
+      <p:sp>
+        <p:nvSpPr>
+          <p:cNvPr id="3" name="TextBox 2"/>
+          <p:cNvSpPr txBox="1"/>
+          <p:nvPr/>
+        </p:nvSpPr>
+        <p:spPr>
+          <a:xfrm>
+            <a:off x="658368" y="804672"/>
+            <a:ext cx="10874959" cy="621792"/>
+          </a:xfrm>
+          <a:prstGeom prst="rect">
+            <a:avLst/>
+          </a:prstGeom>
+          <a:noFill/>
+        </p:spPr>
+        <p:txBody>
+          <a:bodyPr wrap="square" lIns="0" rIns="0" tIns="0" bIns="0" anchor="t">
+            <a:spAutoFit/>
+          </a:bodyPr>
+          <a:lstStyle/>
+          <a:p>
+            <a:pPr algn="l">
+              <a:spcBef>
+                <a:spcPts val="0"/>
+              </a:spcBef>
+              <a:spcAft>
+                <a:spcPts val="0"/>
+              </a:spcAft>
+            </a:pPr>
+            <a:r>
+              <a:rPr sz="3000" b="1" i="0">
+                <a:solidFill>
+                  <a:srgbClr val="FFFFFF"/>
+                </a:solidFill>
+                <a:latin typeface="맑은 고딕"/>
+                <a:ea typeface="맑은 고딕"/>
+                <a:cs typeface="맑은 고딕"/>
+              </a:rPr>
+              <a:t>자주 겪는 문제</a:t>
+            </a:r>
+          </a:p>
+        </p:txBody>
+      </p:sp>
+      <p:sp>
+        <p:nvSpPr>
+          <p:cNvPr id="4" name="Rounded Rectangle 3"/>
+          <p:cNvSpPr/>
+          <p:nvPr/>
+        </p:nvSpPr>
+        <p:spPr>
+          <a:xfrm>
+            <a:off x="658368" y="1783080"/>
+            <a:ext cx="10874959" cy="1042415"/>
+          </a:xfrm>
+          <a:prstGeom prst="roundRect">
+            <a:avLst>
+              <a:gd name="adj" fmla="val 6000"/>
+            </a:avLst>
+          </a:prstGeom>
+          <a:solidFill>
+            <a:srgbClr val="1C2B45"/>
+          </a:solidFill>
+          <a:ln>
+            <a:noFill/>
+          </a:ln>
+          <a:effectLst/>
+        </p:spPr>
+        <p:style>
+          <a:lnRef idx="1">
+            <a:schemeClr val="accent1"/>
+          </a:lnRef>
+          <a:fillRef idx="3">
+            <a:schemeClr val="accent1"/>
+          </a:fillRef>
+          <a:effectRef idx="2">
+            <a:schemeClr val="accent1"/>
+          </a:effectRef>
+          <a:fontRef idx="minor">
+            <a:schemeClr val="lt1"/>
+          </a:fontRef>
+        </p:style>
+        <p:txBody>
+          <a:bodyPr rtlCol="0" anchor="ctr"/>
+          <a:lstStyle/>
+          <a:p/>
+        </p:txBody>
+      </p:sp>
+      <p:sp>
+        <p:nvSpPr>
+          <p:cNvPr id="5" name="Oval 4"/>
+          <p:cNvSpPr/>
+          <p:nvPr/>
+        </p:nvSpPr>
+        <p:spPr>
+          <a:xfrm>
+            <a:off x="932688" y="2093976"/>
+            <a:ext cx="402336" cy="402336"/>
+          </a:xfrm>
+          <a:prstGeom prst="ellipse">
+            <a:avLst/>
+          </a:prstGeom>
+          <a:solidFill>
+            <a:srgbClr val="E4572E"/>
+          </a:solidFill>
+          <a:ln>
+            <a:noFill/>
+          </a:ln>
+          <a:effectLst/>
+        </p:spPr>
+        <p:style>
+          <a:lnRef idx="1">
+            <a:schemeClr val="accent1"/>
+          </a:lnRef>
+          <a:fillRef idx="3">
+            <a:schemeClr val="accent1"/>
+          </a:fillRef>
+          <a:effectRef idx="2">
+            <a:schemeClr val="accent1"/>
+          </a:effectRef>
+          <a:fontRef idx="minor">
+            <a:schemeClr val="lt1"/>
+          </a:fontRef>
+        </p:style>
+        <p:txBody>
+          <a:bodyPr rtlCol="0" anchor="ctr" lIns="0" rIns="0" tIns="0" bIns="0"/>
+          <a:lstStyle/>
+          <a:p>
+            <a:pPr algn="ctr"/>
+            <a:r>
+              <a:rPr sz="1400" b="1" i="0">
+                <a:solidFill>
+                  <a:srgbClr val="FFFFFF"/>
+                </a:solidFill>
+                <a:latin typeface="맑은 고딕"/>
+                <a:ea typeface="맑은 고딕"/>
+                <a:cs typeface="맑은 고딕"/>
+              </a:rPr>
+              <a:t>1</a:t>
+            </a:r>
+          </a:p>
+        </p:txBody>
+      </p:sp>
+      <p:sp>
+        <p:nvSpPr>
+          <p:cNvPr id="6" name="TextBox 5"/>
+          <p:cNvSpPr txBox="1"/>
+          <p:nvPr/>
+        </p:nvSpPr>
+        <p:spPr>
+          <a:xfrm>
+            <a:off x="1517904" y="1965960"/>
+            <a:ext cx="3200400" cy="274320"/>
+          </a:xfrm>
+          <a:prstGeom prst="rect">
+            <a:avLst/>
+          </a:prstGeom>
+          <a:noFill/>
+        </p:spPr>
+        <p:txBody>
+          <a:bodyPr wrap="square" lIns="0" rIns="0" tIns="0" bIns="0" anchor="t">
+            <a:spAutoFit/>
+          </a:bodyPr>
+          <a:lstStyle/>
+          <a:p>
+            <a:pPr algn="l">
+              <a:spcBef>
+                <a:spcPts val="0"/>
+              </a:spcBef>
+              <a:spcAft>
+                <a:spcPts val="0"/>
+              </a:spcAft>
+            </a:pPr>
+            <a:r>
+              <a:rPr sz="1400" b="1" i="0">
+                <a:solidFill>
+                  <a:srgbClr val="FFFFFF"/>
+                </a:solidFill>
+                <a:latin typeface="맑은 고딕"/>
+                <a:ea typeface="맑은 고딕"/>
+                <a:cs typeface="맑은 고딕"/>
+              </a:rPr>
+              <a:t>점수가 계속 같은 값</a:t>
+            </a:r>
+          </a:p>
+        </p:txBody>
+      </p:sp>
+      <p:sp>
+        <p:nvSpPr>
+          <p:cNvPr id="7" name="TextBox 6"/>
+          <p:cNvSpPr txBox="1"/>
+          <p:nvPr/>
+        </p:nvSpPr>
+        <p:spPr>
+          <a:xfrm>
+            <a:off x="1517904" y="2313432"/>
+            <a:ext cx="3200400" cy="365760"/>
+          </a:xfrm>
+          <a:prstGeom prst="rect">
+            <a:avLst/>
+          </a:prstGeom>
+          <a:noFill/>
+        </p:spPr>
+        <p:txBody>
+          <a:bodyPr wrap="square" lIns="0" rIns="0" tIns="0" bIns="0" anchor="t">
+            <a:spAutoFit/>
+          </a:bodyPr>
+          <a:lstStyle/>
+          <a:p>
+            <a:pPr algn="l">
+              <a:lnSpc>
+                <a:spcPct val="115000"/>
+              </a:lnSpc>
+              <a:spcBef>
+                <a:spcPts val="0"/>
+              </a:spcBef>
+              <a:spcAft>
+                <a:spcPts val="0"/>
+              </a:spcAft>
+            </a:pPr>
+            <a:r>
+              <a:rPr sz="1050" b="0" i="0">
+                <a:solidFill>
+                  <a:srgbClr val="F4A261"/>
+                </a:solidFill>
+                <a:latin typeface="맑은 고딕"/>
+                <a:ea typeface="맑은 고딕"/>
+                <a:cs typeface="맑은 고딕"/>
+              </a:rPr>
+              <a:t>현장 서버의 파일이 갱신되지 않는 경우입니다.</a:t>
+            </a:r>
+          </a:p>
+        </p:txBody>
+      </p:sp>
+      <p:sp>
+        <p:nvSpPr>
+          <p:cNvPr id="8" name="TextBox 7"/>
+          <p:cNvSpPr txBox="1"/>
+          <p:nvPr/>
+        </p:nvSpPr>
+        <p:spPr>
+          <a:xfrm>
+            <a:off x="4956048" y="2075688"/>
+            <a:ext cx="6309360" cy="548640"/>
+          </a:xfrm>
+          <a:prstGeom prst="rect">
+            <a:avLst/>
+          </a:prstGeom>
+          <a:noFill/>
+        </p:spPr>
+        <p:txBody>
+          <a:bodyPr wrap="square" lIns="0" rIns="0" tIns="0" bIns="0" anchor="t">
+            <a:spAutoFit/>
+          </a:bodyPr>
+          <a:lstStyle/>
+          <a:p>
+            <a:pPr algn="l">
+              <a:lnSpc>
+                <a:spcPct val="125000"/>
+              </a:lnSpc>
+              <a:spcBef>
+                <a:spcPts val="0"/>
+              </a:spcBef>
+              <a:spcAft>
+                <a:spcPts val="0"/>
+              </a:spcAft>
+            </a:pPr>
+            <a:r>
+              <a:rPr sz="1200" b="0" i="0">
+                <a:solidFill>
+                  <a:srgbClr val="C8D3E3"/>
+                </a:solidFill>
+                <a:latin typeface="맑은 고딕"/>
+                <a:ea typeface="맑은 고딕"/>
+                <a:cs typeface="맑은 고딕"/>
+              </a:rPr>
+              <a:t>debug_logs 의 ts 값을 확인하십시오. 며칠 전 날짜라면 현장 장비의 업로드를 점검합니다.</a:t>
+            </a:r>
+          </a:p>
+        </p:txBody>
+      </p:sp>
+      <p:sp>
+        <p:nvSpPr>
+          <p:cNvPr id="9" name="Rounded Rectangle 8"/>
+          <p:cNvSpPr/>
+          <p:nvPr/>
+        </p:nvSpPr>
+        <p:spPr>
+          <a:xfrm>
+            <a:off x="658368" y="2935224"/>
+            <a:ext cx="10874959" cy="1042415"/>
+          </a:xfrm>
+          <a:prstGeom prst="roundRect">
+            <a:avLst>
+              <a:gd name="adj" fmla="val 6000"/>
+            </a:avLst>
+          </a:prstGeom>
+          <a:solidFill>
+            <a:srgbClr val="1C2B45"/>
+          </a:solidFill>
+          <a:ln>
+            <a:noFill/>
+          </a:ln>
+          <a:effectLst/>
+        </p:spPr>
+        <p:style>
+          <a:lnRef idx="1">
+            <a:schemeClr val="accent1"/>
+          </a:lnRef>
+          <a:fillRef idx="3">
+            <a:schemeClr val="accent1"/>
+          </a:fillRef>
+          <a:effectRef idx="2">
+            <a:schemeClr val="accent1"/>
+          </a:effectRef>
+          <a:fontRef idx="minor">
+            <a:schemeClr val="lt1"/>
+          </a:fontRef>
+        </p:style>
+        <p:txBody>
+          <a:bodyPr rtlCol="0" anchor="ctr"/>
+          <a:lstStyle/>
+          <a:p/>
+        </p:txBody>
+      </p:sp>
+      <p:sp>
+        <p:nvSpPr>
+          <p:cNvPr id="10" name="Oval 9"/>
+          <p:cNvSpPr/>
+          <p:nvPr/>
+        </p:nvSpPr>
+        <p:spPr>
+          <a:xfrm>
+            <a:off x="932688" y="3246120"/>
+            <a:ext cx="402336" cy="402336"/>
+          </a:xfrm>
+          <a:prstGeom prst="ellipse">
+            <a:avLst/>
+          </a:prstGeom>
+          <a:solidFill>
+            <a:srgbClr val="E4572E"/>
+          </a:solidFill>
+          <a:ln>
+            <a:noFill/>
+          </a:ln>
+          <a:effectLst/>
+        </p:spPr>
+        <p:style>
+          <a:lnRef idx="1">
+            <a:schemeClr val="accent1"/>
+          </a:lnRef>
+          <a:fillRef idx="3">
+            <a:schemeClr val="accent1"/>
+          </a:fillRef>
+          <a:effectRef idx="2">
+            <a:schemeClr val="accent1"/>
+          </a:effectRef>
+          <a:fontRef idx="minor">
+            <a:schemeClr val="lt1"/>
+          </a:fontRef>
+        </p:style>
+        <p:txBody>
+          <a:bodyPr rtlCol="0" anchor="ctr" lIns="0" rIns="0" tIns="0" bIns="0"/>
+          <a:lstStyle/>
+          <a:p>
+            <a:pPr algn="ctr"/>
+            <a:r>
+              <a:rPr sz="1400" b="1" i="0">
+                <a:solidFill>
+                  <a:srgbClr val="FFFFFF"/>
+                </a:solidFill>
+                <a:latin typeface="맑은 고딕"/>
+                <a:ea typeface="맑은 고딕"/>
+                <a:cs typeface="맑은 고딕"/>
+              </a:rPr>
+              <a:t>2</a:t>
+            </a:r>
+          </a:p>
+        </p:txBody>
+      </p:sp>
+      <p:sp>
+        <p:nvSpPr>
+          <p:cNvPr id="11" name="TextBox 10"/>
+          <p:cNvSpPr txBox="1"/>
+          <p:nvPr/>
+        </p:nvSpPr>
+        <p:spPr>
+          <a:xfrm>
+            <a:off x="1517904" y="3118104"/>
+            <a:ext cx="3200400" cy="274320"/>
+          </a:xfrm>
+          <a:prstGeom prst="rect">
+            <a:avLst/>
+          </a:prstGeom>
+          <a:noFill/>
+        </p:spPr>
+        <p:txBody>
+          <a:bodyPr wrap="square" lIns="0" rIns="0" tIns="0" bIns="0" anchor="t">
+            <a:spAutoFit/>
+          </a:bodyPr>
+          <a:lstStyle/>
+          <a:p>
+            <a:pPr algn="l">
+              <a:spcBef>
+                <a:spcPts val="0"/>
+              </a:spcBef>
+              <a:spcAft>
+                <a:spcPts val="0"/>
+              </a:spcAft>
+            </a:pPr>
+            <a:r>
+              <a:rPr sz="1400" b="1" i="0">
+                <a:solidFill>
+                  <a:srgbClr val="FFFFFF"/>
+                </a:solidFill>
+                <a:latin typeface="맑은 고딕"/>
+                <a:ea typeface="맑은 고딕"/>
+                <a:cs typeface="맑은 고딕"/>
+              </a:rPr>
+              <a:t>db_utils 임포트 오류</a:t>
+            </a:r>
+          </a:p>
+        </p:txBody>
+      </p:sp>
+      <p:sp>
+        <p:nvSpPr>
+          <p:cNvPr id="12" name="TextBox 11"/>
+          <p:cNvSpPr txBox="1"/>
+          <p:nvPr/>
+        </p:nvSpPr>
+        <p:spPr>
+          <a:xfrm>
+            <a:off x="1517904" y="3465576"/>
+            <a:ext cx="3200400" cy="365760"/>
+          </a:xfrm>
+          <a:prstGeom prst="rect">
+            <a:avLst/>
+          </a:prstGeom>
+          <a:noFill/>
+        </p:spPr>
+        <p:txBody>
+          <a:bodyPr wrap="square" lIns="0" rIns="0" tIns="0" bIns="0" anchor="t">
+            <a:spAutoFit/>
+          </a:bodyPr>
+          <a:lstStyle/>
+          <a:p>
+            <a:pPr algn="l">
+              <a:lnSpc>
+                <a:spcPct val="115000"/>
+              </a:lnSpc>
+              <a:spcBef>
+                <a:spcPts val="0"/>
+              </a:spcBef>
+              <a:spcAft>
+                <a:spcPts val="0"/>
+              </a:spcAft>
+            </a:pPr>
+            <a:r>
+              <a:rPr sz="1050" b="0" i="0">
+                <a:solidFill>
+                  <a:srgbClr val="F4A261"/>
+                </a:solidFill>
+                <a:latin typeface="맑은 고딕"/>
+                <a:ea typeface="맑은 고딕"/>
+                <a:cs typeface="맑은 고딕"/>
+              </a:rPr>
+              <a:t>PyPI 의 동명 패키지가 대신 잡힌 경우입니다.</a:t>
+            </a:r>
+          </a:p>
+        </p:txBody>
+      </p:sp>
+      <p:sp>
+        <p:nvSpPr>
+          <p:cNvPr id="13" name="TextBox 12"/>
+          <p:cNvSpPr txBox="1"/>
+          <p:nvPr/>
+        </p:nvSpPr>
+        <p:spPr>
+          <a:xfrm>
+            <a:off x="4956048" y="3227832"/>
+            <a:ext cx="6309360" cy="548640"/>
+          </a:xfrm>
+          <a:prstGeom prst="rect">
+            <a:avLst/>
+          </a:prstGeom>
+          <a:noFill/>
+        </p:spPr>
+        <p:txBody>
+          <a:bodyPr wrap="square" lIns="0" rIns="0" tIns="0" bIns="0" anchor="t">
+            <a:spAutoFit/>
+          </a:bodyPr>
+          <a:lstStyle/>
+          <a:p>
+            <a:pPr algn="l">
+              <a:lnSpc>
+                <a:spcPct val="125000"/>
+              </a:lnSpc>
+              <a:spcBef>
+                <a:spcPts val="0"/>
+              </a:spcBef>
+              <a:spcAft>
+                <a:spcPts val="0"/>
+              </a:spcAft>
+            </a:pPr>
+            <a:r>
+              <a:rPr sz="1200" b="0" i="0">
+                <a:solidFill>
+                  <a:srgbClr val="C8D3E3"/>
+                </a:solidFill>
+                <a:latin typeface="맑은 고딕"/>
+                <a:ea typeface="맑은 고딕"/>
+                <a:cs typeface="맑은 고딕"/>
+              </a:rPr>
+              <a:t>pip uninstall db_utils 로 제거하고, ROOT_PATH 가 올바른지 확인합니다.</a:t>
+            </a:r>
+          </a:p>
+        </p:txBody>
+      </p:sp>
+      <p:sp>
+        <p:nvSpPr>
+          <p:cNvPr id="14" name="Rounded Rectangle 13"/>
+          <p:cNvSpPr/>
+          <p:nvPr/>
+        </p:nvSpPr>
+        <p:spPr>
+          <a:xfrm>
+            <a:off x="658368" y="4087368"/>
+            <a:ext cx="10874959" cy="1042415"/>
+          </a:xfrm>
+          <a:prstGeom prst="roundRect">
+            <a:avLst>
+              <a:gd name="adj" fmla="val 6000"/>
+            </a:avLst>
+          </a:prstGeom>
+          <a:solidFill>
+            <a:srgbClr val="1C2B45"/>
+          </a:solidFill>
+          <a:ln>
+            <a:noFill/>
+          </a:ln>
+          <a:effectLst/>
+        </p:spPr>
+        <p:style>
+          <a:lnRef idx="1">
+            <a:schemeClr val="accent1"/>
+          </a:lnRef>
+          <a:fillRef idx="3">
+            <a:schemeClr val="accent1"/>
+          </a:fillRef>
+          <a:effectRef idx="2">
+            <a:schemeClr val="accent1"/>
+          </a:effectRef>
+          <a:fontRef idx="minor">
+            <a:schemeClr val="lt1"/>
+          </a:fontRef>
+        </p:style>
+        <p:txBody>
+          <a:bodyPr rtlCol="0" anchor="ctr"/>
+          <a:lstStyle/>
+          <a:p/>
+        </p:txBody>
+      </p:sp>
+      <p:sp>
+        <p:nvSpPr>
+          <p:cNvPr id="15" name="Oval 14"/>
+          <p:cNvSpPr/>
+          <p:nvPr/>
+        </p:nvSpPr>
+        <p:spPr>
+          <a:xfrm>
+            <a:off x="932688" y="4398264"/>
+            <a:ext cx="402336" cy="402336"/>
+          </a:xfrm>
+          <a:prstGeom prst="ellipse">
+            <a:avLst/>
+          </a:prstGeom>
+          <a:solidFill>
+            <a:srgbClr val="E4572E"/>
+          </a:solidFill>
+          <a:ln>
+            <a:noFill/>
+          </a:ln>
+          <a:effectLst/>
+        </p:spPr>
+        <p:style>
+          <a:lnRef idx="1">
+            <a:schemeClr val="accent1"/>
+          </a:lnRef>
+          <a:fillRef idx="3">
+            <a:schemeClr val="accent1"/>
+          </a:fillRef>
+          <a:effectRef idx="2">
+            <a:schemeClr val="accent1"/>
+          </a:effectRef>
+          <a:fontRef idx="minor">
+            <a:schemeClr val="lt1"/>
+          </a:fontRef>
+        </p:style>
+        <p:txBody>
+          <a:bodyPr rtlCol="0" anchor="ctr" lIns="0" rIns="0" tIns="0" bIns="0"/>
+          <a:lstStyle/>
+          <a:p>
+            <a:pPr algn="ctr"/>
+            <a:r>
+              <a:rPr sz="1400" b="1" i="0">
+                <a:solidFill>
+                  <a:srgbClr val="FFFFFF"/>
+                </a:solidFill>
+                <a:latin typeface="맑은 고딕"/>
+                <a:ea typeface="맑은 고딕"/>
+                <a:cs typeface="맑은 고딕"/>
+              </a:rPr>
+              <a:t>3</a:t>
+            </a:r>
+          </a:p>
+        </p:txBody>
+      </p:sp>
+      <p:sp>
+        <p:nvSpPr>
+          <p:cNvPr id="16" name="TextBox 15"/>
+          <p:cNvSpPr txBox="1"/>
+          <p:nvPr/>
+        </p:nvSpPr>
+        <p:spPr>
+          <a:xfrm>
+            <a:off x="1517904" y="4270248"/>
+            <a:ext cx="3200400" cy="274320"/>
+          </a:xfrm>
+          <a:prstGeom prst="rect">
+            <a:avLst/>
+          </a:prstGeom>
+          <a:noFill/>
+        </p:spPr>
+        <p:txBody>
+          <a:bodyPr wrap="square" lIns="0" rIns="0" tIns="0" bIns="0" anchor="t">
+            <a:spAutoFit/>
+          </a:bodyPr>
+          <a:lstStyle/>
+          <a:p>
+            <a:pPr algn="l">
+              <a:spcBef>
+                <a:spcPts val="0"/>
+              </a:spcBef>
+              <a:spcAft>
+                <a:spcPts val="0"/>
+              </a:spcAft>
+            </a:pPr>
+            <a:r>
+              <a:rPr sz="1400" b="1" i="0">
+                <a:solidFill>
+                  <a:srgbClr val="FFFFFF"/>
+                </a:solidFill>
+                <a:latin typeface="맑은 고딕"/>
+                <a:ea typeface="맑은 고딕"/>
+                <a:cs typeface="맑은 고딕"/>
+              </a:rPr>
+              <a:t>env.ini 를 찾을 수 없음</a:t>
+            </a:r>
+          </a:p>
+        </p:txBody>
+      </p:sp>
+      <p:sp>
+        <p:nvSpPr>
+          <p:cNvPr id="17" name="TextBox 16"/>
+          <p:cNvSpPr txBox="1"/>
+          <p:nvPr/>
+        </p:nvSpPr>
+        <p:spPr>
+          <a:xfrm>
+            <a:off x="1517904" y="4617720"/>
+            <a:ext cx="3200400" cy="365760"/>
+          </a:xfrm>
+          <a:prstGeom prst="rect">
+            <a:avLst/>
+          </a:prstGeom>
+          <a:noFill/>
+        </p:spPr>
+        <p:txBody>
+          <a:bodyPr wrap="square" lIns="0" rIns="0" tIns="0" bIns="0" anchor="t">
+            <a:spAutoFit/>
+          </a:bodyPr>
+          <a:lstStyle/>
+          <a:p>
+            <a:pPr algn="l">
+              <a:lnSpc>
+                <a:spcPct val="115000"/>
+              </a:lnSpc>
+              <a:spcBef>
+                <a:spcPts val="0"/>
+              </a:spcBef>
+              <a:spcAft>
+                <a:spcPts val="0"/>
+              </a:spcAft>
+            </a:pPr>
+            <a:r>
+              <a:rPr sz="1050" b="0" i="0">
+                <a:solidFill>
+                  <a:srgbClr val="F4A261"/>
+                </a:solidFill>
+                <a:latin typeface="맑은 고딕"/>
+                <a:ea typeface="맑은 고딕"/>
+                <a:cs typeface="맑은 고딕"/>
+              </a:rPr>
+              <a:t>otg_monitoring.ini 의 ROOT_PATH 가 잘못된 경우입니다.</a:t>
+            </a:r>
+          </a:p>
+        </p:txBody>
+      </p:sp>
+      <p:sp>
+        <p:nvSpPr>
+          <p:cNvPr id="18" name="TextBox 17"/>
+          <p:cNvSpPr txBox="1"/>
+          <p:nvPr/>
+        </p:nvSpPr>
+        <p:spPr>
+          <a:xfrm>
+            <a:off x="4956048" y="4379976"/>
+            <a:ext cx="6309360" cy="548640"/>
+          </a:xfrm>
+          <a:prstGeom prst="rect">
+            <a:avLst/>
+          </a:prstGeom>
+          <a:noFill/>
+        </p:spPr>
+        <p:txBody>
+          <a:bodyPr wrap="square" lIns="0" rIns="0" tIns="0" bIns="0" anchor="t">
+            <a:spAutoFit/>
+          </a:bodyPr>
+          <a:lstStyle/>
+          <a:p>
+            <a:pPr algn="l">
+              <a:lnSpc>
+                <a:spcPct val="125000"/>
+              </a:lnSpc>
+              <a:spcBef>
+                <a:spcPts val="0"/>
+              </a:spcBef>
+              <a:spcAft>
+                <a:spcPts val="0"/>
+              </a:spcAft>
+            </a:pPr>
+            <a:r>
+              <a:rPr sz="1200" b="0" i="0">
+                <a:solidFill>
+                  <a:srgbClr val="C8D3E3"/>
+                </a:solidFill>
+                <a:latin typeface="맑은 고딕"/>
+                <a:ea typeface="맑은 고딕"/>
+                <a:cs typeface="맑은 고딕"/>
+              </a:rPr>
+              <a:t>메시지에 표시된 경로와 실제 폴더를 대조합니다.</a:t>
+            </a:r>
+          </a:p>
+        </p:txBody>
+      </p:sp>
+      <p:sp>
+        <p:nvSpPr>
+          <p:cNvPr id="19" name="Rounded Rectangle 18"/>
+          <p:cNvSpPr/>
+          <p:nvPr/>
+        </p:nvSpPr>
+        <p:spPr>
+          <a:xfrm>
+            <a:off x="658368" y="5239512"/>
+            <a:ext cx="10874959" cy="1042415"/>
+          </a:xfrm>
+          <a:prstGeom prst="roundRect">
+            <a:avLst>
+              <a:gd name="adj" fmla="val 6000"/>
+            </a:avLst>
+          </a:prstGeom>
+          <a:solidFill>
+            <a:srgbClr val="1C2B45"/>
+          </a:solidFill>
+          <a:ln>
+            <a:noFill/>
+          </a:ln>
+          <a:effectLst/>
+        </p:spPr>
+        <p:style>
+          <a:lnRef idx="1">
+            <a:schemeClr val="accent1"/>
+          </a:lnRef>
+          <a:fillRef idx="3">
+            <a:schemeClr val="accent1"/>
+          </a:fillRef>
+          <a:effectRef idx="2">
+            <a:schemeClr val="accent1"/>
+          </a:effectRef>
+          <a:fontRef idx="minor">
+            <a:schemeClr val="lt1"/>
+          </a:fontRef>
+        </p:style>
+        <p:txBody>
+          <a:bodyPr rtlCol="0" anchor="ctr"/>
+          <a:lstStyle/>
+          <a:p/>
+        </p:txBody>
+      </p:sp>
+      <p:sp>
+        <p:nvSpPr>
+          <p:cNvPr id="20" name="Oval 19"/>
+          <p:cNvSpPr/>
+          <p:nvPr/>
+        </p:nvSpPr>
+        <p:spPr>
+          <a:xfrm>
+            <a:off x="932688" y="5550407"/>
+            <a:ext cx="402336" cy="402336"/>
+          </a:xfrm>
+          <a:prstGeom prst="ellipse">
+            <a:avLst/>
+          </a:prstGeom>
+          <a:solidFill>
+            <a:srgbClr val="E4572E"/>
+          </a:solidFill>
+          <a:ln>
+            <a:noFill/>
+          </a:ln>
+          <a:effectLst/>
+        </p:spPr>
+        <p:style>
+          <a:lnRef idx="1">
+            <a:schemeClr val="accent1"/>
+          </a:lnRef>
+          <a:fillRef idx="3">
+            <a:schemeClr val="accent1"/>
+          </a:fillRef>
+          <a:effectRef idx="2">
+            <a:schemeClr val="accent1"/>
+          </a:effectRef>
+          <a:fontRef idx="minor">
+            <a:schemeClr val="lt1"/>
+          </a:fontRef>
+        </p:style>
+        <p:txBody>
+          <a:bodyPr rtlCol="0" anchor="ctr" lIns="0" rIns="0" tIns="0" bIns="0"/>
+          <a:lstStyle/>
+          <a:p>
+            <a:pPr algn="ctr"/>
+            <a:r>
+              <a:rPr sz="1400" b="1" i="0">
+                <a:solidFill>
+                  <a:srgbClr val="FFFFFF"/>
+                </a:solidFill>
+                <a:latin typeface="맑은 고딕"/>
+                <a:ea typeface="맑은 고딕"/>
+                <a:cs typeface="맑은 고딕"/>
+              </a:rPr>
+              <a:t>4</a:t>
+            </a:r>
+          </a:p>
+        </p:txBody>
+      </p:sp>
+      <p:sp>
+        <p:nvSpPr>
+          <p:cNvPr id="21" name="TextBox 20"/>
+          <p:cNvSpPr txBox="1"/>
+          <p:nvPr/>
+        </p:nvSpPr>
+        <p:spPr>
+          <a:xfrm>
+            <a:off x="1517904" y="5422392"/>
+            <a:ext cx="3200400" cy="274320"/>
+          </a:xfrm>
+          <a:prstGeom prst="rect">
+            <a:avLst/>
+          </a:prstGeom>
+          <a:noFill/>
+        </p:spPr>
+        <p:txBody>
+          <a:bodyPr wrap="square" lIns="0" rIns="0" tIns="0" bIns="0" anchor="t">
+            <a:spAutoFit/>
+          </a:bodyPr>
+          <a:lstStyle/>
+          <a:p>
+            <a:pPr algn="l">
+              <a:spcBef>
+                <a:spcPts val="0"/>
+              </a:spcBef>
+              <a:spcAft>
+                <a:spcPts val="0"/>
+              </a:spcAft>
+            </a:pPr>
+            <a:r>
+              <a:rPr sz="1400" b="1" i="0">
+                <a:solidFill>
+                  <a:srgbClr val="FFFFFF"/>
+                </a:solidFill>
+                <a:latin typeface="맑은 고딕"/>
+                <a:ea typeface="맑은 고딕"/>
+                <a:cs typeface="맑은 고딕"/>
+              </a:rPr>
+              <a:t>프로세스가 6개보다 적음</a:t>
+            </a:r>
+          </a:p>
+        </p:txBody>
+      </p:sp>
+      <p:sp>
+        <p:nvSpPr>
+          <p:cNvPr id="22" name="TextBox 21"/>
+          <p:cNvSpPr txBox="1"/>
+          <p:nvPr/>
+        </p:nvSpPr>
+        <p:spPr>
+          <a:xfrm>
+            <a:off x="1517904" y="5769864"/>
+            <a:ext cx="3200400" cy="365760"/>
+          </a:xfrm>
+          <a:prstGeom prst="rect">
+            <a:avLst/>
+          </a:prstGeom>
+          <a:noFill/>
+        </p:spPr>
+        <p:txBody>
+          <a:bodyPr wrap="square" lIns="0" rIns="0" tIns="0" bIns="0" anchor="t">
+            <a:spAutoFit/>
+          </a:bodyPr>
+          <a:lstStyle/>
+          <a:p>
+            <a:pPr algn="l">
+              <a:lnSpc>
+                <a:spcPct val="115000"/>
+              </a:lnSpc>
+              <a:spcBef>
+                <a:spcPts val="0"/>
+              </a:spcBef>
+              <a:spcAft>
+                <a:spcPts val="0"/>
+              </a:spcAft>
+            </a:pPr>
+            <a:r>
+              <a:rPr sz="1050" b="0" i="0">
+                <a:solidFill>
+                  <a:srgbClr val="F4A261"/>
+                </a:solidFill>
+                <a:latin typeface="맑은 고딕"/>
+                <a:ea typeface="맑은 고딕"/>
+                <a:cs typeface="맑은 고딕"/>
+              </a:rPr>
+              <a:t>특정 스크립트만 기동 직후 종료된 경우입니다.</a:t>
+            </a:r>
+          </a:p>
+        </p:txBody>
+      </p:sp>
+      <p:sp>
+        <p:nvSpPr>
+          <p:cNvPr id="23" name="TextBox 22"/>
+          <p:cNvSpPr txBox="1"/>
+          <p:nvPr/>
+        </p:nvSpPr>
+        <p:spPr>
+          <a:xfrm>
+            <a:off x="4956048" y="5532120"/>
+            <a:ext cx="6309360" cy="548640"/>
+          </a:xfrm>
+          <a:prstGeom prst="rect">
+            <a:avLst/>
+          </a:prstGeom>
+          <a:noFill/>
+        </p:spPr>
+        <p:txBody>
+          <a:bodyPr wrap="square" lIns="0" rIns="0" tIns="0" bIns="0" anchor="t">
+            <a:spAutoFit/>
+          </a:bodyPr>
+          <a:lstStyle/>
+          <a:p>
+            <a:pPr algn="l">
+              <a:lnSpc>
+                <a:spcPct val="125000"/>
+              </a:lnSpc>
+              <a:spcBef>
+                <a:spcPts val="0"/>
+              </a:spcBef>
+              <a:spcAft>
+                <a:spcPts val="0"/>
+              </a:spcAft>
+            </a:pPr>
+            <a:r>
+              <a:rPr sz="1200" b="0" i="0">
+                <a:solidFill>
+                  <a:srgbClr val="C8D3E3"/>
+                </a:solidFill>
+                <a:latin typeface="맑은 고딕"/>
+                <a:ea typeface="맑은 고딕"/>
+                <a:cs typeface="맑은 고딕"/>
+              </a:rPr>
+              <a:t>debug_logs 에서 해당 프로세스 로그의 마지막 줄을 확인합니다.</a:t>
+            </a:r>
+          </a:p>
+        </p:txBody>
+      </p:sp>
+      <p:sp>
+        <p:nvSpPr>
+          <p:cNvPr id="24" name="TextBox 23"/>
+          <p:cNvSpPr txBox="1"/>
+          <p:nvPr/>
+        </p:nvSpPr>
+        <p:spPr>
+          <a:xfrm>
+            <a:off x="10618927" y="6291072"/>
+            <a:ext cx="914400" cy="274320"/>
+          </a:xfrm>
+          <a:prstGeom prst="rect">
+            <a:avLst/>
+          </a:prstGeom>
+          <a:noFill/>
+        </p:spPr>
+        <p:txBody>
+          <a:bodyPr wrap="square" lIns="0" rIns="0" tIns="0" bIns="0" anchor="t">
+            <a:spAutoFit/>
+          </a:bodyPr>
+          <a:lstStyle/>
+          <a:p>
+            <a:pPr algn="r">
+              <a:spcBef>
+                <a:spcPts val="0"/>
+              </a:spcBef>
+              <a:spcAft>
+                <a:spcPts val="0"/>
+              </a:spcAft>
+            </a:pPr>
+            <a:r>
+              <a:rPr sz="1050" b="0" i="0">
+                <a:solidFill>
+                  <a:srgbClr val="667085"/>
+                </a:solidFill>
+                <a:latin typeface="맑은 고딕"/>
+                <a:ea typeface="맑은 고딕"/>
+                <a:cs typeface="맑은 고딕"/>
+              </a:rPr>
+              <a:t>15</a:t>
+            </a:r>
+          </a:p>
+        </p:txBody>
+      </p:sp>
+    </p:spTree>
+  </p:cSld>
+  <p:clrMapOvr>
+    <a:masterClrMapping/>
+  </p:clrMapOvr>
+</p:sld>
+</file>
+
+<file path=ppt/slides/slide16.xml><?xml version="1.0" encoding="utf-8"?>
+<p:sld xmlns:a="http://schemas.openxmlformats.org/drawingml/2006/main" xmlns:p="http://schemas.openxmlformats.org/presentationml/2006/main" xmlns:r="http://schemas.openxmlformats.org/officeDocument/2006/relationships">
+  <p:cSld>
+    <p:bg>
+      <p:bgPr>
+        <a:solidFill>
+          <a:srgbClr val="FFFFFF"/>
+        </a:solidFill>
+        <a:effectLst/>
+      </p:bgPr>
+    </p:bg>
+    <p:spTree>
+      <p:nvGrpSpPr>
+        <p:cNvPr id="1" name=""/>
+        <p:cNvGrpSpPr/>
+        <p:nvPr/>
+      </p:nvGrpSpPr>
+      <p:grpSpPr/>
+      <p:sp>
+        <p:nvSpPr>
+          <p:cNvPr id="2" name="TextBox 1"/>
+          <p:cNvSpPr txBox="1"/>
+          <p:nvPr/>
+        </p:nvSpPr>
+        <p:spPr>
+          <a:xfrm>
+            <a:off x="658368" y="475488"/>
+            <a:ext cx="10874959" cy="310896"/>
+          </a:xfrm>
+          <a:prstGeom prst="rect">
+            <a:avLst/>
+          </a:prstGeom>
+          <a:noFill/>
+        </p:spPr>
+        <p:txBody>
+          <a:bodyPr wrap="square" lIns="0" rIns="0" tIns="0" bIns="0" anchor="t">
+            <a:spAutoFit/>
+          </a:bodyPr>
+          <a:lstStyle/>
+          <a:p>
+            <a:pPr algn="l">
+              <a:spcBef>
+                <a:spcPts val="0"/>
+              </a:spcBef>
+              <a:spcAft>
+                <a:spcPts val="0"/>
+              </a:spcAft>
+            </a:pPr>
+            <a:r>
+              <a:rPr sz="1250" b="1" i="0">
+                <a:solidFill>
+                  <a:srgbClr val="E4572E"/>
+                </a:solidFill>
+                <a:latin typeface="맑은 고딕"/>
+                <a:ea typeface="맑은 고딕"/>
+                <a:cs typeface="맑은 고딕"/>
+              </a:rPr>
+              <a:t>15  CHECKLIST</a:t>
             </a:r>
           </a:p>
         </p:txBody>
@@ -9243,7 +12334,7 @@
                 <a:ea typeface="맑은 고딕"/>
                 <a:cs typeface="맑은 고딕"/>
               </a:rPr>
-              <a:t>scaler · autoencoder 모델 파일 확인</a:t>
+              <a:t>scaler · autoencoder 복사 (D:\autoencoder 에서)</a:t>
             </a:r>
           </a:p>
         </p:txBody>
@@ -9470,7 +12561,7 @@
                 <a:ea typeface="맑은 고딕"/>
                 <a:cs typeface="맑은 고딕"/>
               </a:rPr>
-              <a:t>14</a:t>
+              <a:t>16</a:t>
             </a:r>
           </a:p>
         </p:txBody>

--- a/멀티모달_화재감지_모니터링_설치매뉴얼.pptx
+++ b/멀티모달_화재감지_모니터링_설치매뉴얼.pptx
@@ -28064,8 +28064,8 @@
         </p:nvSpPr>
         <p:spPr>
           <a:xfrm>
-            <a:off x="658368" y="4828032"/>
-            <a:ext cx="10874959" cy="1051560"/>
+            <a:off x="658368" y="4773168"/>
+            <a:ext cx="5300319" cy="1371600"/>
           </a:xfrm>
           <a:prstGeom prst="roundRect">
             <a:avLst>
@@ -28108,8 +28108,8 @@
         </p:nvSpPr>
         <p:spPr>
           <a:xfrm>
-            <a:off x="969264" y="5047488"/>
-            <a:ext cx="10253167" cy="640080"/>
+            <a:off x="932688" y="4956048"/>
+            <a:ext cx="4751679" cy="1005840"/>
           </a:xfrm>
           <a:prstGeom prst="rect">
             <a:avLst/>
@@ -28130,11 +28130,11 @@
                 <a:spcPts val="0"/>
               </a:spcBef>
               <a:spcAft>
-                <a:spcPts val="400"/>
-              </a:spcAft>
-            </a:pPr>
-            <a:r>
-              <a:rPr sz="1300" b="1" i="0">
+                <a:spcPts val="500"/>
+              </a:spcAft>
+            </a:pPr>
+            <a:r>
+              <a:rPr sz="1250" b="1" i="0">
                 <a:solidFill>
                   <a:srgbClr val="E4572E"/>
                 </a:solidFill>
@@ -28142,7 +28142,7 @@
                 <a:ea typeface="맑은 고딕"/>
                 <a:cs typeface="맑은 고딕"/>
               </a:rPr>
-              <a:t>수집 주기는 현장마다 다릅니다. </a:t>
+              <a:t>수집 주기는 현장마다 다릅니다</a:t>
             </a:r>
           </a:p>
           <a:p>
@@ -28158,7 +28158,7 @@
               </a:spcAft>
             </a:pPr>
             <a:r>
-              <a:rPr sz="1250" b="0" i="0">
+              <a:rPr sz="1100" b="0" i="0">
                 <a:solidFill>
                   <a:srgbClr val="1A2435"/>
                 </a:solidFill>
@@ -28173,7 +28173,122 @@
       </p:sp>
       <p:sp>
         <p:nvSpPr>
-          <p:cNvPr id="35" name="TextBox 34"/>
+          <p:cNvPr id="35" name="Rounded Rectangle 34"/>
+          <p:cNvSpPr/>
+          <p:nvPr/>
+        </p:nvSpPr>
+        <p:spPr>
+          <a:xfrm>
+            <a:off x="6233007" y="4773168"/>
+            <a:ext cx="5300319" cy="1371600"/>
+          </a:xfrm>
+          <a:prstGeom prst="roundRect">
+            <a:avLst>
+              <a:gd name="adj" fmla="val 6000"/>
+            </a:avLst>
+          </a:prstGeom>
+          <a:solidFill>
+            <a:srgbClr val="ECF6F4"/>
+          </a:solidFill>
+          <a:ln>
+            <a:noFill/>
+          </a:ln>
+          <a:effectLst/>
+        </p:spPr>
+        <p:style>
+          <a:lnRef idx="1">
+            <a:schemeClr val="accent1"/>
+          </a:lnRef>
+          <a:fillRef idx="3">
+            <a:schemeClr val="accent1"/>
+          </a:fillRef>
+          <a:effectRef idx="2">
+            <a:schemeClr val="accent1"/>
+          </a:effectRef>
+          <a:fontRef idx="minor">
+            <a:schemeClr val="lt1"/>
+          </a:fontRef>
+        </p:style>
+        <p:txBody>
+          <a:bodyPr rtlCol="0" anchor="ctr"/>
+          <a:lstStyle/>
+          <a:p/>
+        </p:txBody>
+      </p:sp>
+      <p:sp>
+        <p:nvSpPr>
+          <p:cNvPr id="36" name="TextBox 35"/>
+          <p:cNvSpPr txBox="1"/>
+          <p:nvPr/>
+        </p:nvSpPr>
+        <p:spPr>
+          <a:xfrm>
+            <a:off x="6507327" y="4956048"/>
+            <a:ext cx="4751679" cy="1005840"/>
+          </a:xfrm>
+          <a:prstGeom prst="rect">
+            <a:avLst/>
+          </a:prstGeom>
+          <a:noFill/>
+        </p:spPr>
+        <p:txBody>
+          <a:bodyPr wrap="square" lIns="0" rIns="0" tIns="0" bIns="0" anchor="t">
+            <a:spAutoFit/>
+          </a:bodyPr>
+          <a:lstStyle/>
+          <a:p>
+            <a:pPr algn="l"/>
+          </a:p>
+          <a:p>
+            <a:pPr algn="l">
+              <a:spcBef>
+                <a:spcPts val="0"/>
+              </a:spcBef>
+              <a:spcAft>
+                <a:spcPts val="500"/>
+              </a:spcAft>
+            </a:pPr>
+            <a:r>
+              <a:rPr sz="1250" b="1" i="0">
+                <a:solidFill>
+                  <a:srgbClr val="2A9D8F"/>
+                </a:solidFill>
+                <a:latin typeface="맑은 고딕"/>
+                <a:ea typeface="맑은 고딕"/>
+                <a:cs typeface="맑은 고딕"/>
+              </a:rPr>
+              <a:t>분석 결과는 서버로 올라가지 않습니다</a:t>
+            </a:r>
+          </a:p>
+          <a:p>
+            <a:pPr algn="l">
+              <a:lnSpc>
+                <a:spcPct val="125000"/>
+              </a:lnSpc>
+              <a:spcBef>
+                <a:spcPts val="0"/>
+              </a:spcBef>
+              <a:spcAft>
+                <a:spcPts val="0"/>
+              </a:spcAft>
+            </a:pPr>
+            <a:r>
+              <a:rPr sz="1100" b="0" i="0">
+                <a:solidFill>
+                  <a:srgbClr val="1A2435"/>
+                </a:solidFill>
+                <a:latin typeface="맑은 고딕"/>
+                <a:ea typeface="맑은 고딕"/>
+                <a:cs typeface="맑은 고딕"/>
+              </a:rPr>
+              <a:t>점수와 판정 이력은 이 PC 의 MySQL 에만 쌓입니다. 밖으로 나가는 것은 화재 감지 시의 SMS 발송뿐입니다. 서버에는 raw 원본이 남으므로 PC 이력이 사라져도 재분석은 가능합니다.</a:t>
+            </a:r>
+          </a:p>
+        </p:txBody>
+      </p:sp>
+      <p:sp>
+        <p:nvSpPr>
+          <p:cNvPr id="37" name="TextBox 36"/>
           <p:cNvSpPr txBox="1"/>
           <p:nvPr/>
         </p:nvSpPr>

--- a/멀티모달_화재감지_모니터링_설치매뉴얼.pptx
+++ b/멀티모달_화재감지_모니터링_설치매뉴얼.pptx
@@ -29,6 +29,7 @@
     <p:sldId id="277" r:id="rId28"/>
     <p:sldId id="278" r:id="rId29"/>
     <p:sldId id="279" r:id="rId30"/>
+    <p:sldId id="280" r:id="rId31"/>
   </p:sldIdLst>
   <p:sldSz cx="12191695" cy="6858000" type="screen4x3"/>
   <p:notesSz cx="6858000" cy="9144000"/>
@@ -6409,7 +6410,7 @@
                 <a:ea typeface="맑은 고딕"/>
                 <a:cs typeface="맑은 고딕"/>
               </a:rPr>
-              <a:t>격자 마스크 등 현장 설정 창을 엽니다.</a:t>
+              <a:t>격자 마스크와 연속 학습 단계 전환 조건을 바꿉니다.</a:t>
             </a:r>
           </a:p>
         </p:txBody>
@@ -20035,6 +20036,1297 @@
     <p:bg>
       <p:bgPr>
         <a:solidFill>
+          <a:srgbClr val="FFFFFF"/>
+        </a:solidFill>
+        <a:effectLst/>
+      </p:bgPr>
+    </p:bg>
+    <p:spTree>
+      <p:nvGrpSpPr>
+        <p:cNvPr id="1" name=""/>
+        <p:cNvGrpSpPr/>
+        <p:nvPr/>
+      </p:nvGrpSpPr>
+      <p:grpSpPr/>
+      <p:sp>
+        <p:nvSpPr>
+          <p:cNvPr id="2" name="TextBox 1"/>
+          <p:cNvSpPr txBox="1"/>
+          <p:nvPr/>
+        </p:nvSpPr>
+        <p:spPr>
+          <a:xfrm>
+            <a:off x="658368" y="475488"/>
+            <a:ext cx="10874959" cy="310896"/>
+          </a:xfrm>
+          <a:prstGeom prst="rect">
+            <a:avLst/>
+          </a:prstGeom>
+          <a:noFill/>
+        </p:spPr>
+        <p:txBody>
+          <a:bodyPr wrap="square" lIns="0" rIns="0" tIns="0" bIns="0" anchor="t">
+            <a:spAutoFit/>
+          </a:bodyPr>
+          <a:lstStyle/>
+          <a:p>
+            <a:pPr algn="l">
+              <a:spcBef>
+                <a:spcPts val="0"/>
+              </a:spcBef>
+              <a:spcAft>
+                <a:spcPts val="0"/>
+              </a:spcAft>
+            </a:pPr>
+            <a:r>
+              <a:rPr sz="1250" b="1" i="0">
+                <a:solidFill>
+                  <a:srgbClr val="E4572E"/>
+                </a:solidFill>
+                <a:latin typeface="맑은 고딕"/>
+                <a:ea typeface="맑은 고딕"/>
+                <a:cs typeface="맑은 고딕"/>
+              </a:rPr>
+              <a:t>20  STAGE SETTINGS</a:t>
+            </a:r>
+          </a:p>
+        </p:txBody>
+      </p:sp>
+      <p:sp>
+        <p:nvSpPr>
+          <p:cNvPr id="3" name="TextBox 2"/>
+          <p:cNvSpPr txBox="1"/>
+          <p:nvPr/>
+        </p:nvSpPr>
+        <p:spPr>
+          <a:xfrm>
+            <a:off x="658368" y="804672"/>
+            <a:ext cx="10874959" cy="621792"/>
+          </a:xfrm>
+          <a:prstGeom prst="rect">
+            <a:avLst/>
+          </a:prstGeom>
+          <a:noFill/>
+        </p:spPr>
+        <p:txBody>
+          <a:bodyPr wrap="square" lIns="0" rIns="0" tIns="0" bIns="0" anchor="t">
+            <a:spAutoFit/>
+          </a:bodyPr>
+          <a:lstStyle/>
+          <a:p>
+            <a:pPr algn="l">
+              <a:spcBef>
+                <a:spcPts val="0"/>
+              </a:spcBef>
+              <a:spcAft>
+                <a:spcPts val="0"/>
+              </a:spcAft>
+            </a:pPr>
+            <a:r>
+              <a:rPr sz="3000" b="1" i="0">
+                <a:solidFill>
+                  <a:srgbClr val="1A2435"/>
+                </a:solidFill>
+                <a:latin typeface="맑은 고딕"/>
+                <a:ea typeface="맑은 고딕"/>
+                <a:cs typeface="맑은 고딕"/>
+              </a:rPr>
+              <a:t>단계 전환 조건 바꾸기</a:t>
+            </a:r>
+          </a:p>
+        </p:txBody>
+      </p:sp>
+      <p:sp>
+        <p:nvSpPr>
+          <p:cNvPr id="4" name="TextBox 3"/>
+          <p:cNvSpPr txBox="1"/>
+          <p:nvPr/>
+        </p:nvSpPr>
+        <p:spPr>
+          <a:xfrm>
+            <a:off x="658368" y="1572768"/>
+            <a:ext cx="10515600" cy="320040"/>
+          </a:xfrm>
+          <a:prstGeom prst="rect">
+            <a:avLst/>
+          </a:prstGeom>
+          <a:noFill/>
+        </p:spPr>
+        <p:txBody>
+          <a:bodyPr wrap="square" lIns="0" rIns="0" tIns="0" bIns="0" anchor="t">
+            <a:spAutoFit/>
+          </a:bodyPr>
+          <a:lstStyle/>
+          <a:p>
+            <a:pPr algn="l">
+              <a:spcBef>
+                <a:spcPts val="0"/>
+              </a:spcBef>
+              <a:spcAft>
+                <a:spcPts val="0"/>
+              </a:spcAft>
+            </a:pPr>
+            <a:r>
+              <a:rPr sz="1350" b="0" i="0">
+                <a:solidFill>
+                  <a:srgbClr val="667085"/>
+                </a:solidFill>
+                <a:latin typeface="맑은 고딕"/>
+                <a:ea typeface="맑은 고딕"/>
+                <a:cs typeface="맑은 고딕"/>
+              </a:rPr>
+              <a:t>현장마다 수집 주기도 설비 가동 주기도 다릅니다. [설정] 버튼에서 조정하며, 값은 users\&lt;현장&gt;\env.ini 에 저장됩니다.</a:t>
+            </a:r>
+          </a:p>
+        </p:txBody>
+      </p:sp>
+      <p:sp>
+        <p:nvSpPr>
+          <p:cNvPr id="5" name="TextBox 4"/>
+          <p:cNvSpPr txBox="1"/>
+          <p:nvPr/>
+        </p:nvSpPr>
+        <p:spPr>
+          <a:xfrm>
+            <a:off x="658368" y="2029968"/>
+            <a:ext cx="5029200" cy="274320"/>
+          </a:xfrm>
+          <a:prstGeom prst="rect">
+            <a:avLst/>
+          </a:prstGeom>
+          <a:noFill/>
+        </p:spPr>
+        <p:txBody>
+          <a:bodyPr wrap="square" lIns="0" rIns="0" tIns="0" bIns="0" anchor="t">
+            <a:spAutoFit/>
+          </a:bodyPr>
+          <a:lstStyle/>
+          <a:p>
+            <a:pPr algn="l">
+              <a:spcBef>
+                <a:spcPts val="0"/>
+              </a:spcBef>
+              <a:spcAft>
+                <a:spcPts val="0"/>
+              </a:spcAft>
+            </a:pPr>
+            <a:r>
+              <a:rPr sz="1300" b="1" i="0">
+                <a:solidFill>
+                  <a:srgbClr val="1A2435"/>
+                </a:solidFill>
+                <a:latin typeface="맑은 고딕"/>
+                <a:ea typeface="맑은 고딕"/>
+                <a:cs typeface="맑은 고딕"/>
+              </a:rPr>
+              <a:t>설정 창</a:t>
+            </a:r>
+          </a:p>
+        </p:txBody>
+      </p:sp>
+      <p:sp>
+        <p:nvSpPr>
+          <p:cNvPr id="6" name="Rounded Rectangle 5"/>
+          <p:cNvSpPr/>
+          <p:nvPr/>
+        </p:nvSpPr>
+        <p:spPr>
+          <a:xfrm>
+            <a:off x="658368" y="2359152"/>
+            <a:ext cx="5029200" cy="2055876"/>
+          </a:xfrm>
+          <a:prstGeom prst="roundRect">
+            <a:avLst>
+              <a:gd name="adj" fmla="val 5000"/>
+            </a:avLst>
+          </a:prstGeom>
+          <a:solidFill>
+            <a:srgbClr val="142033"/>
+          </a:solidFill>
+          <a:ln>
+            <a:noFill/>
+          </a:ln>
+          <a:effectLst/>
+        </p:spPr>
+        <p:style>
+          <a:lnRef idx="1">
+            <a:schemeClr val="accent1"/>
+          </a:lnRef>
+          <a:fillRef idx="3">
+            <a:schemeClr val="accent1"/>
+          </a:fillRef>
+          <a:effectRef idx="2">
+            <a:schemeClr val="accent1"/>
+          </a:effectRef>
+          <a:fontRef idx="minor">
+            <a:schemeClr val="lt1"/>
+          </a:fontRef>
+        </p:style>
+        <p:txBody>
+          <a:bodyPr rtlCol="0" anchor="ctr"/>
+          <a:lstStyle/>
+          <a:p/>
+        </p:txBody>
+      </p:sp>
+      <p:sp>
+        <p:nvSpPr>
+          <p:cNvPr id="7" name="TextBox 6"/>
+          <p:cNvSpPr txBox="1"/>
+          <p:nvPr/>
+        </p:nvSpPr>
+        <p:spPr>
+          <a:xfrm>
+            <a:off x="859536" y="2560320"/>
+            <a:ext cx="4626864" cy="1653540"/>
+          </a:xfrm>
+          <a:prstGeom prst="rect">
+            <a:avLst/>
+          </a:prstGeom>
+          <a:noFill/>
+        </p:spPr>
+        <p:txBody>
+          <a:bodyPr wrap="square" lIns="0" rIns="0" tIns="0" bIns="0" anchor="t">
+            <a:spAutoFit/>
+          </a:bodyPr>
+          <a:lstStyle/>
+          <a:p>
+            <a:pPr algn="l">
+              <a:lnSpc>
+                <a:spcPct val="100000"/>
+              </a:lnSpc>
+              <a:spcBef>
+                <a:spcPts val="0"/>
+              </a:spcBef>
+              <a:spcAft>
+                <a:spcPts val="150"/>
+              </a:spcAft>
+            </a:pPr>
+            <a:r>
+              <a:rPr sz="1050" b="0" i="0">
+                <a:solidFill>
+                  <a:srgbClr val="D6DFEA"/>
+                </a:solidFill>
+                <a:latin typeface="Consolas"/>
+                <a:ea typeface="Consolas"/>
+                <a:cs typeface="Consolas"/>
+              </a:rPr>
+              <a:t>[ 연속 학습 단계 전환 조건 ]</a:t>
+            </a:r>
+          </a:p>
+          <a:p>
+            <a:pPr algn="l">
+              <a:lnSpc>
+                <a:spcPct val="100000"/>
+              </a:lnSpc>
+              <a:spcBef>
+                <a:spcPts val="0"/>
+              </a:spcBef>
+              <a:spcAft>
+                <a:spcPts val="150"/>
+              </a:spcAft>
+            </a:pPr>
+            <a:r>
+              <a:rPr sz="1050" b="0" i="0">
+                <a:solidFill>
+                  <a:srgbClr val="D6DFEA"/>
+                </a:solidFill>
+                <a:latin typeface="Consolas"/>
+                <a:ea typeface="Consolas"/>
+                <a:cs typeface="Consolas"/>
+              </a:rPr>
+              <a:t> </a:t>
+            </a:r>
+          </a:p>
+          <a:p>
+            <a:pPr algn="l">
+              <a:lnSpc>
+                <a:spcPct val="100000"/>
+              </a:lnSpc>
+              <a:spcBef>
+                <a:spcPts val="0"/>
+              </a:spcBef>
+              <a:spcAft>
+                <a:spcPts val="150"/>
+              </a:spcAft>
+            </a:pPr>
+            <a:r>
+              <a:rPr sz="1050" b="0" i="0">
+                <a:solidFill>
+                  <a:srgbClr val="D6DFEA"/>
+                </a:solidFill>
+                <a:latin typeface="Consolas"/>
+                <a:ea typeface="Consolas"/>
+                <a:cs typeface="Consolas"/>
+              </a:rPr>
+              <a:t>1단계 기준선 최소 표본 (건)     [ 3000 ]</a:t>
+            </a:r>
+          </a:p>
+          <a:p>
+            <a:pPr algn="l">
+              <a:lnSpc>
+                <a:spcPct val="100000"/>
+              </a:lnSpc>
+              <a:spcBef>
+                <a:spcPts val="0"/>
+              </a:spcBef>
+              <a:spcAft>
+                <a:spcPts val="150"/>
+              </a:spcAft>
+            </a:pPr>
+            <a:r>
+              <a:rPr sz="1050" b="0" i="0">
+                <a:solidFill>
+                  <a:srgbClr val="D6DFEA"/>
+                </a:solidFill>
+                <a:latin typeface="Consolas"/>
+                <a:ea typeface="Consolas"/>
+                <a:cs typeface="Consolas"/>
+              </a:rPr>
+              <a:t>1단계 최소 관측 시간대 (1~24)   [   18 ]</a:t>
+            </a:r>
+          </a:p>
+          <a:p>
+            <a:pPr algn="l">
+              <a:lnSpc>
+                <a:spcPct val="100000"/>
+              </a:lnSpc>
+              <a:spcBef>
+                <a:spcPts val="0"/>
+              </a:spcBef>
+              <a:spcAft>
+                <a:spcPts val="150"/>
+              </a:spcAft>
+            </a:pPr>
+            <a:r>
+              <a:rPr sz="1050" b="0" i="0">
+                <a:solidFill>
+                  <a:srgbClr val="D6DFEA"/>
+                </a:solidFill>
+                <a:latin typeface="Consolas"/>
+                <a:ea typeface="Consolas"/>
+                <a:cs typeface="Consolas"/>
+              </a:rPr>
+              <a:t>2단계 재학습 최소 표본 (건)     [ 5000 ]</a:t>
+            </a:r>
+          </a:p>
+          <a:p>
+            <a:pPr algn="l">
+              <a:lnSpc>
+                <a:spcPct val="100000"/>
+              </a:lnSpc>
+              <a:spcBef>
+                <a:spcPts val="0"/>
+              </a:spcBef>
+              <a:spcAft>
+                <a:spcPts val="150"/>
+              </a:spcAft>
+            </a:pPr>
+            <a:r>
+              <a:rPr sz="1050" b="0" i="0">
+                <a:solidFill>
+                  <a:srgbClr val="D6DFEA"/>
+                </a:solidFill>
+                <a:latin typeface="Consolas"/>
+                <a:ea typeface="Consolas"/>
+                <a:cs typeface="Consolas"/>
+              </a:rPr>
+              <a:t>계산 기준일 (비우면 전체)       [          ]</a:t>
+            </a:r>
+          </a:p>
+          <a:p>
+            <a:pPr algn="l">
+              <a:lnSpc>
+                <a:spcPct val="100000"/>
+              </a:lnSpc>
+              <a:spcBef>
+                <a:spcPts val="0"/>
+              </a:spcBef>
+              <a:spcAft>
+                <a:spcPts val="150"/>
+              </a:spcAft>
+            </a:pPr>
+            <a:r>
+              <a:rPr sz="1050" b="0" i="0">
+                <a:solidFill>
+                  <a:srgbClr val="D6DFEA"/>
+                </a:solidFill>
+                <a:latin typeface="Consolas"/>
+                <a:ea typeface="Consolas"/>
+                <a:cs typeface="Consolas"/>
+              </a:rPr>
+              <a:t> </a:t>
+            </a:r>
+          </a:p>
+          <a:p>
+            <a:pPr algn="l">
+              <a:lnSpc>
+                <a:spcPct val="100000"/>
+              </a:lnSpc>
+              <a:spcBef>
+                <a:spcPts val="0"/>
+              </a:spcBef>
+              <a:spcAft>
+                <a:spcPts val="150"/>
+              </a:spcAft>
+            </a:pPr>
+            <a:r>
+              <a:rPr sz="1050" b="0" i="0">
+                <a:solidFill>
+                  <a:srgbClr val="D6DFEA"/>
+                </a:solidFill>
+                <a:latin typeface="Consolas"/>
+                <a:ea typeface="Consolas"/>
+                <a:cs typeface="Consolas"/>
+              </a:rPr>
+              <a:t>                                  [ 저장 ]</a:t>
+            </a:r>
+          </a:p>
+        </p:txBody>
+      </p:sp>
+      <p:sp>
+        <p:nvSpPr>
+          <p:cNvPr id="8" name="TextBox 7"/>
+          <p:cNvSpPr txBox="1"/>
+          <p:nvPr/>
+        </p:nvSpPr>
+        <p:spPr>
+          <a:xfrm>
+            <a:off x="5989320" y="2029968"/>
+            <a:ext cx="5544007" cy="274320"/>
+          </a:xfrm>
+          <a:prstGeom prst="rect">
+            <a:avLst/>
+          </a:prstGeom>
+          <a:noFill/>
+        </p:spPr>
+        <p:txBody>
+          <a:bodyPr wrap="square" lIns="0" rIns="0" tIns="0" bIns="0" anchor="t">
+            <a:spAutoFit/>
+          </a:bodyPr>
+          <a:lstStyle/>
+          <a:p>
+            <a:pPr algn="l">
+              <a:spcBef>
+                <a:spcPts val="0"/>
+              </a:spcBef>
+              <a:spcAft>
+                <a:spcPts val="0"/>
+              </a:spcAft>
+            </a:pPr>
+            <a:r>
+              <a:rPr sz="1300" b="1" i="0">
+                <a:solidFill>
+                  <a:srgbClr val="1A2435"/>
+                </a:solidFill>
+                <a:latin typeface="맑은 고딕"/>
+                <a:ea typeface="맑은 고딕"/>
+                <a:cs typeface="맑은 고딕"/>
+              </a:rPr>
+              <a:t>각 항목의 뜻</a:t>
+            </a:r>
+          </a:p>
+        </p:txBody>
+      </p:sp>
+      <p:sp>
+        <p:nvSpPr>
+          <p:cNvPr id="9" name="TextBox 8"/>
+          <p:cNvSpPr txBox="1"/>
+          <p:nvPr/>
+        </p:nvSpPr>
+        <p:spPr>
+          <a:xfrm>
+            <a:off x="6025896" y="2377440"/>
+            <a:ext cx="2103120" cy="256032"/>
+          </a:xfrm>
+          <a:prstGeom prst="rect">
+            <a:avLst/>
+          </a:prstGeom>
+          <a:noFill/>
+        </p:spPr>
+        <p:txBody>
+          <a:bodyPr wrap="square" lIns="0" rIns="0" tIns="0" bIns="0" anchor="t">
+            <a:spAutoFit/>
+          </a:bodyPr>
+          <a:lstStyle/>
+          <a:p>
+            <a:pPr algn="l">
+              <a:spcBef>
+                <a:spcPts val="0"/>
+              </a:spcBef>
+              <a:spcAft>
+                <a:spcPts val="0"/>
+              </a:spcAft>
+            </a:pPr>
+            <a:r>
+              <a:rPr sz="1200" b="1" i="0">
+                <a:solidFill>
+                  <a:srgbClr val="1A2435"/>
+                </a:solidFill>
+                <a:latin typeface="맑은 고딕"/>
+                <a:ea typeface="맑은 고딕"/>
+                <a:cs typeface="맑은 고딕"/>
+              </a:rPr>
+              <a:t>최소 표본</a:t>
+            </a:r>
+          </a:p>
+        </p:txBody>
+      </p:sp>
+      <p:sp>
+        <p:nvSpPr>
+          <p:cNvPr id="10" name="TextBox 9"/>
+          <p:cNvSpPr txBox="1"/>
+          <p:nvPr/>
+        </p:nvSpPr>
+        <p:spPr>
+          <a:xfrm>
+            <a:off x="10618927" y="2377440"/>
+            <a:ext cx="877824" cy="256032"/>
+          </a:xfrm>
+          <a:prstGeom prst="rect">
+            <a:avLst/>
+          </a:prstGeom>
+          <a:noFill/>
+        </p:spPr>
+        <p:txBody>
+          <a:bodyPr wrap="square" lIns="0" rIns="0" tIns="0" bIns="0" anchor="t">
+            <a:spAutoFit/>
+          </a:bodyPr>
+          <a:lstStyle/>
+          <a:p>
+            <a:pPr algn="r">
+              <a:spcBef>
+                <a:spcPts val="0"/>
+              </a:spcBef>
+              <a:spcAft>
+                <a:spcPts val="0"/>
+              </a:spcAft>
+            </a:pPr>
+            <a:r>
+              <a:rPr sz="1100" b="0" i="0">
+                <a:solidFill>
+                  <a:srgbClr val="E4572E"/>
+                </a:solidFill>
+                <a:latin typeface="Consolas"/>
+                <a:ea typeface="Consolas"/>
+                <a:cs typeface="Consolas"/>
+              </a:rPr>
+              <a:t>3,000</a:t>
+            </a:r>
+          </a:p>
+        </p:txBody>
+      </p:sp>
+      <p:sp>
+        <p:nvSpPr>
+          <p:cNvPr id="11" name="TextBox 10"/>
+          <p:cNvSpPr txBox="1"/>
+          <p:nvPr/>
+        </p:nvSpPr>
+        <p:spPr>
+          <a:xfrm>
+            <a:off x="6025896" y="2651760"/>
+            <a:ext cx="5452567" cy="274320"/>
+          </a:xfrm>
+          <a:prstGeom prst="rect">
+            <a:avLst/>
+          </a:prstGeom>
+          <a:noFill/>
+        </p:spPr>
+        <p:txBody>
+          <a:bodyPr wrap="square" lIns="0" rIns="0" tIns="0" bIns="0" anchor="t">
+            <a:spAutoFit/>
+          </a:bodyPr>
+          <a:lstStyle/>
+          <a:p>
+            <a:pPr algn="l">
+              <a:spcBef>
+                <a:spcPts val="0"/>
+              </a:spcBef>
+              <a:spcAft>
+                <a:spcPts val="0"/>
+              </a:spcAft>
+            </a:pPr>
+            <a:r>
+              <a:rPr sz="1050" b="0" i="0">
+                <a:solidFill>
+                  <a:srgbClr val="667085"/>
+                </a:solidFill>
+                <a:latin typeface="맑은 고딕"/>
+                <a:ea typeface="맑은 고딕"/>
+                <a:cs typeface="맑은 고딕"/>
+              </a:rPr>
+              <a:t>1단계 채점을 시작하는 데 필요한 누적 건수</a:t>
+            </a:r>
+          </a:p>
+        </p:txBody>
+      </p:sp>
+      <p:sp>
+        <p:nvSpPr>
+          <p:cNvPr id="12" name="TextBox 11"/>
+          <p:cNvSpPr txBox="1"/>
+          <p:nvPr/>
+        </p:nvSpPr>
+        <p:spPr>
+          <a:xfrm>
+            <a:off x="6025896" y="2880360"/>
+            <a:ext cx="2103120" cy="256032"/>
+          </a:xfrm>
+          <a:prstGeom prst="rect">
+            <a:avLst/>
+          </a:prstGeom>
+          <a:noFill/>
+        </p:spPr>
+        <p:txBody>
+          <a:bodyPr wrap="square" lIns="0" rIns="0" tIns="0" bIns="0" anchor="t">
+            <a:spAutoFit/>
+          </a:bodyPr>
+          <a:lstStyle/>
+          <a:p>
+            <a:pPr algn="l">
+              <a:spcBef>
+                <a:spcPts val="0"/>
+              </a:spcBef>
+              <a:spcAft>
+                <a:spcPts val="0"/>
+              </a:spcAft>
+            </a:pPr>
+            <a:r>
+              <a:rPr sz="1200" b="1" i="0">
+                <a:solidFill>
+                  <a:srgbClr val="1A2435"/>
+                </a:solidFill>
+                <a:latin typeface="맑은 고딕"/>
+                <a:ea typeface="맑은 고딕"/>
+                <a:cs typeface="맑은 고딕"/>
+              </a:rPr>
+              <a:t>최소 시간대</a:t>
+            </a:r>
+          </a:p>
+        </p:txBody>
+      </p:sp>
+      <p:sp>
+        <p:nvSpPr>
+          <p:cNvPr id="13" name="TextBox 12"/>
+          <p:cNvSpPr txBox="1"/>
+          <p:nvPr/>
+        </p:nvSpPr>
+        <p:spPr>
+          <a:xfrm>
+            <a:off x="10618927" y="2880360"/>
+            <a:ext cx="877824" cy="256032"/>
+          </a:xfrm>
+          <a:prstGeom prst="rect">
+            <a:avLst/>
+          </a:prstGeom>
+          <a:noFill/>
+        </p:spPr>
+        <p:txBody>
+          <a:bodyPr wrap="square" lIns="0" rIns="0" tIns="0" bIns="0" anchor="t">
+            <a:spAutoFit/>
+          </a:bodyPr>
+          <a:lstStyle/>
+          <a:p>
+            <a:pPr algn="r">
+              <a:spcBef>
+                <a:spcPts val="0"/>
+              </a:spcBef>
+              <a:spcAft>
+                <a:spcPts val="0"/>
+              </a:spcAft>
+            </a:pPr>
+            <a:r>
+              <a:rPr sz="1100" b="0" i="0">
+                <a:solidFill>
+                  <a:srgbClr val="E4572E"/>
+                </a:solidFill>
+                <a:latin typeface="Consolas"/>
+                <a:ea typeface="Consolas"/>
+                <a:cs typeface="Consolas"/>
+              </a:rPr>
+              <a:t>18</a:t>
+            </a:r>
+          </a:p>
+        </p:txBody>
+      </p:sp>
+      <p:sp>
+        <p:nvSpPr>
+          <p:cNvPr id="14" name="TextBox 13"/>
+          <p:cNvSpPr txBox="1"/>
+          <p:nvPr/>
+        </p:nvSpPr>
+        <p:spPr>
+          <a:xfrm>
+            <a:off x="6025896" y="3154680"/>
+            <a:ext cx="5452567" cy="274320"/>
+          </a:xfrm>
+          <a:prstGeom prst="rect">
+            <a:avLst/>
+          </a:prstGeom>
+          <a:noFill/>
+        </p:spPr>
+        <p:txBody>
+          <a:bodyPr wrap="square" lIns="0" rIns="0" tIns="0" bIns="0" anchor="t">
+            <a:spAutoFit/>
+          </a:bodyPr>
+          <a:lstStyle/>
+          <a:p>
+            <a:pPr algn="l">
+              <a:spcBef>
+                <a:spcPts val="0"/>
+              </a:spcBef>
+              <a:spcAft>
+                <a:spcPts val="0"/>
+              </a:spcAft>
+            </a:pPr>
+            <a:r>
+              <a:rPr sz="1050" b="0" i="0">
+                <a:solidFill>
+                  <a:srgbClr val="667085"/>
+                </a:solidFill>
+                <a:latin typeface="맑은 고딕"/>
+                <a:ea typeface="맑은 고딕"/>
+                <a:cs typeface="맑은 고딕"/>
+              </a:rPr>
+              <a:t>하루 중 관측한 서로 다른 시각의 개수</a:t>
+            </a:r>
+          </a:p>
+        </p:txBody>
+      </p:sp>
+      <p:sp>
+        <p:nvSpPr>
+          <p:cNvPr id="15" name="TextBox 14"/>
+          <p:cNvSpPr txBox="1"/>
+          <p:nvPr/>
+        </p:nvSpPr>
+        <p:spPr>
+          <a:xfrm>
+            <a:off x="6025896" y="3383280"/>
+            <a:ext cx="2103120" cy="256032"/>
+          </a:xfrm>
+          <a:prstGeom prst="rect">
+            <a:avLst/>
+          </a:prstGeom>
+          <a:noFill/>
+        </p:spPr>
+        <p:txBody>
+          <a:bodyPr wrap="square" lIns="0" rIns="0" tIns="0" bIns="0" anchor="t">
+            <a:spAutoFit/>
+          </a:bodyPr>
+          <a:lstStyle/>
+          <a:p>
+            <a:pPr algn="l">
+              <a:spcBef>
+                <a:spcPts val="0"/>
+              </a:spcBef>
+              <a:spcAft>
+                <a:spcPts val="0"/>
+              </a:spcAft>
+            </a:pPr>
+            <a:r>
+              <a:rPr sz="1200" b="1" i="0">
+                <a:solidFill>
+                  <a:srgbClr val="1A2435"/>
+                </a:solidFill>
+                <a:latin typeface="맑은 고딕"/>
+                <a:ea typeface="맑은 고딕"/>
+                <a:cs typeface="맑은 고딕"/>
+              </a:rPr>
+              <a:t>재학습 최소 표본</a:t>
+            </a:r>
+          </a:p>
+        </p:txBody>
+      </p:sp>
+      <p:sp>
+        <p:nvSpPr>
+          <p:cNvPr id="16" name="TextBox 15"/>
+          <p:cNvSpPr txBox="1"/>
+          <p:nvPr/>
+        </p:nvSpPr>
+        <p:spPr>
+          <a:xfrm>
+            <a:off x="10618927" y="3383280"/>
+            <a:ext cx="877824" cy="256032"/>
+          </a:xfrm>
+          <a:prstGeom prst="rect">
+            <a:avLst/>
+          </a:prstGeom>
+          <a:noFill/>
+        </p:spPr>
+        <p:txBody>
+          <a:bodyPr wrap="square" lIns="0" rIns="0" tIns="0" bIns="0" anchor="t">
+            <a:spAutoFit/>
+          </a:bodyPr>
+          <a:lstStyle/>
+          <a:p>
+            <a:pPr algn="r">
+              <a:spcBef>
+                <a:spcPts val="0"/>
+              </a:spcBef>
+              <a:spcAft>
+                <a:spcPts val="0"/>
+              </a:spcAft>
+            </a:pPr>
+            <a:r>
+              <a:rPr sz="1100" b="0" i="0">
+                <a:solidFill>
+                  <a:srgbClr val="E4572E"/>
+                </a:solidFill>
+                <a:latin typeface="Consolas"/>
+                <a:ea typeface="Consolas"/>
+                <a:cs typeface="Consolas"/>
+              </a:rPr>
+              <a:t>5,000</a:t>
+            </a:r>
+          </a:p>
+        </p:txBody>
+      </p:sp>
+      <p:sp>
+        <p:nvSpPr>
+          <p:cNvPr id="17" name="TextBox 16"/>
+          <p:cNvSpPr txBox="1"/>
+          <p:nvPr/>
+        </p:nvSpPr>
+        <p:spPr>
+          <a:xfrm>
+            <a:off x="6025896" y="3657600"/>
+            <a:ext cx="5452567" cy="274320"/>
+          </a:xfrm>
+          <a:prstGeom prst="rect">
+            <a:avLst/>
+          </a:prstGeom>
+          <a:noFill/>
+        </p:spPr>
+        <p:txBody>
+          <a:bodyPr wrap="square" lIns="0" rIns="0" tIns="0" bIns="0" anchor="t">
+            <a:spAutoFit/>
+          </a:bodyPr>
+          <a:lstStyle/>
+          <a:p>
+            <a:pPr algn="l">
+              <a:spcBef>
+                <a:spcPts val="0"/>
+              </a:spcBef>
+              <a:spcAft>
+                <a:spcPts val="0"/>
+              </a:spcAft>
+            </a:pPr>
+            <a:r>
+              <a:rPr sz="1050" b="0" i="0">
+                <a:solidFill>
+                  <a:srgbClr val="667085"/>
+                </a:solidFill>
+                <a:latin typeface="맑은 고딕"/>
+                <a:ea typeface="맑은 고딕"/>
+                <a:cs typeface="맑은 고딕"/>
+              </a:rPr>
+              <a:t>야간 재학습을 시도할 최소 건수</a:t>
+            </a:r>
+          </a:p>
+        </p:txBody>
+      </p:sp>
+      <p:sp>
+        <p:nvSpPr>
+          <p:cNvPr id="18" name="TextBox 17"/>
+          <p:cNvSpPr txBox="1"/>
+          <p:nvPr/>
+        </p:nvSpPr>
+        <p:spPr>
+          <a:xfrm>
+            <a:off x="6025896" y="3886200"/>
+            <a:ext cx="2103120" cy="256032"/>
+          </a:xfrm>
+          <a:prstGeom prst="rect">
+            <a:avLst/>
+          </a:prstGeom>
+          <a:noFill/>
+        </p:spPr>
+        <p:txBody>
+          <a:bodyPr wrap="square" lIns="0" rIns="0" tIns="0" bIns="0" anchor="t">
+            <a:spAutoFit/>
+          </a:bodyPr>
+          <a:lstStyle/>
+          <a:p>
+            <a:pPr algn="l">
+              <a:spcBef>
+                <a:spcPts val="0"/>
+              </a:spcBef>
+              <a:spcAft>
+                <a:spcPts val="0"/>
+              </a:spcAft>
+            </a:pPr>
+            <a:r>
+              <a:rPr sz="1200" b="1" i="0">
+                <a:solidFill>
+                  <a:srgbClr val="1A2435"/>
+                </a:solidFill>
+                <a:latin typeface="맑은 고딕"/>
+                <a:ea typeface="맑은 고딕"/>
+                <a:cs typeface="맑은 고딕"/>
+              </a:rPr>
+              <a:t>계산 기준일</a:t>
+            </a:r>
+          </a:p>
+        </p:txBody>
+      </p:sp>
+      <p:sp>
+        <p:nvSpPr>
+          <p:cNvPr id="19" name="TextBox 18"/>
+          <p:cNvSpPr txBox="1"/>
+          <p:nvPr/>
+        </p:nvSpPr>
+        <p:spPr>
+          <a:xfrm>
+            <a:off x="10618927" y="3886200"/>
+            <a:ext cx="877824" cy="256032"/>
+          </a:xfrm>
+          <a:prstGeom prst="rect">
+            <a:avLst/>
+          </a:prstGeom>
+          <a:noFill/>
+        </p:spPr>
+        <p:txBody>
+          <a:bodyPr wrap="square" lIns="0" rIns="0" tIns="0" bIns="0" anchor="t">
+            <a:spAutoFit/>
+          </a:bodyPr>
+          <a:lstStyle/>
+          <a:p>
+            <a:pPr algn="r">
+              <a:spcBef>
+                <a:spcPts val="0"/>
+              </a:spcBef>
+              <a:spcAft>
+                <a:spcPts val="0"/>
+              </a:spcAft>
+            </a:pPr>
+            <a:r>
+              <a:rPr sz="1100" b="0" i="0">
+                <a:solidFill>
+                  <a:srgbClr val="E4572E"/>
+                </a:solidFill>
+                <a:latin typeface="Consolas"/>
+                <a:ea typeface="Consolas"/>
+                <a:cs typeface="Consolas"/>
+              </a:rPr>
+              <a:t>비움</a:t>
+            </a:r>
+          </a:p>
+        </p:txBody>
+      </p:sp>
+      <p:sp>
+        <p:nvSpPr>
+          <p:cNvPr id="20" name="TextBox 19"/>
+          <p:cNvSpPr txBox="1"/>
+          <p:nvPr/>
+        </p:nvSpPr>
+        <p:spPr>
+          <a:xfrm>
+            <a:off x="6025896" y="4160520"/>
+            <a:ext cx="5452567" cy="274320"/>
+          </a:xfrm>
+          <a:prstGeom prst="rect">
+            <a:avLst/>
+          </a:prstGeom>
+          <a:noFill/>
+        </p:spPr>
+        <p:txBody>
+          <a:bodyPr wrap="square" lIns="0" rIns="0" tIns="0" bIns="0" anchor="t">
+            <a:spAutoFit/>
+          </a:bodyPr>
+          <a:lstStyle/>
+          <a:p>
+            <a:pPr algn="l">
+              <a:spcBef>
+                <a:spcPts val="0"/>
+              </a:spcBef>
+              <a:spcAft>
+                <a:spcPts val="0"/>
+              </a:spcAft>
+            </a:pPr>
+            <a:r>
+              <a:rPr sz="1050" b="0" i="0">
+                <a:solidFill>
+                  <a:srgbClr val="667085"/>
+                </a:solidFill>
+                <a:latin typeface="맑은 고딕"/>
+                <a:ea typeface="맑은 고딕"/>
+                <a:cs typeface="맑은 고딕"/>
+              </a:rPr>
+              <a:t>이 날짜 이전 데이터를 계산에서 제외</a:t>
+            </a:r>
+          </a:p>
+        </p:txBody>
+      </p:sp>
+      <p:sp>
+        <p:nvSpPr>
+          <p:cNvPr id="21" name="Rounded Rectangle 20"/>
+          <p:cNvSpPr/>
+          <p:nvPr/>
+        </p:nvSpPr>
+        <p:spPr>
+          <a:xfrm>
+            <a:off x="658368" y="4517136"/>
+            <a:ext cx="10874959" cy="1645920"/>
+          </a:xfrm>
+          <a:prstGeom prst="roundRect">
+            <a:avLst>
+              <a:gd name="adj" fmla="val 6000"/>
+            </a:avLst>
+          </a:prstGeom>
+          <a:solidFill>
+            <a:srgbClr val="FDF1EC"/>
+          </a:solidFill>
+          <a:ln>
+            <a:noFill/>
+          </a:ln>
+          <a:effectLst/>
+        </p:spPr>
+        <p:style>
+          <a:lnRef idx="1">
+            <a:schemeClr val="accent1"/>
+          </a:lnRef>
+          <a:fillRef idx="3">
+            <a:schemeClr val="accent1"/>
+          </a:fillRef>
+          <a:effectRef idx="2">
+            <a:schemeClr val="accent1"/>
+          </a:effectRef>
+          <a:fontRef idx="minor">
+            <a:schemeClr val="lt1"/>
+          </a:fontRef>
+        </p:style>
+        <p:txBody>
+          <a:bodyPr rtlCol="0" anchor="ctr"/>
+          <a:lstStyle/>
+          <a:p/>
+        </p:txBody>
+      </p:sp>
+      <p:sp>
+        <p:nvSpPr>
+          <p:cNvPr id="22" name="Oval 21"/>
+          <p:cNvSpPr/>
+          <p:nvPr/>
+        </p:nvSpPr>
+        <p:spPr>
+          <a:xfrm>
+            <a:off x="932688" y="4736592"/>
+            <a:ext cx="347472" cy="347472"/>
+          </a:xfrm>
+          <a:prstGeom prst="ellipse">
+            <a:avLst/>
+          </a:prstGeom>
+          <a:solidFill>
+            <a:srgbClr val="E4572E"/>
+          </a:solidFill>
+          <a:ln>
+            <a:noFill/>
+          </a:ln>
+          <a:effectLst/>
+        </p:spPr>
+        <p:style>
+          <a:lnRef idx="1">
+            <a:schemeClr val="accent1"/>
+          </a:lnRef>
+          <a:fillRef idx="3">
+            <a:schemeClr val="accent1"/>
+          </a:fillRef>
+          <a:effectRef idx="2">
+            <a:schemeClr val="accent1"/>
+          </a:effectRef>
+          <a:fontRef idx="minor">
+            <a:schemeClr val="lt1"/>
+          </a:fontRef>
+        </p:style>
+        <p:txBody>
+          <a:bodyPr rtlCol="0" anchor="ctr" lIns="0" rIns="0" tIns="0" bIns="0"/>
+          <a:lstStyle/>
+          <a:p>
+            <a:pPr algn="ctr"/>
+            <a:r>
+              <a:rPr sz="1400" b="1" i="0">
+                <a:solidFill>
+                  <a:srgbClr val="FFFFFF"/>
+                </a:solidFill>
+                <a:latin typeface="맑은 고딕"/>
+                <a:ea typeface="맑은 고딕"/>
+                <a:cs typeface="맑은 고딕"/>
+              </a:rPr>
+              <a:t>!</a:t>
+            </a:r>
+          </a:p>
+        </p:txBody>
+      </p:sp>
+      <p:sp>
+        <p:nvSpPr>
+          <p:cNvPr id="23" name="TextBox 22"/>
+          <p:cNvSpPr txBox="1"/>
+          <p:nvPr/>
+        </p:nvSpPr>
+        <p:spPr>
+          <a:xfrm>
+            <a:off x="1408176" y="4754880"/>
+            <a:ext cx="9692640" cy="274320"/>
+          </a:xfrm>
+          <a:prstGeom prst="rect">
+            <a:avLst/>
+          </a:prstGeom>
+          <a:noFill/>
+        </p:spPr>
+        <p:txBody>
+          <a:bodyPr wrap="square" lIns="0" rIns="0" tIns="0" bIns="0" anchor="t">
+            <a:spAutoFit/>
+          </a:bodyPr>
+          <a:lstStyle/>
+          <a:p>
+            <a:pPr algn="l">
+              <a:spcBef>
+                <a:spcPts val="0"/>
+              </a:spcBef>
+              <a:spcAft>
+                <a:spcPts val="0"/>
+              </a:spcAft>
+            </a:pPr>
+            <a:r>
+              <a:rPr sz="1300" b="1" i="0">
+                <a:solidFill>
+                  <a:srgbClr val="E4572E"/>
+                </a:solidFill>
+                <a:latin typeface="맑은 고딕"/>
+                <a:ea typeface="맑은 고딕"/>
+                <a:cs typeface="맑은 고딕"/>
+              </a:rPr>
+              <a:t>계산 기준일을 바꾸면 셀별 기준선을 버리고 처음부터 다시 쌓습니다</a:t>
+            </a:r>
+          </a:p>
+        </p:txBody>
+      </p:sp>
+      <p:sp>
+        <p:nvSpPr>
+          <p:cNvPr id="24" name="TextBox 23"/>
+          <p:cNvSpPr txBox="1"/>
+          <p:nvPr/>
+        </p:nvSpPr>
+        <p:spPr>
+          <a:xfrm>
+            <a:off x="932688" y="5138928"/>
+            <a:ext cx="10326319" cy="914400"/>
+          </a:xfrm>
+          <a:prstGeom prst="rect">
+            <a:avLst/>
+          </a:prstGeom>
+          <a:noFill/>
+        </p:spPr>
+        <p:txBody>
+          <a:bodyPr wrap="square" lIns="0" rIns="0" tIns="0" bIns="0" anchor="t">
+            <a:spAutoFit/>
+          </a:bodyPr>
+          <a:lstStyle/>
+          <a:p>
+            <a:pPr algn="l">
+              <a:lnSpc>
+                <a:spcPct val="125000"/>
+              </a:lnSpc>
+              <a:spcBef>
+                <a:spcPts val="0"/>
+              </a:spcBef>
+              <a:spcAft>
+                <a:spcPts val="600"/>
+              </a:spcAft>
+            </a:pPr>
+            <a:r>
+              <a:rPr sz="1150" b="0" i="0">
+                <a:solidFill>
+                  <a:srgbClr val="1A2435"/>
+                </a:solidFill>
+                <a:latin typeface="맑은 고딕"/>
+                <a:ea typeface="맑은 고딕"/>
+                <a:cs typeface="맑은 고딕"/>
+              </a:rPr>
+              <a:t>히스토리 DB 는 날짜별 테이블이라 기준일 이전 구간을 정확히 잘라낼 수 있습니다. 반면 셀별 기준선의 히스토그램에는 표본별 시각이 남지 않아 과거만 골라 뺄 수 없습니다. 그래서 새로 쌓는 수밖에 없습니다.</a:t>
+            </a:r>
+          </a:p>
+          <a:p>
+            <a:pPr algn="l">
+              <a:lnSpc>
+                <a:spcPct val="125000"/>
+              </a:lnSpc>
+              <a:spcBef>
+                <a:spcPts val="0"/>
+              </a:spcBef>
+              <a:spcAft>
+                <a:spcPts val="0"/>
+              </a:spcAft>
+            </a:pPr>
+            <a:r>
+              <a:rPr sz="1150" b="1" i="0">
+                <a:solidFill>
+                  <a:srgbClr val="E4572E"/>
+                </a:solidFill>
+                <a:latin typeface="맑은 고딕"/>
+                <a:ea typeface="맑은 고딕"/>
+                <a:cs typeface="맑은 고딕"/>
+              </a:rPr>
+              <a:t>며칠치 누적이 사라지므로, 카메라 조준을 복구했거나 설비를 바꾼 때처럼 정말 그 전 것을 잊어야 할 때만 쓰십시오.  |  저장 후 [정지] → [시작] 을 눌러야 반영됩니다 (파이썬은 기동할 때 설정을 읽습니다).</a:t>
+            </a:r>
+          </a:p>
+        </p:txBody>
+      </p:sp>
+      <p:sp>
+        <p:nvSpPr>
+          <p:cNvPr id="25" name="TextBox 24"/>
+          <p:cNvSpPr txBox="1"/>
+          <p:nvPr/>
+        </p:nvSpPr>
+        <p:spPr>
+          <a:xfrm>
+            <a:off x="10618927" y="6291072"/>
+            <a:ext cx="914400" cy="274320"/>
+          </a:xfrm>
+          <a:prstGeom prst="rect">
+            <a:avLst/>
+          </a:prstGeom>
+          <a:noFill/>
+        </p:spPr>
+        <p:txBody>
+          <a:bodyPr wrap="square" lIns="0" rIns="0" tIns="0" bIns="0" anchor="t">
+            <a:spAutoFit/>
+          </a:bodyPr>
+          <a:lstStyle/>
+          <a:p>
+            <a:pPr algn="r">
+              <a:spcBef>
+                <a:spcPts val="0"/>
+              </a:spcBef>
+              <a:spcAft>
+                <a:spcPts val="0"/>
+              </a:spcAft>
+            </a:pPr>
+            <a:r>
+              <a:rPr sz="1050" b="0" i="0">
+                <a:solidFill>
+                  <a:srgbClr val="667085"/>
+                </a:solidFill>
+                <a:latin typeface="맑은 고딕"/>
+                <a:ea typeface="맑은 고딕"/>
+                <a:cs typeface="맑은 고딕"/>
+              </a:rPr>
+              <a:t>21</a:t>
+            </a:r>
+          </a:p>
+        </p:txBody>
+      </p:sp>
+    </p:spTree>
+  </p:cSld>
+  <p:clrMapOvr>
+    <a:masterClrMapping/>
+  </p:clrMapOvr>
+</p:sld>
+</file>
+
+<file path=ppt/slides/slide22.xml><?xml version="1.0" encoding="utf-8"?>
+<p:sld xmlns:a="http://schemas.openxmlformats.org/drawingml/2006/main" xmlns:p="http://schemas.openxmlformats.org/presentationml/2006/main" xmlns:r="http://schemas.openxmlformats.org/officeDocument/2006/relationships">
+  <p:cSld>
+    <p:bg>
+      <p:bgPr>
+        <a:solidFill>
           <a:srgbClr val="0F1B2D"/>
         </a:solidFill>
         <a:effectLst/>
@@ -20086,7 +21378,7 @@
                 <a:ea typeface="맑은 고딕"/>
                 <a:cs typeface="맑은 고딕"/>
               </a:rPr>
-              <a:t>20  SAFETY RULES</a:t>
+              <a:t>21  SAFETY RULES</a:t>
             </a:r>
           </a:p>
         </p:txBody>
@@ -21066,7 +22358,7 @@
                 <a:ea typeface="맑은 고딕"/>
                 <a:cs typeface="맑은 고딕"/>
               </a:rPr>
-              <a:t>21</a:t>
+              <a:t>22</a:t>
             </a:r>
           </a:p>
         </p:txBody>
@@ -21079,7 +22371,7 @@
 </p:sld>
 </file>
 
-<file path=ppt/slides/slide22.xml><?xml version="1.0" encoding="utf-8"?>
+<file path=ppt/slides/slide23.xml><?xml version="1.0" encoding="utf-8"?>
 <p:sld xmlns:a="http://schemas.openxmlformats.org/drawingml/2006/main" xmlns:p="http://schemas.openxmlformats.org/presentationml/2006/main" xmlns:r="http://schemas.openxmlformats.org/officeDocument/2006/relationships">
   <p:cSld>
     <p:bg>
@@ -21136,7 +22428,7 @@
                 <a:ea typeface="맑은 고딕"/>
                 <a:cs typeface="맑은 고딕"/>
               </a:rPr>
-              <a:t>21  COMMISSIONING</a:t>
+              <a:t>22  COMMISSIONING</a:t>
             </a:r>
           </a:p>
         </p:txBody>
@@ -23800,7 +25092,7 @@
                 <a:ea typeface="맑은 고딕"/>
                 <a:cs typeface="맑은 고딕"/>
               </a:rPr>
-              <a:t>22</a:t>
+              <a:t>23</a:t>
             </a:r>
           </a:p>
         </p:txBody>
@@ -23813,7 +25105,7 @@
 </p:sld>
 </file>
 
-<file path=ppt/slides/slide23.xml><?xml version="1.0" encoding="utf-8"?>
+<file path=ppt/slides/slide24.xml><?xml version="1.0" encoding="utf-8"?>
 <p:sld xmlns:a="http://schemas.openxmlformats.org/drawingml/2006/main" xmlns:p="http://schemas.openxmlformats.org/presentationml/2006/main" xmlns:r="http://schemas.openxmlformats.org/officeDocument/2006/relationships">
   <p:cSld>
     <p:bg>
@@ -23870,7 +25162,7 @@
                 <a:ea typeface="맑은 고딕"/>
                 <a:cs typeface="맑은 고딕"/>
               </a:rPr>
-              <a:t>22  TROUBLESHOOTING</a:t>
+              <a:t>23  TROUBLESHOOTING</a:t>
             </a:r>
           </a:p>
         </p:txBody>
@@ -25143,7 +26435,7 @@
                 <a:ea typeface="맑은 고딕"/>
                 <a:cs typeface="맑은 고딕"/>
               </a:rPr>
-              <a:t>23</a:t>
+              <a:t>24</a:t>
             </a:r>
           </a:p>
         </p:txBody>
@@ -25156,7 +26448,7 @@
 </p:sld>
 </file>
 
-<file path=ppt/slides/slide24.xml><?xml version="1.0" encoding="utf-8"?>
+<file path=ppt/slides/slide25.xml><?xml version="1.0" encoding="utf-8"?>
 <p:sld xmlns:a="http://schemas.openxmlformats.org/drawingml/2006/main" xmlns:p="http://schemas.openxmlformats.org/presentationml/2006/main" xmlns:r="http://schemas.openxmlformats.org/officeDocument/2006/relationships">
   <p:cSld>
     <p:bg>
@@ -25213,7 +26505,7 @@
                 <a:ea typeface="맑은 고딕"/>
                 <a:cs typeface="맑은 고딕"/>
               </a:rPr>
-              <a:t>23  CHECKLIST</a:t>
+              <a:t>24  CHECKLIST</a:t>
             </a:r>
           </a:p>
         </p:txBody>
@@ -26624,7 +27916,7 @@
                 <a:ea typeface="맑은 고딕"/>
                 <a:cs typeface="맑은 고딕"/>
               </a:rPr>
-              <a:t>24</a:t>
+              <a:t>25</a:t>
             </a:r>
           </a:p>
         </p:txBody>

--- a/멀티모달_화재감지_모니터링_설치매뉴얼.pptx
+++ b/멀티모달_화재감지_모니터링_설치매뉴얼.pptx
@@ -20233,7 +20233,7 @@
         <p:spPr>
           <a:xfrm>
             <a:off x="658368" y="2359152"/>
-            <a:ext cx="5029200" cy="2055876"/>
+            <a:ext cx="5029200" cy="2262568"/>
           </a:xfrm>
           <a:prstGeom prst="roundRect">
             <a:avLst>
@@ -20277,7 +20277,7 @@
         <p:spPr>
           <a:xfrm>
             <a:off x="859536" y="2560320"/>
-            <a:ext cx="4626864" cy="1653540"/>
+            <a:ext cx="4626864" cy="1860232"/>
           </a:xfrm>
           <a:prstGeom prst="rect">
             <a:avLst/>
@@ -20430,7 +20430,7 @@
                 <a:ea typeface="Consolas"/>
                 <a:cs typeface="Consolas"/>
               </a:rPr>
-              <a:t>계산 기준일 (비우면 전체)       [          ]</a:t>
+              <a:t>계산 기준일 (체크 해제 시 전체)</a:t>
             </a:r>
           </a:p>
           <a:p>
@@ -20454,7 +20454,7 @@
                 <a:ea typeface="Consolas"/>
                 <a:cs typeface="Consolas"/>
               </a:rPr>
-              <a:t> </a:t>
+              <a:t>                        [ ] 2026-09-21  v</a:t>
             </a:r>
           </a:p>
           <a:p>
@@ -20478,196 +20478,88 @@
                 <a:ea typeface="Consolas"/>
                 <a:cs typeface="Consolas"/>
               </a:rPr>
-              <a:t>                                  [ 저장 ]</a:t>
-            </a:r>
-          </a:p>
-        </p:txBody>
-      </p:sp>
-      <p:sp>
-        <p:nvSpPr>
-          <p:cNvPr id="8" name="TextBox 7"/>
-          <p:cNvSpPr txBox="1"/>
-          <p:nvPr/>
-        </p:nvSpPr>
-        <p:spPr>
-          <a:xfrm>
-            <a:off x="5989320" y="2029968"/>
-            <a:ext cx="5544007" cy="274320"/>
-          </a:xfrm>
-          <a:prstGeom prst="rect">
-            <a:avLst/>
-          </a:prstGeom>
-          <a:noFill/>
-        </p:spPr>
-        <p:txBody>
-          <a:bodyPr wrap="square" lIns="0" rIns="0" tIns="0" bIns="0" anchor="t">
-            <a:spAutoFit/>
-          </a:bodyPr>
-          <a:lstStyle/>
-          <a:p>
-            <a:pPr algn="l">
-              <a:spcBef>
-                <a:spcPts val="0"/>
-              </a:spcBef>
-              <a:spcAft>
-                <a:spcPts val="0"/>
-              </a:spcAft>
-            </a:pPr>
-            <a:r>
-              <a:rPr sz="1300" b="1" i="0">
-                <a:solidFill>
-                  <a:srgbClr val="1A2435"/>
-                </a:solidFill>
-                <a:latin typeface="맑은 고딕"/>
-                <a:ea typeface="맑은 고딕"/>
-                <a:cs typeface="맑은 고딕"/>
-              </a:rPr>
-              <a:t>각 항목의 뜻</a:t>
-            </a:r>
-          </a:p>
-        </p:txBody>
-      </p:sp>
-      <p:sp>
-        <p:nvSpPr>
-          <p:cNvPr id="9" name="TextBox 8"/>
-          <p:cNvSpPr txBox="1"/>
-          <p:nvPr/>
-        </p:nvSpPr>
-        <p:spPr>
-          <a:xfrm>
-            <a:off x="6025896" y="2377440"/>
-            <a:ext cx="2103120" cy="256032"/>
-          </a:xfrm>
-          <a:prstGeom prst="rect">
-            <a:avLst/>
-          </a:prstGeom>
-          <a:noFill/>
-        </p:spPr>
-        <p:txBody>
-          <a:bodyPr wrap="square" lIns="0" rIns="0" tIns="0" bIns="0" anchor="t">
-            <a:spAutoFit/>
-          </a:bodyPr>
-          <a:lstStyle/>
-          <a:p>
-            <a:pPr algn="l">
-              <a:spcBef>
-                <a:spcPts val="0"/>
-              </a:spcBef>
-              <a:spcAft>
-                <a:spcPts val="0"/>
-              </a:spcAft>
-            </a:pPr>
-            <a:r>
-              <a:rPr sz="1200" b="1" i="0">
-                <a:solidFill>
-                  <a:srgbClr val="1A2435"/>
-                </a:solidFill>
-                <a:latin typeface="맑은 고딕"/>
-                <a:ea typeface="맑은 고딕"/>
-                <a:cs typeface="맑은 고딕"/>
-              </a:rPr>
-              <a:t>최소 표본</a:t>
-            </a:r>
-          </a:p>
-        </p:txBody>
-      </p:sp>
-      <p:sp>
-        <p:nvSpPr>
-          <p:cNvPr id="10" name="TextBox 9"/>
-          <p:cNvSpPr txBox="1"/>
-          <p:nvPr/>
-        </p:nvSpPr>
-        <p:spPr>
-          <a:xfrm>
-            <a:off x="10618927" y="2377440"/>
-            <a:ext cx="877824" cy="256032"/>
-          </a:xfrm>
-          <a:prstGeom prst="rect">
-            <a:avLst/>
-          </a:prstGeom>
-          <a:noFill/>
-        </p:spPr>
-        <p:txBody>
-          <a:bodyPr wrap="square" lIns="0" rIns="0" tIns="0" bIns="0" anchor="t">
-            <a:spAutoFit/>
-          </a:bodyPr>
-          <a:lstStyle/>
-          <a:p>
-            <a:pPr algn="r">
-              <a:spcBef>
-                <a:spcPts val="0"/>
-              </a:spcBef>
-              <a:spcAft>
-                <a:spcPts val="0"/>
-              </a:spcAft>
-            </a:pPr>
-            <a:r>
-              <a:rPr sz="1100" b="0" i="0">
-                <a:solidFill>
-                  <a:srgbClr val="E4572E"/>
+              <a:t> </a:t>
+            </a:r>
+          </a:p>
+          <a:p>
+            <a:pPr algn="l">
+              <a:lnSpc>
+                <a:spcPct val="100000"/>
+              </a:lnSpc>
+              <a:spcBef>
+                <a:spcPts val="0"/>
+              </a:spcBef>
+              <a:spcAft>
+                <a:spcPts val="150"/>
+              </a:spcAft>
+            </a:pPr>
+            <a:r>
+              <a:rPr sz="1050" b="0" i="0">
+                <a:solidFill>
+                  <a:srgbClr val="D6DFEA"/>
                 </a:solidFill>
                 <a:latin typeface="Consolas"/>
                 <a:ea typeface="Consolas"/>
                 <a:cs typeface="Consolas"/>
               </a:rPr>
-              <a:t>3,000</a:t>
-            </a:r>
-          </a:p>
-        </p:txBody>
-      </p:sp>
-      <p:sp>
-        <p:nvSpPr>
-          <p:cNvPr id="11" name="TextBox 10"/>
-          <p:cNvSpPr txBox="1"/>
-          <p:nvPr/>
-        </p:nvSpPr>
-        <p:spPr>
-          <a:xfrm>
-            <a:off x="6025896" y="2651760"/>
-            <a:ext cx="5452567" cy="274320"/>
-          </a:xfrm>
-          <a:prstGeom prst="rect">
-            <a:avLst/>
-          </a:prstGeom>
-          <a:noFill/>
-        </p:spPr>
-        <p:txBody>
-          <a:bodyPr wrap="square" lIns="0" rIns="0" tIns="0" bIns="0" anchor="t">
-            <a:spAutoFit/>
-          </a:bodyPr>
-          <a:lstStyle/>
-          <a:p>
-            <a:pPr algn="l">
-              <a:spcBef>
-                <a:spcPts val="0"/>
-              </a:spcBef>
-              <a:spcAft>
-                <a:spcPts val="0"/>
-              </a:spcAft>
-            </a:pPr>
-            <a:r>
-              <a:rPr sz="1050" b="0" i="0">
-                <a:solidFill>
-                  <a:srgbClr val="667085"/>
-                </a:solidFill>
-                <a:latin typeface="맑은 고딕"/>
-                <a:ea typeface="맑은 고딕"/>
-                <a:cs typeface="맑은 고딕"/>
-              </a:rPr>
-              <a:t>1단계 채점을 시작하는 데 필요한 누적 건수</a:t>
-            </a:r>
-          </a:p>
-        </p:txBody>
-      </p:sp>
-      <p:sp>
-        <p:nvSpPr>
-          <p:cNvPr id="12" name="TextBox 11"/>
-          <p:cNvSpPr txBox="1"/>
-          <p:nvPr/>
-        </p:nvSpPr>
-        <p:spPr>
-          <a:xfrm>
-            <a:off x="6025896" y="2880360"/>
+              <a:t>                                  [ 저장 ]</a:t>
+            </a:r>
+          </a:p>
+        </p:txBody>
+      </p:sp>
+      <p:sp>
+        <p:nvSpPr>
+          <p:cNvPr id="8" name="TextBox 7"/>
+          <p:cNvSpPr txBox="1"/>
+          <p:nvPr/>
+        </p:nvSpPr>
+        <p:spPr>
+          <a:xfrm>
+            <a:off x="5989320" y="2029968"/>
+            <a:ext cx="5544007" cy="274320"/>
+          </a:xfrm>
+          <a:prstGeom prst="rect">
+            <a:avLst/>
+          </a:prstGeom>
+          <a:noFill/>
+        </p:spPr>
+        <p:txBody>
+          <a:bodyPr wrap="square" lIns="0" rIns="0" tIns="0" bIns="0" anchor="t">
+            <a:spAutoFit/>
+          </a:bodyPr>
+          <a:lstStyle/>
+          <a:p>
+            <a:pPr algn="l">
+              <a:spcBef>
+                <a:spcPts val="0"/>
+              </a:spcBef>
+              <a:spcAft>
+                <a:spcPts val="0"/>
+              </a:spcAft>
+            </a:pPr>
+            <a:r>
+              <a:rPr sz="1300" b="1" i="0">
+                <a:solidFill>
+                  <a:srgbClr val="1A2435"/>
+                </a:solidFill>
+                <a:latin typeface="맑은 고딕"/>
+                <a:ea typeface="맑은 고딕"/>
+                <a:cs typeface="맑은 고딕"/>
+              </a:rPr>
+              <a:t>각 항목의 뜻</a:t>
+            </a:r>
+          </a:p>
+        </p:txBody>
+      </p:sp>
+      <p:sp>
+        <p:nvSpPr>
+          <p:cNvPr id="9" name="TextBox 8"/>
+          <p:cNvSpPr txBox="1"/>
+          <p:nvPr/>
+        </p:nvSpPr>
+        <p:spPr>
+          <a:xfrm>
+            <a:off x="6025896" y="2377440"/>
             <a:ext cx="2103120" cy="256032"/>
           </a:xfrm>
           <a:prstGeom prst="rect">
@@ -20698,20 +20590,20 @@
                 <a:ea typeface="맑은 고딕"/>
                 <a:cs typeface="맑은 고딕"/>
               </a:rPr>
-              <a:t>최소 시간대</a:t>
-            </a:r>
-          </a:p>
-        </p:txBody>
-      </p:sp>
-      <p:sp>
-        <p:nvSpPr>
-          <p:cNvPr id="13" name="TextBox 12"/>
-          <p:cNvSpPr txBox="1"/>
-          <p:nvPr/>
-        </p:nvSpPr>
-        <p:spPr>
-          <a:xfrm>
-            <a:off x="10618927" y="2880360"/>
+              <a:t>최소 표본</a:t>
+            </a:r>
+          </a:p>
+        </p:txBody>
+      </p:sp>
+      <p:sp>
+        <p:nvSpPr>
+          <p:cNvPr id="10" name="TextBox 9"/>
+          <p:cNvSpPr txBox="1"/>
+          <p:nvPr/>
+        </p:nvSpPr>
+        <p:spPr>
+          <a:xfrm>
+            <a:off x="10618927" y="2377440"/>
             <a:ext cx="877824" cy="256032"/>
           </a:xfrm>
           <a:prstGeom prst="rect">
@@ -20742,20 +20634,20 @@
                 <a:ea typeface="Consolas"/>
                 <a:cs typeface="Consolas"/>
               </a:rPr>
-              <a:t>18</a:t>
-            </a:r>
-          </a:p>
-        </p:txBody>
-      </p:sp>
-      <p:sp>
-        <p:nvSpPr>
-          <p:cNvPr id="14" name="TextBox 13"/>
-          <p:cNvSpPr txBox="1"/>
-          <p:nvPr/>
-        </p:nvSpPr>
-        <p:spPr>
-          <a:xfrm>
-            <a:off x="6025896" y="3154680"/>
+              <a:t>3,000</a:t>
+            </a:r>
+          </a:p>
+        </p:txBody>
+      </p:sp>
+      <p:sp>
+        <p:nvSpPr>
+          <p:cNvPr id="11" name="TextBox 10"/>
+          <p:cNvSpPr txBox="1"/>
+          <p:nvPr/>
+        </p:nvSpPr>
+        <p:spPr>
+          <a:xfrm>
+            <a:off x="6025896" y="2651760"/>
             <a:ext cx="5452567" cy="274320"/>
           </a:xfrm>
           <a:prstGeom prst="rect">
@@ -20786,20 +20678,20 @@
                 <a:ea typeface="맑은 고딕"/>
                 <a:cs typeface="맑은 고딕"/>
               </a:rPr>
-              <a:t>하루 중 관측한 서로 다른 시각의 개수</a:t>
-            </a:r>
-          </a:p>
-        </p:txBody>
-      </p:sp>
-      <p:sp>
-        <p:nvSpPr>
-          <p:cNvPr id="15" name="TextBox 14"/>
-          <p:cNvSpPr txBox="1"/>
-          <p:nvPr/>
-        </p:nvSpPr>
-        <p:spPr>
-          <a:xfrm>
-            <a:off x="6025896" y="3383280"/>
+              <a:t>1단계 채점을 시작하는 데 필요한 누적 건수</a:t>
+            </a:r>
+          </a:p>
+        </p:txBody>
+      </p:sp>
+      <p:sp>
+        <p:nvSpPr>
+          <p:cNvPr id="12" name="TextBox 11"/>
+          <p:cNvSpPr txBox="1"/>
+          <p:nvPr/>
+        </p:nvSpPr>
+        <p:spPr>
+          <a:xfrm>
+            <a:off x="6025896" y="2880360"/>
             <a:ext cx="2103120" cy="256032"/>
           </a:xfrm>
           <a:prstGeom prst="rect">
@@ -20830,20 +20722,20 @@
                 <a:ea typeface="맑은 고딕"/>
                 <a:cs typeface="맑은 고딕"/>
               </a:rPr>
-              <a:t>재학습 최소 표본</a:t>
-            </a:r>
-          </a:p>
-        </p:txBody>
-      </p:sp>
-      <p:sp>
-        <p:nvSpPr>
-          <p:cNvPr id="16" name="TextBox 15"/>
-          <p:cNvSpPr txBox="1"/>
-          <p:nvPr/>
-        </p:nvSpPr>
-        <p:spPr>
-          <a:xfrm>
-            <a:off x="10618927" y="3383280"/>
+              <a:t>최소 시간대</a:t>
+            </a:r>
+          </a:p>
+        </p:txBody>
+      </p:sp>
+      <p:sp>
+        <p:nvSpPr>
+          <p:cNvPr id="13" name="TextBox 12"/>
+          <p:cNvSpPr txBox="1"/>
+          <p:nvPr/>
+        </p:nvSpPr>
+        <p:spPr>
+          <a:xfrm>
+            <a:off x="10618927" y="2880360"/>
             <a:ext cx="877824" cy="256032"/>
           </a:xfrm>
           <a:prstGeom prst="rect">
@@ -20874,20 +20766,20 @@
                 <a:ea typeface="Consolas"/>
                 <a:cs typeface="Consolas"/>
               </a:rPr>
-              <a:t>5,000</a:t>
-            </a:r>
-          </a:p>
-        </p:txBody>
-      </p:sp>
-      <p:sp>
-        <p:nvSpPr>
-          <p:cNvPr id="17" name="TextBox 16"/>
-          <p:cNvSpPr txBox="1"/>
-          <p:nvPr/>
-        </p:nvSpPr>
-        <p:spPr>
-          <a:xfrm>
-            <a:off x="6025896" y="3657600"/>
+              <a:t>18</a:t>
+            </a:r>
+          </a:p>
+        </p:txBody>
+      </p:sp>
+      <p:sp>
+        <p:nvSpPr>
+          <p:cNvPr id="14" name="TextBox 13"/>
+          <p:cNvSpPr txBox="1"/>
+          <p:nvPr/>
+        </p:nvSpPr>
+        <p:spPr>
+          <a:xfrm>
+            <a:off x="6025896" y="3154680"/>
             <a:ext cx="5452567" cy="274320"/>
           </a:xfrm>
           <a:prstGeom prst="rect">
@@ -20918,20 +20810,20 @@
                 <a:ea typeface="맑은 고딕"/>
                 <a:cs typeface="맑은 고딕"/>
               </a:rPr>
-              <a:t>야간 재학습을 시도할 최소 건수</a:t>
-            </a:r>
-          </a:p>
-        </p:txBody>
-      </p:sp>
-      <p:sp>
-        <p:nvSpPr>
-          <p:cNvPr id="18" name="TextBox 17"/>
-          <p:cNvSpPr txBox="1"/>
-          <p:nvPr/>
-        </p:nvSpPr>
-        <p:spPr>
-          <a:xfrm>
-            <a:off x="6025896" y="3886200"/>
+              <a:t>하루 중 관측한 서로 다른 시각의 개수</a:t>
+            </a:r>
+          </a:p>
+        </p:txBody>
+      </p:sp>
+      <p:sp>
+        <p:nvSpPr>
+          <p:cNvPr id="15" name="TextBox 14"/>
+          <p:cNvSpPr txBox="1"/>
+          <p:nvPr/>
+        </p:nvSpPr>
+        <p:spPr>
+          <a:xfrm>
+            <a:off x="6025896" y="3383280"/>
             <a:ext cx="2103120" cy="256032"/>
           </a:xfrm>
           <a:prstGeom prst="rect">
@@ -20962,20 +20854,20 @@
                 <a:ea typeface="맑은 고딕"/>
                 <a:cs typeface="맑은 고딕"/>
               </a:rPr>
-              <a:t>계산 기준일</a:t>
-            </a:r>
-          </a:p>
-        </p:txBody>
-      </p:sp>
-      <p:sp>
-        <p:nvSpPr>
-          <p:cNvPr id="19" name="TextBox 18"/>
-          <p:cNvSpPr txBox="1"/>
-          <p:nvPr/>
-        </p:nvSpPr>
-        <p:spPr>
-          <a:xfrm>
-            <a:off x="10618927" y="3886200"/>
+              <a:t>재학습 최소 표본</a:t>
+            </a:r>
+          </a:p>
+        </p:txBody>
+      </p:sp>
+      <p:sp>
+        <p:nvSpPr>
+          <p:cNvPr id="16" name="TextBox 15"/>
+          <p:cNvSpPr txBox="1"/>
+          <p:nvPr/>
+        </p:nvSpPr>
+        <p:spPr>
+          <a:xfrm>
+            <a:off x="10618927" y="3383280"/>
             <a:ext cx="877824" cy="256032"/>
           </a:xfrm>
           <a:prstGeom prst="rect">
@@ -21006,7 +20898,139 @@
                 <a:ea typeface="Consolas"/>
                 <a:cs typeface="Consolas"/>
               </a:rPr>
-              <a:t>비움</a:t>
+              <a:t>5,000</a:t>
+            </a:r>
+          </a:p>
+        </p:txBody>
+      </p:sp>
+      <p:sp>
+        <p:nvSpPr>
+          <p:cNvPr id="17" name="TextBox 16"/>
+          <p:cNvSpPr txBox="1"/>
+          <p:nvPr/>
+        </p:nvSpPr>
+        <p:spPr>
+          <a:xfrm>
+            <a:off x="6025896" y="3657600"/>
+            <a:ext cx="5452567" cy="274320"/>
+          </a:xfrm>
+          <a:prstGeom prst="rect">
+            <a:avLst/>
+          </a:prstGeom>
+          <a:noFill/>
+        </p:spPr>
+        <p:txBody>
+          <a:bodyPr wrap="square" lIns="0" rIns="0" tIns="0" bIns="0" anchor="t">
+            <a:spAutoFit/>
+          </a:bodyPr>
+          <a:lstStyle/>
+          <a:p>
+            <a:pPr algn="l">
+              <a:spcBef>
+                <a:spcPts val="0"/>
+              </a:spcBef>
+              <a:spcAft>
+                <a:spcPts val="0"/>
+              </a:spcAft>
+            </a:pPr>
+            <a:r>
+              <a:rPr sz="1050" b="0" i="0">
+                <a:solidFill>
+                  <a:srgbClr val="667085"/>
+                </a:solidFill>
+                <a:latin typeface="맑은 고딕"/>
+                <a:ea typeface="맑은 고딕"/>
+                <a:cs typeface="맑은 고딕"/>
+              </a:rPr>
+              <a:t>야간 재학습을 시도할 최소 건수</a:t>
+            </a:r>
+          </a:p>
+        </p:txBody>
+      </p:sp>
+      <p:sp>
+        <p:nvSpPr>
+          <p:cNvPr id="18" name="TextBox 17"/>
+          <p:cNvSpPr txBox="1"/>
+          <p:nvPr/>
+        </p:nvSpPr>
+        <p:spPr>
+          <a:xfrm>
+            <a:off x="6025896" y="3886200"/>
+            <a:ext cx="2103120" cy="256032"/>
+          </a:xfrm>
+          <a:prstGeom prst="rect">
+            <a:avLst/>
+          </a:prstGeom>
+          <a:noFill/>
+        </p:spPr>
+        <p:txBody>
+          <a:bodyPr wrap="square" lIns="0" rIns="0" tIns="0" bIns="0" anchor="t">
+            <a:spAutoFit/>
+          </a:bodyPr>
+          <a:lstStyle/>
+          <a:p>
+            <a:pPr algn="l">
+              <a:spcBef>
+                <a:spcPts val="0"/>
+              </a:spcBef>
+              <a:spcAft>
+                <a:spcPts val="0"/>
+              </a:spcAft>
+            </a:pPr>
+            <a:r>
+              <a:rPr sz="1200" b="1" i="0">
+                <a:solidFill>
+                  <a:srgbClr val="1A2435"/>
+                </a:solidFill>
+                <a:latin typeface="맑은 고딕"/>
+                <a:ea typeface="맑은 고딕"/>
+                <a:cs typeface="맑은 고딕"/>
+              </a:rPr>
+              <a:t>계산 기준일</a:t>
+            </a:r>
+          </a:p>
+        </p:txBody>
+      </p:sp>
+      <p:sp>
+        <p:nvSpPr>
+          <p:cNvPr id="19" name="TextBox 18"/>
+          <p:cNvSpPr txBox="1"/>
+          <p:nvPr/>
+        </p:nvSpPr>
+        <p:spPr>
+          <a:xfrm>
+            <a:off x="10618927" y="3886200"/>
+            <a:ext cx="877824" cy="256032"/>
+          </a:xfrm>
+          <a:prstGeom prst="rect">
+            <a:avLst/>
+          </a:prstGeom>
+          <a:noFill/>
+        </p:spPr>
+        <p:txBody>
+          <a:bodyPr wrap="square" lIns="0" rIns="0" tIns="0" bIns="0" anchor="t">
+            <a:spAutoFit/>
+          </a:bodyPr>
+          <a:lstStyle/>
+          <a:p>
+            <a:pPr algn="r">
+              <a:spcBef>
+                <a:spcPts val="0"/>
+              </a:spcBef>
+              <a:spcAft>
+                <a:spcPts val="0"/>
+              </a:spcAft>
+            </a:pPr>
+            <a:r>
+              <a:rPr sz="1100" b="0" i="0">
+                <a:solidFill>
+                  <a:srgbClr val="E4572E"/>
+                </a:solidFill>
+                <a:latin typeface="Consolas"/>
+                <a:ea typeface="Consolas"/>
+                <a:cs typeface="Consolas"/>
+              </a:rPr>
+              <a:t>해제</a:t>
             </a:r>
           </a:p>
         </p:txBody>
@@ -21050,7 +21074,7 @@
                 <a:ea typeface="맑은 고딕"/>
                 <a:cs typeface="맑은 고딕"/>
               </a:rPr>
-              <a:t>이 날짜 이전 데이터를 계산에서 제외</a:t>
+              <a:t>달력에서 고릅니다. 체크를 풀면 전체 기간</a:t>
             </a:r>
           </a:p>
         </p:txBody>
@@ -21264,7 +21288,7 @@
                 <a:ea typeface="맑은 고딕"/>
                 <a:cs typeface="맑은 고딕"/>
               </a:rPr>
-              <a:t>며칠치 누적이 사라지므로, 카메라 조준을 복구했거나 설비를 바꾼 때처럼 정말 그 전 것을 잊어야 할 때만 쓰십시오.  |  저장 후 [정지] → [시작] 을 눌러야 반영됩니다 (파이썬은 기동할 때 설정을 읽습니다).</a:t>
+              <a:t>며칠치 누적이 사라지므로, 카메라 조준을 복구했거나 설비를 바꾼 때처럼 정말 그 전 것을 잊어야 할 때만 쓰십시오. 처음 열면 오늘 날짜가 보이지만 체크는 풀려 있습니다 — 고를 때 편하라고 채워 둔 것이지 적용된 값이 아닙니다.  |  저장 후 [정지] → [시작] 을 눌러야 반영됩니다.</a:t>
             </a:r>
           </a:p>
         </p:txBody>

--- a/멀티모달_화재감지_모니터링_설치매뉴얼.pptx
+++ b/멀티모달_화재감지_모니터링_설치매뉴얼.pptx
@@ -6114,7 +6114,7 @@
                 <a:ea typeface="맑은 고딕"/>
                 <a:cs typeface="맑은 고딕"/>
               </a:rPr>
-              <a:t>두 현장의 프로세스 6개를 차례로 기동합니다. 기동 중에는 다시 눌러도 무시됩니다.</a:t>
+              <a:t>두 현장의 프로세스 6개를 차례로 기동합니다. 진행바가 뜨고, 이미지 뷰어가 올라오면 사라집니다. 기동 중에는 다시 눌러도 무시됩니다.</a:t>
             </a:r>
           </a:p>
         </p:txBody>
@@ -6410,7 +6410,7 @@
                 <a:ea typeface="맑은 고딕"/>
                 <a:cs typeface="맑은 고딕"/>
               </a:rPr>
-              <a:t>격자 마스크와 연속 학습 단계 전환 조건을 바꿉니다.</a:t>
+              <a:t>설정 영역을 펼칩니다. 목록과 같은 토글이라 펼친 채로 다른 버튼을 쓸 수 있습니다.</a:t>
             </a:r>
           </a:p>
         </p:txBody>
@@ -20175,65 +20175,21 @@
                 <a:ea typeface="맑은 고딕"/>
                 <a:cs typeface="맑은 고딕"/>
               </a:rPr>
-              <a:t>현장마다 수집 주기도 설비 가동 주기도 다릅니다. [설정] 버튼에서 조정하며, 값은 users\&lt;현장&gt;\env.ini 에 저장됩니다.</a:t>
-            </a:r>
-          </a:p>
-        </p:txBody>
-      </p:sp>
-      <p:sp>
-        <p:nvSpPr>
-          <p:cNvPr id="5" name="TextBox 4"/>
-          <p:cNvSpPr txBox="1"/>
-          <p:nvPr/>
-        </p:nvSpPr>
-        <p:spPr>
-          <a:xfrm>
-            <a:off x="658368" y="2029968"/>
-            <a:ext cx="5029200" cy="274320"/>
-          </a:xfrm>
-          <a:prstGeom prst="rect">
-            <a:avLst/>
-          </a:prstGeom>
-          <a:noFill/>
-        </p:spPr>
-        <p:txBody>
-          <a:bodyPr wrap="square" lIns="0" rIns="0" tIns="0" bIns="0" anchor="t">
-            <a:spAutoFit/>
-          </a:bodyPr>
-          <a:lstStyle/>
-          <a:p>
-            <a:pPr algn="l">
-              <a:spcBef>
-                <a:spcPts val="0"/>
-              </a:spcBef>
-              <a:spcAft>
-                <a:spcPts val="0"/>
-              </a:spcAft>
-            </a:pPr>
-            <a:r>
-              <a:rPr sz="1300" b="1" i="0">
-                <a:solidFill>
-                  <a:srgbClr val="1A2435"/>
-                </a:solidFill>
-                <a:latin typeface="맑은 고딕"/>
-                <a:ea typeface="맑은 고딕"/>
-                <a:cs typeface="맑은 고딕"/>
-              </a:rPr>
-              <a:t>설정 창</a:t>
-            </a:r>
-          </a:p>
-        </p:txBody>
-      </p:sp>
-      <p:sp>
-        <p:nvSpPr>
-          <p:cNvPr id="6" name="Rounded Rectangle 5"/>
+              <a:t>[설정] 버튼을 누르면 창 아래가 펼쳐집니다. 목록과 같은 토글이라 펼친 채로 다른 버튼을 쓸 수 있습니다. 값은 users\&lt;현장&gt;\env.ini 에 저장됩니다.</a:t>
+            </a:r>
+          </a:p>
+        </p:txBody>
+      </p:sp>
+      <p:sp>
+        <p:nvSpPr>
+          <p:cNvPr id="5" name="Rounded Rectangle 4"/>
           <p:cNvSpPr/>
           <p:nvPr/>
         </p:nvSpPr>
         <p:spPr>
           <a:xfrm>
-            <a:off x="658368" y="2359152"/>
-            <a:ext cx="5029200" cy="2262568"/>
+            <a:off x="658368" y="2011680"/>
+            <a:ext cx="10874959" cy="2567686"/>
           </a:xfrm>
           <a:prstGeom prst="roundRect">
             <a:avLst>
@@ -20270,14 +20226,14 @@
       </p:sp>
       <p:sp>
         <p:nvSpPr>
-          <p:cNvPr id="7" name="TextBox 6"/>
-          <p:cNvSpPr txBox="1"/>
-          <p:nvPr/>
-        </p:nvSpPr>
-        <p:spPr>
-          <a:xfrm>
-            <a:off x="859536" y="2560320"/>
-            <a:ext cx="4626864" cy="1860232"/>
+          <p:cNvPr id="6" name="TextBox 5"/>
+          <p:cNvSpPr txBox="1"/>
+          <p:nvPr/>
+        </p:nvSpPr>
+        <p:spPr>
+          <a:xfrm>
+            <a:off x="859536" y="2212848"/>
+            <a:ext cx="10472623" cy="2165350"/>
           </a:xfrm>
           <a:prstGeom prst="rect">
             <a:avLst/>
@@ -20302,7 +20258,7 @@
               </a:spcAft>
             </a:pPr>
             <a:r>
-              <a:rPr sz="1050" b="0" i="0">
+              <a:rPr sz="1000" b="0" i="0">
                 <a:solidFill>
                   <a:srgbClr val="D6DFEA"/>
                 </a:solidFill>
@@ -20310,7 +20266,7 @@
                 <a:ea typeface="Consolas"/>
                 <a:cs typeface="Consolas"/>
               </a:rPr>
-              <a:t>[ 연속 학습 단계 전환 조건 ]</a:t>
+              <a:t>[ 연속학습 조건 ]                         [ 현재 진행 ]</a:t>
             </a:r>
           </a:p>
           <a:p>
@@ -20326,7 +20282,7 @@
               </a:spcAft>
             </a:pPr>
             <a:r>
-              <a:rPr sz="1050" b="0" i="0">
+              <a:rPr sz="1000" b="0" i="0">
                 <a:solidFill>
                   <a:srgbClr val="D6DFEA"/>
                 </a:solidFill>
@@ -20334,7 +20290,7 @@
                 <a:ea typeface="Consolas"/>
                 <a:cs typeface="Consolas"/>
               </a:rPr>
-              <a:t> </a:t>
+              <a:t>1단계 필터링 표본수  [ 3000 ]             0단계 절대임계값   사용 중</a:t>
             </a:r>
           </a:p>
           <a:p>
@@ -20350,7 +20306,7 @@
               </a:spcAft>
             </a:pPr>
             <a:r>
-              <a:rPr sz="1050" b="0" i="0">
+              <a:rPr sz="1000" b="0" i="0">
                 <a:solidFill>
                   <a:srgbClr val="D6DFEA"/>
                 </a:solidFill>
@@ -20358,7 +20314,7 @@
                 <a:ea typeface="Consolas"/>
                 <a:cs typeface="Consolas"/>
               </a:rPr>
-              <a:t>1단계 기준선 최소 표본 (건)     [ 3000 ]</a:t>
+              <a:t>1단계 관측 시간      [   18 ]                온도 207/222도 · 상승 20/34도/분</a:t>
             </a:r>
           </a:p>
           <a:p>
@@ -20374,7 +20330,7 @@
               </a:spcAft>
             </a:pPr>
             <a:r>
-              <a:rPr sz="1050" b="0" i="0">
+              <a:rPr sz="1000" b="0" i="0">
                 <a:solidFill>
                   <a:srgbClr val="D6DFEA"/>
                 </a:solidFill>
@@ -20382,7 +20338,7 @@
                 <a:ea typeface="Consolas"/>
                 <a:cs typeface="Consolas"/>
               </a:rPr>
-              <a:t>1단계 최소 관측 시간대 (1~24)   [   18 ]</a:t>
+              <a:t>2단계 필터링 표본수  [ 5000 ]             1단계 셀별기준선   사용 중</a:t>
             </a:r>
           </a:p>
           <a:p>
@@ -20398,7 +20354,7 @@
               </a:spcAft>
             </a:pPr>
             <a:r>
-              <a:rPr sz="1050" b="0" i="0">
+              <a:rPr sz="1000" b="0" i="0">
                 <a:solidFill>
                   <a:srgbClr val="D6DFEA"/>
                 </a:solidFill>
@@ -20406,7 +20362,7 @@
                 <a:ea typeface="Consolas"/>
                 <a:cs typeface="Consolas"/>
               </a:rPr>
-              <a:t>2단계 재학습 최소 표본 (건)     [ 5000 ]</a:t>
+              <a:t>계산기준일   [ 2026-09-22 v ]                표본 3,000/3,000 · 시간대 9/18</a:t>
             </a:r>
           </a:p>
           <a:p>
@@ -20422,7 +20378,7 @@
               </a:spcAft>
             </a:pPr>
             <a:r>
-              <a:rPr sz="1050" b="0" i="0">
+              <a:rPr sz="1000" b="0" i="0">
                 <a:solidFill>
                   <a:srgbClr val="D6DFEA"/>
                 </a:solidFill>
@@ -20430,7 +20386,7 @@
                 <a:ea typeface="Consolas"/>
                 <a:cs typeface="Consolas"/>
               </a:rPr>
-              <a:t>계산 기준일 (체크 해제 시 전체)</a:t>
+              <a:t>                                          2단계 오토인코더   사용 중</a:t>
             </a:r>
           </a:p>
           <a:p>
@@ -20446,7 +20402,7 @@
               </a:spcAft>
             </a:pPr>
             <a:r>
-              <a:rPr sz="1050" b="0" i="0">
+              <a:rPr sz="1000" b="0" i="0">
                 <a:solidFill>
                   <a:srgbClr val="D6DFEA"/>
                 </a:solidFill>
@@ -20454,7 +20410,7 @@
                 <a:ea typeface="Consolas"/>
                 <a:cs typeface="Consolas"/>
               </a:rPr>
-              <a:t>                        [ ] 2026-09-21  v</a:t>
+              <a:t>[ 절대 임계값 (0단계) ]  주의/경보           모델 2026-09-20 18:28</a:t>
             </a:r>
           </a:p>
           <a:p>
@@ -20470,7 +20426,7 @@
               </a:spcAft>
             </a:pPr>
             <a:r>
-              <a:rPr sz="1050" b="0" i="0">
+              <a:rPr sz="1000" b="0" i="0">
                 <a:solidFill>
                   <a:srgbClr val="D6DFEA"/>
                 </a:solidFill>
@@ -20478,7 +20434,7 @@
                 <a:ea typeface="Consolas"/>
                 <a:cs typeface="Consolas"/>
               </a:rPr>
-              <a:t> </a:t>
+              <a:t>마스크 셀 최고 온도  [ 207 ][ 222 ]       3단계 연속학습     대기</a:t>
             </a:r>
           </a:p>
           <a:p>
@@ -20494,7 +20450,7 @@
               </a:spcAft>
             </a:pPr>
             <a:r>
-              <a:rPr sz="1050" b="0" i="0">
+              <a:rPr sz="1000" b="0" i="0">
                 <a:solidFill>
                   <a:srgbClr val="D6DFEA"/>
                 </a:solidFill>
@@ -20502,351 +20458,135 @@
                 <a:ea typeface="Consolas"/>
                 <a:cs typeface="Consolas"/>
               </a:rPr>
-              <a:t>                                  [ 저장 ]</a:t>
-            </a:r>
-          </a:p>
-        </p:txBody>
-      </p:sp>
-      <p:sp>
-        <p:nvSpPr>
-          <p:cNvPr id="8" name="TextBox 7"/>
-          <p:cNvSpPr txBox="1"/>
-          <p:nvPr/>
-        </p:nvSpPr>
-        <p:spPr>
-          <a:xfrm>
-            <a:off x="5989320" y="2029968"/>
-            <a:ext cx="5544007" cy="274320"/>
-          </a:xfrm>
-          <a:prstGeom prst="rect">
-            <a:avLst/>
-          </a:prstGeom>
-          <a:noFill/>
-        </p:spPr>
-        <p:txBody>
-          <a:bodyPr wrap="square" lIns="0" rIns="0" tIns="0" bIns="0" anchor="t">
-            <a:spAutoFit/>
-          </a:bodyPr>
-          <a:lstStyle/>
-          <a:p>
-            <a:pPr algn="l">
-              <a:spcBef>
-                <a:spcPts val="0"/>
-              </a:spcBef>
-              <a:spcAft>
-                <a:spcPts val="0"/>
-              </a:spcAft>
-            </a:pPr>
-            <a:r>
-              <a:rPr sz="1300" b="1" i="0">
-                <a:solidFill>
-                  <a:srgbClr val="1A2435"/>
-                </a:solidFill>
-                <a:latin typeface="맑은 고딕"/>
-                <a:ea typeface="맑은 고딕"/>
-                <a:cs typeface="맑은 고딕"/>
-              </a:rPr>
-              <a:t>각 항목의 뜻</a:t>
-            </a:r>
-          </a:p>
-        </p:txBody>
-      </p:sp>
-      <p:sp>
-        <p:nvSpPr>
-          <p:cNvPr id="9" name="TextBox 8"/>
-          <p:cNvSpPr txBox="1"/>
-          <p:nvPr/>
-        </p:nvSpPr>
-        <p:spPr>
-          <a:xfrm>
-            <a:off x="6025896" y="2377440"/>
-            <a:ext cx="2103120" cy="256032"/>
-          </a:xfrm>
-          <a:prstGeom prst="rect">
-            <a:avLst/>
-          </a:prstGeom>
-          <a:noFill/>
-        </p:spPr>
-        <p:txBody>
-          <a:bodyPr wrap="square" lIns="0" rIns="0" tIns="0" bIns="0" anchor="t">
-            <a:spAutoFit/>
-          </a:bodyPr>
-          <a:lstStyle/>
-          <a:p>
-            <a:pPr algn="l">
-              <a:spcBef>
-                <a:spcPts val="0"/>
-              </a:spcBef>
-              <a:spcAft>
-                <a:spcPts val="0"/>
-              </a:spcAft>
-            </a:pPr>
-            <a:r>
-              <a:rPr sz="1200" b="1" i="0">
-                <a:solidFill>
-                  <a:srgbClr val="1A2435"/>
-                </a:solidFill>
-                <a:latin typeface="맑은 고딕"/>
-                <a:ea typeface="맑은 고딕"/>
-                <a:cs typeface="맑은 고딕"/>
-              </a:rPr>
-              <a:t>최소 표본</a:t>
-            </a:r>
-          </a:p>
-        </p:txBody>
-      </p:sp>
-      <p:sp>
-        <p:nvSpPr>
-          <p:cNvPr id="10" name="TextBox 9"/>
-          <p:cNvSpPr txBox="1"/>
-          <p:nvPr/>
-        </p:nvSpPr>
-        <p:spPr>
-          <a:xfrm>
-            <a:off x="10618927" y="2377440"/>
-            <a:ext cx="877824" cy="256032"/>
-          </a:xfrm>
-          <a:prstGeom prst="rect">
-            <a:avLst/>
-          </a:prstGeom>
-          <a:noFill/>
-        </p:spPr>
-        <p:txBody>
-          <a:bodyPr wrap="square" lIns="0" rIns="0" tIns="0" bIns="0" anchor="t">
-            <a:spAutoFit/>
-          </a:bodyPr>
-          <a:lstStyle/>
-          <a:p>
-            <a:pPr algn="r">
-              <a:spcBef>
-                <a:spcPts val="0"/>
-              </a:spcBef>
-              <a:spcAft>
-                <a:spcPts val="0"/>
-              </a:spcAft>
-            </a:pPr>
-            <a:r>
-              <a:rPr sz="1100" b="0" i="0">
-                <a:solidFill>
-                  <a:srgbClr val="E4572E"/>
+              <a:t>분당 상승률          [  20 ][  34 ]          재학습 가능 3,200/5,000건</a:t>
+            </a:r>
+          </a:p>
+          <a:p>
+            <a:pPr algn="l">
+              <a:lnSpc>
+                <a:spcPct val="100000"/>
+              </a:lnSpc>
+              <a:spcBef>
+                <a:spcPts val="0"/>
+              </a:spcBef>
+              <a:spcAft>
+                <a:spcPts val="150"/>
+              </a:spcAft>
+            </a:pPr>
+            <a:r>
+              <a:rPr sz="1000" b="0" i="0">
+                <a:solidFill>
+                  <a:srgbClr val="D6DFEA"/>
                 </a:solidFill>
                 <a:latin typeface="Consolas"/>
                 <a:ea typeface="Consolas"/>
                 <a:cs typeface="Consolas"/>
               </a:rPr>
-              <a:t>3,000</a:t>
-            </a:r>
-          </a:p>
-        </p:txBody>
-      </p:sp>
-      <p:sp>
-        <p:nvSpPr>
-          <p:cNvPr id="11" name="TextBox 10"/>
-          <p:cNvSpPr txBox="1"/>
-          <p:nvPr/>
-        </p:nvSpPr>
-        <p:spPr>
-          <a:xfrm>
-            <a:off x="6025896" y="2651760"/>
-            <a:ext cx="5452567" cy="274320"/>
-          </a:xfrm>
-          <a:prstGeom prst="rect">
-            <a:avLst/>
-          </a:prstGeom>
-          <a:noFill/>
-        </p:spPr>
-        <p:txBody>
-          <a:bodyPr wrap="square" lIns="0" rIns="0" tIns="0" bIns="0" anchor="t">
-            <a:spAutoFit/>
-          </a:bodyPr>
-          <a:lstStyle/>
-          <a:p>
-            <a:pPr algn="l">
-              <a:spcBef>
-                <a:spcPts val="0"/>
-              </a:spcBef>
-              <a:spcAft>
-                <a:spcPts val="0"/>
-              </a:spcAft>
-            </a:pPr>
-            <a:r>
-              <a:rPr sz="1050" b="0" i="0">
-                <a:solidFill>
-                  <a:srgbClr val="667085"/>
-                </a:solidFill>
-                <a:latin typeface="맑은 고딕"/>
-                <a:ea typeface="맑은 고딕"/>
-                <a:cs typeface="맑은 고딕"/>
-              </a:rPr>
-              <a:t>1단계 채점을 시작하는 데 필요한 누적 건수</a:t>
-            </a:r>
-          </a:p>
-        </p:txBody>
-      </p:sp>
-      <p:sp>
-        <p:nvSpPr>
-          <p:cNvPr id="12" name="TextBox 11"/>
-          <p:cNvSpPr txBox="1"/>
-          <p:nvPr/>
-        </p:nvSpPr>
-        <p:spPr>
-          <a:xfrm>
-            <a:off x="6025896" y="2880360"/>
-            <a:ext cx="2103120" cy="256032"/>
-          </a:xfrm>
-          <a:prstGeom prst="rect">
-            <a:avLst/>
-          </a:prstGeom>
-          <a:noFill/>
-        </p:spPr>
-        <p:txBody>
-          <a:bodyPr wrap="square" lIns="0" rIns="0" tIns="0" bIns="0" anchor="t">
-            <a:spAutoFit/>
-          </a:bodyPr>
-          <a:lstStyle/>
-          <a:p>
-            <a:pPr algn="l">
-              <a:spcBef>
-                <a:spcPts val="0"/>
-              </a:spcBef>
-              <a:spcAft>
-                <a:spcPts val="0"/>
-              </a:spcAft>
-            </a:pPr>
-            <a:r>
-              <a:rPr sz="1200" b="1" i="0">
-                <a:solidFill>
-                  <a:srgbClr val="1A2435"/>
-                </a:solidFill>
-                <a:latin typeface="맑은 고딕"/>
-                <a:ea typeface="맑은 고딕"/>
-                <a:cs typeface="맑은 고딕"/>
-              </a:rPr>
-              <a:t>최소 시간대</a:t>
-            </a:r>
-          </a:p>
-        </p:txBody>
-      </p:sp>
-      <p:sp>
-        <p:nvSpPr>
-          <p:cNvPr id="13" name="TextBox 12"/>
-          <p:cNvSpPr txBox="1"/>
-          <p:nvPr/>
-        </p:nvSpPr>
-        <p:spPr>
-          <a:xfrm>
-            <a:off x="10618927" y="2880360"/>
-            <a:ext cx="877824" cy="256032"/>
-          </a:xfrm>
-          <a:prstGeom prst="rect">
-            <a:avLst/>
-          </a:prstGeom>
-          <a:noFill/>
-        </p:spPr>
-        <p:txBody>
-          <a:bodyPr wrap="square" lIns="0" rIns="0" tIns="0" bIns="0" anchor="t">
-            <a:spAutoFit/>
-          </a:bodyPr>
-          <a:lstStyle/>
-          <a:p>
-            <a:pPr algn="r">
-              <a:spcBef>
-                <a:spcPts val="0"/>
-              </a:spcBef>
-              <a:spcAft>
-                <a:spcPts val="0"/>
-              </a:spcAft>
-            </a:pPr>
-            <a:r>
-              <a:rPr sz="1100" b="0" i="0">
-                <a:solidFill>
-                  <a:srgbClr val="E4572E"/>
+              <a:t> </a:t>
+            </a:r>
+          </a:p>
+          <a:p>
+            <a:pPr algn="l">
+              <a:lnSpc>
+                <a:spcPct val="100000"/>
+              </a:lnSpc>
+              <a:spcBef>
+                <a:spcPts val="0"/>
+              </a:spcBef>
+              <a:spcAft>
+                <a:spcPts val="150"/>
+              </a:spcAft>
+            </a:pPr>
+            <a:r>
+              <a:rPr sz="1000" b="0" i="0">
+                <a:solidFill>
+                  <a:srgbClr val="D6DFEA"/>
                 </a:solidFill>
                 <a:latin typeface="Consolas"/>
                 <a:ea typeface="Consolas"/>
                 <a:cs typeface="Consolas"/>
               </a:rPr>
-              <a:t>18</a:t>
-            </a:r>
-          </a:p>
-        </p:txBody>
-      </p:sp>
-      <p:sp>
-        <p:nvSpPr>
-          <p:cNvPr id="14" name="TextBox 13"/>
-          <p:cNvSpPr txBox="1"/>
-          <p:nvPr/>
-        </p:nvSpPr>
-        <p:spPr>
-          <a:xfrm>
-            <a:off x="6025896" y="3154680"/>
-            <a:ext cx="5452567" cy="274320"/>
-          </a:xfrm>
-          <a:prstGeom prst="rect">
-            <a:avLst/>
-          </a:prstGeom>
-          <a:noFill/>
-        </p:spPr>
-        <p:txBody>
-          <a:bodyPr wrap="square" lIns="0" rIns="0" tIns="0" bIns="0" anchor="t">
-            <a:spAutoFit/>
-          </a:bodyPr>
-          <a:lstStyle/>
-          <a:p>
-            <a:pPr algn="l">
-              <a:spcBef>
-                <a:spcPts val="0"/>
-              </a:spcBef>
-              <a:spcAft>
-                <a:spcPts val="0"/>
-              </a:spcAft>
-            </a:pPr>
-            <a:r>
-              <a:rPr sz="1050" b="0" i="0">
-                <a:solidFill>
-                  <a:srgbClr val="667085"/>
-                </a:solidFill>
-                <a:latin typeface="맑은 고딕"/>
-                <a:ea typeface="맑은 고딕"/>
-                <a:cs typeface="맑은 고딕"/>
-              </a:rPr>
-              <a:t>하루 중 관측한 서로 다른 시각의 개수</a:t>
-            </a:r>
-          </a:p>
-        </p:txBody>
-      </p:sp>
-      <p:sp>
-        <p:nvSpPr>
-          <p:cNvPr id="15" name="TextBox 14"/>
-          <p:cNvSpPr txBox="1"/>
-          <p:nvPr/>
-        </p:nvSpPr>
-        <p:spPr>
-          <a:xfrm>
-            <a:off x="6025896" y="3383280"/>
-            <a:ext cx="2103120" cy="256032"/>
-          </a:xfrm>
-          <a:prstGeom prst="rect">
-            <a:avLst/>
-          </a:prstGeom>
-          <a:noFill/>
-        </p:spPr>
-        <p:txBody>
-          <a:bodyPr wrap="square" lIns="0" rIns="0" tIns="0" bIns="0" anchor="t">
-            <a:spAutoFit/>
-          </a:bodyPr>
-          <a:lstStyle/>
-          <a:p>
-            <a:pPr algn="l">
-              <a:spcBef>
-                <a:spcPts val="0"/>
-              </a:spcBef>
-              <a:spcAft>
-                <a:spcPts val="0"/>
-              </a:spcAft>
-            </a:pPr>
-            <a:r>
-              <a:rPr sz="1200" b="1" i="0">
+              <a:t>[ 설정 적용 ]</a:t>
+            </a:r>
+          </a:p>
+        </p:txBody>
+      </p:sp>
+      <p:sp>
+        <p:nvSpPr>
+          <p:cNvPr id="7" name="Rounded Rectangle 6"/>
+          <p:cNvSpPr/>
+          <p:nvPr/>
+        </p:nvSpPr>
+        <p:spPr>
+          <a:xfrm>
+            <a:off x="658368" y="4718304"/>
+            <a:ext cx="5300319" cy="1444752"/>
+          </a:xfrm>
+          <a:prstGeom prst="roundRect">
+            <a:avLst>
+              <a:gd name="adj" fmla="val 6000"/>
+            </a:avLst>
+          </a:prstGeom>
+          <a:solidFill>
+            <a:srgbClr val="F2F4F7"/>
+          </a:solidFill>
+          <a:ln>
+            <a:noFill/>
+          </a:ln>
+          <a:effectLst/>
+        </p:spPr>
+        <p:style>
+          <a:lnRef idx="1">
+            <a:schemeClr val="accent1"/>
+          </a:lnRef>
+          <a:fillRef idx="3">
+            <a:schemeClr val="accent1"/>
+          </a:fillRef>
+          <a:effectRef idx="2">
+            <a:schemeClr val="accent1"/>
+          </a:effectRef>
+          <a:fontRef idx="minor">
+            <a:schemeClr val="lt1"/>
+          </a:fontRef>
+        </p:style>
+        <p:txBody>
+          <a:bodyPr rtlCol="0" anchor="ctr"/>
+          <a:lstStyle/>
+          <a:p/>
+        </p:txBody>
+      </p:sp>
+      <p:sp>
+        <p:nvSpPr>
+          <p:cNvPr id="8" name="TextBox 7"/>
+          <p:cNvSpPr txBox="1"/>
+          <p:nvPr/>
+        </p:nvSpPr>
+        <p:spPr>
+          <a:xfrm>
+            <a:off x="914400" y="4864608"/>
+            <a:ext cx="4788255" cy="274320"/>
+          </a:xfrm>
+          <a:prstGeom prst="rect">
+            <a:avLst/>
+          </a:prstGeom>
+          <a:noFill/>
+        </p:spPr>
+        <p:txBody>
+          <a:bodyPr wrap="square" lIns="0" rIns="0" tIns="0" bIns="0" anchor="t">
+            <a:spAutoFit/>
+          </a:bodyPr>
+          <a:lstStyle/>
+          <a:p>
+            <a:pPr algn="l">
+              <a:spcBef>
+                <a:spcPts val="0"/>
+              </a:spcBef>
+              <a:spcAft>
+                <a:spcPts val="0"/>
+              </a:spcAft>
+            </a:pPr>
+            <a:r>
+              <a:rPr sz="1250" b="1" i="0">
                 <a:solidFill>
                   <a:srgbClr val="1A2435"/>
                 </a:solidFill>
@@ -20854,241 +20594,92 @@
                 <a:ea typeface="맑은 고딕"/>
                 <a:cs typeface="맑은 고딕"/>
               </a:rPr>
-              <a:t>재학습 최소 표본</a:t>
-            </a:r>
-          </a:p>
-        </p:txBody>
-      </p:sp>
-      <p:sp>
-        <p:nvSpPr>
-          <p:cNvPr id="16" name="TextBox 15"/>
-          <p:cNvSpPr txBox="1"/>
-          <p:nvPr/>
-        </p:nvSpPr>
-        <p:spPr>
-          <a:xfrm>
-            <a:off x="10618927" y="3383280"/>
-            <a:ext cx="877824" cy="256032"/>
-          </a:xfrm>
-          <a:prstGeom prst="rect">
-            <a:avLst/>
-          </a:prstGeom>
-          <a:noFill/>
-        </p:spPr>
-        <p:txBody>
-          <a:bodyPr wrap="square" lIns="0" rIns="0" tIns="0" bIns="0" anchor="t">
-            <a:spAutoFit/>
-          </a:bodyPr>
-          <a:lstStyle/>
-          <a:p>
-            <a:pPr algn="r">
-              <a:spcBef>
-                <a:spcPts val="0"/>
-              </a:spcBef>
-              <a:spcAft>
-                <a:spcPts val="0"/>
+              <a:t>왼쪽 — 조건을 정한다</a:t>
+            </a:r>
+          </a:p>
+        </p:txBody>
+      </p:sp>
+      <p:sp>
+        <p:nvSpPr>
+          <p:cNvPr id="9" name="TextBox 8"/>
+          <p:cNvSpPr txBox="1"/>
+          <p:nvPr/>
+        </p:nvSpPr>
+        <p:spPr>
+          <a:xfrm>
+            <a:off x="914400" y="5175504"/>
+            <a:ext cx="4788255" cy="914400"/>
+          </a:xfrm>
+          <a:prstGeom prst="rect">
+            <a:avLst/>
+          </a:prstGeom>
+          <a:noFill/>
+        </p:spPr>
+        <p:txBody>
+          <a:bodyPr wrap="square" lIns="0" rIns="0" tIns="0" bIns="0" anchor="t">
+            <a:spAutoFit/>
+          </a:bodyPr>
+          <a:lstStyle/>
+          <a:p>
+            <a:pPr algn="l">
+              <a:lnSpc>
+                <a:spcPct val="125000"/>
+              </a:lnSpc>
+              <a:spcBef>
+                <a:spcPts val="0"/>
+              </a:spcBef>
+              <a:spcAft>
+                <a:spcPts val="500"/>
               </a:spcAft>
             </a:pPr>
             <a:r>
               <a:rPr sz="1100" b="0" i="0">
                 <a:solidFill>
+                  <a:srgbClr val="1A2435"/>
+                </a:solidFill>
+                <a:latin typeface="맑은 고딕"/>
+                <a:ea typeface="맑은 고딕"/>
+                <a:cs typeface="맑은 고딕"/>
+              </a:rPr>
+              <a:t>위 묶음은 단계가 언제 켜질지, 아래 묶음은 0단계가 언제 경보할지 정합니다. 버튼 하나로 함께 저장하며, 값이 하나라도 잘못되면 아무것도 쓰지 않습니다.</a:t>
+            </a:r>
+          </a:p>
+          <a:p>
+            <a:pPr algn="l">
+              <a:lnSpc>
+                <a:spcPct val="125000"/>
+              </a:lnSpc>
+              <a:spcBef>
+                <a:spcPts val="0"/>
+              </a:spcBef>
+              <a:spcAft>
+                <a:spcPts val="0"/>
+              </a:spcAft>
+            </a:pPr>
+            <a:r>
+              <a:rPr sz="1100" b="0" i="0">
+                <a:solidFill>
                   <a:srgbClr val="E4572E"/>
                 </a:solidFill>
-                <a:latin typeface="Consolas"/>
-                <a:ea typeface="Consolas"/>
-                <a:cs typeface="Consolas"/>
-              </a:rPr>
-              <a:t>5,000</a:t>
-            </a:r>
-          </a:p>
-        </p:txBody>
-      </p:sp>
-      <p:sp>
-        <p:nvSpPr>
-          <p:cNvPr id="17" name="TextBox 16"/>
-          <p:cNvSpPr txBox="1"/>
-          <p:nvPr/>
-        </p:nvSpPr>
-        <p:spPr>
-          <a:xfrm>
-            <a:off x="6025896" y="3657600"/>
-            <a:ext cx="5452567" cy="274320"/>
-          </a:xfrm>
-          <a:prstGeom prst="rect">
-            <a:avLst/>
-          </a:prstGeom>
-          <a:noFill/>
-        </p:spPr>
-        <p:txBody>
-          <a:bodyPr wrap="square" lIns="0" rIns="0" tIns="0" bIns="0" anchor="t">
-            <a:spAutoFit/>
-          </a:bodyPr>
-          <a:lstStyle/>
-          <a:p>
-            <a:pPr algn="l">
-              <a:spcBef>
-                <a:spcPts val="0"/>
-              </a:spcBef>
-              <a:spcAft>
-                <a:spcPts val="0"/>
-              </a:spcAft>
-            </a:pPr>
-            <a:r>
-              <a:rPr sz="1050" b="0" i="0">
-                <a:solidFill>
-                  <a:srgbClr val="667085"/>
-                </a:solidFill>
-                <a:latin typeface="맑은 고딕"/>
-                <a:ea typeface="맑은 고딕"/>
-                <a:cs typeface="맑은 고딕"/>
-              </a:rPr>
-              <a:t>야간 재학습을 시도할 최소 건수</a:t>
-            </a:r>
-          </a:p>
-        </p:txBody>
-      </p:sp>
-      <p:sp>
-        <p:nvSpPr>
-          <p:cNvPr id="18" name="TextBox 17"/>
-          <p:cNvSpPr txBox="1"/>
-          <p:nvPr/>
-        </p:nvSpPr>
-        <p:spPr>
-          <a:xfrm>
-            <a:off x="6025896" y="3886200"/>
-            <a:ext cx="2103120" cy="256032"/>
-          </a:xfrm>
-          <a:prstGeom prst="rect">
-            <a:avLst/>
-          </a:prstGeom>
-          <a:noFill/>
-        </p:spPr>
-        <p:txBody>
-          <a:bodyPr wrap="square" lIns="0" rIns="0" tIns="0" bIns="0" anchor="t">
-            <a:spAutoFit/>
-          </a:bodyPr>
-          <a:lstStyle/>
-          <a:p>
-            <a:pPr algn="l">
-              <a:spcBef>
-                <a:spcPts val="0"/>
-              </a:spcBef>
-              <a:spcAft>
-                <a:spcPts val="0"/>
-              </a:spcAft>
-            </a:pPr>
-            <a:r>
-              <a:rPr sz="1200" b="1" i="0">
-                <a:solidFill>
-                  <a:srgbClr val="1A2435"/>
-                </a:solidFill>
-                <a:latin typeface="맑은 고딕"/>
-                <a:ea typeface="맑은 고딕"/>
-                <a:cs typeface="맑은 고딕"/>
-              </a:rPr>
-              <a:t>계산 기준일</a:t>
-            </a:r>
-          </a:p>
-        </p:txBody>
-      </p:sp>
-      <p:sp>
-        <p:nvSpPr>
-          <p:cNvPr id="19" name="TextBox 18"/>
-          <p:cNvSpPr txBox="1"/>
-          <p:nvPr/>
-        </p:nvSpPr>
-        <p:spPr>
-          <a:xfrm>
-            <a:off x="10618927" y="3886200"/>
-            <a:ext cx="877824" cy="256032"/>
-          </a:xfrm>
-          <a:prstGeom prst="rect">
-            <a:avLst/>
-          </a:prstGeom>
-          <a:noFill/>
-        </p:spPr>
-        <p:txBody>
-          <a:bodyPr wrap="square" lIns="0" rIns="0" tIns="0" bIns="0" anchor="t">
-            <a:spAutoFit/>
-          </a:bodyPr>
-          <a:lstStyle/>
-          <a:p>
-            <a:pPr algn="r">
-              <a:spcBef>
-                <a:spcPts val="0"/>
-              </a:spcBef>
-              <a:spcAft>
-                <a:spcPts val="0"/>
-              </a:spcAft>
-            </a:pPr>
-            <a:r>
-              <a:rPr sz="1100" b="0" i="0">
-                <a:solidFill>
-                  <a:srgbClr val="E4572E"/>
-                </a:solidFill>
-                <a:latin typeface="Consolas"/>
-                <a:ea typeface="Consolas"/>
-                <a:cs typeface="Consolas"/>
-              </a:rPr>
-              <a:t>해제</a:t>
-            </a:r>
-          </a:p>
-        </p:txBody>
-      </p:sp>
-      <p:sp>
-        <p:nvSpPr>
-          <p:cNvPr id="20" name="TextBox 19"/>
-          <p:cNvSpPr txBox="1"/>
-          <p:nvPr/>
-        </p:nvSpPr>
-        <p:spPr>
-          <a:xfrm>
-            <a:off x="6025896" y="4160520"/>
-            <a:ext cx="5452567" cy="274320"/>
-          </a:xfrm>
-          <a:prstGeom prst="rect">
-            <a:avLst/>
-          </a:prstGeom>
-          <a:noFill/>
-        </p:spPr>
-        <p:txBody>
-          <a:bodyPr wrap="square" lIns="0" rIns="0" tIns="0" bIns="0" anchor="t">
-            <a:spAutoFit/>
-          </a:bodyPr>
-          <a:lstStyle/>
-          <a:p>
-            <a:pPr algn="l">
-              <a:spcBef>
-                <a:spcPts val="0"/>
-              </a:spcBef>
-              <a:spcAft>
-                <a:spcPts val="0"/>
-              </a:spcAft>
-            </a:pPr>
-            <a:r>
-              <a:rPr sz="1050" b="0" i="0">
-                <a:solidFill>
-                  <a:srgbClr val="667085"/>
-                </a:solidFill>
-                <a:latin typeface="맑은 고딕"/>
-                <a:ea typeface="맑은 고딕"/>
-                <a:cs typeface="맑은 고딕"/>
-              </a:rPr>
-              <a:t>달력에서 고릅니다. 체크를 풀면 전체 기간</a:t>
-            </a:r>
-          </a:p>
-        </p:txBody>
-      </p:sp>
-      <p:sp>
-        <p:nvSpPr>
-          <p:cNvPr id="21" name="Rounded Rectangle 20"/>
+                <a:latin typeface="맑은 고딕"/>
+                <a:ea typeface="맑은 고딕"/>
+                <a:cs typeface="맑은 고딕"/>
+              </a:rPr>
+              <a:t>임계값은 설비마다 전혀 다릅니다. 네 칸을 모두 비우면 0단계가 꺼집니다.</a:t>
+            </a:r>
+          </a:p>
+        </p:txBody>
+      </p:sp>
+      <p:sp>
+        <p:nvSpPr>
+          <p:cNvPr id="10" name="Rounded Rectangle 9"/>
           <p:cNvSpPr/>
           <p:nvPr/>
         </p:nvSpPr>
         <p:spPr>
           <a:xfrm>
-            <a:off x="658368" y="4517136"/>
-            <a:ext cx="10874959" cy="1645920"/>
+            <a:off x="6233007" y="4718304"/>
+            <a:ext cx="5300319" cy="1444752"/>
           </a:xfrm>
           <a:prstGeom prst="roundRect">
             <a:avLst>
@@ -21125,91 +20716,36 @@
       </p:sp>
       <p:sp>
         <p:nvSpPr>
-          <p:cNvPr id="22" name="Oval 21"/>
-          <p:cNvSpPr/>
-          <p:nvPr/>
-        </p:nvSpPr>
-        <p:spPr>
-          <a:xfrm>
-            <a:off x="932688" y="4736592"/>
-            <a:ext cx="347472" cy="347472"/>
-          </a:xfrm>
-          <a:prstGeom prst="ellipse">
-            <a:avLst/>
-          </a:prstGeom>
-          <a:solidFill>
-            <a:srgbClr val="E4572E"/>
-          </a:solidFill>
-          <a:ln>
-            <a:noFill/>
-          </a:ln>
-          <a:effectLst/>
-        </p:spPr>
-        <p:style>
-          <a:lnRef idx="1">
-            <a:schemeClr val="accent1"/>
-          </a:lnRef>
-          <a:fillRef idx="3">
-            <a:schemeClr val="accent1"/>
-          </a:fillRef>
-          <a:effectRef idx="2">
-            <a:schemeClr val="accent1"/>
-          </a:effectRef>
-          <a:fontRef idx="minor">
-            <a:schemeClr val="lt1"/>
-          </a:fontRef>
-        </p:style>
-        <p:txBody>
-          <a:bodyPr rtlCol="0" anchor="ctr" lIns="0" rIns="0" tIns="0" bIns="0"/>
-          <a:lstStyle/>
-          <a:p>
-            <a:pPr algn="ctr"/>
-            <a:r>
-              <a:rPr sz="1400" b="1" i="0">
-                <a:solidFill>
-                  <a:srgbClr val="FFFFFF"/>
-                </a:solidFill>
-                <a:latin typeface="맑은 고딕"/>
-                <a:ea typeface="맑은 고딕"/>
-                <a:cs typeface="맑은 고딕"/>
-              </a:rPr>
-              <a:t>!</a:t>
-            </a:r>
-          </a:p>
-        </p:txBody>
-      </p:sp>
-      <p:sp>
-        <p:nvSpPr>
-          <p:cNvPr id="23" name="TextBox 22"/>
-          <p:cNvSpPr txBox="1"/>
-          <p:nvPr/>
-        </p:nvSpPr>
-        <p:spPr>
-          <a:xfrm>
-            <a:off x="1408176" y="4754880"/>
-            <a:ext cx="9692640" cy="274320"/>
-          </a:xfrm>
-          <a:prstGeom prst="rect">
-            <a:avLst/>
-          </a:prstGeom>
-          <a:noFill/>
-        </p:spPr>
-        <p:txBody>
-          <a:bodyPr wrap="square" lIns="0" rIns="0" tIns="0" bIns="0" anchor="t">
-            <a:spAutoFit/>
-          </a:bodyPr>
-          <a:lstStyle/>
-          <a:p>
-            <a:pPr algn="l">
-              <a:spcBef>
-                <a:spcPts val="0"/>
-              </a:spcBef>
-              <a:spcAft>
-                <a:spcPts val="0"/>
-              </a:spcAft>
-            </a:pPr>
-            <a:r>
-              <a:rPr sz="1300" b="1" i="0">
+          <p:cNvPr id="11" name="TextBox 10"/>
+          <p:cNvSpPr txBox="1"/>
+          <p:nvPr/>
+        </p:nvSpPr>
+        <p:spPr>
+          <a:xfrm>
+            <a:off x="6489039" y="4864608"/>
+            <a:ext cx="4788255" cy="274320"/>
+          </a:xfrm>
+          <a:prstGeom prst="rect">
+            <a:avLst/>
+          </a:prstGeom>
+          <a:noFill/>
+        </p:spPr>
+        <p:txBody>
+          <a:bodyPr wrap="square" lIns="0" rIns="0" tIns="0" bIns="0" anchor="t">
+            <a:spAutoFit/>
+          </a:bodyPr>
+          <a:lstStyle/>
+          <a:p>
+            <a:pPr algn="l">
+              <a:spcBef>
+                <a:spcPts val="0"/>
+              </a:spcBef>
+              <a:spcAft>
+                <a:spcPts val="0"/>
+              </a:spcAft>
+            </a:pPr>
+            <a:r>
+              <a:rPr sz="1250" b="1" i="0">
                 <a:solidFill>
                   <a:srgbClr val="E4572E"/>
                 </a:solidFill>
@@ -21217,21 +20753,21 @@
                 <a:ea typeface="맑은 고딕"/>
                 <a:cs typeface="맑은 고딕"/>
               </a:rPr>
-              <a:t>계산 기준일을 바꾸면 셀별 기준선을 버리고 처음부터 다시 쌓습니다</a:t>
-            </a:r>
-          </a:p>
-        </p:txBody>
-      </p:sp>
-      <p:sp>
-        <p:nvSpPr>
-          <p:cNvPr id="24" name="TextBox 23"/>
-          <p:cNvSpPr txBox="1"/>
-          <p:nvPr/>
-        </p:nvSpPr>
-        <p:spPr>
-          <a:xfrm>
-            <a:off x="932688" y="5138928"/>
-            <a:ext cx="10326319" cy="914400"/>
+              <a:t>계산기준일을 바꾸면 기준선을 새로 쌓습니다</a:t>
+            </a:r>
+          </a:p>
+        </p:txBody>
+      </p:sp>
+      <p:sp>
+        <p:nvSpPr>
+          <p:cNvPr id="12" name="TextBox 11"/>
+          <p:cNvSpPr txBox="1"/>
+          <p:nvPr/>
+        </p:nvSpPr>
+        <p:spPr>
+          <a:xfrm>
+            <a:off x="6489039" y="5175504"/>
+            <a:ext cx="4788255" cy="914400"/>
           </a:xfrm>
           <a:prstGeom prst="rect">
             <a:avLst/>
@@ -21252,11 +20788,11 @@
                 <a:spcPts val="0"/>
               </a:spcBef>
               <a:spcAft>
-                <a:spcPts val="600"/>
-              </a:spcAft>
-            </a:pPr>
-            <a:r>
-              <a:rPr sz="1150" b="0" i="0">
+                <a:spcPts val="500"/>
+              </a:spcAft>
+            </a:pPr>
+            <a:r>
+              <a:rPr sz="1100" b="0" i="0">
                 <a:solidFill>
                   <a:srgbClr val="1A2435"/>
                 </a:solidFill>
@@ -21264,7 +20800,7 @@
                 <a:ea typeface="맑은 고딕"/>
                 <a:cs typeface="맑은 고딕"/>
               </a:rPr>
-              <a:t>히스토리 DB 는 날짜별 테이블이라 기준일 이전 구간을 정확히 잘라낼 수 있습니다. 반면 셀별 기준선의 히스토그램에는 표본별 시각이 남지 않아 과거만 골라 뺄 수 없습니다. 그래서 새로 쌓는 수밖에 없습니다.</a:t>
+              <a:t>히스토리 DB 는 날짜별 테이블이라 정확히 잘라내지만, 셀별 기준선에는 표본별 시각이 없어 과거만 뺄 수 없습니다. 며칠치가 사라지므로 바뀔 때 확인을 묻습니다.</a:t>
             </a:r>
           </a:p>
           <a:p>
@@ -21280,7 +20816,7 @@
               </a:spcAft>
             </a:pPr>
             <a:r>
-              <a:rPr sz="1150" b="1" i="0">
+              <a:rPr sz="1100" b="1" i="0">
                 <a:solidFill>
                   <a:srgbClr val="E4572E"/>
                 </a:solidFill>
@@ -21288,14 +20824,14 @@
                 <a:ea typeface="맑은 고딕"/>
                 <a:cs typeface="맑은 고딕"/>
               </a:rPr>
-              <a:t>며칠치 누적이 사라지므로, 카메라 조준을 복구했거나 설비를 바꾼 때처럼 정말 그 전 것을 잊어야 할 때만 쓰십시오. 처음 열면 오늘 날짜가 보이지만 체크는 풀려 있습니다 — 고를 때 편하라고 채워 둔 것이지 적용된 값이 아닙니다.  |  저장 후 [정지] → [시작] 을 눌러야 반영됩니다.</a:t>
-            </a:r>
-          </a:p>
-        </p:txBody>
-      </p:sp>
-      <p:sp>
-        <p:nvSpPr>
-          <p:cNvPr id="25" name="TextBox 24"/>
+              <a:t>저장 후 [정지] → [시작] 을 눌러야 반영됩니다.</a:t>
+            </a:r>
+          </a:p>
+        </p:txBody>
+      </p:sp>
+      <p:sp>
+        <p:nvSpPr>
+          <p:cNvPr id="13" name="TextBox 12"/>
           <p:cNvSpPr txBox="1"/>
           <p:nvPr/>
         </p:nvSpPr>

--- a/멀티모달_화재감지_모니터링_설치매뉴얼.pptx
+++ b/멀티모달_화재감지_모니터링_설치매뉴얼.pptx
@@ -14977,55 +14977,44 @@
       </p:sp>
       <p:sp>
         <p:nvSpPr>
-          <p:cNvPr id="24" name="Oval 23"/>
-          <p:cNvSpPr/>
-          <p:nvPr/>
-        </p:nvSpPr>
-        <p:spPr>
-          <a:xfrm>
-            <a:off x="9235440" y="2615184"/>
-            <a:ext cx="475488" cy="475488"/>
-          </a:xfrm>
-          <a:prstGeom prst="ellipse">
-            <a:avLst/>
-          </a:prstGeom>
-          <a:solidFill>
-            <a:srgbClr val="3D6BA8"/>
-          </a:solidFill>
-          <a:ln>
-            <a:noFill/>
-          </a:ln>
-          <a:effectLst/>
-        </p:spPr>
-        <p:style>
-          <a:lnRef idx="1">
-            <a:schemeClr val="accent1"/>
-          </a:lnRef>
-          <a:fillRef idx="3">
-            <a:schemeClr val="accent1"/>
-          </a:fillRef>
-          <a:effectRef idx="2">
-            <a:schemeClr val="accent1"/>
-          </a:effectRef>
-          <a:fontRef idx="minor">
-            <a:schemeClr val="lt1"/>
-          </a:fontRef>
-        </p:style>
-        <p:txBody>
-          <a:bodyPr rtlCol="0" anchor="ctr" lIns="0" rIns="0" tIns="0" bIns="0"/>
-          <a:lstStyle/>
-          <a:p>
-            <a:pPr algn="ctr"/>
-            <a:r>
-              <a:rPr sz="1700" b="1" i="0">
-                <a:solidFill>
-                  <a:srgbClr val="FFFFFF"/>
-                </a:solidFill>
-                <a:latin typeface="맑은 고딕"/>
-                <a:ea typeface="맑은 고딕"/>
-                <a:cs typeface="맑은 고딕"/>
-              </a:rPr>
-              <a:t>3</a:t>
+          <p:cNvPr id="24" name="TextBox 23"/>
+          <p:cNvSpPr txBox="1"/>
+          <p:nvPr/>
+        </p:nvSpPr>
+        <p:spPr>
+          <a:xfrm>
+            <a:off x="9235440" y="2688336"/>
+            <a:ext cx="2066543" cy="274320"/>
+          </a:xfrm>
+          <a:prstGeom prst="rect">
+            <a:avLst/>
+          </a:prstGeom>
+          <a:noFill/>
+        </p:spPr>
+        <p:txBody>
+          <a:bodyPr wrap="square" lIns="0" rIns="0" tIns="0" bIns="0" anchor="t">
+            <a:spAutoFit/>
+          </a:bodyPr>
+          <a:lstStyle/>
+          <a:p>
+            <a:pPr algn="l">
+              <a:spcBef>
+                <a:spcPts val="0"/>
+              </a:spcBef>
+              <a:spcAft>
+                <a:spcPts val="0"/>
+              </a:spcAft>
+            </a:pPr>
+            <a:r>
+              <a:rPr sz="1400" b="1" i="0">
+                <a:solidFill>
+                  <a:srgbClr val="1A2435"/>
+                </a:solidFill>
+                <a:latin typeface="맑은 고딕"/>
+                <a:ea typeface="맑은 고딕"/>
+                <a:cs typeface="맑은 고딕"/>
+              </a:rPr>
+              <a:t>연속학습</a:t>
             </a:r>
           </a:p>
         </p:txBody>
@@ -15033,50 +15022,6 @@
       <p:sp>
         <p:nvSpPr>
           <p:cNvPr id="25" name="TextBox 24"/>
-          <p:cNvSpPr txBox="1"/>
-          <p:nvPr/>
-        </p:nvSpPr>
-        <p:spPr>
-          <a:xfrm>
-            <a:off x="9820656" y="2688336"/>
-            <a:ext cx="1536191" cy="274320"/>
-          </a:xfrm>
-          <a:prstGeom prst="rect">
-            <a:avLst/>
-          </a:prstGeom>
-          <a:noFill/>
-        </p:spPr>
-        <p:txBody>
-          <a:bodyPr wrap="square" lIns="0" rIns="0" tIns="0" bIns="0" anchor="t">
-            <a:spAutoFit/>
-          </a:bodyPr>
-          <a:lstStyle/>
-          <a:p>
-            <a:pPr algn="l">
-              <a:spcBef>
-                <a:spcPts val="0"/>
-              </a:spcBef>
-              <a:spcAft>
-                <a:spcPts val="0"/>
-              </a:spcAft>
-            </a:pPr>
-            <a:r>
-              <a:rPr sz="1400" b="1" i="0">
-                <a:solidFill>
-                  <a:srgbClr val="1A2435"/>
-                </a:solidFill>
-                <a:latin typeface="맑은 고딕"/>
-                <a:ea typeface="맑은 고딕"/>
-                <a:cs typeface="맑은 고딕"/>
-              </a:rPr>
-              <a:t>야간 재학습</a:t>
-            </a:r>
-          </a:p>
-        </p:txBody>
-      </p:sp>
-      <p:sp>
-        <p:nvSpPr>
-          <p:cNvPr id="26" name="TextBox 25"/>
           <p:cNvSpPr txBox="1"/>
           <p:nvPr/>
         </p:nvSpPr>
@@ -15141,7 +15086,7 @@
       </p:sp>
       <p:sp>
         <p:nvSpPr>
-          <p:cNvPr id="27" name="TextBox 26"/>
+          <p:cNvPr id="26" name="TextBox 25"/>
           <p:cNvSpPr txBox="1"/>
           <p:nvPr/>
         </p:nvSpPr>
@@ -15181,14 +15126,14 @@
                 <a:ea typeface="맑은 고딕"/>
                 <a:cs typeface="맑은 고딕"/>
               </a:rPr>
-              <a:t>쌓인 데이터로 스스로 갱신하며, 검증을 통과해야만 교체됩니다.</a:t>
-            </a:r>
-          </a:p>
-        </p:txBody>
-      </p:sp>
-      <p:sp>
-        <p:nvSpPr>
-          <p:cNvPr id="28" name="Rounded Rectangle 27"/>
+              <a:t>쌓인 데이터로 2단계 모델을 스스로 갱신하며, 검증을 통과해야만 교체됩니다.</a:t>
+            </a:r>
+          </a:p>
+        </p:txBody>
+      </p:sp>
+      <p:sp>
+        <p:nvSpPr>
+          <p:cNvPr id="27" name="Rounded Rectangle 26"/>
           <p:cNvSpPr/>
           <p:nvPr/>
         </p:nvSpPr>
@@ -15232,7 +15177,7 @@
       </p:sp>
       <p:sp>
         <p:nvSpPr>
-          <p:cNvPr id="29" name="Oval 28"/>
+          <p:cNvPr id="28" name="Oval 27"/>
           <p:cNvSpPr/>
           <p:nvPr/>
         </p:nvSpPr>
@@ -15287,7 +15232,7 @@
       </p:sp>
       <p:sp>
         <p:nvSpPr>
-          <p:cNvPr id="30" name="TextBox 29"/>
+          <p:cNvPr id="29" name="TextBox 28"/>
           <p:cNvSpPr txBox="1"/>
           <p:nvPr/>
         </p:nvSpPr>
@@ -15331,7 +15276,7 @@
       </p:sp>
       <p:sp>
         <p:nvSpPr>
-          <p:cNvPr id="31" name="TextBox 30"/>
+          <p:cNvPr id="30" name="TextBox 29"/>
           <p:cNvSpPr txBox="1"/>
           <p:nvPr/>
         </p:nvSpPr>
@@ -15378,7 +15323,7 @@
       </p:sp>
       <p:sp>
         <p:nvSpPr>
-          <p:cNvPr id="32" name="TextBox 31"/>
+          <p:cNvPr id="31" name="TextBox 30"/>
           <p:cNvSpPr txBox="1"/>
           <p:nvPr/>
         </p:nvSpPr>
@@ -23048,7 +22993,7 @@
         <p:spPr>
           <a:xfrm>
             <a:off x="658368" y="2011680"/>
-            <a:ext cx="10874959" cy="2567686"/>
+            <a:ext cx="10874959" cy="2764536"/>
           </a:xfrm>
           <a:prstGeom prst="roundRect">
             <a:avLst>
@@ -23092,7 +23037,7 @@
         <p:spPr>
           <a:xfrm>
             <a:off x="859536" y="2212848"/>
-            <a:ext cx="10472623" cy="2165350"/>
+            <a:ext cx="10472623" cy="2362200"/>
           </a:xfrm>
           <a:prstGeom prst="rect">
             <a:avLst/>
@@ -23149,7 +23094,7 @@
                 <a:ea typeface="Consolas"/>
                 <a:cs typeface="Consolas"/>
               </a:rPr>
-              <a:t>1단계 필터링 표본수  [ 3000 ]             0단계 절대임계값   사용 중</a:t>
+              <a:t>기준선 최소 표본수  [ 3000 ]              0단계 절대임계값   사용 중</a:t>
             </a:r>
           </a:p>
           <a:p>
@@ -23173,7 +23118,7 @@
                 <a:ea typeface="Consolas"/>
                 <a:cs typeface="Consolas"/>
               </a:rPr>
-              <a:t>1단계 관측 시간      [   18 ]                온도 207/222도 · 상승 20/34도/분</a:t>
+              <a:t>기준선 최소 시간대  [   18 ]                 온도 207/222도 · 상승 20/34도/분</a:t>
             </a:r>
           </a:p>
           <a:p>
@@ -23197,7 +23142,7 @@
                 <a:ea typeface="Consolas"/>
                 <a:cs typeface="Consolas"/>
               </a:rPr>
-              <a:t>2단계 필터링 표본수  [ 5000 ]             1단계 셀별기준선   사용 중</a:t>
+              <a:t>재학습 최소 표본수  [ 5000 ]              1단계 셀별기준선   집계 중</a:t>
             </a:r>
           </a:p>
           <a:p>
@@ -23221,7 +23166,7 @@
                 <a:ea typeface="Consolas"/>
                 <a:cs typeface="Consolas"/>
               </a:rPr>
-              <a:t>계산기준일   [ 2026-09-22 v ]                표본 3,000/3,000 · 시간대 9/18</a:t>
+              <a:t>재학습 최소 시간대  [   18 ]                 표본 6,400/3,000 · 시간대 13/18</a:t>
             </a:r>
           </a:p>
           <a:p>
@@ -23245,7 +23190,7 @@
                 <a:ea typeface="Consolas"/>
                 <a:cs typeface="Consolas"/>
               </a:rPr>
-              <a:t>                                          2단계 오토인코더   사용 중</a:t>
+              <a:t>계산기준일   [ 2026-09-21 v ]             2단계 오토인코더   사용 중</a:t>
             </a:r>
           </a:p>
           <a:p>
@@ -23269,7 +23214,7 @@
                 <a:ea typeface="Consolas"/>
                 <a:cs typeface="Consolas"/>
               </a:rPr>
-              <a:t>[ 절대 임계값 (0단계) ]  주의/경보           모델 2026-09-20 18:28</a:t>
+              <a:t>                                             모델 2026-09-20 18:28</a:t>
             </a:r>
           </a:p>
           <a:p>
@@ -23293,7 +23238,7 @@
                 <a:ea typeface="Consolas"/>
                 <a:cs typeface="Consolas"/>
               </a:rPr>
-              <a:t>마스크 셀 최고 온도  [ 207 ][ 222 ]       3단계 연속학습     대기</a:t>
+              <a:t>[ 절대 임계값 (0단계) ]  주의/경보        연속학습          대기</a:t>
             </a:r>
           </a:p>
           <a:p>
@@ -23317,7 +23262,31 @@
                 <a:ea typeface="Consolas"/>
                 <a:cs typeface="Consolas"/>
               </a:rPr>
-              <a:t>분당 상승률          [  20 ][  34 ]          재학습 가능 3,200/5,000건</a:t>
+              <a:t>마스크 셀 최고 온도  [ 207 ][ 222 ]          재학습 가능 9,299/5,000건</a:t>
+            </a:r>
+          </a:p>
+          <a:p>
+            <a:pPr algn="l">
+              <a:lnSpc>
+                <a:spcPct val="100000"/>
+              </a:lnSpc>
+              <a:spcBef>
+                <a:spcPts val="0"/>
+              </a:spcBef>
+              <a:spcAft>
+                <a:spcPts val="150"/>
+              </a:spcAft>
+            </a:pPr>
+            <a:r>
+              <a:rPr sz="1000" b="0" i="0">
+                <a:solidFill>
+                  <a:srgbClr val="D6DFEA"/>
+                </a:solidFill>
+                <a:latin typeface="Consolas"/>
+                <a:ea typeface="Consolas"/>
+                <a:cs typeface="Consolas"/>
+              </a:rPr>
+              <a:t>분당 상승률          [  20 ][  34 ]          판단 점수 0.088 → 기여 0.00</a:t>
             </a:r>
           </a:p>
           <a:p>

--- a/멀티모달_화재감지_모니터링_설치매뉴얼.pptx
+++ b/멀티모달_화재감지_모니터링_설치매뉴얼.pptx
@@ -32,6 +32,7 @@
     <p:sldId id="280" r:id="rId31"/>
     <p:sldId id="281" r:id="rId32"/>
     <p:sldId id="282" r:id="rId33"/>
+    <p:sldId id="283" r:id="rId34"/>
   </p:sldIdLst>
   <p:sldSz cx="12191695" cy="6858000" type="screen4x3"/>
   <p:notesSz cx="6858000" cy="9144000"/>
@@ -18938,7 +18939,7 @@
                 <a:ea typeface="맑은 고딕"/>
                 <a:cs typeface="맑은 고딕"/>
               </a:rPr>
-              <a:t>10세대까지 보관해 언제든 되돌립니다. 통과하지 못한 후보도 남겨 원인을 확인합니다.</a:t>
+              <a:t>10세대까지 보관합니다. 통과하지 못한 후보와 예행연습 결과도 남겨 원인을 확인합니다. 되돌리기는 다음 장에서 다룹니다.</a:t>
             </a:r>
           </a:p>
         </p:txBody>
@@ -18996,7 +18997,7 @@
         <p:spPr>
           <a:xfrm>
             <a:off x="7424928" y="2377440"/>
-            <a:ext cx="3849624" cy="1386586"/>
+            <a:ext cx="3849624" cy="1780286"/>
           </a:xfrm>
           <a:prstGeom prst="roundRect">
             <a:avLst>
@@ -19040,7 +19041,7 @@
         <p:spPr>
           <a:xfrm>
             <a:off x="7626096" y="2578608"/>
-            <a:ext cx="3447288" cy="984250"/>
+            <a:ext cx="3447288" cy="1377950"/>
           </a:xfrm>
           <a:prstGeom prst="rect">
             <a:avLst/>
@@ -19121,7 +19122,7 @@
                 <a:ea typeface="Consolas"/>
                 <a:cs typeface="Consolas"/>
               </a:rPr>
-              <a:t>  --dry-run    시험만, 교체 안 함</a:t>
+              <a:t>  --dry-run     시험만, 교체 안 함</a:t>
             </a:r>
           </a:p>
           <a:p>
@@ -19145,7 +19146,7 @@
                 <a:ea typeface="Consolas"/>
                 <a:cs typeface="Consolas"/>
               </a:rPr>
-              <a:t>  --list       세대 목록</a:t>
+              <a:t>  --list        세대 목록</a:t>
             </a:r>
           </a:p>
           <a:p>
@@ -19169,7 +19170,55 @@
                 <a:ea typeface="Consolas"/>
                 <a:cs typeface="Consolas"/>
               </a:rPr>
-              <a:t>  --rollback   직전 세대로 복귀</a:t>
+              <a:t>  --rollback    직전 운용 세대로</a:t>
+            </a:r>
+          </a:p>
+          <a:p>
+            <a:pPr algn="l">
+              <a:lnSpc>
+                <a:spcPct val="100000"/>
+              </a:lnSpc>
+              <a:spcBef>
+                <a:spcPts val="0"/>
+              </a:spcBef>
+              <a:spcAft>
+                <a:spcPts val="150"/>
+              </a:spcAft>
+            </a:pPr>
+            <a:r>
+              <a:rPr sz="1000" b="0" i="0">
+                <a:solidFill>
+                  <a:srgbClr val="D6DFEA"/>
+                </a:solidFill>
+                <a:latin typeface="Consolas"/>
+                <a:ea typeface="Consolas"/>
+                <a:cs typeface="Consolas"/>
+              </a:rPr>
+              <a:t>  --rollback &lt;세대&gt;</a:t>
+            </a:r>
+          </a:p>
+          <a:p>
+            <a:pPr algn="l">
+              <a:lnSpc>
+                <a:spcPct val="100000"/>
+              </a:lnSpc>
+              <a:spcBef>
+                <a:spcPts val="0"/>
+              </a:spcBef>
+              <a:spcAft>
+                <a:spcPts val="150"/>
+              </a:spcAft>
+            </a:pPr>
+            <a:r>
+              <a:rPr sz="1000" b="0" i="0">
+                <a:solidFill>
+                  <a:srgbClr val="D6DFEA"/>
+                </a:solidFill>
+                <a:latin typeface="Consolas"/>
+                <a:ea typeface="Consolas"/>
+                <a:cs typeface="Consolas"/>
+              </a:rPr>
+              <a:t>  --keep-baseline</a:t>
             </a:r>
           </a:p>
         </p:txBody>
@@ -22891,7 +22940,7 @@
                 <a:ea typeface="맑은 고딕"/>
                 <a:cs typeface="맑은 고딕"/>
               </a:rPr>
-              <a:t>22  STAGE SETTINGS</a:t>
+              <a:t>22  ROLLBACK</a:t>
             </a:r>
           </a:p>
         </p:txBody>
@@ -22935,7 +22984,7 @@
                 <a:ea typeface="맑은 고딕"/>
                 <a:cs typeface="맑은 고딕"/>
               </a:rPr>
-              <a:t>단계 전환 조건 바꾸기</a:t>
+              <a:t>되돌리기 - 무엇으로 돌아가는가</a:t>
             </a:r>
           </a:p>
         </p:txBody>
@@ -22979,7 +23028,7 @@
                 <a:ea typeface="맑은 고딕"/>
                 <a:cs typeface="맑은 고딕"/>
               </a:rPr>
-              <a:t>[설정] 버튼을 누르면 창 아래가 펼쳐집니다. 목록과 같은 토글이라 펼친 채로 다른 버튼을 쓸 수 있습니다. 값은 users\&lt;현장&gt;\env.ini 에 저장됩니다.</a:t>
+              <a:t>감도 시험을 통과한 모델도 현장에서 겪어 보면 아닐 수 있습니다. [재학습] 창의 [되돌리기] 로 직전에 운용하던 세대로 돌립니다.</a:t>
             </a:r>
           </a:p>
         </p:txBody>
@@ -22993,7 +23042,7 @@
         <p:spPr>
           <a:xfrm>
             <a:off x="658368" y="2011680"/>
-            <a:ext cx="10874959" cy="2764536"/>
+            <a:ext cx="10874959" cy="2567686"/>
           </a:xfrm>
           <a:prstGeom prst="roundRect">
             <a:avLst>
@@ -23037,7 +23086,7 @@
         <p:spPr>
           <a:xfrm>
             <a:off x="859536" y="2212848"/>
-            <a:ext cx="10472623" cy="2362200"/>
+            <a:ext cx="10472623" cy="2165350"/>
           </a:xfrm>
           <a:prstGeom prst="rect">
             <a:avLst/>
@@ -23070,7 +23119,7 @@
                 <a:ea typeface="Consolas"/>
                 <a:cs typeface="Consolas"/>
               </a:rPr>
-              <a:t>[ 연속학습 조건 ]                         [ 현재 진행 ]</a:t>
+              <a:t>[ 재학습 창 ]                             [ generation_history.txt ]</a:t>
             </a:r>
           </a:p>
           <a:p>
@@ -23094,7 +23143,7 @@
                 <a:ea typeface="Consolas"/>
                 <a:cs typeface="Consolas"/>
               </a:rPr>
-              <a:t>기준선 최소 표본수  [ 3000 ]              0단계 절대임계값   사용 중</a:t>
+              <a:t>[cj_busan_1] 운용에 올라간 세대           09-23 14:51  20260923_145111  승격</a:t>
             </a:r>
           </a:p>
           <a:p>
@@ -23118,7 +23167,7 @@
                 <a:ea typeface="Consolas"/>
                 <a:cs typeface="Consolas"/>
               </a:rPr>
-              <a:t>기준선 최소 시간대  [   18 ]                 온도 207/222도 · 상승 20/34도/분</a:t>
+              <a:t>   20260923_145111   운영중               09-24 12:14  20260924_121452  승격</a:t>
             </a:r>
           </a:p>
           <a:p>
@@ -23142,7 +23191,7 @@
                 <a:ea typeface="Consolas"/>
                 <a:cs typeface="Consolas"/>
               </a:rPr>
-              <a:t>재학습 최소 표본수  [ 5000 ]              1단계 셀별기준선   집계 중</a:t>
+              <a:t>   20260924_121452   운용된 적 있음       09-24 12:54  20260923_145111  되돌림</a:t>
             </a:r>
           </a:p>
           <a:p>
@@ -23166,7 +23215,7 @@
                 <a:ea typeface="Consolas"/>
                 <a:cs typeface="Consolas"/>
               </a:rPr>
-              <a:t>재학습 최소 시간대  [   18 ]                 표본 6,400/3,000 · 시간대 13/18</a:t>
+              <a:t> </a:t>
             </a:r>
           </a:p>
           <a:p>
@@ -23190,7 +23239,7 @@
                 <a:ea typeface="Consolas"/>
                 <a:cs typeface="Consolas"/>
               </a:rPr>
-              <a:t>계산기준일   [ 2026-09-21 v ]             2단계 오토인코더   사용 중</a:t>
+              <a:t>예행연습 후보 3개는 숨겼습니다.           승격과 되돌림을 남깁니다. 되돌리기는</a:t>
             </a:r>
           </a:p>
           <a:p>
@@ -23214,7 +23263,7 @@
                 <a:ea typeface="Consolas"/>
                 <a:cs typeface="Consolas"/>
               </a:rPr>
-              <a:t>                                             모델 2026-09-20 18:28</a:t>
+              <a:t>되돌릴 대상이 아닙니다.                   이 순서를 거슬러 갑니다.</a:t>
             </a:r>
           </a:p>
           <a:p>
@@ -23238,7 +23287,7 @@
                 <a:ea typeface="Consolas"/>
                 <a:cs typeface="Consolas"/>
               </a:rPr>
-              <a:t>[ 절대 임계값 (0단계) ]  주의/경보        연속학습          대기</a:t>
+              <a:t> </a:t>
             </a:r>
           </a:p>
           <a:p>
@@ -23262,7 +23311,7 @@
                 <a:ea typeface="Consolas"/>
                 <a:cs typeface="Consolas"/>
               </a:rPr>
-              <a:t>마스크 셀 최고 온도  [ 207 ][ 222 ]          재학습 가능 9,299/5,000건</a:t>
+              <a:t>[되돌리기] 대상은 20260924_121452 입니다.</a:t>
             </a:r>
           </a:p>
           <a:p>
@@ -23286,7 +23335,7 @@
                 <a:ea typeface="Consolas"/>
                 <a:cs typeface="Consolas"/>
               </a:rPr>
-              <a:t>분당 상승률          [  20 ][  34 ]          판단 점수 0.088 → 기여 0.00</a:t>
+              <a:t> </a:t>
             </a:r>
           </a:p>
           <a:p>
@@ -23310,31 +23359,7 @@
                 <a:ea typeface="Consolas"/>
                 <a:cs typeface="Consolas"/>
               </a:rPr>
-              <a:t> </a:t>
-            </a:r>
-          </a:p>
-          <a:p>
-            <a:pPr algn="l">
-              <a:lnSpc>
-                <a:spcPct val="100000"/>
-              </a:lnSpc>
-              <a:spcBef>
-                <a:spcPts val="0"/>
-              </a:spcBef>
-              <a:spcAft>
-                <a:spcPts val="150"/>
-              </a:spcAft>
-            </a:pPr>
-            <a:r>
-              <a:rPr sz="1000" b="0" i="0">
-                <a:solidFill>
-                  <a:srgbClr val="D6DFEA"/>
-                </a:solidFill>
-                <a:latin typeface="Consolas"/>
-                <a:ea typeface="Consolas"/>
-                <a:cs typeface="Consolas"/>
-              </a:rPr>
-              <a:t>[ 설정 적용 ]</a:t>
+              <a:t>[ 되돌리기 ]        [예행연습] [진행] [닫기]</a:t>
             </a:r>
           </a:p>
         </p:txBody>
@@ -23422,7 +23447,7 @@
                 <a:ea typeface="맑은 고딕"/>
                 <a:cs typeface="맑은 고딕"/>
               </a:rPr>
-              <a:t>왼쪽 — 조건을 정한다</a:t>
+              <a:t>예행연습 후보는 대상이 아니다</a:t>
             </a:r>
           </a:p>
         </p:txBody>
@@ -23469,7 +23494,7 @@
                 <a:ea typeface="맑은 고딕"/>
                 <a:cs typeface="맑은 고딕"/>
               </a:rPr>
-              <a:t>위 묶음은 단계가 언제 켜질지, 아래 묶음은 0단계가 언제 경보할지 정합니다. 버튼 하나로 함께 저장하며, 값이 하나라도 잘못되면 아무것도 쓰지 않습니다.</a:t>
+              <a:t>예행연습도 학습을 끝까지 돌리고 결과를 같은 곳에 보관합니다. 그래서 폴더 순서로 "직전" 을 고르면 운용된 적 없는 후보로 갑니다.</a:t>
             </a:r>
           </a:p>
           <a:p>
@@ -23487,13 +23512,13 @@
             <a:r>
               <a:rPr sz="1100" b="0" i="0">
                 <a:solidFill>
-                  <a:srgbClr val="E4572E"/>
-                </a:solidFill>
-                <a:latin typeface="맑은 고딕"/>
-                <a:ea typeface="맑은 고딕"/>
-                <a:cs typeface="맑은 고딕"/>
-              </a:rPr>
-              <a:t>임계값은 설비마다 전혀 다릅니다. 네 칸을 모두 비우면 0단계가 꺼집니다.</a:t>
+                  <a:srgbClr val="1A2435"/>
+                </a:solidFill>
+                <a:latin typeface="맑은 고딕"/>
+                <a:ea typeface="맑은 고딕"/>
+                <a:cs typeface="맑은 고딕"/>
+              </a:rPr>
+              <a:t>cj_busan_1 은 세대 10개 중 실제로 올라간 것이 하나였습니다. 그래서 폴더가 아니라 승격 기록을 기준으로 삼습니다.</a:t>
             </a:r>
           </a:p>
         </p:txBody>
@@ -23581,7 +23606,7 @@
                 <a:ea typeface="맑은 고딕"/>
                 <a:cs typeface="맑은 고딕"/>
               </a:rPr>
-              <a:t>계산기준일을 바꾸면 기준선을 새로 쌓습니다</a:t>
+              <a:t>되돌리면 칸별 기준선도 함께 치웁니다</a:t>
             </a:r>
           </a:p>
         </p:txBody>
@@ -23628,7 +23653,7 @@
                 <a:ea typeface="맑은 고딕"/>
                 <a:cs typeface="맑은 고딕"/>
               </a:rPr>
-              <a:t>히스토리 DB 는 날짜별 테이블이라 정확히 잘라내지만, 셀별 기준선에는 표본별 시각이 없어 과거만 뺄 수 없습니다. 며칠치가 사라지므로 바뀔 때 확인을 묻습니다.</a:t>
+              <a:t>기준선은 그 모델이 칸마다 내는 오차의 분포입니다. 모델을 갈면 오차 크기가 달라져 임계치가 다른 모델 것이 됩니다.</a:t>
             </a:r>
           </a:p>
           <a:p>
@@ -23652,7 +23677,7 @@
                 <a:ea typeface="맑은 고딕"/>
                 <a:cs typeface="맑은 고딕"/>
               </a:rPr>
-              <a:t>저장 후 [정지] → [시작] 을 눌러야 반영됩니다.</a:t>
+              <a:t>지우지 않고 보관하므로 되돌릴 수 있습니다. 다시 쌓는 동안에는 0단계 절대 임계치만 작동합니다. 되돌린 뒤 [정지] -&gt; [시작] 이 필요합니다.</a:t>
             </a:r>
           </a:p>
         </p:txBody>
@@ -23710,6 +23735,881 @@
 </file>
 
 <file path=ppt/slides/slide24.xml><?xml version="1.0" encoding="utf-8"?>
+<p:sld xmlns:a="http://schemas.openxmlformats.org/drawingml/2006/main" xmlns:p="http://schemas.openxmlformats.org/presentationml/2006/main" xmlns:r="http://schemas.openxmlformats.org/officeDocument/2006/relationships">
+  <p:cSld>
+    <p:bg>
+      <p:bgPr>
+        <a:solidFill>
+          <a:srgbClr val="FFFFFF"/>
+        </a:solidFill>
+        <a:effectLst/>
+      </p:bgPr>
+    </p:bg>
+    <p:spTree>
+      <p:nvGrpSpPr>
+        <p:cNvPr id="1" name=""/>
+        <p:cNvGrpSpPr/>
+        <p:nvPr/>
+      </p:nvGrpSpPr>
+      <p:grpSpPr/>
+      <p:sp>
+        <p:nvSpPr>
+          <p:cNvPr id="2" name="TextBox 1"/>
+          <p:cNvSpPr txBox="1"/>
+          <p:nvPr/>
+        </p:nvSpPr>
+        <p:spPr>
+          <a:xfrm>
+            <a:off x="658368" y="475488"/>
+            <a:ext cx="10874959" cy="310896"/>
+          </a:xfrm>
+          <a:prstGeom prst="rect">
+            <a:avLst/>
+          </a:prstGeom>
+          <a:noFill/>
+        </p:spPr>
+        <p:txBody>
+          <a:bodyPr wrap="square" lIns="0" rIns="0" tIns="0" bIns="0" anchor="t">
+            <a:spAutoFit/>
+          </a:bodyPr>
+          <a:lstStyle/>
+          <a:p>
+            <a:pPr algn="l">
+              <a:spcBef>
+                <a:spcPts val="0"/>
+              </a:spcBef>
+              <a:spcAft>
+                <a:spcPts val="0"/>
+              </a:spcAft>
+            </a:pPr>
+            <a:r>
+              <a:rPr sz="1250" b="1" i="0">
+                <a:solidFill>
+                  <a:srgbClr val="E4572E"/>
+                </a:solidFill>
+                <a:latin typeface="맑은 고딕"/>
+                <a:ea typeface="맑은 고딕"/>
+                <a:cs typeface="맑은 고딕"/>
+              </a:rPr>
+              <a:t>23  STAGE SETTINGS</a:t>
+            </a:r>
+          </a:p>
+        </p:txBody>
+      </p:sp>
+      <p:sp>
+        <p:nvSpPr>
+          <p:cNvPr id="3" name="TextBox 2"/>
+          <p:cNvSpPr txBox="1"/>
+          <p:nvPr/>
+        </p:nvSpPr>
+        <p:spPr>
+          <a:xfrm>
+            <a:off x="658368" y="804672"/>
+            <a:ext cx="10874959" cy="621792"/>
+          </a:xfrm>
+          <a:prstGeom prst="rect">
+            <a:avLst/>
+          </a:prstGeom>
+          <a:noFill/>
+        </p:spPr>
+        <p:txBody>
+          <a:bodyPr wrap="square" lIns="0" rIns="0" tIns="0" bIns="0" anchor="t">
+            <a:spAutoFit/>
+          </a:bodyPr>
+          <a:lstStyle/>
+          <a:p>
+            <a:pPr algn="l">
+              <a:spcBef>
+                <a:spcPts val="0"/>
+              </a:spcBef>
+              <a:spcAft>
+                <a:spcPts val="0"/>
+              </a:spcAft>
+            </a:pPr>
+            <a:r>
+              <a:rPr sz="3000" b="1" i="0">
+                <a:solidFill>
+                  <a:srgbClr val="1A2435"/>
+                </a:solidFill>
+                <a:latin typeface="맑은 고딕"/>
+                <a:ea typeface="맑은 고딕"/>
+                <a:cs typeface="맑은 고딕"/>
+              </a:rPr>
+              <a:t>단계 전환 조건 바꾸기</a:t>
+            </a:r>
+          </a:p>
+        </p:txBody>
+      </p:sp>
+      <p:sp>
+        <p:nvSpPr>
+          <p:cNvPr id="4" name="TextBox 3"/>
+          <p:cNvSpPr txBox="1"/>
+          <p:nvPr/>
+        </p:nvSpPr>
+        <p:spPr>
+          <a:xfrm>
+            <a:off x="658368" y="1572768"/>
+            <a:ext cx="10515600" cy="320040"/>
+          </a:xfrm>
+          <a:prstGeom prst="rect">
+            <a:avLst/>
+          </a:prstGeom>
+          <a:noFill/>
+        </p:spPr>
+        <p:txBody>
+          <a:bodyPr wrap="square" lIns="0" rIns="0" tIns="0" bIns="0" anchor="t">
+            <a:spAutoFit/>
+          </a:bodyPr>
+          <a:lstStyle/>
+          <a:p>
+            <a:pPr algn="l">
+              <a:spcBef>
+                <a:spcPts val="0"/>
+              </a:spcBef>
+              <a:spcAft>
+                <a:spcPts val="0"/>
+              </a:spcAft>
+            </a:pPr>
+            <a:r>
+              <a:rPr sz="1350" b="0" i="0">
+                <a:solidFill>
+                  <a:srgbClr val="667085"/>
+                </a:solidFill>
+                <a:latin typeface="맑은 고딕"/>
+                <a:ea typeface="맑은 고딕"/>
+                <a:cs typeface="맑은 고딕"/>
+              </a:rPr>
+              <a:t>[설정] 버튼을 누르면 창 아래가 펼쳐집니다. 목록과 같은 토글이라 펼친 채로 다른 버튼을 쓸 수 있습니다. 값은 users\&lt;현장&gt;\env.ini 에 저장됩니다.</a:t>
+            </a:r>
+          </a:p>
+        </p:txBody>
+      </p:sp>
+      <p:sp>
+        <p:nvSpPr>
+          <p:cNvPr id="5" name="Rounded Rectangle 4"/>
+          <p:cNvSpPr/>
+          <p:nvPr/>
+        </p:nvSpPr>
+        <p:spPr>
+          <a:xfrm>
+            <a:off x="658368" y="2011680"/>
+            <a:ext cx="10874959" cy="2764536"/>
+          </a:xfrm>
+          <a:prstGeom prst="roundRect">
+            <a:avLst>
+              <a:gd name="adj" fmla="val 5000"/>
+            </a:avLst>
+          </a:prstGeom>
+          <a:solidFill>
+            <a:srgbClr val="142033"/>
+          </a:solidFill>
+          <a:ln>
+            <a:noFill/>
+          </a:ln>
+          <a:effectLst/>
+        </p:spPr>
+        <p:style>
+          <a:lnRef idx="1">
+            <a:schemeClr val="accent1"/>
+          </a:lnRef>
+          <a:fillRef idx="3">
+            <a:schemeClr val="accent1"/>
+          </a:fillRef>
+          <a:effectRef idx="2">
+            <a:schemeClr val="accent1"/>
+          </a:effectRef>
+          <a:fontRef idx="minor">
+            <a:schemeClr val="lt1"/>
+          </a:fontRef>
+        </p:style>
+        <p:txBody>
+          <a:bodyPr rtlCol="0" anchor="ctr"/>
+          <a:lstStyle/>
+          <a:p/>
+        </p:txBody>
+      </p:sp>
+      <p:sp>
+        <p:nvSpPr>
+          <p:cNvPr id="6" name="TextBox 5"/>
+          <p:cNvSpPr txBox="1"/>
+          <p:nvPr/>
+        </p:nvSpPr>
+        <p:spPr>
+          <a:xfrm>
+            <a:off x="859536" y="2212848"/>
+            <a:ext cx="10472623" cy="2362200"/>
+          </a:xfrm>
+          <a:prstGeom prst="rect">
+            <a:avLst/>
+          </a:prstGeom>
+          <a:noFill/>
+        </p:spPr>
+        <p:txBody>
+          <a:bodyPr wrap="square" lIns="0" rIns="0" tIns="0" bIns="0" anchor="t">
+            <a:spAutoFit/>
+          </a:bodyPr>
+          <a:lstStyle/>
+          <a:p>
+            <a:pPr algn="l">
+              <a:lnSpc>
+                <a:spcPct val="100000"/>
+              </a:lnSpc>
+              <a:spcBef>
+                <a:spcPts val="0"/>
+              </a:spcBef>
+              <a:spcAft>
+                <a:spcPts val="150"/>
+              </a:spcAft>
+            </a:pPr>
+            <a:r>
+              <a:rPr sz="1000" b="0" i="0">
+                <a:solidFill>
+                  <a:srgbClr val="D6DFEA"/>
+                </a:solidFill>
+                <a:latin typeface="Consolas"/>
+                <a:ea typeface="Consolas"/>
+                <a:cs typeface="Consolas"/>
+              </a:rPr>
+              <a:t>[ 연속학습 조건 ]                         [ 현재 진행 ]</a:t>
+            </a:r>
+          </a:p>
+          <a:p>
+            <a:pPr algn="l">
+              <a:lnSpc>
+                <a:spcPct val="100000"/>
+              </a:lnSpc>
+              <a:spcBef>
+                <a:spcPts val="0"/>
+              </a:spcBef>
+              <a:spcAft>
+                <a:spcPts val="150"/>
+              </a:spcAft>
+            </a:pPr>
+            <a:r>
+              <a:rPr sz="1000" b="0" i="0">
+                <a:solidFill>
+                  <a:srgbClr val="D6DFEA"/>
+                </a:solidFill>
+                <a:latin typeface="Consolas"/>
+                <a:ea typeface="Consolas"/>
+                <a:cs typeface="Consolas"/>
+              </a:rPr>
+              <a:t>기준선 최소 표본수  [ 3000 ]              0단계 절대임계값   사용 중</a:t>
+            </a:r>
+          </a:p>
+          <a:p>
+            <a:pPr algn="l">
+              <a:lnSpc>
+                <a:spcPct val="100000"/>
+              </a:lnSpc>
+              <a:spcBef>
+                <a:spcPts val="0"/>
+              </a:spcBef>
+              <a:spcAft>
+                <a:spcPts val="150"/>
+              </a:spcAft>
+            </a:pPr>
+            <a:r>
+              <a:rPr sz="1000" b="0" i="0">
+                <a:solidFill>
+                  <a:srgbClr val="D6DFEA"/>
+                </a:solidFill>
+                <a:latin typeface="Consolas"/>
+                <a:ea typeface="Consolas"/>
+                <a:cs typeface="Consolas"/>
+              </a:rPr>
+              <a:t>기준선 최소 시간대  [   18 ]                 온도 207/222도 · 상승 20/34도/분</a:t>
+            </a:r>
+          </a:p>
+          <a:p>
+            <a:pPr algn="l">
+              <a:lnSpc>
+                <a:spcPct val="100000"/>
+              </a:lnSpc>
+              <a:spcBef>
+                <a:spcPts val="0"/>
+              </a:spcBef>
+              <a:spcAft>
+                <a:spcPts val="150"/>
+              </a:spcAft>
+            </a:pPr>
+            <a:r>
+              <a:rPr sz="1000" b="0" i="0">
+                <a:solidFill>
+                  <a:srgbClr val="D6DFEA"/>
+                </a:solidFill>
+                <a:latin typeface="Consolas"/>
+                <a:ea typeface="Consolas"/>
+                <a:cs typeface="Consolas"/>
+              </a:rPr>
+              <a:t>재학습 최소 표본수  [ 5000 ]              1단계 셀별기준선   집계 중</a:t>
+            </a:r>
+          </a:p>
+          <a:p>
+            <a:pPr algn="l">
+              <a:lnSpc>
+                <a:spcPct val="100000"/>
+              </a:lnSpc>
+              <a:spcBef>
+                <a:spcPts val="0"/>
+              </a:spcBef>
+              <a:spcAft>
+                <a:spcPts val="150"/>
+              </a:spcAft>
+            </a:pPr>
+            <a:r>
+              <a:rPr sz="1000" b="0" i="0">
+                <a:solidFill>
+                  <a:srgbClr val="D6DFEA"/>
+                </a:solidFill>
+                <a:latin typeface="Consolas"/>
+                <a:ea typeface="Consolas"/>
+                <a:cs typeface="Consolas"/>
+              </a:rPr>
+              <a:t>재학습 최소 시간대  [   18 ]                 표본 6,400/3,000 · 시간대 13/18</a:t>
+            </a:r>
+          </a:p>
+          <a:p>
+            <a:pPr algn="l">
+              <a:lnSpc>
+                <a:spcPct val="100000"/>
+              </a:lnSpc>
+              <a:spcBef>
+                <a:spcPts val="0"/>
+              </a:spcBef>
+              <a:spcAft>
+                <a:spcPts val="150"/>
+              </a:spcAft>
+            </a:pPr>
+            <a:r>
+              <a:rPr sz="1000" b="0" i="0">
+                <a:solidFill>
+                  <a:srgbClr val="D6DFEA"/>
+                </a:solidFill>
+                <a:latin typeface="Consolas"/>
+                <a:ea typeface="Consolas"/>
+                <a:cs typeface="Consolas"/>
+              </a:rPr>
+              <a:t>계산기준일   [ 2026-09-21 v ]             2단계 오토인코더   사용 중</a:t>
+            </a:r>
+          </a:p>
+          <a:p>
+            <a:pPr algn="l">
+              <a:lnSpc>
+                <a:spcPct val="100000"/>
+              </a:lnSpc>
+              <a:spcBef>
+                <a:spcPts val="0"/>
+              </a:spcBef>
+              <a:spcAft>
+                <a:spcPts val="150"/>
+              </a:spcAft>
+            </a:pPr>
+            <a:r>
+              <a:rPr sz="1000" b="0" i="0">
+                <a:solidFill>
+                  <a:srgbClr val="D6DFEA"/>
+                </a:solidFill>
+                <a:latin typeface="Consolas"/>
+                <a:ea typeface="Consolas"/>
+                <a:cs typeface="Consolas"/>
+              </a:rPr>
+              <a:t>                                             모델 2026-09-20 18:28</a:t>
+            </a:r>
+          </a:p>
+          <a:p>
+            <a:pPr algn="l">
+              <a:lnSpc>
+                <a:spcPct val="100000"/>
+              </a:lnSpc>
+              <a:spcBef>
+                <a:spcPts val="0"/>
+              </a:spcBef>
+              <a:spcAft>
+                <a:spcPts val="150"/>
+              </a:spcAft>
+            </a:pPr>
+            <a:r>
+              <a:rPr sz="1000" b="0" i="0">
+                <a:solidFill>
+                  <a:srgbClr val="D6DFEA"/>
+                </a:solidFill>
+                <a:latin typeface="Consolas"/>
+                <a:ea typeface="Consolas"/>
+                <a:cs typeface="Consolas"/>
+              </a:rPr>
+              <a:t>[ 절대 임계값 (0단계) ]  주의/경보        연속학습          대기</a:t>
+            </a:r>
+          </a:p>
+          <a:p>
+            <a:pPr algn="l">
+              <a:lnSpc>
+                <a:spcPct val="100000"/>
+              </a:lnSpc>
+              <a:spcBef>
+                <a:spcPts val="0"/>
+              </a:spcBef>
+              <a:spcAft>
+                <a:spcPts val="150"/>
+              </a:spcAft>
+            </a:pPr>
+            <a:r>
+              <a:rPr sz="1000" b="0" i="0">
+                <a:solidFill>
+                  <a:srgbClr val="D6DFEA"/>
+                </a:solidFill>
+                <a:latin typeface="Consolas"/>
+                <a:ea typeface="Consolas"/>
+                <a:cs typeface="Consolas"/>
+              </a:rPr>
+              <a:t>마스크 셀 최고 온도  [ 207 ][ 222 ]          재학습 가능 9,299/5,000건</a:t>
+            </a:r>
+          </a:p>
+          <a:p>
+            <a:pPr algn="l">
+              <a:lnSpc>
+                <a:spcPct val="100000"/>
+              </a:lnSpc>
+              <a:spcBef>
+                <a:spcPts val="0"/>
+              </a:spcBef>
+              <a:spcAft>
+                <a:spcPts val="150"/>
+              </a:spcAft>
+            </a:pPr>
+            <a:r>
+              <a:rPr sz="1000" b="0" i="0">
+                <a:solidFill>
+                  <a:srgbClr val="D6DFEA"/>
+                </a:solidFill>
+                <a:latin typeface="Consolas"/>
+                <a:ea typeface="Consolas"/>
+                <a:cs typeface="Consolas"/>
+              </a:rPr>
+              <a:t>분당 상승률          [  20 ][  34 ]          판단 점수 0.088 → 기여 0.00</a:t>
+            </a:r>
+          </a:p>
+          <a:p>
+            <a:pPr algn="l">
+              <a:lnSpc>
+                <a:spcPct val="100000"/>
+              </a:lnSpc>
+              <a:spcBef>
+                <a:spcPts val="0"/>
+              </a:spcBef>
+              <a:spcAft>
+                <a:spcPts val="150"/>
+              </a:spcAft>
+            </a:pPr>
+            <a:r>
+              <a:rPr sz="1000" b="0" i="0">
+                <a:solidFill>
+                  <a:srgbClr val="D6DFEA"/>
+                </a:solidFill>
+                <a:latin typeface="Consolas"/>
+                <a:ea typeface="Consolas"/>
+                <a:cs typeface="Consolas"/>
+              </a:rPr>
+              <a:t> </a:t>
+            </a:r>
+          </a:p>
+          <a:p>
+            <a:pPr algn="l">
+              <a:lnSpc>
+                <a:spcPct val="100000"/>
+              </a:lnSpc>
+              <a:spcBef>
+                <a:spcPts val="0"/>
+              </a:spcBef>
+              <a:spcAft>
+                <a:spcPts val="150"/>
+              </a:spcAft>
+            </a:pPr>
+            <a:r>
+              <a:rPr sz="1000" b="0" i="0">
+                <a:solidFill>
+                  <a:srgbClr val="D6DFEA"/>
+                </a:solidFill>
+                <a:latin typeface="Consolas"/>
+                <a:ea typeface="Consolas"/>
+                <a:cs typeface="Consolas"/>
+              </a:rPr>
+              <a:t>[ 설정 적용 ]   [ 재학습 ]</a:t>
+            </a:r>
+          </a:p>
+        </p:txBody>
+      </p:sp>
+      <p:sp>
+        <p:nvSpPr>
+          <p:cNvPr id="7" name="Rounded Rectangle 6"/>
+          <p:cNvSpPr/>
+          <p:nvPr/>
+        </p:nvSpPr>
+        <p:spPr>
+          <a:xfrm>
+            <a:off x="658368" y="4718304"/>
+            <a:ext cx="5300319" cy="1444752"/>
+          </a:xfrm>
+          <a:prstGeom prst="roundRect">
+            <a:avLst>
+              <a:gd name="adj" fmla="val 6000"/>
+            </a:avLst>
+          </a:prstGeom>
+          <a:solidFill>
+            <a:srgbClr val="F2F4F7"/>
+          </a:solidFill>
+          <a:ln>
+            <a:noFill/>
+          </a:ln>
+          <a:effectLst/>
+        </p:spPr>
+        <p:style>
+          <a:lnRef idx="1">
+            <a:schemeClr val="accent1"/>
+          </a:lnRef>
+          <a:fillRef idx="3">
+            <a:schemeClr val="accent1"/>
+          </a:fillRef>
+          <a:effectRef idx="2">
+            <a:schemeClr val="accent1"/>
+          </a:effectRef>
+          <a:fontRef idx="minor">
+            <a:schemeClr val="lt1"/>
+          </a:fontRef>
+        </p:style>
+        <p:txBody>
+          <a:bodyPr rtlCol="0" anchor="ctr"/>
+          <a:lstStyle/>
+          <a:p/>
+        </p:txBody>
+      </p:sp>
+      <p:sp>
+        <p:nvSpPr>
+          <p:cNvPr id="8" name="TextBox 7"/>
+          <p:cNvSpPr txBox="1"/>
+          <p:nvPr/>
+        </p:nvSpPr>
+        <p:spPr>
+          <a:xfrm>
+            <a:off x="914400" y="4864608"/>
+            <a:ext cx="4788255" cy="274320"/>
+          </a:xfrm>
+          <a:prstGeom prst="rect">
+            <a:avLst/>
+          </a:prstGeom>
+          <a:noFill/>
+        </p:spPr>
+        <p:txBody>
+          <a:bodyPr wrap="square" lIns="0" rIns="0" tIns="0" bIns="0" anchor="t">
+            <a:spAutoFit/>
+          </a:bodyPr>
+          <a:lstStyle/>
+          <a:p>
+            <a:pPr algn="l">
+              <a:spcBef>
+                <a:spcPts val="0"/>
+              </a:spcBef>
+              <a:spcAft>
+                <a:spcPts val="0"/>
+              </a:spcAft>
+            </a:pPr>
+            <a:r>
+              <a:rPr sz="1250" b="1" i="0">
+                <a:solidFill>
+                  <a:srgbClr val="1A2435"/>
+                </a:solidFill>
+                <a:latin typeface="맑은 고딕"/>
+                <a:ea typeface="맑은 고딕"/>
+                <a:cs typeface="맑은 고딕"/>
+              </a:rPr>
+              <a:t>왼쪽 — 조건을 정한다</a:t>
+            </a:r>
+          </a:p>
+        </p:txBody>
+      </p:sp>
+      <p:sp>
+        <p:nvSpPr>
+          <p:cNvPr id="9" name="TextBox 8"/>
+          <p:cNvSpPr txBox="1"/>
+          <p:nvPr/>
+        </p:nvSpPr>
+        <p:spPr>
+          <a:xfrm>
+            <a:off x="914400" y="5175504"/>
+            <a:ext cx="4788255" cy="914400"/>
+          </a:xfrm>
+          <a:prstGeom prst="rect">
+            <a:avLst/>
+          </a:prstGeom>
+          <a:noFill/>
+        </p:spPr>
+        <p:txBody>
+          <a:bodyPr wrap="square" lIns="0" rIns="0" tIns="0" bIns="0" anchor="t">
+            <a:spAutoFit/>
+          </a:bodyPr>
+          <a:lstStyle/>
+          <a:p>
+            <a:pPr algn="l">
+              <a:lnSpc>
+                <a:spcPct val="125000"/>
+              </a:lnSpc>
+              <a:spcBef>
+                <a:spcPts val="0"/>
+              </a:spcBef>
+              <a:spcAft>
+                <a:spcPts val="500"/>
+              </a:spcAft>
+            </a:pPr>
+            <a:r>
+              <a:rPr sz="1100" b="0" i="0">
+                <a:solidFill>
+                  <a:srgbClr val="1A2435"/>
+                </a:solidFill>
+                <a:latin typeface="맑은 고딕"/>
+                <a:ea typeface="맑은 고딕"/>
+                <a:cs typeface="맑은 고딕"/>
+              </a:rPr>
+              <a:t>위 묶음은 단계가 언제 켜질지, 아래 묶음은 0단계가 언제 경보할지 정합니다. 버튼 하나로 함께 저장하며, 값이 하나라도 잘못되면 아무것도 쓰지 않습니다.</a:t>
+            </a:r>
+          </a:p>
+          <a:p>
+            <a:pPr algn="l">
+              <a:lnSpc>
+                <a:spcPct val="125000"/>
+              </a:lnSpc>
+              <a:spcBef>
+                <a:spcPts val="0"/>
+              </a:spcBef>
+              <a:spcAft>
+                <a:spcPts val="0"/>
+              </a:spcAft>
+            </a:pPr>
+            <a:r>
+              <a:rPr sz="1100" b="0" i="0">
+                <a:solidFill>
+                  <a:srgbClr val="E4572E"/>
+                </a:solidFill>
+                <a:latin typeface="맑은 고딕"/>
+                <a:ea typeface="맑은 고딕"/>
+                <a:cs typeface="맑은 고딕"/>
+              </a:rPr>
+              <a:t>임계값은 설비마다 전혀 다릅니다. 네 칸을 모두 비우면 0단계가 꺼집니다.</a:t>
+            </a:r>
+          </a:p>
+        </p:txBody>
+      </p:sp>
+      <p:sp>
+        <p:nvSpPr>
+          <p:cNvPr id="10" name="Rounded Rectangle 9"/>
+          <p:cNvSpPr/>
+          <p:nvPr/>
+        </p:nvSpPr>
+        <p:spPr>
+          <a:xfrm>
+            <a:off x="6233007" y="4718304"/>
+            <a:ext cx="5300319" cy="1444752"/>
+          </a:xfrm>
+          <a:prstGeom prst="roundRect">
+            <a:avLst>
+              <a:gd name="adj" fmla="val 6000"/>
+            </a:avLst>
+          </a:prstGeom>
+          <a:solidFill>
+            <a:srgbClr val="FDF1EC"/>
+          </a:solidFill>
+          <a:ln>
+            <a:noFill/>
+          </a:ln>
+          <a:effectLst/>
+        </p:spPr>
+        <p:style>
+          <a:lnRef idx="1">
+            <a:schemeClr val="accent1"/>
+          </a:lnRef>
+          <a:fillRef idx="3">
+            <a:schemeClr val="accent1"/>
+          </a:fillRef>
+          <a:effectRef idx="2">
+            <a:schemeClr val="accent1"/>
+          </a:effectRef>
+          <a:fontRef idx="minor">
+            <a:schemeClr val="lt1"/>
+          </a:fontRef>
+        </p:style>
+        <p:txBody>
+          <a:bodyPr rtlCol="0" anchor="ctr"/>
+          <a:lstStyle/>
+          <a:p/>
+        </p:txBody>
+      </p:sp>
+      <p:sp>
+        <p:nvSpPr>
+          <p:cNvPr id="11" name="TextBox 10"/>
+          <p:cNvSpPr txBox="1"/>
+          <p:nvPr/>
+        </p:nvSpPr>
+        <p:spPr>
+          <a:xfrm>
+            <a:off x="6489039" y="4864608"/>
+            <a:ext cx="4788255" cy="274320"/>
+          </a:xfrm>
+          <a:prstGeom prst="rect">
+            <a:avLst/>
+          </a:prstGeom>
+          <a:noFill/>
+        </p:spPr>
+        <p:txBody>
+          <a:bodyPr wrap="square" lIns="0" rIns="0" tIns="0" bIns="0" anchor="t">
+            <a:spAutoFit/>
+          </a:bodyPr>
+          <a:lstStyle/>
+          <a:p>
+            <a:pPr algn="l">
+              <a:spcBef>
+                <a:spcPts val="0"/>
+              </a:spcBef>
+              <a:spcAft>
+                <a:spcPts val="0"/>
+              </a:spcAft>
+            </a:pPr>
+            <a:r>
+              <a:rPr sz="1250" b="1" i="0">
+                <a:solidFill>
+                  <a:srgbClr val="E4572E"/>
+                </a:solidFill>
+                <a:latin typeface="맑은 고딕"/>
+                <a:ea typeface="맑은 고딕"/>
+                <a:cs typeface="맑은 고딕"/>
+              </a:rPr>
+              <a:t>계산기준일을 바꾸면 기준선을 새로 쌓습니다</a:t>
+            </a:r>
+          </a:p>
+        </p:txBody>
+      </p:sp>
+      <p:sp>
+        <p:nvSpPr>
+          <p:cNvPr id="12" name="TextBox 11"/>
+          <p:cNvSpPr txBox="1"/>
+          <p:nvPr/>
+        </p:nvSpPr>
+        <p:spPr>
+          <a:xfrm>
+            <a:off x="6489039" y="5175504"/>
+            <a:ext cx="4788255" cy="914400"/>
+          </a:xfrm>
+          <a:prstGeom prst="rect">
+            <a:avLst/>
+          </a:prstGeom>
+          <a:noFill/>
+        </p:spPr>
+        <p:txBody>
+          <a:bodyPr wrap="square" lIns="0" rIns="0" tIns="0" bIns="0" anchor="t">
+            <a:spAutoFit/>
+          </a:bodyPr>
+          <a:lstStyle/>
+          <a:p>
+            <a:pPr algn="l">
+              <a:lnSpc>
+                <a:spcPct val="125000"/>
+              </a:lnSpc>
+              <a:spcBef>
+                <a:spcPts val="0"/>
+              </a:spcBef>
+              <a:spcAft>
+                <a:spcPts val="500"/>
+              </a:spcAft>
+            </a:pPr>
+            <a:r>
+              <a:rPr sz="1100" b="0" i="0">
+                <a:solidFill>
+                  <a:srgbClr val="1A2435"/>
+                </a:solidFill>
+                <a:latin typeface="맑은 고딕"/>
+                <a:ea typeface="맑은 고딕"/>
+                <a:cs typeface="맑은 고딕"/>
+              </a:rPr>
+              <a:t>히스토리 DB 는 날짜별 테이블이라 정확히 잘라내지만, 셀별 기준선에는 표본별 시각이 없어 과거만 뺄 수 없습니다. 며칠치가 사라지므로 바뀔 때 확인을 묻습니다.</a:t>
+            </a:r>
+          </a:p>
+          <a:p>
+            <a:pPr algn="l">
+              <a:lnSpc>
+                <a:spcPct val="125000"/>
+              </a:lnSpc>
+              <a:spcBef>
+                <a:spcPts val="0"/>
+              </a:spcBef>
+              <a:spcAft>
+                <a:spcPts val="0"/>
+              </a:spcAft>
+            </a:pPr>
+            <a:r>
+              <a:rPr sz="1100" b="1" i="0">
+                <a:solidFill>
+                  <a:srgbClr val="E4572E"/>
+                </a:solidFill>
+                <a:latin typeface="맑은 고딕"/>
+                <a:ea typeface="맑은 고딕"/>
+                <a:cs typeface="맑은 고딕"/>
+              </a:rPr>
+              <a:t>저장 후 [정지] → [시작] 을 눌러야 반영됩니다.</a:t>
+            </a:r>
+          </a:p>
+        </p:txBody>
+      </p:sp>
+      <p:sp>
+        <p:nvSpPr>
+          <p:cNvPr id="13" name="TextBox 12"/>
+          <p:cNvSpPr txBox="1"/>
+          <p:nvPr/>
+        </p:nvSpPr>
+        <p:spPr>
+          <a:xfrm>
+            <a:off x="10618927" y="6291072"/>
+            <a:ext cx="914400" cy="274320"/>
+          </a:xfrm>
+          <a:prstGeom prst="rect">
+            <a:avLst/>
+          </a:prstGeom>
+          <a:noFill/>
+        </p:spPr>
+        <p:txBody>
+          <a:bodyPr wrap="square" lIns="0" rIns="0" tIns="0" bIns="0" anchor="t">
+            <a:spAutoFit/>
+          </a:bodyPr>
+          <a:lstStyle/>
+          <a:p>
+            <a:pPr algn="r">
+              <a:spcBef>
+                <a:spcPts val="0"/>
+              </a:spcBef>
+              <a:spcAft>
+                <a:spcPts val="0"/>
+              </a:spcAft>
+            </a:pPr>
+            <a:r>
+              <a:rPr sz="1050" b="0" i="0">
+                <a:solidFill>
+                  <a:srgbClr val="667085"/>
+                </a:solidFill>
+                <a:latin typeface="맑은 고딕"/>
+                <a:ea typeface="맑은 고딕"/>
+                <a:cs typeface="맑은 고딕"/>
+              </a:rPr>
+              <a:t>23</a:t>
+            </a:r>
+          </a:p>
+        </p:txBody>
+      </p:sp>
+    </p:spTree>
+  </p:cSld>
+  <p:clrMapOvr>
+    <a:masterClrMapping/>
+  </p:clrMapOvr>
+</p:sld>
+</file>
+
+<file path=ppt/slides/slide25.xml><?xml version="1.0" encoding="utf-8"?>
 <p:sld xmlns:a="http://schemas.openxmlformats.org/drawingml/2006/main" xmlns:p="http://schemas.openxmlformats.org/presentationml/2006/main" xmlns:r="http://schemas.openxmlformats.org/officeDocument/2006/relationships">
   <p:cSld>
     <p:bg>
@@ -23766,7 +24666,7 @@
                 <a:ea typeface="맑은 고딕"/>
                 <a:cs typeface="맑은 고딕"/>
               </a:rPr>
-              <a:t>23  SAFETY RULES</a:t>
+              <a:t>24  SAFETY RULES</a:t>
             </a:r>
           </a:p>
         </p:txBody>
@@ -24746,7 +25646,7 @@
                 <a:ea typeface="맑은 고딕"/>
                 <a:cs typeface="맑은 고딕"/>
               </a:rPr>
-              <a:t>23</a:t>
+              <a:t>24</a:t>
             </a:r>
           </a:p>
         </p:txBody>
@@ -24759,7 +25659,7 @@
 </p:sld>
 </file>
 
-<file path=ppt/slides/slide25.xml><?xml version="1.0" encoding="utf-8"?>
+<file path=ppt/slides/slide26.xml><?xml version="1.0" encoding="utf-8"?>
 <p:sld xmlns:a="http://schemas.openxmlformats.org/drawingml/2006/main" xmlns:p="http://schemas.openxmlformats.org/presentationml/2006/main" xmlns:r="http://schemas.openxmlformats.org/officeDocument/2006/relationships">
   <p:cSld>
     <p:bg>
@@ -24816,7 +25716,7 @@
                 <a:ea typeface="맑은 고딕"/>
                 <a:cs typeface="맑은 고딕"/>
               </a:rPr>
-              <a:t>24  COMMISSIONING</a:t>
+              <a:t>25  COMMISSIONING</a:t>
             </a:r>
           </a:p>
         </p:txBody>
@@ -27480,7 +28380,7 @@
                 <a:ea typeface="맑은 고딕"/>
                 <a:cs typeface="맑은 고딕"/>
               </a:rPr>
-              <a:t>24</a:t>
+              <a:t>25</a:t>
             </a:r>
           </a:p>
         </p:txBody>
@@ -27493,7 +28393,7 @@
 </p:sld>
 </file>
 
-<file path=ppt/slides/slide26.xml><?xml version="1.0" encoding="utf-8"?>
+<file path=ppt/slides/slide27.xml><?xml version="1.0" encoding="utf-8"?>
 <p:sld xmlns:a="http://schemas.openxmlformats.org/drawingml/2006/main" xmlns:p="http://schemas.openxmlformats.org/presentationml/2006/main" xmlns:r="http://schemas.openxmlformats.org/officeDocument/2006/relationships">
   <p:cSld>
     <p:bg>
@@ -27550,7 +28450,7 @@
                 <a:ea typeface="맑은 고딕"/>
                 <a:cs typeface="맑은 고딕"/>
               </a:rPr>
-              <a:t>25  TROUBLESHOOTING</a:t>
+              <a:t>26  TROUBLESHOOTING</a:t>
             </a:r>
           </a:p>
         </p:txBody>
@@ -28823,7 +29723,7 @@
                 <a:ea typeface="맑은 고딕"/>
                 <a:cs typeface="맑은 고딕"/>
               </a:rPr>
-              <a:t>25</a:t>
+              <a:t>26</a:t>
             </a:r>
           </a:p>
         </p:txBody>
@@ -28836,7 +29736,7 @@
 </p:sld>
 </file>
 
-<file path=ppt/slides/slide27.xml><?xml version="1.0" encoding="utf-8"?>
+<file path=ppt/slides/slide28.xml><?xml version="1.0" encoding="utf-8"?>
 <p:sld xmlns:a="http://schemas.openxmlformats.org/drawingml/2006/main" xmlns:p="http://schemas.openxmlformats.org/presentationml/2006/main" xmlns:r="http://schemas.openxmlformats.org/officeDocument/2006/relationships">
   <p:cSld>
     <p:bg>
@@ -28893,7 +29793,7 @@
                 <a:ea typeface="맑은 고딕"/>
                 <a:cs typeface="맑은 고딕"/>
               </a:rPr>
-              <a:t>26  CHECKLIST</a:t>
+              <a:t>27  CHECKLIST</a:t>
             </a:r>
           </a:p>
         </p:txBody>
@@ -30304,7 +31204,7 @@
                 <a:ea typeface="맑은 고딕"/>
                 <a:cs typeface="맑은 고딕"/>
               </a:rPr>
-              <a:t>26</a:t>
+              <a:t>27</a:t>
             </a:r>
           </a:p>
         </p:txBody>

--- a/멀티모달_화재감지_모니터링_설치매뉴얼.pptx
+++ b/멀티모달_화재감지_모니터링_설치매뉴얼.pptx
@@ -23359,7 +23359,7 @@
                 <a:ea typeface="Consolas"/>
                 <a:cs typeface="Consolas"/>
               </a:rPr>
-              <a:t>[ 되돌리기 ]        [예행연습] [진행] [닫기]</a:t>
+              <a:t>[ 되돌리기 ]     [예행연습] [재학습 실행] [닫기]</a:t>
             </a:r>
           </a:p>
         </p:txBody>

--- a/멀티모달_화재감지_모니터링_설치매뉴얼.pptx
+++ b/멀티모달_화재감지_모니터링_설치매뉴얼.pptx
@@ -18939,7 +18939,7 @@
                 <a:ea typeface="맑은 고딕"/>
                 <a:cs typeface="맑은 고딕"/>
               </a:rPr>
-              <a:t>10세대까지 보관합니다. 통과하지 못한 후보와 예행연습 결과도 남겨 원인을 확인합니다. 되돌리기는 다음 장에서 다룹니다.</a:t>
+              <a:t>재학습을 실제로 돌린 경우만 보관합니다(10세대). 예행연습은 아무것도 남기지 않습니다. 되돌리기는 다음 장에서 다룹니다.</a:t>
             </a:r>
           </a:p>
         </p:txBody>
@@ -23239,7 +23239,7 @@
                 <a:ea typeface="Consolas"/>
                 <a:cs typeface="Consolas"/>
               </a:rPr>
-              <a:t>예행연습 후보 3개는 숨겼습니다.           승격과 되돌림을 남깁니다. 되돌리기는</a:t>
+              <a:t>                                          승격과 되돌림을 남깁니다. 되돌리기는</a:t>
             </a:r>
           </a:p>
           <a:p>
@@ -23263,7 +23263,7 @@
                 <a:ea typeface="Consolas"/>
                 <a:cs typeface="Consolas"/>
               </a:rPr>
-              <a:t>되돌릴 대상이 아닙니다.                   이 순서를 거슬러 갑니다.</a:t>
+              <a:t>                                          이 순서를 거슬러 갑니다.</a:t>
             </a:r>
           </a:p>
           <a:p>
@@ -23447,7 +23447,7 @@
                 <a:ea typeface="맑은 고딕"/>
                 <a:cs typeface="맑은 고딕"/>
               </a:rPr>
-              <a:t>예행연습 후보는 대상이 아니다</a:t>
+              <a:t>예행연습은 아무것도 남기지 않는다</a:t>
             </a:r>
           </a:p>
         </p:txBody>
@@ -23494,7 +23494,7 @@
                 <a:ea typeface="맑은 고딕"/>
                 <a:cs typeface="맑은 고딕"/>
               </a:rPr>
-              <a:t>예행연습도 학습을 끝까지 돌리고 결과를 같은 곳에 보관합니다. 그래서 폴더 순서로 "직전" 을 고르면 운용된 적 없는 후보로 갑니다.</a:t>
+              <a:t>예행연습 결과는 화면의 보고서로 다 나오고 그 모델을 나중에 쓸 일이 없어 저장하지 않습니다. 세대는 [재학습 실행] 으로만 생깁니다.</a:t>
             </a:r>
           </a:p>
           <a:p>
@@ -23518,7 +23518,7 @@
                 <a:ea typeface="맑은 고딕"/>
                 <a:cs typeface="맑은 고딕"/>
               </a:rPr>
-              <a:t>cj_busan_1 은 세대 10개 중 실제로 올라간 것이 하나였습니다. 그래서 폴더가 아니라 승격 기록을 기준으로 삼습니다.</a:t>
+              <a:t>한때 cj_busan_1 은 세대 10개 중 9개가 예행연습 결과였습니다. 폴더 순서로 "직전" 을 고르면 운용된 적 없는 후보로 갑니다. 그래서 승격 기록을 기준으로 삼습니다.</a:t>
             </a:r>
           </a:p>
         </p:txBody>

--- a/멀티모달_화재감지_모니터링_설치매뉴얼.pptx
+++ b/멀티모달_화재감지_모니터링_설치매뉴얼.pptx
@@ -18355,7 +18355,7 @@
                 <a:ea typeface="맑은 고딕"/>
                 <a:cs typeface="맑은 고딕"/>
               </a:rPr>
-              <a:t>히스토리 DB 에 이미 64셀 값이 쌓이고 있어, 별도 수집 장치 없이 스스로 갱신합니다.</a:t>
+              <a:t>히스토리 DB 에 이미 64셀 값이 쌓이고 있어, 별도 수집 장치 없이 스스로 갱신합니다. 창에서 돌리면 가운데에 진행 판이 떠 경과 시간과 단계를 보여 줍니다.</a:t>
             </a:r>
           </a:p>
         </p:txBody>
@@ -23028,7 +23028,7 @@
                 <a:ea typeface="맑은 고딕"/>
                 <a:cs typeface="맑은 고딕"/>
               </a:rPr>
-              <a:t>감도 시험을 통과한 모델도 현장에서 겪어 보면 아닐 수 있습니다. [재학습] 창의 [되돌리기] 로 직전에 운용하던 세대로 돌립니다.</a:t>
+              <a:t>감도 시험을 통과한 모델도 현장에서 겪어 보면 아닐 수 있습니다. [재학습] 창에서 세대를 골라 되돌립니다.</a:t>
             </a:r>
           </a:p>
         </p:txBody>
@@ -23042,7 +23042,7 @@
         <p:spPr>
           <a:xfrm>
             <a:off x="658368" y="2011680"/>
-            <a:ext cx="10874959" cy="2567686"/>
+            <a:ext cx="10874959" cy="2173986"/>
           </a:xfrm>
           <a:prstGeom prst="roundRect">
             <a:avLst>
@@ -23086,7 +23086,7 @@
         <p:spPr>
           <a:xfrm>
             <a:off x="859536" y="2212848"/>
-            <a:ext cx="10472623" cy="2165350"/>
+            <a:ext cx="10472623" cy="1771650"/>
           </a:xfrm>
           <a:prstGeom prst="rect">
             <a:avLst/>
@@ -23143,7 +23143,7 @@
                 <a:ea typeface="Consolas"/>
                 <a:cs typeface="Consolas"/>
               </a:rPr>
-              <a:t>[cj_busan_1] 운용에 올라간 세대           09-23 14:51  20260923_145111  승격</a:t>
+              <a:t>[되돌리기] [20260924_145528 (직전) v]     09-23 14:51  20260923_145111  승격</a:t>
             </a:r>
           </a:p>
           <a:p>
@@ -23167,7 +23167,7 @@
                 <a:ea typeface="Consolas"/>
                 <a:cs typeface="Consolas"/>
               </a:rPr>
-              <a:t>   20260923_145111   운영중               09-24 12:14  20260924_121452  승격</a:t>
+              <a:t>        [예행연습] [재학습 실행] [닫기]   09-24 12:14  20260924_121452  승격</a:t>
             </a:r>
           </a:p>
           <a:p>
@@ -23191,7 +23191,7 @@
                 <a:ea typeface="Consolas"/>
                 <a:cs typeface="Consolas"/>
               </a:rPr>
-              <a:t>   20260924_121452   운용된 적 있음       09-24 12:54  20260923_145111  되돌림</a:t>
+              <a:t>                                          09-24 12:54  20260923_145111  되돌림</a:t>
             </a:r>
           </a:p>
           <a:p>
@@ -23215,7 +23215,7 @@
                 <a:ea typeface="Consolas"/>
                 <a:cs typeface="Consolas"/>
               </a:rPr>
-              <a:t> </a:t>
+              <a:t>[cj_busan_1] 운용에 올라간 세대           09-24 14:55  20260924_145528  승격</a:t>
             </a:r>
           </a:p>
           <a:p>
@@ -23239,7 +23239,7 @@
                 <a:ea typeface="Consolas"/>
                 <a:cs typeface="Consolas"/>
               </a:rPr>
-              <a:t>                                          승격과 되돌림을 남깁니다. 되돌리기는</a:t>
+              <a:t>   20260923_145111   운용된 적 있음       09-24 22:27  20260924_222750  승격</a:t>
             </a:r>
           </a:p>
           <a:p>
@@ -23263,7 +23263,7 @@
                 <a:ea typeface="Consolas"/>
                 <a:cs typeface="Consolas"/>
               </a:rPr>
-              <a:t>                                          이 순서를 거슬러 갑니다.</a:t>
+              <a:t>   20260924_121452   운용된 적 있음</a:t>
             </a:r>
           </a:p>
           <a:p>
@@ -23287,7 +23287,7 @@
                 <a:ea typeface="Consolas"/>
                 <a:cs typeface="Consolas"/>
               </a:rPr>
-              <a:t> </a:t>
+              <a:t>   20260924_145528   운용된 적 있음       승격과 되돌림을 남깁니다. 목록에</a:t>
             </a:r>
           </a:p>
           <a:p>
@@ -23311,55 +23311,7 @@
                 <a:ea typeface="Consolas"/>
                 <a:cs typeface="Consolas"/>
               </a:rPr>
-              <a:t>[되돌리기] 대상은 20260924_121452 입니다.</a:t>
-            </a:r>
-          </a:p>
-          <a:p>
-            <a:pPr algn="l">
-              <a:lnSpc>
-                <a:spcPct val="100000"/>
-              </a:lnSpc>
-              <a:spcBef>
-                <a:spcPts val="0"/>
-              </a:spcBef>
-              <a:spcAft>
-                <a:spcPts val="150"/>
-              </a:spcAft>
-            </a:pPr>
-            <a:r>
-              <a:rPr sz="1000" b="0" i="0">
-                <a:solidFill>
-                  <a:srgbClr val="D6DFEA"/>
-                </a:solidFill>
-                <a:latin typeface="Consolas"/>
-                <a:ea typeface="Consolas"/>
-                <a:cs typeface="Consolas"/>
-              </a:rPr>
-              <a:t> </a:t>
-            </a:r>
-          </a:p>
-          <a:p>
-            <a:pPr algn="l">
-              <a:lnSpc>
-                <a:spcPct val="100000"/>
-              </a:lnSpc>
-              <a:spcBef>
-                <a:spcPts val="0"/>
-              </a:spcBef>
-              <a:spcAft>
-                <a:spcPts val="150"/>
-              </a:spcAft>
-            </a:pPr>
-            <a:r>
-              <a:rPr sz="1000" b="0" i="0">
-                <a:solidFill>
-                  <a:srgbClr val="D6DFEA"/>
-                </a:solidFill>
-                <a:latin typeface="Consolas"/>
-                <a:ea typeface="Consolas"/>
-                <a:cs typeface="Consolas"/>
-              </a:rPr>
-              <a:t>[ 되돌리기 ]     [예행연습] [재학습 실행] [닫기]</a:t>
+              <a:t>   20260924_222750   운영중               담는 것은 여기 있는 세대뿐입니다.</a:t>
             </a:r>
           </a:p>
         </p:txBody>
@@ -23447,7 +23399,7 @@
                 <a:ea typeface="맑은 고딕"/>
                 <a:cs typeface="맑은 고딕"/>
               </a:rPr>
-              <a:t>예행연습은 아무것도 남기지 않는다</a:t>
+              <a:t>한 걸음 뒤가 아니라 골라서 간다</a:t>
             </a:r>
           </a:p>
         </p:txBody>
@@ -23494,7 +23446,7 @@
                 <a:ea typeface="맑은 고딕"/>
                 <a:cs typeface="맑은 고딕"/>
               </a:rPr>
-              <a:t>예행연습 결과는 화면의 보고서로 다 나오고 그 모델을 나중에 쓸 일이 없어 저장하지 않습니다. 세대는 [재학습 실행] 으로만 생깁니다.</a:t>
+              <a:t>되돌리기도 승격으로 기록되므로, 늘 한 걸음 뒤로만 가면 두 세대 사이를 왕복할 뿐 더 앞으로는 못 갑니다. 그래서 목록에서 고릅니다.</a:t>
             </a:r>
           </a:p>
           <a:p>
@@ -23518,7 +23470,7 @@
                 <a:ea typeface="맑은 고딕"/>
                 <a:cs typeface="맑은 고딕"/>
               </a:rPr>
-              <a:t>한때 cj_busan_1 은 세대 10개 중 9개가 예행연습 결과였습니다. 폴더 순서로 "직전" 을 고르면 운용된 적 없는 후보로 갑니다. 그래서 승격 기록을 기준으로 삼습니다.</a:t>
+              <a:t>목록에는 운용에 올라간 적이 있는 세대만 담깁니다. 예행연습은 아무것도 남기지 않고, 시험에서 막힌 후보는 운용된 적이 없습니다.</a:t>
             </a:r>
           </a:p>
         </p:txBody>

--- a/멀티모달_화재감지_모니터링_설치매뉴얼.pptx
+++ b/멀티모달_화재감지_모니터링_설치매뉴얼.pptx
@@ -33,6 +33,7 @@
     <p:sldId id="281" r:id="rId32"/>
     <p:sldId id="282" r:id="rId33"/>
     <p:sldId id="283" r:id="rId34"/>
+    <p:sldId id="284" r:id="rId35"/>
   </p:sldIdLst>
   <p:sldSz cx="12191695" cy="6858000" type="screen4x3"/>
   <p:notesSz cx="6858000" cy="9144000"/>
@@ -3717,7 +3718,7 @@
                 <a:ea typeface="맑은 고딕"/>
                 <a:cs typeface="맑은 고딕"/>
               </a:rPr>
-              <a:t>비밀번호 분리 — secrets.ini</a:t>
+              <a:t>비밀번호 분리 — db_secrets.ini</a:t>
             </a:r>
           </a:p>
         </p:txBody>
@@ -3876,7 +3877,7 @@
                 <a:ea typeface="Consolas"/>
                 <a:cs typeface="Consolas"/>
               </a:rPr>
-              <a:t>$ copy users\secrets.ini.sample users\kict1\secrets.ini</a:t>
+              <a:t>$ copy users\db_secrets.ini.sample users\kict1\db_secrets.ini</a:t>
             </a:r>
           </a:p>
           <a:p>
@@ -3900,7 +3901,7 @@
                 <a:ea typeface="Consolas"/>
                 <a:cs typeface="Consolas"/>
               </a:rPr>
-              <a:t>$ copy users\secrets.ini.sample users\cj_busan_1\secrets.ini</a:t>
+              <a:t>$ copy users\db_secrets.ini.sample users\cj_busan_1\db_secrets.ini</a:t>
             </a:r>
           </a:p>
           <a:p>
@@ -3948,7 +3949,7 @@
                 <a:ea typeface="Consolas"/>
                 <a:cs typeface="Consolas"/>
               </a:rPr>
-              <a:t>; users\kict1\secrets.ini</a:t>
+              <a:t>; users\kict1\db_secrets.ini</a:t>
             </a:r>
           </a:p>
           <a:p>
@@ -4203,7 +4204,7 @@
                 <a:ea typeface="맑은 고딕"/>
                 <a:cs typeface="맑은 고딕"/>
               </a:rPr>
-              <a:t>파이썬은 env.ini 와 secrets.ini 를 이어서 읽어 하나로 합칩니다. C++ 은 비밀번호만 secrets.ini 에서 읽습니다.</a:t>
+              <a:t>파이썬은 env.ini 와 db_secrets.ini 를 이어서 읽어 하나로 합칩니다. C++ 은 비밀번호만 db_secrets.ini 에서 읽습니다.</a:t>
             </a:r>
           </a:p>
         </p:txBody>
@@ -4393,7 +4394,7 @@
                 <a:ea typeface="맑은 고딕"/>
                 <a:cs typeface="맑은 고딕"/>
               </a:rPr>
-              <a:t>secrets.ini 가 없으면 파일 경로와 함께 오류가 표시되고 프로그램이 멈춥니다. 조용히 잘못 동작하지 않으므로 원인 파악이 쉽습니다.</a:t>
+              <a:t>db_secrets.ini 가 없으면 파일 경로와 함께 오류가 표시되고 프로그램이 멈춥니다. 조용히 잘못 동작하지 않으므로 원인 파악이 쉽습니다.</a:t>
             </a:r>
           </a:p>
         </p:txBody>
@@ -15858,7 +15859,7 @@
                 <a:ea typeface="Consolas"/>
                 <a:cs typeface="Consolas"/>
               </a:rPr>
-              <a:t># users/&lt;user&gt;/env.ini  [CONSTANTS]</a:t>
+              <a:t># users/&lt;user&gt;/continual_learning.ini  [CONSTANTS]</a:t>
             </a:r>
           </a:p>
           <a:p>
@@ -18267,7 +18268,7 @@
                 <a:ea typeface="맑은 고딕"/>
                 <a:cs typeface="맑은 고딕"/>
               </a:rPr>
-              <a:t>19  NIGHTLY RETRAIN</a:t>
+              <a:t>19  RETRAIN</a:t>
             </a:r>
           </a:p>
         </p:txBody>
@@ -18311,7 +18312,7 @@
                 <a:ea typeface="맑은 고딕"/>
                 <a:cs typeface="맑은 고딕"/>
               </a:rPr>
-              <a:t>야간 자동 재학습</a:t>
+              <a:t>재학습 - 창에서 눌러 돌립니다</a:t>
             </a:r>
           </a:p>
         </p:txBody>
@@ -18355,7 +18356,7 @@
                 <a:ea typeface="맑은 고딕"/>
                 <a:cs typeface="맑은 고딕"/>
               </a:rPr>
-              <a:t>히스토리 DB 에 이미 64셀 값이 쌓이고 있어, 별도 수집 장치 없이 스스로 갱신합니다. 창에서 돌리면 가운데에 진행 판이 떠 경과 시간과 단계를 보여 줍니다.</a:t>
+              <a:t>히스토리 DB 에 이미 64셀 값이 쌓이고 있어, 별도 수집 장치 없이 갱신합니다. 정해진 시각에 저절로 돌지는 않습니다 - [재학습] 창에서 눌러야 돌고, 가운데에 진행 판이 떠 경과 시간과 단계를 보여 줍니다.</a:t>
             </a:r>
           </a:p>
         </p:txBody>
@@ -21535,7 +21536,7 @@
                 <a:ea typeface="맑은 고딕"/>
                 <a:cs typeface="맑은 고딕"/>
               </a:rPr>
-              <a:t>몇 칸 밀렸는지가 아니라 지금 몇 점을 내고 있는지로 정합니다.</a:t>
+              <a:t>몇 칸 밀렸는지가 아니라 지금 몇 점을 내고 있는지로 정합니다. 점수는 표본을 지금 모델로 다시 매겨 구합니다.</a:t>
             </a:r>
           </a:p>
         </p:txBody>
@@ -21593,7 +21594,7 @@
         <p:spPr>
           <a:xfrm>
             <a:off x="694944" y="2340864"/>
-            <a:ext cx="5029200" cy="548640"/>
+            <a:ext cx="5029200" cy="731520"/>
           </a:xfrm>
           <a:prstGeom prst="rect">
             <a:avLst/>
@@ -21626,7 +21627,7 @@
                 <a:ea typeface="맑은 고딕"/>
                 <a:cs typeface="맑은 고딕"/>
               </a:rPr>
-              <a:t>최근 하루 mscore 의 중앙값입니다. 순간값을 쓰면 서서히 뜨거워지는 설비가 점수를 낮출 때 그 데이터로 재학습해 경보가 스스로 사라집니다.</a:t>
+              <a:t>최근 하루 프레임에서 표본 2,000건을 뽑아 지금 모델로 다시 매긴 점수의 중앙값입니다. DB 에 적힌 점수는 그때 돌던 모델의 것이라 세대를 갈아 끼운 날이면 여러 모델의 점수가 섞입니다. 순간값 대신 중앙값을 쓰는 이유는 따로 있습니다 — 서서히 뜨거워지는 설비가 점수를 낮출 때 그 데이터로 재학습하면 경보가 스스로 사라집니다.</a:t>
             </a:r>
           </a:p>
         </p:txBody>
@@ -21639,7 +21640,7 @@
         </p:nvSpPr>
         <p:spPr>
           <a:xfrm>
-            <a:off x="694944" y="2962656"/>
+            <a:off x="694944" y="3218688"/>
             <a:ext cx="5029200" cy="274320"/>
           </a:xfrm>
           <a:prstGeom prst="rect">
@@ -21683,7 +21684,7 @@
         </p:nvSpPr>
         <p:spPr>
           <a:xfrm>
-            <a:off x="731519" y="3273552"/>
+            <a:off x="731519" y="3529584"/>
             <a:ext cx="164592" cy="164592"/>
           </a:xfrm>
           <a:prstGeom prst="ellipse">
@@ -21727,7 +21728,7 @@
         </p:nvSpPr>
         <p:spPr>
           <a:xfrm>
-            <a:off x="1024128" y="3227832"/>
+            <a:off x="1024128" y="3483864"/>
             <a:ext cx="4754880" cy="402336"/>
           </a:xfrm>
           <a:prstGeom prst="rect">
@@ -21774,7 +21775,7 @@
         </p:nvSpPr>
         <p:spPr>
           <a:xfrm>
-            <a:off x="731519" y="3730752"/>
+            <a:off x="731519" y="3986783"/>
             <a:ext cx="164592" cy="164592"/>
           </a:xfrm>
           <a:prstGeom prst="ellipse">
@@ -21818,7 +21819,7 @@
         </p:nvSpPr>
         <p:spPr>
           <a:xfrm>
-            <a:off x="1024128" y="3685032"/>
+            <a:off x="1024128" y="3941063"/>
             <a:ext cx="4754880" cy="402336"/>
           </a:xfrm>
           <a:prstGeom prst="rect">
@@ -22116,7 +22117,7 @@
                 <a:ea typeface="Consolas"/>
                 <a:cs typeface="Consolas"/>
               </a:rPr>
-              <a:t>1.0</a:t>
+              <a:t>1.00</a:t>
             </a:r>
           </a:p>
         </p:txBody>
@@ -22204,7 +22205,7 @@
                 <a:ea typeface="맑은 고딕"/>
                 <a:cs typeface="맑은 고딕"/>
               </a:rPr>
-              <a:t>0.50 이상</a:t>
+              <a:t>0.70</a:t>
             </a:r>
           </a:p>
         </p:txBody>
@@ -22248,7 +22249,7 @@
                 <a:ea typeface="Consolas"/>
                 <a:cs typeface="Consolas"/>
               </a:rPr>
-              <a:t>0.5</a:t>
+              <a:t>0.77</a:t>
             </a:r>
           </a:p>
         </p:txBody>
@@ -22292,7 +22293,7 @@
                 <a:ea typeface="맑은 고딕"/>
                 <a:cs typeface="맑은 고딕"/>
               </a:rPr>
-              <a:t>옛 자료 절반</a:t>
+              <a:t>두 끝 사이는 직선으로 잇습니다</a:t>
             </a:r>
           </a:p>
         </p:txBody>
@@ -22336,7 +22337,7 @@
                 <a:ea typeface="맑은 고딕"/>
                 <a:cs typeface="맑은 고딕"/>
               </a:rPr>
-              <a:t>0.20 이상</a:t>
+              <a:t>0.50</a:t>
             </a:r>
           </a:p>
         </p:txBody>
@@ -22380,7 +22381,7 @@
                 <a:ea typeface="Consolas"/>
                 <a:cs typeface="Consolas"/>
               </a:rPr>
-              <a:t>0.2</a:t>
+              <a:t>0.46</a:t>
             </a:r>
           </a:p>
         </p:txBody>
@@ -22424,7 +22425,7 @@
                 <a:ea typeface="맑은 고딕"/>
                 <a:cs typeface="맑은 고딕"/>
               </a:rPr>
-              <a:t>옛 자료 소량</a:t>
+              <a:t>기여만큼만 옛 자료를 섞습니다</a:t>
             </a:r>
           </a:p>
         </p:txBody>
@@ -22468,7 +22469,7 @@
                 <a:ea typeface="맑은 고딕"/>
                 <a:cs typeface="맑은 고딕"/>
               </a:rPr>
-              <a:t>그 아래</a:t>
+              <a:t>0.20 이하</a:t>
             </a:r>
           </a:p>
         </p:txBody>
@@ -22512,7 +22513,7 @@
                 <a:ea typeface="Consolas"/>
                 <a:cs typeface="Consolas"/>
               </a:rPr>
-              <a:t>0.0</a:t>
+              <a:t>0.00</a:t>
             </a:r>
           </a:p>
         </p:txBody>
@@ -22556,7 +22557,7 @@
                 <a:ea typeface="맑은 고딕"/>
                 <a:cs typeface="맑은 고딕"/>
               </a:rPr>
-              <a:t>새로 시작</a:t>
+              <a:t>웜스타트 없이 새로 시작</a:t>
             </a:r>
           </a:p>
         </p:txBody>
@@ -22569,8 +22570,8 @@
         </p:nvSpPr>
         <p:spPr>
           <a:xfrm>
-            <a:off x="6272783" y="3913632"/>
-            <a:ext cx="4846320" cy="420624"/>
+            <a:off x="6272783" y="3675887"/>
+            <a:ext cx="4846320" cy="566928"/>
           </a:xfrm>
           <a:prstGeom prst="rect">
             <a:avLst/>
@@ -22603,7 +22604,7 @@
                 <a:ea typeface="맑은 고딕"/>
                 <a:cs typeface="맑은 고딕"/>
               </a:rPr>
-              <a:t>문턱은 env.ini 의 CONTRIB_BAND_HIGH / MID / LOW 로 바꿉니다.</a:t>
+              <a:t>두 끝 사이를 직선으로 이어 0.849 와 0.851 이 딴 학습이 되지 않게 합니다. 두 끝과 판단 기간·최소 프레임·표본 상한은 [설정] 창의 [ 기여도 판단 ] 에서 바꿉니다.</a:t>
             </a:r>
           </a:p>
         </p:txBody>
@@ -23831,7 +23832,7 @@
                 <a:ea typeface="맑은 고딕"/>
                 <a:cs typeface="맑은 고딕"/>
               </a:rPr>
-              <a:t>[설정] 버튼을 누르면 창 아래가 펼쳐집니다. 목록과 같은 토글이라 펼친 채로 다른 버튼을 쓸 수 있습니다. 값은 users\&lt;현장&gt;\env.ini 에 저장됩니다.</a:t>
+              <a:t>[설정] 버튼을 누르면 창 아래가 펼쳐집니다. 목록과 같은 토글이라 펼친 채로 다른 버튼을 쓸 수 있습니다. 값은 users\&lt;현장&gt;\continual_learning.ini 에 저장됩니다.</a:t>
             </a:r>
           </a:p>
         </p:txBody>
@@ -23844,8 +23845,8 @@
         </p:nvSpPr>
         <p:spPr>
           <a:xfrm>
-            <a:off x="658368" y="2011680"/>
-            <a:ext cx="10874959" cy="2764536"/>
+            <a:off x="658368" y="1938528"/>
+            <a:ext cx="10874959" cy="3768471"/>
           </a:xfrm>
           <a:prstGeom prst="roundRect">
             <a:avLst>
@@ -23888,8 +23889,8 @@
         </p:nvSpPr>
         <p:spPr>
           <a:xfrm>
-            <a:off x="859536" y="2212848"/>
-            <a:ext cx="10472623" cy="2362200"/>
+            <a:off x="859536" y="2139696"/>
+            <a:ext cx="10472623" cy="3366135"/>
           </a:xfrm>
           <a:prstGeom prst="rect">
             <a:avLst/>
@@ -23914,7 +23915,7 @@
               </a:spcAft>
             </a:pPr>
             <a:r>
-              <a:rPr sz="1000" b="0" i="0">
+              <a:rPr sz="900" b="0" i="0">
                 <a:solidFill>
                   <a:srgbClr val="D6DFEA"/>
                 </a:solidFill>
@@ -23938,7 +23939,7 @@
               </a:spcAft>
             </a:pPr>
             <a:r>
-              <a:rPr sz="1000" b="0" i="0">
+              <a:rPr sz="900" b="0" i="0">
                 <a:solidFill>
                   <a:srgbClr val="D6DFEA"/>
                 </a:solidFill>
@@ -23946,7 +23947,7 @@
                 <a:ea typeface="Consolas"/>
                 <a:cs typeface="Consolas"/>
               </a:rPr>
-              <a:t>기준선 최소 표본수  [ 3000 ]              0단계 절대임계값   사용 중</a:t>
+              <a:t>기준선 최소 표본수/시간대 [3000][18]      0단계 절대임계값   사용 중</a:t>
             </a:r>
           </a:p>
           <a:p>
@@ -23962,7 +23963,7 @@
               </a:spcAft>
             </a:pPr>
             <a:r>
-              <a:rPr sz="1000" b="0" i="0">
+              <a:rPr sz="900" b="0" i="0">
                 <a:solidFill>
                   <a:srgbClr val="D6DFEA"/>
                 </a:solidFill>
@@ -23970,7 +23971,7 @@
                 <a:ea typeface="Consolas"/>
                 <a:cs typeface="Consolas"/>
               </a:rPr>
-              <a:t>기준선 최소 시간대  [   18 ]                 온도 207/222도 · 상승 20/34도/분</a:t>
+              <a:t>재학습 최소 표본수/시간대 [5000][18]         온도 207/222도 · 상승 20/34도/분</a:t>
             </a:r>
           </a:p>
           <a:p>
@@ -23986,7 +23987,7 @@
               </a:spcAft>
             </a:pPr>
             <a:r>
-              <a:rPr sz="1000" b="0" i="0">
+              <a:rPr sz="900" b="0" i="0">
                 <a:solidFill>
                   <a:srgbClr val="D6DFEA"/>
                 </a:solidFill>
@@ -23994,7 +23995,7 @@
                 <a:ea typeface="Consolas"/>
                 <a:cs typeface="Consolas"/>
               </a:rPr>
-              <a:t>재학습 최소 표본수  [ 5000 ]              1단계 셀별기준선   집계 중</a:t>
+              <a:t>계산기준일   [ 2026-09-21 v ]             1단계 셀별기준선   집계 중</a:t>
             </a:r>
           </a:p>
           <a:p>
@@ -24010,7 +24011,7 @@
               </a:spcAft>
             </a:pPr>
             <a:r>
-              <a:rPr sz="1000" b="0" i="0">
+              <a:rPr sz="900" b="0" i="0">
                 <a:solidFill>
                   <a:srgbClr val="D6DFEA"/>
                 </a:solidFill>
@@ -24018,7 +24019,7 @@
                 <a:ea typeface="Consolas"/>
                 <a:cs typeface="Consolas"/>
               </a:rPr>
-              <a:t>재학습 최소 시간대  [   18 ]                 표본 6,400/3,000 · 시간대 13/18</a:t>
+              <a:t>                                             표본 6,400/3,000 · 시간대 13/18</a:t>
             </a:r>
           </a:p>
           <a:p>
@@ -24034,7 +24035,7 @@
               </a:spcAft>
             </a:pPr>
             <a:r>
-              <a:rPr sz="1000" b="0" i="0">
+              <a:rPr sz="900" b="0" i="0">
                 <a:solidFill>
                   <a:srgbClr val="D6DFEA"/>
                 </a:solidFill>
@@ -24042,7 +24043,7 @@
                 <a:ea typeface="Consolas"/>
                 <a:cs typeface="Consolas"/>
               </a:rPr>
-              <a:t>계산기준일   [ 2026-09-21 v ]             2단계 오토인코더   사용 중</a:t>
+              <a:t>[ 절대 임계값 (0단계) ]  주의/경보        2단계 오토인코더   사용 중</a:t>
             </a:r>
           </a:p>
           <a:p>
@@ -24058,7 +24059,7 @@
               </a:spcAft>
             </a:pPr>
             <a:r>
-              <a:rPr sz="1000" b="0" i="0">
+              <a:rPr sz="900" b="0" i="0">
                 <a:solidFill>
                   <a:srgbClr val="D6DFEA"/>
                 </a:solidFill>
@@ -24066,7 +24067,7 @@
                 <a:ea typeface="Consolas"/>
                 <a:cs typeface="Consolas"/>
               </a:rPr>
-              <a:t>                                             모델 2026-09-20 18:28</a:t>
+              <a:t>마스크 셀 최고 온도  [ 207 ][ 222 ]          세대 20260925_152357</a:t>
             </a:r>
           </a:p>
           <a:p>
@@ -24082,7 +24083,7 @@
               </a:spcAft>
             </a:pPr>
             <a:r>
-              <a:rPr sz="1000" b="0" i="0">
+              <a:rPr sz="900" b="0" i="0">
                 <a:solidFill>
                   <a:srgbClr val="D6DFEA"/>
                 </a:solidFill>
@@ -24090,7 +24091,7 @@
                 <a:ea typeface="Consolas"/>
                 <a:cs typeface="Consolas"/>
               </a:rPr>
-              <a:t>[ 절대 임계값 (0단계) ]  주의/경보        연속학습          대기</a:t>
+              <a:t>분당 상승률          [  20 ][  34 ]          모델 2026-09-25 15:23</a:t>
             </a:r>
           </a:p>
           <a:p>
@@ -24106,7 +24107,7 @@
               </a:spcAft>
             </a:pPr>
             <a:r>
-              <a:rPr sz="1000" b="0" i="0">
+              <a:rPr sz="900" b="0" i="0">
                 <a:solidFill>
                   <a:srgbClr val="D6DFEA"/>
                 </a:solidFill>
@@ -24114,7 +24115,7 @@
                 <a:ea typeface="Consolas"/>
                 <a:cs typeface="Consolas"/>
               </a:rPr>
-              <a:t>마스크 셀 최고 온도  [ 207 ][ 222 ]          재학습 가능 9,299/5,000건</a:t>
+              <a:t> </a:t>
             </a:r>
           </a:p>
           <a:p>
@@ -24130,7 +24131,7 @@
               </a:spcAft>
             </a:pPr>
             <a:r>
-              <a:rPr sz="1000" b="0" i="0">
+              <a:rPr sz="900" b="0" i="0">
                 <a:solidFill>
                   <a:srgbClr val="D6DFEA"/>
                 </a:solidFill>
@@ -24138,7 +24139,7 @@
                 <a:ea typeface="Consolas"/>
                 <a:cs typeface="Consolas"/>
               </a:rPr>
-              <a:t>분당 상승률          [  20 ][  34 ]          판단 점수 0.088 → 기여 0.00</a:t>
+              <a:t>[ 기여도 판단 ]                           연속학습          적용됨</a:t>
             </a:r>
           </a:p>
           <a:p>
@@ -24154,7 +24155,7 @@
               </a:spcAft>
             </a:pPr>
             <a:r>
-              <a:rPr sz="1000" b="0" i="0">
+              <a:rPr sz="900" b="0" i="0">
                 <a:solidFill>
                   <a:srgbClr val="D6DFEA"/>
                 </a:solidFill>
@@ -24162,7 +24163,7 @@
                 <a:ea typeface="Consolas"/>
                 <a:cs typeface="Consolas"/>
               </a:rPr>
-              <a:t> </a:t>
+              <a:t>판단 기간 (테이블 수)    [    7 ]            최근 승격 2026-09-25 15:23</a:t>
             </a:r>
           </a:p>
           <a:p>
@@ -24178,7 +24179,7 @@
               </a:spcAft>
             </a:pPr>
             <a:r>
-              <a:rPr sz="1000" b="0" i="0">
+              <a:rPr sz="900" b="0" i="0">
                 <a:solidFill>
                   <a:srgbClr val="D6DFEA"/>
                 </a:solidFill>
@@ -24186,6 +24187,174 @@
                 <a:ea typeface="Consolas"/>
                 <a:cs typeface="Consolas"/>
               </a:rPr>
+              <a:t>최소 프레임/표본 상한 [500][2000]            판단 점수 0.960</a:t>
+            </a:r>
+          </a:p>
+          <a:p>
+            <a:pPr algn="l">
+              <a:lnSpc>
+                <a:spcPct val="100000"/>
+              </a:lnSpc>
+              <a:spcBef>
+                <a:spcPts val="0"/>
+              </a:spcBef>
+              <a:spcAft>
+                <a:spcPts val="150"/>
+              </a:spcAft>
+            </a:pPr>
+            <a:r>
+              <a:rPr sz="900" b="0" i="0">
+                <a:solidFill>
+                  <a:srgbClr val="D6DFEA"/>
+                </a:solidFill>
+                <a:latin typeface="Consolas"/>
+                <a:ea typeface="Consolas"/>
+                <a:cs typeface="Consolas"/>
+              </a:rPr>
+              <a:t>기여 문턱 (하/상)    [0.20][0.85]            기존 모델 기여 1.00</a:t>
+            </a:r>
+          </a:p>
+          <a:p>
+            <a:pPr algn="l">
+              <a:lnSpc>
+                <a:spcPct val="100000"/>
+              </a:lnSpc>
+              <a:spcBef>
+                <a:spcPts val="0"/>
+              </a:spcBef>
+              <a:spcAft>
+                <a:spcPts val="150"/>
+              </a:spcAft>
+            </a:pPr>
+            <a:r>
+              <a:rPr sz="900" b="0" i="0">
+                <a:solidFill>
+                  <a:srgbClr val="D6DFEA"/>
+                </a:solidFill>
+                <a:latin typeface="Consolas"/>
+                <a:ea typeface="Consolas"/>
+                <a:cs typeface="Consolas"/>
+              </a:rPr>
+              <a:t> </a:t>
+            </a:r>
+          </a:p>
+          <a:p>
+            <a:pPr algn="l">
+              <a:lnSpc>
+                <a:spcPct val="100000"/>
+              </a:lnSpc>
+              <a:spcBef>
+                <a:spcPts val="0"/>
+              </a:spcBef>
+              <a:spcAft>
+                <a:spcPts val="150"/>
+              </a:spcAft>
+            </a:pPr>
+            <a:r>
+              <a:rPr sz="900" b="0" i="0">
+                <a:solidFill>
+                  <a:srgbClr val="D6DFEA"/>
+                </a:solidFill>
+                <a:latin typeface="Consolas"/>
+                <a:ea typeface="Consolas"/>
+                <a:cs typeface="Consolas"/>
+              </a:rPr>
+              <a:t>[ 학습 표본 ]</a:t>
+            </a:r>
+          </a:p>
+          <a:p>
+            <a:pPr algn="l">
+              <a:lnSpc>
+                <a:spcPct val="100000"/>
+              </a:lnSpc>
+              <a:spcBef>
+                <a:spcPts val="0"/>
+              </a:spcBef>
+              <a:spcAft>
+                <a:spcPts val="150"/>
+              </a:spcAft>
+            </a:pPr>
+            <a:r>
+              <a:rPr sz="900" b="0" i="0">
+                <a:solidFill>
+                  <a:srgbClr val="D6DFEA"/>
+                </a:solidFill>
+                <a:latin typeface="Consolas"/>
+                <a:ea typeface="Consolas"/>
+                <a:cs typeface="Consolas"/>
+              </a:rPr>
+              <a:t>목표 표본 수 [60000] 정상 판정선 [0.5]</a:t>
+            </a:r>
+          </a:p>
+          <a:p>
+            <a:pPr algn="l">
+              <a:lnSpc>
+                <a:spcPct val="100000"/>
+              </a:lnSpc>
+              <a:spcBef>
+                <a:spcPts val="0"/>
+              </a:spcBef>
+              <a:spcAft>
+                <a:spcPts val="150"/>
+              </a:spcAft>
+            </a:pPr>
+            <a:r>
+              <a:rPr sz="900" b="0" i="0">
+                <a:solidFill>
+                  <a:srgbClr val="D6DFEA"/>
+                </a:solidFill>
+                <a:latin typeface="Consolas"/>
+                <a:ea typeface="Consolas"/>
+                <a:cs typeface="Consolas"/>
+              </a:rPr>
+              <a:t>가동 판정 온도  [      ] 비우면 자동</a:t>
+            </a:r>
+          </a:p>
+          <a:p>
+            <a:pPr algn="l">
+              <a:lnSpc>
+                <a:spcPct val="100000"/>
+              </a:lnSpc>
+              <a:spcBef>
+                <a:spcPts val="0"/>
+              </a:spcBef>
+              <a:spcAft>
+                <a:spcPts val="150"/>
+              </a:spcAft>
+            </a:pPr>
+            <a:r>
+              <a:rPr sz="900" b="0" i="0">
+                <a:solidFill>
+                  <a:srgbClr val="D6DFEA"/>
+                </a:solidFill>
+                <a:latin typeface="Consolas"/>
+                <a:ea typeface="Consolas"/>
+                <a:cs typeface="Consolas"/>
+              </a:rPr>
+              <a:t>[ ] 시기를 나누어 담기</a:t>
+            </a:r>
+          </a:p>
+          <a:p>
+            <a:pPr algn="l">
+              <a:lnSpc>
+                <a:spcPct val="100000"/>
+              </a:lnSpc>
+              <a:spcBef>
+                <a:spcPts val="0"/>
+              </a:spcBef>
+              <a:spcAft>
+                <a:spcPts val="150"/>
+              </a:spcAft>
+            </a:pPr>
+            <a:r>
+              <a:rPr sz="900" b="0" i="0">
+                <a:solidFill>
+                  <a:srgbClr val="D6DFEA"/>
+                </a:solidFill>
+                <a:latin typeface="Consolas"/>
+                <a:ea typeface="Consolas"/>
+                <a:cs typeface="Consolas"/>
+              </a:rPr>
               <a:t>[ 설정 적용 ]   [ 재학습 ]</a:t>
             </a:r>
           </a:p>
@@ -24193,325 +24362,78 @@
       </p:sp>
       <p:sp>
         <p:nvSpPr>
-          <p:cNvPr id="7" name="Rounded Rectangle 6"/>
-          <p:cNvSpPr/>
-          <p:nvPr/>
-        </p:nvSpPr>
-        <p:spPr>
-          <a:xfrm>
-            <a:off x="658368" y="4718304"/>
-            <a:ext cx="5300319" cy="1444752"/>
-          </a:xfrm>
-          <a:prstGeom prst="roundRect">
-            <a:avLst>
-              <a:gd name="adj" fmla="val 6000"/>
-            </a:avLst>
-          </a:prstGeom>
-          <a:solidFill>
-            <a:srgbClr val="F2F4F7"/>
-          </a:solidFill>
-          <a:ln>
-            <a:noFill/>
-          </a:ln>
-          <a:effectLst/>
-        </p:spPr>
-        <p:style>
-          <a:lnRef idx="1">
-            <a:schemeClr val="accent1"/>
-          </a:lnRef>
-          <a:fillRef idx="3">
-            <a:schemeClr val="accent1"/>
-          </a:fillRef>
-          <a:effectRef idx="2">
-            <a:schemeClr val="accent1"/>
-          </a:effectRef>
-          <a:fontRef idx="minor">
-            <a:schemeClr val="lt1"/>
-          </a:fontRef>
-        </p:style>
-        <p:txBody>
-          <a:bodyPr rtlCol="0" anchor="ctr"/>
-          <a:lstStyle/>
-          <a:p/>
+          <p:cNvPr id="7" name="TextBox 6"/>
+          <p:cNvSpPr txBox="1"/>
+          <p:nvPr/>
+        </p:nvSpPr>
+        <p:spPr>
+          <a:xfrm>
+            <a:off x="658368" y="5815584"/>
+            <a:ext cx="9509760" cy="457200"/>
+          </a:xfrm>
+          <a:prstGeom prst="rect">
+            <a:avLst/>
+          </a:prstGeom>
+          <a:noFill/>
+        </p:spPr>
+        <p:txBody>
+          <a:bodyPr wrap="square" lIns="0" rIns="0" tIns="0" bIns="0" anchor="t">
+            <a:spAutoFit/>
+          </a:bodyPr>
+          <a:lstStyle/>
+          <a:p>
+            <a:pPr algn="l">
+              <a:lnSpc>
+                <a:spcPct val="120000"/>
+              </a:lnSpc>
+              <a:spcBef>
+                <a:spcPts val="0"/>
+              </a:spcBef>
+              <a:spcAft>
+                <a:spcPts val="400"/>
+              </a:spcAft>
+            </a:pPr>
+            <a:r>
+              <a:rPr sz="1100" b="0" i="0">
+                <a:solidFill>
+                  <a:srgbClr val="1A2435"/>
+                </a:solidFill>
+                <a:latin typeface="맑은 고딕"/>
+                <a:ea typeface="맑은 고딕"/>
+                <a:cs typeface="맑은 고딕"/>
+              </a:rPr>
+              <a:t>네 묶음을 [설정 적용] 하나로 함께 저장합니다. 값이 하나라도 잘못되면 아무것도 쓰지 않고, 저장 뒤 [정지] → [시작] 을 눌러야 반영됩니다.</a:t>
+            </a:r>
+          </a:p>
+          <a:p>
+            <a:pPr algn="l">
+              <a:lnSpc>
+                <a:spcPct val="120000"/>
+              </a:lnSpc>
+              <a:spcBef>
+                <a:spcPts val="0"/>
+              </a:spcBef>
+              <a:spcAft>
+                <a:spcPts val="0"/>
+              </a:spcAft>
+            </a:pPr>
+            <a:r>
+              <a:rPr sz="1100" b="0" i="0">
+                <a:solidFill>
+                  <a:srgbClr val="E4572E"/>
+                </a:solidFill>
+                <a:latin typeface="맑은 고딕"/>
+                <a:ea typeface="맑은 고딕"/>
+                <a:cs typeface="맑은 고딕"/>
+              </a:rPr>
+              <a:t>계산기준일을 바꾸면 셀별 기준선을 버리고 처음부터 다시 쌓습니다 — 며칠치가 사라지므로 바뀔 때 확인을 묻습니다.</a:t>
+            </a:r>
+          </a:p>
         </p:txBody>
       </p:sp>
       <p:sp>
         <p:nvSpPr>
           <p:cNvPr id="8" name="TextBox 7"/>
-          <p:cNvSpPr txBox="1"/>
-          <p:nvPr/>
-        </p:nvSpPr>
-        <p:spPr>
-          <a:xfrm>
-            <a:off x="914400" y="4864608"/>
-            <a:ext cx="4788255" cy="274320"/>
-          </a:xfrm>
-          <a:prstGeom prst="rect">
-            <a:avLst/>
-          </a:prstGeom>
-          <a:noFill/>
-        </p:spPr>
-        <p:txBody>
-          <a:bodyPr wrap="square" lIns="0" rIns="0" tIns="0" bIns="0" anchor="t">
-            <a:spAutoFit/>
-          </a:bodyPr>
-          <a:lstStyle/>
-          <a:p>
-            <a:pPr algn="l">
-              <a:spcBef>
-                <a:spcPts val="0"/>
-              </a:spcBef>
-              <a:spcAft>
-                <a:spcPts val="0"/>
-              </a:spcAft>
-            </a:pPr>
-            <a:r>
-              <a:rPr sz="1250" b="1" i="0">
-                <a:solidFill>
-                  <a:srgbClr val="1A2435"/>
-                </a:solidFill>
-                <a:latin typeface="맑은 고딕"/>
-                <a:ea typeface="맑은 고딕"/>
-                <a:cs typeface="맑은 고딕"/>
-              </a:rPr>
-              <a:t>왼쪽 — 조건을 정한다</a:t>
-            </a:r>
-          </a:p>
-        </p:txBody>
-      </p:sp>
-      <p:sp>
-        <p:nvSpPr>
-          <p:cNvPr id="9" name="TextBox 8"/>
-          <p:cNvSpPr txBox="1"/>
-          <p:nvPr/>
-        </p:nvSpPr>
-        <p:spPr>
-          <a:xfrm>
-            <a:off x="914400" y="5175504"/>
-            <a:ext cx="4788255" cy="914400"/>
-          </a:xfrm>
-          <a:prstGeom prst="rect">
-            <a:avLst/>
-          </a:prstGeom>
-          <a:noFill/>
-        </p:spPr>
-        <p:txBody>
-          <a:bodyPr wrap="square" lIns="0" rIns="0" tIns="0" bIns="0" anchor="t">
-            <a:spAutoFit/>
-          </a:bodyPr>
-          <a:lstStyle/>
-          <a:p>
-            <a:pPr algn="l">
-              <a:lnSpc>
-                <a:spcPct val="125000"/>
-              </a:lnSpc>
-              <a:spcBef>
-                <a:spcPts val="0"/>
-              </a:spcBef>
-              <a:spcAft>
-                <a:spcPts val="500"/>
-              </a:spcAft>
-            </a:pPr>
-            <a:r>
-              <a:rPr sz="1100" b="0" i="0">
-                <a:solidFill>
-                  <a:srgbClr val="1A2435"/>
-                </a:solidFill>
-                <a:latin typeface="맑은 고딕"/>
-                <a:ea typeface="맑은 고딕"/>
-                <a:cs typeface="맑은 고딕"/>
-              </a:rPr>
-              <a:t>위 묶음은 단계가 언제 켜질지, 아래 묶음은 0단계가 언제 경보할지 정합니다. 버튼 하나로 함께 저장하며, 값이 하나라도 잘못되면 아무것도 쓰지 않습니다.</a:t>
-            </a:r>
-          </a:p>
-          <a:p>
-            <a:pPr algn="l">
-              <a:lnSpc>
-                <a:spcPct val="125000"/>
-              </a:lnSpc>
-              <a:spcBef>
-                <a:spcPts val="0"/>
-              </a:spcBef>
-              <a:spcAft>
-                <a:spcPts val="0"/>
-              </a:spcAft>
-            </a:pPr>
-            <a:r>
-              <a:rPr sz="1100" b="0" i="0">
-                <a:solidFill>
-                  <a:srgbClr val="E4572E"/>
-                </a:solidFill>
-                <a:latin typeface="맑은 고딕"/>
-                <a:ea typeface="맑은 고딕"/>
-                <a:cs typeface="맑은 고딕"/>
-              </a:rPr>
-              <a:t>임계값은 설비마다 전혀 다릅니다. 네 칸을 모두 비우면 0단계가 꺼집니다.</a:t>
-            </a:r>
-          </a:p>
-        </p:txBody>
-      </p:sp>
-      <p:sp>
-        <p:nvSpPr>
-          <p:cNvPr id="10" name="Rounded Rectangle 9"/>
-          <p:cNvSpPr/>
-          <p:nvPr/>
-        </p:nvSpPr>
-        <p:spPr>
-          <a:xfrm>
-            <a:off x="6233007" y="4718304"/>
-            <a:ext cx="5300319" cy="1444752"/>
-          </a:xfrm>
-          <a:prstGeom prst="roundRect">
-            <a:avLst>
-              <a:gd name="adj" fmla="val 6000"/>
-            </a:avLst>
-          </a:prstGeom>
-          <a:solidFill>
-            <a:srgbClr val="FDF1EC"/>
-          </a:solidFill>
-          <a:ln>
-            <a:noFill/>
-          </a:ln>
-          <a:effectLst/>
-        </p:spPr>
-        <p:style>
-          <a:lnRef idx="1">
-            <a:schemeClr val="accent1"/>
-          </a:lnRef>
-          <a:fillRef idx="3">
-            <a:schemeClr val="accent1"/>
-          </a:fillRef>
-          <a:effectRef idx="2">
-            <a:schemeClr val="accent1"/>
-          </a:effectRef>
-          <a:fontRef idx="minor">
-            <a:schemeClr val="lt1"/>
-          </a:fontRef>
-        </p:style>
-        <p:txBody>
-          <a:bodyPr rtlCol="0" anchor="ctr"/>
-          <a:lstStyle/>
-          <a:p/>
-        </p:txBody>
-      </p:sp>
-      <p:sp>
-        <p:nvSpPr>
-          <p:cNvPr id="11" name="TextBox 10"/>
-          <p:cNvSpPr txBox="1"/>
-          <p:nvPr/>
-        </p:nvSpPr>
-        <p:spPr>
-          <a:xfrm>
-            <a:off x="6489039" y="4864608"/>
-            <a:ext cx="4788255" cy="274320"/>
-          </a:xfrm>
-          <a:prstGeom prst="rect">
-            <a:avLst/>
-          </a:prstGeom>
-          <a:noFill/>
-        </p:spPr>
-        <p:txBody>
-          <a:bodyPr wrap="square" lIns="0" rIns="0" tIns="0" bIns="0" anchor="t">
-            <a:spAutoFit/>
-          </a:bodyPr>
-          <a:lstStyle/>
-          <a:p>
-            <a:pPr algn="l">
-              <a:spcBef>
-                <a:spcPts val="0"/>
-              </a:spcBef>
-              <a:spcAft>
-                <a:spcPts val="0"/>
-              </a:spcAft>
-            </a:pPr>
-            <a:r>
-              <a:rPr sz="1250" b="1" i="0">
-                <a:solidFill>
-                  <a:srgbClr val="E4572E"/>
-                </a:solidFill>
-                <a:latin typeface="맑은 고딕"/>
-                <a:ea typeface="맑은 고딕"/>
-                <a:cs typeface="맑은 고딕"/>
-              </a:rPr>
-              <a:t>계산기준일을 바꾸면 기준선을 새로 쌓습니다</a:t>
-            </a:r>
-          </a:p>
-        </p:txBody>
-      </p:sp>
-      <p:sp>
-        <p:nvSpPr>
-          <p:cNvPr id="12" name="TextBox 11"/>
-          <p:cNvSpPr txBox="1"/>
-          <p:nvPr/>
-        </p:nvSpPr>
-        <p:spPr>
-          <a:xfrm>
-            <a:off x="6489039" y="5175504"/>
-            <a:ext cx="4788255" cy="914400"/>
-          </a:xfrm>
-          <a:prstGeom prst="rect">
-            <a:avLst/>
-          </a:prstGeom>
-          <a:noFill/>
-        </p:spPr>
-        <p:txBody>
-          <a:bodyPr wrap="square" lIns="0" rIns="0" tIns="0" bIns="0" anchor="t">
-            <a:spAutoFit/>
-          </a:bodyPr>
-          <a:lstStyle/>
-          <a:p>
-            <a:pPr algn="l">
-              <a:lnSpc>
-                <a:spcPct val="125000"/>
-              </a:lnSpc>
-              <a:spcBef>
-                <a:spcPts val="0"/>
-              </a:spcBef>
-              <a:spcAft>
-                <a:spcPts val="500"/>
-              </a:spcAft>
-            </a:pPr>
-            <a:r>
-              <a:rPr sz="1100" b="0" i="0">
-                <a:solidFill>
-                  <a:srgbClr val="1A2435"/>
-                </a:solidFill>
-                <a:latin typeface="맑은 고딕"/>
-                <a:ea typeface="맑은 고딕"/>
-                <a:cs typeface="맑은 고딕"/>
-              </a:rPr>
-              <a:t>히스토리 DB 는 날짜별 테이블이라 정확히 잘라내지만, 셀별 기준선에는 표본별 시각이 없어 과거만 뺄 수 없습니다. 며칠치가 사라지므로 바뀔 때 확인을 묻습니다.</a:t>
-            </a:r>
-          </a:p>
-          <a:p>
-            <a:pPr algn="l">
-              <a:lnSpc>
-                <a:spcPct val="125000"/>
-              </a:lnSpc>
-              <a:spcBef>
-                <a:spcPts val="0"/>
-              </a:spcBef>
-              <a:spcAft>
-                <a:spcPts val="0"/>
-              </a:spcAft>
-            </a:pPr>
-            <a:r>
-              <a:rPr sz="1100" b="1" i="0">
-                <a:solidFill>
-                  <a:srgbClr val="E4572E"/>
-                </a:solidFill>
-                <a:latin typeface="맑은 고딕"/>
-                <a:ea typeface="맑은 고딕"/>
-                <a:cs typeface="맑은 고딕"/>
-              </a:rPr>
-              <a:t>저장 후 [정지] → [시작] 을 눌러야 반영됩니다.</a:t>
-            </a:r>
-          </a:p>
-        </p:txBody>
-      </p:sp>
-      <p:sp>
-        <p:nvSpPr>
-          <p:cNvPr id="13" name="TextBox 12"/>
           <p:cNvSpPr txBox="1"/>
           <p:nvPr/>
         </p:nvSpPr>
@@ -24562,6 +24484,1746 @@
 </file>
 
 <file path=ppt/slides/slide25.xml><?xml version="1.0" encoding="utf-8"?>
+<p:sld xmlns:a="http://schemas.openxmlformats.org/drawingml/2006/main" xmlns:p="http://schemas.openxmlformats.org/presentationml/2006/main" xmlns:r="http://schemas.openxmlformats.org/officeDocument/2006/relationships">
+  <p:cSld>
+    <p:bg>
+      <p:bgPr>
+        <a:solidFill>
+          <a:srgbClr val="FFFFFF"/>
+        </a:solidFill>
+        <a:effectLst/>
+      </p:bgPr>
+    </p:bg>
+    <p:spTree>
+      <p:nvGrpSpPr>
+        <p:cNvPr id="1" name=""/>
+        <p:cNvGrpSpPr/>
+        <p:nvPr/>
+      </p:nvGrpSpPr>
+      <p:grpSpPr/>
+      <p:sp>
+        <p:nvSpPr>
+          <p:cNvPr id="2" name="TextBox 1"/>
+          <p:cNvSpPr txBox="1"/>
+          <p:nvPr/>
+        </p:nvSpPr>
+        <p:spPr>
+          <a:xfrm>
+            <a:off x="658368" y="475488"/>
+            <a:ext cx="10874959" cy="310896"/>
+          </a:xfrm>
+          <a:prstGeom prst="rect">
+            <a:avLst/>
+          </a:prstGeom>
+          <a:noFill/>
+        </p:spPr>
+        <p:txBody>
+          <a:bodyPr wrap="square" lIns="0" rIns="0" tIns="0" bIns="0" anchor="t">
+            <a:spAutoFit/>
+          </a:bodyPr>
+          <a:lstStyle/>
+          <a:p>
+            <a:pPr algn="l">
+              <a:spcBef>
+                <a:spcPts val="0"/>
+              </a:spcBef>
+              <a:spcAft>
+                <a:spcPts val="0"/>
+              </a:spcAft>
+            </a:pPr>
+            <a:r>
+              <a:rPr sz="1250" b="1" i="0">
+                <a:solidFill>
+                  <a:srgbClr val="E4572E"/>
+                </a:solidFill>
+                <a:latin typeface="맑은 고딕"/>
+                <a:ea typeface="맑은 고딕"/>
+                <a:cs typeface="맑은 고딕"/>
+              </a:rPr>
+              <a:t>24  TRAINING SAMPLE</a:t>
+            </a:r>
+          </a:p>
+        </p:txBody>
+      </p:sp>
+      <p:sp>
+        <p:nvSpPr>
+          <p:cNvPr id="3" name="TextBox 2"/>
+          <p:cNvSpPr txBox="1"/>
+          <p:nvPr/>
+        </p:nvSpPr>
+        <p:spPr>
+          <a:xfrm>
+            <a:off x="658368" y="804672"/>
+            <a:ext cx="10874959" cy="621792"/>
+          </a:xfrm>
+          <a:prstGeom prst="rect">
+            <a:avLst/>
+          </a:prstGeom>
+          <a:noFill/>
+        </p:spPr>
+        <p:txBody>
+          <a:bodyPr wrap="square" lIns="0" rIns="0" tIns="0" bIns="0" anchor="t">
+            <a:spAutoFit/>
+          </a:bodyPr>
+          <a:lstStyle/>
+          <a:p>
+            <a:pPr algn="l">
+              <a:spcBef>
+                <a:spcPts val="0"/>
+              </a:spcBef>
+              <a:spcAft>
+                <a:spcPts val="0"/>
+              </a:spcAft>
+            </a:pPr>
+            <a:r>
+              <a:rPr sz="3000" b="1" i="0">
+                <a:solidFill>
+                  <a:srgbClr val="1A2435"/>
+                </a:solidFill>
+                <a:latin typeface="맑은 고딕"/>
+                <a:ea typeface="맑은 고딕"/>
+                <a:cs typeface="맑은 고딕"/>
+              </a:rPr>
+              <a:t>학습 표본 - 무엇을 배우는가</a:t>
+            </a:r>
+          </a:p>
+        </p:txBody>
+      </p:sp>
+      <p:sp>
+        <p:nvSpPr>
+          <p:cNvPr id="4" name="TextBox 3"/>
+          <p:cNvSpPr txBox="1"/>
+          <p:nvPr/>
+        </p:nvSpPr>
+        <p:spPr>
+          <a:xfrm>
+            <a:off x="658368" y="1572768"/>
+            <a:ext cx="10515600" cy="320040"/>
+          </a:xfrm>
+          <a:prstGeom prst="rect">
+            <a:avLst/>
+          </a:prstGeom>
+          <a:noFill/>
+        </p:spPr>
+        <p:txBody>
+          <a:bodyPr wrap="square" lIns="0" rIns="0" tIns="0" bIns="0" anchor="t">
+            <a:spAutoFit/>
+          </a:bodyPr>
+          <a:lstStyle/>
+          <a:p>
+            <a:pPr algn="l">
+              <a:spcBef>
+                <a:spcPts val="0"/>
+              </a:spcBef>
+              <a:spcAft>
+                <a:spcPts val="0"/>
+              </a:spcAft>
+            </a:pPr>
+            <a:r>
+              <a:rPr sz="1350" b="0" i="0">
+                <a:solidFill>
+                  <a:srgbClr val="667085"/>
+                </a:solidFill>
+                <a:latin typeface="맑은 고딕"/>
+                <a:ea typeface="맑은 고딕"/>
+                <a:cs typeface="맑은 고딕"/>
+              </a:rPr>
+              <a:t>히스토리 DB 에서 학습에 쓸 프레임을 골라 모읍니다. 앞쪽 [기여도 판단] 이 '기존 모델을 믿을지' 라면, 여기는 '무엇으로 학습할지' 입니다.</a:t>
+            </a:r>
+          </a:p>
+        </p:txBody>
+      </p:sp>
+      <p:sp>
+        <p:nvSpPr>
+          <p:cNvPr id="5" name="TextBox 4"/>
+          <p:cNvSpPr txBox="1"/>
+          <p:nvPr/>
+        </p:nvSpPr>
+        <p:spPr>
+          <a:xfrm>
+            <a:off x="658368" y="2011680"/>
+            <a:ext cx="5120640" cy="274320"/>
+          </a:xfrm>
+          <a:prstGeom prst="rect">
+            <a:avLst/>
+          </a:prstGeom>
+          <a:noFill/>
+        </p:spPr>
+        <p:txBody>
+          <a:bodyPr wrap="square" lIns="0" rIns="0" tIns="0" bIns="0" anchor="t">
+            <a:spAutoFit/>
+          </a:bodyPr>
+          <a:lstStyle/>
+          <a:p>
+            <a:pPr algn="l">
+              <a:spcBef>
+                <a:spcPts val="0"/>
+              </a:spcBef>
+              <a:spcAft>
+                <a:spcPts val="0"/>
+              </a:spcAft>
+            </a:pPr>
+            <a:r>
+              <a:rPr sz="1300" b="1" i="0">
+                <a:solidFill>
+                  <a:srgbClr val="1A2435"/>
+                </a:solidFill>
+                <a:latin typeface="맑은 고딕"/>
+                <a:ea typeface="맑은 고딕"/>
+                <a:cs typeface="맑은 고딕"/>
+              </a:rPr>
+              <a:t>고르는 차례</a:t>
+            </a:r>
+          </a:p>
+        </p:txBody>
+      </p:sp>
+      <p:sp>
+        <p:nvSpPr>
+          <p:cNvPr id="6" name="Oval 5"/>
+          <p:cNvSpPr/>
+          <p:nvPr/>
+        </p:nvSpPr>
+        <p:spPr>
+          <a:xfrm>
+            <a:off x="694944" y="2359152"/>
+            <a:ext cx="237744" cy="237744"/>
+          </a:xfrm>
+          <a:prstGeom prst="ellipse">
+            <a:avLst/>
+          </a:prstGeom>
+          <a:solidFill>
+            <a:srgbClr val="2A9D8F"/>
+          </a:solidFill>
+          <a:ln>
+            <a:noFill/>
+          </a:ln>
+          <a:effectLst/>
+        </p:spPr>
+        <p:style>
+          <a:lnRef idx="1">
+            <a:schemeClr val="accent1"/>
+          </a:lnRef>
+          <a:fillRef idx="3">
+            <a:schemeClr val="accent1"/>
+          </a:fillRef>
+          <a:effectRef idx="2">
+            <a:schemeClr val="accent1"/>
+          </a:effectRef>
+          <a:fontRef idx="minor">
+            <a:schemeClr val="lt1"/>
+          </a:fontRef>
+        </p:style>
+        <p:txBody>
+          <a:bodyPr rtlCol="0" anchor="ctr" lIns="0" rIns="0" tIns="0" bIns="0"/>
+          <a:lstStyle/>
+          <a:p>
+            <a:pPr algn="ctr"/>
+            <a:r>
+              <a:rPr sz="1100" b="1" i="0">
+                <a:solidFill>
+                  <a:srgbClr val="FFFFFF"/>
+                </a:solidFill>
+                <a:latin typeface="맑은 고딕"/>
+                <a:ea typeface="맑은 고딕"/>
+                <a:cs typeface="맑은 고딕"/>
+              </a:rPr>
+              <a:t>1</a:t>
+            </a:r>
+          </a:p>
+        </p:txBody>
+      </p:sp>
+      <p:sp>
+        <p:nvSpPr>
+          <p:cNvPr id="7" name="TextBox 6"/>
+          <p:cNvSpPr txBox="1"/>
+          <p:nvPr/>
+        </p:nvSpPr>
+        <p:spPr>
+          <a:xfrm>
+            <a:off x="1042415" y="2322576"/>
+            <a:ext cx="4754880" cy="237744"/>
+          </a:xfrm>
+          <a:prstGeom prst="rect">
+            <a:avLst/>
+          </a:prstGeom>
+          <a:noFill/>
+        </p:spPr>
+        <p:txBody>
+          <a:bodyPr wrap="square" lIns="0" rIns="0" tIns="0" bIns="0" anchor="t">
+            <a:spAutoFit/>
+          </a:bodyPr>
+          <a:lstStyle/>
+          <a:p>
+            <a:pPr algn="l">
+              <a:spcBef>
+                <a:spcPts val="0"/>
+              </a:spcBef>
+              <a:spcAft>
+                <a:spcPts val="0"/>
+              </a:spcAft>
+            </a:pPr>
+            <a:r>
+              <a:rPr sz="1150" b="1" i="0">
+                <a:solidFill>
+                  <a:srgbClr val="1A2435"/>
+                </a:solidFill>
+                <a:latin typeface="맑은 고딕"/>
+                <a:ea typeface="맑은 고딕"/>
+                <a:cs typeface="맑은 고딕"/>
+              </a:rPr>
+              <a:t>날짜 테이블 전체</a:t>
+            </a:r>
+          </a:p>
+        </p:txBody>
+      </p:sp>
+      <p:sp>
+        <p:nvSpPr>
+          <p:cNvPr id="8" name="TextBox 7"/>
+          <p:cNvSpPr txBox="1"/>
+          <p:nvPr/>
+        </p:nvSpPr>
+        <p:spPr>
+          <a:xfrm>
+            <a:off x="1042415" y="2578608"/>
+            <a:ext cx="4754880" cy="402336"/>
+          </a:xfrm>
+          <a:prstGeom prst="rect">
+            <a:avLst/>
+          </a:prstGeom>
+          <a:noFill/>
+        </p:spPr>
+        <p:txBody>
+          <a:bodyPr wrap="square" lIns="0" rIns="0" tIns="0" bIns="0" anchor="t">
+            <a:spAutoFit/>
+          </a:bodyPr>
+          <a:lstStyle/>
+          <a:p>
+            <a:pPr algn="l">
+              <a:lnSpc>
+                <a:spcPct val="120000"/>
+              </a:lnSpc>
+              <a:spcBef>
+                <a:spcPts val="0"/>
+              </a:spcBef>
+              <a:spcAft>
+                <a:spcPts val="0"/>
+              </a:spcAft>
+            </a:pPr>
+            <a:r>
+              <a:rPr sz="1000" b="0" i="0">
+                <a:solidFill>
+                  <a:srgbClr val="667085"/>
+                </a:solidFill>
+                <a:latin typeface="맑은 고딕"/>
+                <a:ea typeface="맑은 고딕"/>
+                <a:cs typeface="맑은 고딕"/>
+              </a:rPr>
+              <a:t>results_history_YYYYMMDD 를 모두 훑습니다</a:t>
+            </a:r>
+          </a:p>
+        </p:txBody>
+      </p:sp>
+      <p:sp>
+        <p:nvSpPr>
+          <p:cNvPr id="9" name="Oval 8"/>
+          <p:cNvSpPr/>
+          <p:nvPr/>
+        </p:nvSpPr>
+        <p:spPr>
+          <a:xfrm>
+            <a:off x="694944" y="2980944"/>
+            <a:ext cx="237744" cy="237744"/>
+          </a:xfrm>
+          <a:prstGeom prst="ellipse">
+            <a:avLst/>
+          </a:prstGeom>
+          <a:solidFill>
+            <a:srgbClr val="2A9D8F"/>
+          </a:solidFill>
+          <a:ln>
+            <a:noFill/>
+          </a:ln>
+          <a:effectLst/>
+        </p:spPr>
+        <p:style>
+          <a:lnRef idx="1">
+            <a:schemeClr val="accent1"/>
+          </a:lnRef>
+          <a:fillRef idx="3">
+            <a:schemeClr val="accent1"/>
+          </a:fillRef>
+          <a:effectRef idx="2">
+            <a:schemeClr val="accent1"/>
+          </a:effectRef>
+          <a:fontRef idx="minor">
+            <a:schemeClr val="lt1"/>
+          </a:fontRef>
+        </p:style>
+        <p:txBody>
+          <a:bodyPr rtlCol="0" anchor="ctr" lIns="0" rIns="0" tIns="0" bIns="0"/>
+          <a:lstStyle/>
+          <a:p>
+            <a:pPr algn="ctr"/>
+            <a:r>
+              <a:rPr sz="1100" b="1" i="0">
+                <a:solidFill>
+                  <a:srgbClr val="FFFFFF"/>
+                </a:solidFill>
+                <a:latin typeface="맑은 고딕"/>
+                <a:ea typeface="맑은 고딕"/>
+                <a:cs typeface="맑은 고딕"/>
+              </a:rPr>
+              <a:t>2</a:t>
+            </a:r>
+          </a:p>
+        </p:txBody>
+      </p:sp>
+      <p:sp>
+        <p:nvSpPr>
+          <p:cNvPr id="10" name="TextBox 9"/>
+          <p:cNvSpPr txBox="1"/>
+          <p:nvPr/>
+        </p:nvSpPr>
+        <p:spPr>
+          <a:xfrm>
+            <a:off x="1042415" y="2944368"/>
+            <a:ext cx="4754880" cy="237744"/>
+          </a:xfrm>
+          <a:prstGeom prst="rect">
+            <a:avLst/>
+          </a:prstGeom>
+          <a:noFill/>
+        </p:spPr>
+        <p:txBody>
+          <a:bodyPr wrap="square" lIns="0" rIns="0" tIns="0" bIns="0" anchor="t">
+            <a:spAutoFit/>
+          </a:bodyPr>
+          <a:lstStyle/>
+          <a:p>
+            <a:pPr algn="l">
+              <a:spcBef>
+                <a:spcPts val="0"/>
+              </a:spcBef>
+              <a:spcAft>
+                <a:spcPts val="0"/>
+              </a:spcAft>
+            </a:pPr>
+            <a:r>
+              <a:rPr sz="1150" b="1" i="0">
+                <a:solidFill>
+                  <a:srgbClr val="1A2435"/>
+                </a:solidFill>
+                <a:latin typeface="맑은 고딕"/>
+                <a:ea typeface="맑은 고딕"/>
+                <a:cs typeface="맑은 고딕"/>
+              </a:rPr>
+              <a:t>정상만 남긴다</a:t>
+            </a:r>
+          </a:p>
+        </p:txBody>
+      </p:sp>
+      <p:sp>
+        <p:nvSpPr>
+          <p:cNvPr id="11" name="TextBox 10"/>
+          <p:cNvSpPr txBox="1"/>
+          <p:nvPr/>
+        </p:nvSpPr>
+        <p:spPr>
+          <a:xfrm>
+            <a:off x="1042415" y="3200400"/>
+            <a:ext cx="4754880" cy="402336"/>
+          </a:xfrm>
+          <a:prstGeom prst="rect">
+            <a:avLst/>
+          </a:prstGeom>
+          <a:noFill/>
+        </p:spPr>
+        <p:txBody>
+          <a:bodyPr wrap="square" lIns="0" rIns="0" tIns="0" bIns="0" anchor="t">
+            <a:spAutoFit/>
+          </a:bodyPr>
+          <a:lstStyle/>
+          <a:p>
+            <a:pPr algn="l">
+              <a:lnSpc>
+                <a:spcPct val="120000"/>
+              </a:lnSpc>
+              <a:spcBef>
+                <a:spcPts val="0"/>
+              </a:spcBef>
+              <a:spcAft>
+                <a:spcPts val="0"/>
+              </a:spcAft>
+            </a:pPr>
+            <a:r>
+              <a:rPr sz="1000" b="0" i="0">
+                <a:solidFill>
+                  <a:srgbClr val="667085"/>
+                </a:solidFill>
+                <a:latin typeface="맑은 고딕"/>
+                <a:ea typeface="맑은 고딕"/>
+                <a:cs typeface="맑은 고딕"/>
+              </a:rPr>
+              <a:t>지금 모델로 다시 매긴 점수와 그때 적힌 점수 중 하나만 판정선을 넘으면 받습니다</a:t>
+            </a:r>
+          </a:p>
+        </p:txBody>
+      </p:sp>
+      <p:sp>
+        <p:nvSpPr>
+          <p:cNvPr id="12" name="Oval 11"/>
+          <p:cNvSpPr/>
+          <p:nvPr/>
+        </p:nvSpPr>
+        <p:spPr>
+          <a:xfrm>
+            <a:off x="694944" y="3602736"/>
+            <a:ext cx="237744" cy="237744"/>
+          </a:xfrm>
+          <a:prstGeom prst="ellipse">
+            <a:avLst/>
+          </a:prstGeom>
+          <a:solidFill>
+            <a:srgbClr val="2A9D8F"/>
+          </a:solidFill>
+          <a:ln>
+            <a:noFill/>
+          </a:ln>
+          <a:effectLst/>
+        </p:spPr>
+        <p:style>
+          <a:lnRef idx="1">
+            <a:schemeClr val="accent1"/>
+          </a:lnRef>
+          <a:fillRef idx="3">
+            <a:schemeClr val="accent1"/>
+          </a:fillRef>
+          <a:effectRef idx="2">
+            <a:schemeClr val="accent1"/>
+          </a:effectRef>
+          <a:fontRef idx="minor">
+            <a:schemeClr val="lt1"/>
+          </a:fontRef>
+        </p:style>
+        <p:txBody>
+          <a:bodyPr rtlCol="0" anchor="ctr" lIns="0" rIns="0" tIns="0" bIns="0"/>
+          <a:lstStyle/>
+          <a:p>
+            <a:pPr algn="ctr"/>
+            <a:r>
+              <a:rPr sz="1100" b="1" i="0">
+                <a:solidFill>
+                  <a:srgbClr val="FFFFFF"/>
+                </a:solidFill>
+                <a:latin typeface="맑은 고딕"/>
+                <a:ea typeface="맑은 고딕"/>
+                <a:cs typeface="맑은 고딕"/>
+              </a:rPr>
+              <a:t>3</a:t>
+            </a:r>
+          </a:p>
+        </p:txBody>
+      </p:sp>
+      <p:sp>
+        <p:nvSpPr>
+          <p:cNvPr id="13" name="TextBox 12"/>
+          <p:cNvSpPr txBox="1"/>
+          <p:nvPr/>
+        </p:nvSpPr>
+        <p:spPr>
+          <a:xfrm>
+            <a:off x="1042415" y="3566160"/>
+            <a:ext cx="4754880" cy="237744"/>
+          </a:xfrm>
+          <a:prstGeom prst="rect">
+            <a:avLst/>
+          </a:prstGeom>
+          <a:noFill/>
+        </p:spPr>
+        <p:txBody>
+          <a:bodyPr wrap="square" lIns="0" rIns="0" tIns="0" bIns="0" anchor="t">
+            <a:spAutoFit/>
+          </a:bodyPr>
+          <a:lstStyle/>
+          <a:p>
+            <a:pPr algn="l">
+              <a:spcBef>
+                <a:spcPts val="0"/>
+              </a:spcBef>
+              <a:spcAft>
+                <a:spcPts val="0"/>
+              </a:spcAft>
+            </a:pPr>
+            <a:r>
+              <a:rPr sz="1150" b="1" i="0">
+                <a:solidFill>
+                  <a:srgbClr val="1A2435"/>
+                </a:solidFill>
+                <a:latin typeface="맑은 고딕"/>
+                <a:ea typeface="맑은 고딕"/>
+                <a:cs typeface="맑은 고딕"/>
+              </a:rPr>
+              <a:t>48칸에 나눠 담는다</a:t>
+            </a:r>
+          </a:p>
+        </p:txBody>
+      </p:sp>
+      <p:sp>
+        <p:nvSpPr>
+          <p:cNvPr id="14" name="TextBox 13"/>
+          <p:cNvSpPr txBox="1"/>
+          <p:nvPr/>
+        </p:nvSpPr>
+        <p:spPr>
+          <a:xfrm>
+            <a:off x="1042415" y="3822192"/>
+            <a:ext cx="4754880" cy="402336"/>
+          </a:xfrm>
+          <a:prstGeom prst="rect">
+            <a:avLst/>
+          </a:prstGeom>
+          <a:noFill/>
+        </p:spPr>
+        <p:txBody>
+          <a:bodyPr wrap="square" lIns="0" rIns="0" tIns="0" bIns="0" anchor="t">
+            <a:spAutoFit/>
+          </a:bodyPr>
+          <a:lstStyle/>
+          <a:p>
+            <a:pPr algn="l">
+              <a:lnSpc>
+                <a:spcPct val="120000"/>
+              </a:lnSpc>
+              <a:spcBef>
+                <a:spcPts val="0"/>
+              </a:spcBef>
+              <a:spcAft>
+                <a:spcPts val="0"/>
+              </a:spcAft>
+            </a:pPr>
+            <a:r>
+              <a:rPr sz="1000" b="0" i="0">
+                <a:solidFill>
+                  <a:srgbClr val="667085"/>
+                </a:solidFill>
+                <a:latin typeface="맑은 고딕"/>
+                <a:ea typeface="맑은 고딕"/>
+                <a:cs typeface="맑은 고딕"/>
+              </a:rPr>
+              <a:t>시각(24) x 가동상태(2). 자료가 몰린 시간대에 끌려가지 않게 합니다</a:t>
+            </a:r>
+          </a:p>
+        </p:txBody>
+      </p:sp>
+      <p:sp>
+        <p:nvSpPr>
+          <p:cNvPr id="15" name="Oval 14"/>
+          <p:cNvSpPr/>
+          <p:nvPr/>
+        </p:nvSpPr>
+        <p:spPr>
+          <a:xfrm>
+            <a:off x="694944" y="4224528"/>
+            <a:ext cx="237744" cy="237744"/>
+          </a:xfrm>
+          <a:prstGeom prst="ellipse">
+            <a:avLst/>
+          </a:prstGeom>
+          <a:solidFill>
+            <a:srgbClr val="2A9D8F"/>
+          </a:solidFill>
+          <a:ln>
+            <a:noFill/>
+          </a:ln>
+          <a:effectLst/>
+        </p:spPr>
+        <p:style>
+          <a:lnRef idx="1">
+            <a:schemeClr val="accent1"/>
+          </a:lnRef>
+          <a:fillRef idx="3">
+            <a:schemeClr val="accent1"/>
+          </a:fillRef>
+          <a:effectRef idx="2">
+            <a:schemeClr val="accent1"/>
+          </a:effectRef>
+          <a:fontRef idx="minor">
+            <a:schemeClr val="lt1"/>
+          </a:fontRef>
+        </p:style>
+        <p:txBody>
+          <a:bodyPr rtlCol="0" anchor="ctr" lIns="0" rIns="0" tIns="0" bIns="0"/>
+          <a:lstStyle/>
+          <a:p>
+            <a:pPr algn="ctr"/>
+            <a:r>
+              <a:rPr sz="1100" b="1" i="0">
+                <a:solidFill>
+                  <a:srgbClr val="FFFFFF"/>
+                </a:solidFill>
+                <a:latin typeface="맑은 고딕"/>
+                <a:ea typeface="맑은 고딕"/>
+                <a:cs typeface="맑은 고딕"/>
+              </a:rPr>
+              <a:t>4</a:t>
+            </a:r>
+          </a:p>
+        </p:txBody>
+      </p:sp>
+      <p:sp>
+        <p:nvSpPr>
+          <p:cNvPr id="16" name="TextBox 15"/>
+          <p:cNvSpPr txBox="1"/>
+          <p:nvPr/>
+        </p:nvSpPr>
+        <p:spPr>
+          <a:xfrm>
+            <a:off x="1042415" y="4187952"/>
+            <a:ext cx="4754880" cy="237744"/>
+          </a:xfrm>
+          <a:prstGeom prst="rect">
+            <a:avLst/>
+          </a:prstGeom>
+          <a:noFill/>
+        </p:spPr>
+        <p:txBody>
+          <a:bodyPr wrap="square" lIns="0" rIns="0" tIns="0" bIns="0" anchor="t">
+            <a:spAutoFit/>
+          </a:bodyPr>
+          <a:lstStyle/>
+          <a:p>
+            <a:pPr algn="l">
+              <a:spcBef>
+                <a:spcPts val="0"/>
+              </a:spcBef>
+              <a:spcAft>
+                <a:spcPts val="0"/>
+              </a:spcAft>
+            </a:pPr>
+            <a:r>
+              <a:rPr sz="1150" b="1" i="0">
+                <a:solidFill>
+                  <a:srgbClr val="1A2435"/>
+                </a:solidFill>
+                <a:latin typeface="맑은 고딕"/>
+                <a:ea typeface="맑은 고딕"/>
+                <a:cs typeface="맑은 고딕"/>
+              </a:rPr>
+              <a:t>목표만큼 꺼낸다</a:t>
+            </a:r>
+          </a:p>
+        </p:txBody>
+      </p:sp>
+      <p:sp>
+        <p:nvSpPr>
+          <p:cNvPr id="17" name="TextBox 16"/>
+          <p:cNvSpPr txBox="1"/>
+          <p:nvPr/>
+        </p:nvSpPr>
+        <p:spPr>
+          <a:xfrm>
+            <a:off x="1042415" y="4443984"/>
+            <a:ext cx="4754880" cy="402336"/>
+          </a:xfrm>
+          <a:prstGeom prst="rect">
+            <a:avLst/>
+          </a:prstGeom>
+          <a:noFill/>
+        </p:spPr>
+        <p:txBody>
+          <a:bodyPr wrap="square" lIns="0" rIns="0" tIns="0" bIns="0" anchor="t">
+            <a:spAutoFit/>
+          </a:bodyPr>
+          <a:lstStyle/>
+          <a:p>
+            <a:pPr algn="l">
+              <a:lnSpc>
+                <a:spcPct val="120000"/>
+              </a:lnSpc>
+              <a:spcBef>
+                <a:spcPts val="0"/>
+              </a:spcBef>
+              <a:spcAft>
+                <a:spcPts val="0"/>
+              </a:spcAft>
+            </a:pPr>
+            <a:r>
+              <a:rPr sz="1000" b="0" i="0">
+                <a:solidFill>
+                  <a:srgbClr val="667085"/>
+                </a:solidFill>
+                <a:latin typeface="맑은 고딕"/>
+                <a:ea typeface="맑은 고딕"/>
+                <a:cs typeface="맑은 고딕"/>
+              </a:rPr>
+              <a:t>칸마다 같은 몫씩. 모자라면 복제하지 않고 있는 만큼만</a:t>
+            </a:r>
+          </a:p>
+        </p:txBody>
+      </p:sp>
+      <p:sp>
+        <p:nvSpPr>
+          <p:cNvPr id="18" name="TextBox 17"/>
+          <p:cNvSpPr txBox="1"/>
+          <p:nvPr/>
+        </p:nvSpPr>
+        <p:spPr>
+          <a:xfrm>
+            <a:off x="6236207" y="2011680"/>
+            <a:ext cx="4937760" cy="274320"/>
+          </a:xfrm>
+          <a:prstGeom prst="rect">
+            <a:avLst/>
+          </a:prstGeom>
+          <a:noFill/>
+        </p:spPr>
+        <p:txBody>
+          <a:bodyPr wrap="square" lIns="0" rIns="0" tIns="0" bIns="0" anchor="t">
+            <a:spAutoFit/>
+          </a:bodyPr>
+          <a:lstStyle/>
+          <a:p>
+            <a:pPr algn="l">
+              <a:spcBef>
+                <a:spcPts val="0"/>
+              </a:spcBef>
+              <a:spcAft>
+                <a:spcPts val="0"/>
+              </a:spcAft>
+            </a:pPr>
+            <a:r>
+              <a:rPr sz="1300" b="1" i="0">
+                <a:solidFill>
+                  <a:srgbClr val="1A2435"/>
+                </a:solidFill>
+                <a:latin typeface="맑은 고딕"/>
+                <a:ea typeface="맑은 고딕"/>
+                <a:cs typeface="맑은 고딕"/>
+              </a:rPr>
+              <a:t>[설정] 창에서 정합니다</a:t>
+            </a:r>
+          </a:p>
+        </p:txBody>
+      </p:sp>
+      <p:sp>
+        <p:nvSpPr>
+          <p:cNvPr id="19" name="TextBox 18"/>
+          <p:cNvSpPr txBox="1"/>
+          <p:nvPr/>
+        </p:nvSpPr>
+        <p:spPr>
+          <a:xfrm>
+            <a:off x="6272783" y="2395728"/>
+            <a:ext cx="1737360" cy="237744"/>
+          </a:xfrm>
+          <a:prstGeom prst="rect">
+            <a:avLst/>
+          </a:prstGeom>
+          <a:noFill/>
+        </p:spPr>
+        <p:txBody>
+          <a:bodyPr wrap="square" lIns="0" rIns="0" tIns="0" bIns="0" anchor="t">
+            <a:spAutoFit/>
+          </a:bodyPr>
+          <a:lstStyle/>
+          <a:p>
+            <a:pPr algn="l">
+              <a:spcBef>
+                <a:spcPts val="0"/>
+              </a:spcBef>
+              <a:spcAft>
+                <a:spcPts val="0"/>
+              </a:spcAft>
+            </a:pPr>
+            <a:r>
+              <a:rPr sz="1050" b="0" i="0">
+                <a:solidFill>
+                  <a:srgbClr val="667085"/>
+                </a:solidFill>
+                <a:latin typeface="맑은 고딕"/>
+                <a:ea typeface="맑은 고딕"/>
+                <a:cs typeface="맑은 고딕"/>
+              </a:rPr>
+              <a:t>항목</a:t>
+            </a:r>
+          </a:p>
+        </p:txBody>
+      </p:sp>
+      <p:sp>
+        <p:nvSpPr>
+          <p:cNvPr id="20" name="TextBox 19"/>
+          <p:cNvSpPr txBox="1"/>
+          <p:nvPr/>
+        </p:nvSpPr>
+        <p:spPr>
+          <a:xfrm>
+            <a:off x="8065008" y="2395728"/>
+            <a:ext cx="731520" cy="237744"/>
+          </a:xfrm>
+          <a:prstGeom prst="rect">
+            <a:avLst/>
+          </a:prstGeom>
+          <a:noFill/>
+        </p:spPr>
+        <p:txBody>
+          <a:bodyPr wrap="square" lIns="0" rIns="0" tIns="0" bIns="0" anchor="t">
+            <a:spAutoFit/>
+          </a:bodyPr>
+          <a:lstStyle/>
+          <a:p>
+            <a:pPr algn="r">
+              <a:spcBef>
+                <a:spcPts val="0"/>
+              </a:spcBef>
+              <a:spcAft>
+                <a:spcPts val="0"/>
+              </a:spcAft>
+            </a:pPr>
+            <a:r>
+              <a:rPr sz="1050" b="0" i="0">
+                <a:solidFill>
+                  <a:srgbClr val="667085"/>
+                </a:solidFill>
+                <a:latin typeface="Consolas"/>
+                <a:ea typeface="Consolas"/>
+                <a:cs typeface="Consolas"/>
+              </a:rPr>
+              <a:t>기본</a:t>
+            </a:r>
+          </a:p>
+        </p:txBody>
+      </p:sp>
+      <p:sp>
+        <p:nvSpPr>
+          <p:cNvPr id="21" name="TextBox 20"/>
+          <p:cNvSpPr txBox="1"/>
+          <p:nvPr/>
+        </p:nvSpPr>
+        <p:spPr>
+          <a:xfrm>
+            <a:off x="8979408" y="2395728"/>
+            <a:ext cx="2194560" cy="237744"/>
+          </a:xfrm>
+          <a:prstGeom prst="rect">
+            <a:avLst/>
+          </a:prstGeom>
+          <a:noFill/>
+        </p:spPr>
+        <p:txBody>
+          <a:bodyPr wrap="square" lIns="0" rIns="0" tIns="0" bIns="0" anchor="t">
+            <a:spAutoFit/>
+          </a:bodyPr>
+          <a:lstStyle/>
+          <a:p>
+            <a:pPr algn="l">
+              <a:spcBef>
+                <a:spcPts val="0"/>
+              </a:spcBef>
+              <a:spcAft>
+                <a:spcPts val="0"/>
+              </a:spcAft>
+            </a:pPr>
+            <a:r>
+              <a:rPr sz="1000" b="0" i="0">
+                <a:solidFill>
+                  <a:srgbClr val="667085"/>
+                </a:solidFill>
+                <a:latin typeface="맑은 고딕"/>
+                <a:ea typeface="맑은 고딕"/>
+                <a:cs typeface="맑은 고딕"/>
+              </a:rPr>
+              <a:t>무엇</a:t>
+            </a:r>
+          </a:p>
+        </p:txBody>
+      </p:sp>
+      <p:sp>
+        <p:nvSpPr>
+          <p:cNvPr id="22" name="TextBox 21"/>
+          <p:cNvSpPr txBox="1"/>
+          <p:nvPr/>
+        </p:nvSpPr>
+        <p:spPr>
+          <a:xfrm>
+            <a:off x="6272783" y="2706624"/>
+            <a:ext cx="1737360" cy="237744"/>
+          </a:xfrm>
+          <a:prstGeom prst="rect">
+            <a:avLst/>
+          </a:prstGeom>
+          <a:noFill/>
+        </p:spPr>
+        <p:txBody>
+          <a:bodyPr wrap="square" lIns="0" rIns="0" tIns="0" bIns="0" anchor="t">
+            <a:spAutoFit/>
+          </a:bodyPr>
+          <a:lstStyle/>
+          <a:p>
+            <a:pPr algn="l">
+              <a:spcBef>
+                <a:spcPts val="0"/>
+              </a:spcBef>
+              <a:spcAft>
+                <a:spcPts val="0"/>
+              </a:spcAft>
+            </a:pPr>
+            <a:r>
+              <a:rPr sz="1050" b="0" i="0">
+                <a:solidFill>
+                  <a:srgbClr val="667085"/>
+                </a:solidFill>
+                <a:latin typeface="맑은 고딕"/>
+                <a:ea typeface="맑은 고딕"/>
+                <a:cs typeface="맑은 고딕"/>
+              </a:rPr>
+              <a:t>목표 표본 수</a:t>
+            </a:r>
+          </a:p>
+        </p:txBody>
+      </p:sp>
+      <p:sp>
+        <p:nvSpPr>
+          <p:cNvPr id="23" name="TextBox 22"/>
+          <p:cNvSpPr txBox="1"/>
+          <p:nvPr/>
+        </p:nvSpPr>
+        <p:spPr>
+          <a:xfrm>
+            <a:off x="8065008" y="2706624"/>
+            <a:ext cx="731520" cy="237744"/>
+          </a:xfrm>
+          <a:prstGeom prst="rect">
+            <a:avLst/>
+          </a:prstGeom>
+          <a:noFill/>
+        </p:spPr>
+        <p:txBody>
+          <a:bodyPr wrap="square" lIns="0" rIns="0" tIns="0" bIns="0" anchor="t">
+            <a:spAutoFit/>
+          </a:bodyPr>
+          <a:lstStyle/>
+          <a:p>
+            <a:pPr algn="r">
+              <a:spcBef>
+                <a:spcPts val="0"/>
+              </a:spcBef>
+              <a:spcAft>
+                <a:spcPts val="0"/>
+              </a:spcAft>
+            </a:pPr>
+            <a:r>
+              <a:rPr sz="1050" b="1" i="0">
+                <a:solidFill>
+                  <a:srgbClr val="2A9D8F"/>
+                </a:solidFill>
+                <a:latin typeface="Consolas"/>
+                <a:ea typeface="Consolas"/>
+                <a:cs typeface="Consolas"/>
+              </a:rPr>
+              <a:t>60000</a:t>
+            </a:r>
+          </a:p>
+        </p:txBody>
+      </p:sp>
+      <p:sp>
+        <p:nvSpPr>
+          <p:cNvPr id="24" name="TextBox 23"/>
+          <p:cNvSpPr txBox="1"/>
+          <p:nvPr/>
+        </p:nvSpPr>
+        <p:spPr>
+          <a:xfrm>
+            <a:off x="8979408" y="2706624"/>
+            <a:ext cx="2194560" cy="237744"/>
+          </a:xfrm>
+          <a:prstGeom prst="rect">
+            <a:avLst/>
+          </a:prstGeom>
+          <a:noFill/>
+        </p:spPr>
+        <p:txBody>
+          <a:bodyPr wrap="square" lIns="0" rIns="0" tIns="0" bIns="0" anchor="t">
+            <a:spAutoFit/>
+          </a:bodyPr>
+          <a:lstStyle/>
+          <a:p>
+            <a:pPr algn="l">
+              <a:spcBef>
+                <a:spcPts val="0"/>
+              </a:spcBef>
+              <a:spcAft>
+                <a:spcPts val="0"/>
+              </a:spcAft>
+            </a:pPr>
+            <a:r>
+              <a:rPr sz="1000" b="0" i="0">
+                <a:solidFill>
+                  <a:srgbClr val="667085"/>
+                </a:solidFill>
+                <a:latin typeface="맑은 고딕"/>
+                <a:ea typeface="맑은 고딕"/>
+                <a:cs typeface="맑은 고딕"/>
+              </a:rPr>
+              <a:t>이만큼 모읍니다</a:t>
+            </a:r>
+          </a:p>
+        </p:txBody>
+      </p:sp>
+      <p:sp>
+        <p:nvSpPr>
+          <p:cNvPr id="25" name="TextBox 24"/>
+          <p:cNvSpPr txBox="1"/>
+          <p:nvPr/>
+        </p:nvSpPr>
+        <p:spPr>
+          <a:xfrm>
+            <a:off x="6272783" y="3017520"/>
+            <a:ext cx="1737360" cy="237744"/>
+          </a:xfrm>
+          <a:prstGeom prst="rect">
+            <a:avLst/>
+          </a:prstGeom>
+          <a:noFill/>
+        </p:spPr>
+        <p:txBody>
+          <a:bodyPr wrap="square" lIns="0" rIns="0" tIns="0" bIns="0" anchor="t">
+            <a:spAutoFit/>
+          </a:bodyPr>
+          <a:lstStyle/>
+          <a:p>
+            <a:pPr algn="l">
+              <a:spcBef>
+                <a:spcPts val="0"/>
+              </a:spcBef>
+              <a:spcAft>
+                <a:spcPts val="0"/>
+              </a:spcAft>
+            </a:pPr>
+            <a:r>
+              <a:rPr sz="1050" b="0" i="0">
+                <a:solidFill>
+                  <a:srgbClr val="667085"/>
+                </a:solidFill>
+                <a:latin typeface="맑은 고딕"/>
+                <a:ea typeface="맑은 고딕"/>
+                <a:cs typeface="맑은 고딕"/>
+              </a:rPr>
+              <a:t>정상 판정선</a:t>
+            </a:r>
+          </a:p>
+        </p:txBody>
+      </p:sp>
+      <p:sp>
+        <p:nvSpPr>
+          <p:cNvPr id="26" name="TextBox 25"/>
+          <p:cNvSpPr txBox="1"/>
+          <p:nvPr/>
+        </p:nvSpPr>
+        <p:spPr>
+          <a:xfrm>
+            <a:off x="8065008" y="3017520"/>
+            <a:ext cx="731520" cy="237744"/>
+          </a:xfrm>
+          <a:prstGeom prst="rect">
+            <a:avLst/>
+          </a:prstGeom>
+          <a:noFill/>
+        </p:spPr>
+        <p:txBody>
+          <a:bodyPr wrap="square" lIns="0" rIns="0" tIns="0" bIns="0" anchor="t">
+            <a:spAutoFit/>
+          </a:bodyPr>
+          <a:lstStyle/>
+          <a:p>
+            <a:pPr algn="r">
+              <a:spcBef>
+                <a:spcPts val="0"/>
+              </a:spcBef>
+              <a:spcAft>
+                <a:spcPts val="0"/>
+              </a:spcAft>
+            </a:pPr>
+            <a:r>
+              <a:rPr sz="1050" b="1" i="0">
+                <a:solidFill>
+                  <a:srgbClr val="2A9D8F"/>
+                </a:solidFill>
+                <a:latin typeface="Consolas"/>
+                <a:ea typeface="Consolas"/>
+                <a:cs typeface="Consolas"/>
+              </a:rPr>
+              <a:t>0.5</a:t>
+            </a:r>
+          </a:p>
+        </p:txBody>
+      </p:sp>
+      <p:sp>
+        <p:nvSpPr>
+          <p:cNvPr id="27" name="TextBox 26"/>
+          <p:cNvSpPr txBox="1"/>
+          <p:nvPr/>
+        </p:nvSpPr>
+        <p:spPr>
+          <a:xfrm>
+            <a:off x="8979408" y="3017520"/>
+            <a:ext cx="2194560" cy="237744"/>
+          </a:xfrm>
+          <a:prstGeom prst="rect">
+            <a:avLst/>
+          </a:prstGeom>
+          <a:noFill/>
+        </p:spPr>
+        <p:txBody>
+          <a:bodyPr wrap="square" lIns="0" rIns="0" tIns="0" bIns="0" anchor="t">
+            <a:spAutoFit/>
+          </a:bodyPr>
+          <a:lstStyle/>
+          <a:p>
+            <a:pPr algn="l">
+              <a:spcBef>
+                <a:spcPts val="0"/>
+              </a:spcBef>
+              <a:spcAft>
+                <a:spcPts val="0"/>
+              </a:spcAft>
+            </a:pPr>
+            <a:r>
+              <a:rPr sz="1000" b="0" i="0">
+                <a:solidFill>
+                  <a:srgbClr val="667085"/>
+                </a:solidFill>
+                <a:latin typeface="맑은 고딕"/>
+                <a:ea typeface="맑은 고딕"/>
+                <a:cs typeface="맑은 고딕"/>
+              </a:rPr>
+              <a:t>이 점수 위만 학습에</a:t>
+            </a:r>
+          </a:p>
+        </p:txBody>
+      </p:sp>
+      <p:sp>
+        <p:nvSpPr>
+          <p:cNvPr id="28" name="TextBox 27"/>
+          <p:cNvSpPr txBox="1"/>
+          <p:nvPr/>
+        </p:nvSpPr>
+        <p:spPr>
+          <a:xfrm>
+            <a:off x="6272783" y="3328415"/>
+            <a:ext cx="1737360" cy="237744"/>
+          </a:xfrm>
+          <a:prstGeom prst="rect">
+            <a:avLst/>
+          </a:prstGeom>
+          <a:noFill/>
+        </p:spPr>
+        <p:txBody>
+          <a:bodyPr wrap="square" lIns="0" rIns="0" tIns="0" bIns="0" anchor="t">
+            <a:spAutoFit/>
+          </a:bodyPr>
+          <a:lstStyle/>
+          <a:p>
+            <a:pPr algn="l">
+              <a:spcBef>
+                <a:spcPts val="0"/>
+              </a:spcBef>
+              <a:spcAft>
+                <a:spcPts val="0"/>
+              </a:spcAft>
+            </a:pPr>
+            <a:r>
+              <a:rPr sz="1050" b="0" i="0">
+                <a:solidFill>
+                  <a:srgbClr val="667085"/>
+                </a:solidFill>
+                <a:latin typeface="맑은 고딕"/>
+                <a:ea typeface="맑은 고딕"/>
+                <a:cs typeface="맑은 고딕"/>
+              </a:rPr>
+              <a:t>가동 판정 온도</a:t>
+            </a:r>
+          </a:p>
+        </p:txBody>
+      </p:sp>
+      <p:sp>
+        <p:nvSpPr>
+          <p:cNvPr id="29" name="TextBox 28"/>
+          <p:cNvSpPr txBox="1"/>
+          <p:nvPr/>
+        </p:nvSpPr>
+        <p:spPr>
+          <a:xfrm>
+            <a:off x="8065008" y="3328415"/>
+            <a:ext cx="731520" cy="237744"/>
+          </a:xfrm>
+          <a:prstGeom prst="rect">
+            <a:avLst/>
+          </a:prstGeom>
+          <a:noFill/>
+        </p:spPr>
+        <p:txBody>
+          <a:bodyPr wrap="square" lIns="0" rIns="0" tIns="0" bIns="0" anchor="t">
+            <a:spAutoFit/>
+          </a:bodyPr>
+          <a:lstStyle/>
+          <a:p>
+            <a:pPr algn="r">
+              <a:spcBef>
+                <a:spcPts val="0"/>
+              </a:spcBef>
+              <a:spcAft>
+                <a:spcPts val="0"/>
+              </a:spcAft>
+            </a:pPr>
+            <a:r>
+              <a:rPr sz="1050" b="1" i="0">
+                <a:solidFill>
+                  <a:srgbClr val="2A9D8F"/>
+                </a:solidFill>
+                <a:latin typeface="Consolas"/>
+                <a:ea typeface="Consolas"/>
+                <a:cs typeface="Consolas"/>
+              </a:rPr>
+              <a:t>자동</a:t>
+            </a:r>
+          </a:p>
+        </p:txBody>
+      </p:sp>
+      <p:sp>
+        <p:nvSpPr>
+          <p:cNvPr id="30" name="TextBox 29"/>
+          <p:cNvSpPr txBox="1"/>
+          <p:nvPr/>
+        </p:nvSpPr>
+        <p:spPr>
+          <a:xfrm>
+            <a:off x="8979408" y="3328415"/>
+            <a:ext cx="2194560" cy="237744"/>
+          </a:xfrm>
+          <a:prstGeom prst="rect">
+            <a:avLst/>
+          </a:prstGeom>
+          <a:noFill/>
+        </p:spPr>
+        <p:txBody>
+          <a:bodyPr wrap="square" lIns="0" rIns="0" tIns="0" bIns="0" anchor="t">
+            <a:spAutoFit/>
+          </a:bodyPr>
+          <a:lstStyle/>
+          <a:p>
+            <a:pPr algn="l">
+              <a:spcBef>
+                <a:spcPts val="0"/>
+              </a:spcBef>
+              <a:spcAft>
+                <a:spcPts val="0"/>
+              </a:spcAft>
+            </a:pPr>
+            <a:r>
+              <a:rPr sz="1000" b="0" i="0">
+                <a:solidFill>
+                  <a:srgbClr val="667085"/>
+                </a:solidFill>
+                <a:latin typeface="맑은 고딕"/>
+                <a:ea typeface="맑은 고딕"/>
+                <a:cs typeface="맑은 고딕"/>
+              </a:rPr>
+              <a:t>비우면 자료에서 잡습니다</a:t>
+            </a:r>
+          </a:p>
+        </p:txBody>
+      </p:sp>
+      <p:sp>
+        <p:nvSpPr>
+          <p:cNvPr id="31" name="TextBox 30"/>
+          <p:cNvSpPr txBox="1"/>
+          <p:nvPr/>
+        </p:nvSpPr>
+        <p:spPr>
+          <a:xfrm>
+            <a:off x="6272783" y="3639311"/>
+            <a:ext cx="1737360" cy="237744"/>
+          </a:xfrm>
+          <a:prstGeom prst="rect">
+            <a:avLst/>
+          </a:prstGeom>
+          <a:noFill/>
+        </p:spPr>
+        <p:txBody>
+          <a:bodyPr wrap="square" lIns="0" rIns="0" tIns="0" bIns="0" anchor="t">
+            <a:spAutoFit/>
+          </a:bodyPr>
+          <a:lstStyle/>
+          <a:p>
+            <a:pPr algn="l">
+              <a:spcBef>
+                <a:spcPts val="0"/>
+              </a:spcBef>
+              <a:spcAft>
+                <a:spcPts val="0"/>
+              </a:spcAft>
+            </a:pPr>
+            <a:r>
+              <a:rPr sz="1050" b="0" i="0">
+                <a:solidFill>
+                  <a:srgbClr val="667085"/>
+                </a:solidFill>
+                <a:latin typeface="맑은 고딕"/>
+                <a:ea typeface="맑은 고딕"/>
+                <a:cs typeface="맑은 고딕"/>
+              </a:rPr>
+              <a:t>시기 나누어 담기</a:t>
+            </a:r>
+          </a:p>
+        </p:txBody>
+      </p:sp>
+      <p:sp>
+        <p:nvSpPr>
+          <p:cNvPr id="32" name="TextBox 31"/>
+          <p:cNvSpPr txBox="1"/>
+          <p:nvPr/>
+        </p:nvSpPr>
+        <p:spPr>
+          <a:xfrm>
+            <a:off x="8065008" y="3639311"/>
+            <a:ext cx="731520" cy="237744"/>
+          </a:xfrm>
+          <a:prstGeom prst="rect">
+            <a:avLst/>
+          </a:prstGeom>
+          <a:noFill/>
+        </p:spPr>
+        <p:txBody>
+          <a:bodyPr wrap="square" lIns="0" rIns="0" tIns="0" bIns="0" anchor="t">
+            <a:spAutoFit/>
+          </a:bodyPr>
+          <a:lstStyle/>
+          <a:p>
+            <a:pPr algn="r">
+              <a:spcBef>
+                <a:spcPts val="0"/>
+              </a:spcBef>
+              <a:spcAft>
+                <a:spcPts val="0"/>
+              </a:spcAft>
+            </a:pPr>
+            <a:r>
+              <a:rPr sz="1050" b="1" i="0">
+                <a:solidFill>
+                  <a:srgbClr val="2A9D8F"/>
+                </a:solidFill>
+                <a:latin typeface="Consolas"/>
+                <a:ea typeface="Consolas"/>
+                <a:cs typeface="Consolas"/>
+              </a:rPr>
+              <a:t>끔</a:t>
+            </a:r>
+          </a:p>
+        </p:txBody>
+      </p:sp>
+      <p:sp>
+        <p:nvSpPr>
+          <p:cNvPr id="33" name="TextBox 32"/>
+          <p:cNvSpPr txBox="1"/>
+          <p:nvPr/>
+        </p:nvSpPr>
+        <p:spPr>
+          <a:xfrm>
+            <a:off x="8979408" y="3639311"/>
+            <a:ext cx="2194560" cy="237744"/>
+          </a:xfrm>
+          <a:prstGeom prst="rect">
+            <a:avLst/>
+          </a:prstGeom>
+          <a:noFill/>
+        </p:spPr>
+        <p:txBody>
+          <a:bodyPr wrap="square" lIns="0" rIns="0" tIns="0" bIns="0" anchor="t">
+            <a:spAutoFit/>
+          </a:bodyPr>
+          <a:lstStyle/>
+          <a:p>
+            <a:pPr algn="l">
+              <a:spcBef>
+                <a:spcPts val="0"/>
+              </a:spcBef>
+              <a:spcAft>
+                <a:spcPts val="0"/>
+              </a:spcAft>
+            </a:pPr>
+            <a:r>
+              <a:rPr sz="1000" b="0" i="0">
+                <a:solidFill>
+                  <a:srgbClr val="667085"/>
+                </a:solidFill>
+                <a:latin typeface="맑은 고딕"/>
+                <a:ea typeface="맑은 고딕"/>
+                <a:cs typeface="맑은 고딕"/>
+              </a:rPr>
+              <a:t>켜면 칸이 시기별로 늘어납니다</a:t>
+            </a:r>
+          </a:p>
+        </p:txBody>
+      </p:sp>
+      <p:sp>
+        <p:nvSpPr>
+          <p:cNvPr id="34" name="TextBox 33"/>
+          <p:cNvSpPr txBox="1"/>
+          <p:nvPr/>
+        </p:nvSpPr>
+        <p:spPr>
+          <a:xfrm>
+            <a:off x="6272783" y="4041648"/>
+            <a:ext cx="4846320" cy="566928"/>
+          </a:xfrm>
+          <a:prstGeom prst="rect">
+            <a:avLst/>
+          </a:prstGeom>
+          <a:noFill/>
+        </p:spPr>
+        <p:txBody>
+          <a:bodyPr wrap="square" lIns="0" rIns="0" tIns="0" bIns="0" anchor="t">
+            <a:spAutoFit/>
+          </a:bodyPr>
+          <a:lstStyle/>
+          <a:p>
+            <a:pPr algn="l">
+              <a:lnSpc>
+                <a:spcPct val="120000"/>
+              </a:lnSpc>
+              <a:spcBef>
+                <a:spcPts val="0"/>
+              </a:spcBef>
+              <a:spcAft>
+                <a:spcPts val="0"/>
+              </a:spcAft>
+            </a:pPr>
+            <a:r>
+              <a:rPr sz="1000" b="0" i="0">
+                <a:solidFill>
+                  <a:srgbClr val="667085"/>
+                </a:solidFill>
+                <a:latin typeface="맑은 고딕"/>
+                <a:ea typeface="맑은 고딕"/>
+                <a:cs typeface="맑은 고딕"/>
+              </a:rPr>
+              <a:t>가동 판정 온도를 비우면 앞쪽 2,000건 최고온도의 중앙값으로 잡습니다. 그 2,000건은 판정선이 아직 없어 모두 정지로 들어갑니다. 현장에서 아는 값이 있으면 적는 편이 낫습니다.</a:t>
+            </a:r>
+          </a:p>
+        </p:txBody>
+      </p:sp>
+      <p:sp>
+        <p:nvSpPr>
+          <p:cNvPr id="35" name="Rounded Rectangle 34"/>
+          <p:cNvSpPr/>
+          <p:nvPr/>
+        </p:nvSpPr>
+        <p:spPr>
+          <a:xfrm>
+            <a:off x="658368" y="4919472"/>
+            <a:ext cx="10874959" cy="1188720"/>
+          </a:xfrm>
+          <a:prstGeom prst="roundRect">
+            <a:avLst>
+              <a:gd name="adj" fmla="val 6000"/>
+            </a:avLst>
+          </a:prstGeom>
+          <a:solidFill>
+            <a:srgbClr val="ECF6F4"/>
+          </a:solidFill>
+          <a:ln>
+            <a:noFill/>
+          </a:ln>
+          <a:effectLst/>
+        </p:spPr>
+        <p:style>
+          <a:lnRef idx="1">
+            <a:schemeClr val="accent1"/>
+          </a:lnRef>
+          <a:fillRef idx="3">
+            <a:schemeClr val="accent1"/>
+          </a:fillRef>
+          <a:effectRef idx="2">
+            <a:schemeClr val="accent1"/>
+          </a:effectRef>
+          <a:fontRef idx="minor">
+            <a:schemeClr val="lt1"/>
+          </a:fontRef>
+        </p:style>
+        <p:txBody>
+          <a:bodyPr rtlCol="0" anchor="ctr"/>
+          <a:lstStyle/>
+          <a:p/>
+        </p:txBody>
+      </p:sp>
+      <p:sp>
+        <p:nvSpPr>
+          <p:cNvPr id="36" name="TextBox 35"/>
+          <p:cNvSpPr txBox="1"/>
+          <p:nvPr/>
+        </p:nvSpPr>
+        <p:spPr>
+          <a:xfrm>
+            <a:off x="932688" y="5029200"/>
+            <a:ext cx="10058400" cy="274320"/>
+          </a:xfrm>
+          <a:prstGeom prst="rect">
+            <a:avLst/>
+          </a:prstGeom>
+          <a:noFill/>
+        </p:spPr>
+        <p:txBody>
+          <a:bodyPr wrap="square" lIns="0" rIns="0" tIns="0" bIns="0" anchor="t">
+            <a:spAutoFit/>
+          </a:bodyPr>
+          <a:lstStyle/>
+          <a:p>
+            <a:pPr algn="l">
+              <a:spcBef>
+                <a:spcPts val="0"/>
+              </a:spcBef>
+              <a:spcAft>
+                <a:spcPts val="0"/>
+              </a:spcAft>
+            </a:pPr>
+            <a:r>
+              <a:rPr sz="1200" b="1" i="0">
+                <a:solidFill>
+                  <a:srgbClr val="2A9D8F"/>
+                </a:solidFill>
+                <a:latin typeface="맑은 고딕"/>
+                <a:ea typeface="맑은 고딕"/>
+                <a:cs typeface="맑은 고딕"/>
+              </a:rPr>
+              <a:t>시기는 날짜를 적는 것이 아니라 자료가 끊긴 자리로 나뉩니다</a:t>
+            </a:r>
+          </a:p>
+        </p:txBody>
+      </p:sp>
+      <p:sp>
+        <p:nvSpPr>
+          <p:cNvPr id="37" name="TextBox 36"/>
+          <p:cNvSpPr txBox="1"/>
+          <p:nvPr/>
+        </p:nvSpPr>
+        <p:spPr>
+          <a:xfrm>
+            <a:off x="932688" y="5321808"/>
+            <a:ext cx="10424160" cy="713232"/>
+          </a:xfrm>
+          <a:prstGeom prst="rect">
+            <a:avLst/>
+          </a:prstGeom>
+          <a:noFill/>
+        </p:spPr>
+        <p:txBody>
+          <a:bodyPr wrap="square" lIns="0" rIns="0" tIns="0" bIns="0" anchor="t">
+            <a:spAutoFit/>
+          </a:bodyPr>
+          <a:lstStyle/>
+          <a:p>
+            <a:pPr algn="l">
+              <a:lnSpc>
+                <a:spcPct val="120000"/>
+              </a:lnSpc>
+              <a:spcBef>
+                <a:spcPts val="0"/>
+              </a:spcBef>
+              <a:spcAft>
+                <a:spcPts val="400"/>
+              </a:spcAft>
+            </a:pPr>
+            <a:r>
+              <a:rPr sz="1050" b="0" i="0">
+                <a:solidFill>
+                  <a:srgbClr val="1A2435"/>
+                </a:solidFill>
+                <a:latin typeface="맑은 고딕"/>
+                <a:ea typeface="맑은 고딕"/>
+                <a:cs typeface="맑은 고딕"/>
+              </a:rPr>
+              <a:t>자료가 7일 이상 끊기면 그 앞뒤를 다른 시기로 봅니다. 설비를 고치거나 카메라를 옮겨 한동안 멈춘 자리가 저절로 경계가 됩니다. 끊긴 적이 없는 현장은 시기가 하나라 켜도 칸이 그대로입니다 — 어느 현장에 켜 두어도 부작용이 없습니다.</a:t>
+            </a:r>
+          </a:p>
+          <a:p>
+            <a:pPr algn="l">
+              <a:lnSpc>
+                <a:spcPct val="120000"/>
+              </a:lnSpc>
+              <a:spcBef>
+                <a:spcPts val="0"/>
+              </a:spcBef>
+              <a:spcAft>
+                <a:spcPts val="0"/>
+              </a:spcAft>
+            </a:pPr>
+            <a:r>
+              <a:rPr sz="1050" b="0" i="0">
+                <a:solidFill>
+                  <a:srgbClr val="E4572E"/>
+                </a:solidFill>
+                <a:latin typeface="맑은 고딕"/>
+                <a:ea typeface="맑은 고딕"/>
+                <a:cs typeface="맑은 고딕"/>
+              </a:rPr>
+              <a:t>끄면 자료가 많은 시기가 그만큼 많이 뽑힙니다. 칸 안에서는 모든 프레임이 같은 확률이라 비율이 그대로 보존되어, 두 달 전 자료가 표본의 대부분을 차지할 수 있습니다.</a:t>
+            </a:r>
+          </a:p>
+        </p:txBody>
+      </p:sp>
+      <p:sp>
+        <p:nvSpPr>
+          <p:cNvPr id="38" name="TextBox 37"/>
+          <p:cNvSpPr txBox="1"/>
+          <p:nvPr/>
+        </p:nvSpPr>
+        <p:spPr>
+          <a:xfrm>
+            <a:off x="10618927" y="6291072"/>
+            <a:ext cx="914400" cy="274320"/>
+          </a:xfrm>
+          <a:prstGeom prst="rect">
+            <a:avLst/>
+          </a:prstGeom>
+          <a:noFill/>
+        </p:spPr>
+        <p:txBody>
+          <a:bodyPr wrap="square" lIns="0" rIns="0" tIns="0" bIns="0" anchor="t">
+            <a:spAutoFit/>
+          </a:bodyPr>
+          <a:lstStyle/>
+          <a:p>
+            <a:pPr algn="r">
+              <a:spcBef>
+                <a:spcPts val="0"/>
+              </a:spcBef>
+              <a:spcAft>
+                <a:spcPts val="0"/>
+              </a:spcAft>
+            </a:pPr>
+            <a:r>
+              <a:rPr sz="1050" b="0" i="0">
+                <a:solidFill>
+                  <a:srgbClr val="667085"/>
+                </a:solidFill>
+                <a:latin typeface="맑은 고딕"/>
+                <a:ea typeface="맑은 고딕"/>
+                <a:cs typeface="맑은 고딕"/>
+              </a:rPr>
+              <a:t>24</a:t>
+            </a:r>
+          </a:p>
+        </p:txBody>
+      </p:sp>
+    </p:spTree>
+  </p:cSld>
+  <p:clrMapOvr>
+    <a:masterClrMapping/>
+  </p:clrMapOvr>
+</p:sld>
+</file>
+
+<file path=ppt/slides/slide26.xml><?xml version="1.0" encoding="utf-8"?>
 <p:sld xmlns:a="http://schemas.openxmlformats.org/drawingml/2006/main" xmlns:p="http://schemas.openxmlformats.org/presentationml/2006/main" xmlns:r="http://schemas.openxmlformats.org/officeDocument/2006/relationships">
   <p:cSld>
     <p:bg>
@@ -24618,7 +26280,7 @@
                 <a:ea typeface="맑은 고딕"/>
                 <a:cs typeface="맑은 고딕"/>
               </a:rPr>
-              <a:t>24  SAFETY RULES</a:t>
+              <a:t>25  SAFETY RULES</a:t>
             </a:r>
           </a:p>
         </p:txBody>
@@ -25598,7 +27260,7 @@
                 <a:ea typeface="맑은 고딕"/>
                 <a:cs typeface="맑은 고딕"/>
               </a:rPr>
-              <a:t>24</a:t>
+              <a:t>25</a:t>
             </a:r>
           </a:p>
         </p:txBody>
@@ -25611,7 +27273,7 @@
 </p:sld>
 </file>
 
-<file path=ppt/slides/slide26.xml><?xml version="1.0" encoding="utf-8"?>
+<file path=ppt/slides/slide27.xml><?xml version="1.0" encoding="utf-8"?>
 <p:sld xmlns:a="http://schemas.openxmlformats.org/drawingml/2006/main" xmlns:p="http://schemas.openxmlformats.org/presentationml/2006/main" xmlns:r="http://schemas.openxmlformats.org/officeDocument/2006/relationships">
   <p:cSld>
     <p:bg>
@@ -25668,7 +27330,7 @@
                 <a:ea typeface="맑은 고딕"/>
                 <a:cs typeface="맑은 고딕"/>
               </a:rPr>
-              <a:t>25  COMMISSIONING</a:t>
+              <a:t>26  COMMISSIONING</a:t>
             </a:r>
           </a:p>
         </p:txBody>
@@ -26070,7 +27732,7 @@
                 <a:ea typeface="맑은 고딕"/>
                 <a:cs typeface="맑은 고딕"/>
               </a:rPr>
-              <a:t>env.ini · secrets.ini 작성</a:t>
+              <a:t>env.ini · continual_learning.ini · db_secrets.ini 작성</a:t>
             </a:r>
           </a:p>
         </p:txBody>
@@ -27681,7 +29343,7 @@
                 <a:ea typeface="맑은 고딕"/>
                 <a:cs typeface="맑은 고딕"/>
               </a:rPr>
-              <a:t>야간 자동 갱신</a:t>
+              <a:t>필요할 때 재학습</a:t>
             </a:r>
           </a:p>
         </p:txBody>
@@ -28332,7 +29994,7 @@
                 <a:ea typeface="맑은 고딕"/>
                 <a:cs typeface="맑은 고딕"/>
               </a:rPr>
-              <a:t>25</a:t>
+              <a:t>26</a:t>
             </a:r>
           </a:p>
         </p:txBody>
@@ -28345,7 +30007,7 @@
 </p:sld>
 </file>
 
-<file path=ppt/slides/slide27.xml><?xml version="1.0" encoding="utf-8"?>
+<file path=ppt/slides/slide28.xml><?xml version="1.0" encoding="utf-8"?>
 <p:sld xmlns:a="http://schemas.openxmlformats.org/drawingml/2006/main" xmlns:p="http://schemas.openxmlformats.org/presentationml/2006/main" xmlns:r="http://schemas.openxmlformats.org/officeDocument/2006/relationships">
   <p:cSld>
     <p:bg>
@@ -28402,7 +30064,7 @@
                 <a:ea typeface="맑은 고딕"/>
                 <a:cs typeface="맑은 고딕"/>
               </a:rPr>
-              <a:t>26  TROUBLESHOOTING</a:t>
+              <a:t>27  TROUBLESHOOTING</a:t>
             </a:r>
           </a:p>
         </p:txBody>
@@ -29675,7 +31337,7 @@
                 <a:ea typeface="맑은 고딕"/>
                 <a:cs typeface="맑은 고딕"/>
               </a:rPr>
-              <a:t>26</a:t>
+              <a:t>27</a:t>
             </a:r>
           </a:p>
         </p:txBody>
@@ -29688,7 +31350,7 @@
 </p:sld>
 </file>
 
-<file path=ppt/slides/slide28.xml><?xml version="1.0" encoding="utf-8"?>
+<file path=ppt/slides/slide29.xml><?xml version="1.0" encoding="utf-8"?>
 <p:sld xmlns:a="http://schemas.openxmlformats.org/drawingml/2006/main" xmlns:p="http://schemas.openxmlformats.org/presentationml/2006/main" xmlns:r="http://schemas.openxmlformats.org/officeDocument/2006/relationships">
   <p:cSld>
     <p:bg>
@@ -29745,7 +31407,7 @@
                 <a:ea typeface="맑은 고딕"/>
                 <a:cs typeface="맑은 고딕"/>
               </a:rPr>
-              <a:t>27  CHECKLIST</a:t>
+              <a:t>28  CHECKLIST</a:t>
             </a:r>
           </a:p>
         </p:txBody>
@@ -30644,7 +32306,7 @@
                 <a:ea typeface="맑은 고딕"/>
                 <a:cs typeface="맑은 고딕"/>
               </a:rPr>
-              <a:t>users\&lt;user&gt;\env.ini 배치</a:t>
+              <a:t>users\&lt;user&gt;\env.ini · continual_learning.ini 배치</a:t>
             </a:r>
           </a:p>
         </p:txBody>
@@ -30739,7 +32401,7 @@
                 <a:ea typeface="맑은 고딕"/>
                 <a:cs typeface="맑은 고딕"/>
               </a:rPr>
-              <a:t>users\&lt;user&gt;\secrets.ini 작성</a:t>
+              <a:t>users\&lt;user&gt;\db_secrets.ini 작성</a:t>
             </a:r>
           </a:p>
         </p:txBody>
@@ -31156,7 +32818,7 @@
                 <a:ea typeface="맑은 고딕"/>
                 <a:cs typeface="맑은 고딕"/>
               </a:rPr>
-              <a:t>27</a:t>
+              <a:t>28</a:t>
             </a:r>
           </a:p>
         </p:txBody>
@@ -32985,7 +34647,7 @@
         <p:spPr>
           <a:xfrm>
             <a:off x="658368" y="1627632"/>
-            <a:ext cx="6903720" cy="4733036"/>
+            <a:ext cx="6903720" cy="4949571"/>
           </a:xfrm>
           <a:prstGeom prst="roundRect">
             <a:avLst>
@@ -33029,7 +34691,7 @@
         <p:spPr>
           <a:xfrm>
             <a:off x="859536" y="1828800"/>
-            <a:ext cx="6501383" cy="4330700"/>
+            <a:ext cx="6501383" cy="4547235"/>
           </a:xfrm>
           <a:prstGeom prst="rect">
             <a:avLst/>
@@ -33398,7 +35060,7 @@
                 <a:ea typeface="Consolas"/>
                 <a:cs typeface="Consolas"/>
               </a:rPr>
-              <a:t>    env.ini        현장 설정 (DB · 네트워크 · 임계값)</a:t>
+              <a:t>    env.ini        현장 설정 (DB · 네트워크 · 격자)</a:t>
             </a:r>
           </a:p>
           <a:p>
@@ -33422,7 +35084,31 @@
                 <a:ea typeface="Consolas"/>
                 <a:cs typeface="Consolas"/>
               </a:rPr>
-              <a:t>    secrets.ini    DB 비밀번호  (git 제외)</a:t>
+              <a:t>    continual_learning.ini      연속학습 설정 (임계값 · 단계 · 기여도 · 표본)</a:t>
+            </a:r>
+          </a:p>
+          <a:p>
+            <a:pPr algn="l">
+              <a:lnSpc>
+                <a:spcPct val="100000"/>
+              </a:lnSpc>
+              <a:spcBef>
+                <a:spcPts val="0"/>
+              </a:spcBef>
+              <a:spcAft>
+                <a:spcPts val="150"/>
+              </a:spcAft>
+            </a:pPr>
+            <a:r>
+              <a:rPr sz="1100" b="0" i="0">
+                <a:solidFill>
+                  <a:srgbClr val="D6DFEA"/>
+                </a:solidFill>
+                <a:latin typeface="Consolas"/>
+                <a:ea typeface="Consolas"/>
+                <a:cs typeface="Consolas"/>
+              </a:rPr>
+              <a:t>    db_secrets.ini    DB 비밀번호  (git 제외)</a:t>
             </a:r>
           </a:p>
           <a:p>
@@ -33876,7 +35562,7 @@
                 <a:ea typeface="맑은 고딕"/>
                 <a:cs typeface="맑은 고딕"/>
               </a:rPr>
-              <a:t>현장을 추가하려면 users 아래에 폴더를 만들고 env.ini 와 secrets.ini 를 넣습니다.</a:t>
+              <a:t>현장을 추가하려면 users 아래에 폴더를 만들고 env.ini · continual_learning.ini · db_secrets.ini 를 넣습니다.</a:t>
             </a:r>
           </a:p>
         </p:txBody>
@@ -34213,7 +35899,7 @@
                 <a:ea typeface="맑은 고딕"/>
                 <a:cs typeface="맑은 고딕"/>
               </a:rPr>
-              <a:t>설정 파일 세 가지</a:t>
+              <a:t>설정 파일 네 가지</a:t>
             </a:r>
           </a:p>
         </p:txBody>
@@ -34226,7 +35912,7 @@
         </p:nvSpPr>
         <p:spPr>
           <a:xfrm>
-            <a:off x="658368" y="1572768"/>
+            <a:off x="658368" y="1536192"/>
             <a:ext cx="10515600" cy="320040"/>
           </a:xfrm>
           <a:prstGeom prst="rect">
@@ -34249,7 +35935,7 @@
               </a:spcAft>
             </a:pPr>
             <a:r>
-              <a:rPr sz="1400" b="0" i="0">
+              <a:rPr sz="1350" b="0" i="0">
                 <a:solidFill>
                   <a:srgbClr val="667085"/>
                 </a:solidFill>
@@ -34257,7 +35943,7 @@
                 <a:ea typeface="맑은 고딕"/>
                 <a:cs typeface="맑은 고딕"/>
               </a:rPr>
-              <a:t>장비 고유 · 현장 고유 · 비밀 정보를 분리했습니다. 읽는 순서가 정해져 있습니다.</a:t>
+              <a:t>장비 고유 · 현장 고유 · 운영 중 조정 · 비밀 정보를 나눴습니다. 읽는 순서가 정해져 있습니다.</a:t>
             </a:r>
           </a:p>
         </p:txBody>
@@ -34270,8 +35956,8 @@
         </p:nvSpPr>
         <p:spPr>
           <a:xfrm>
-            <a:off x="658368" y="2048256"/>
-            <a:ext cx="10874959" cy="1298448"/>
+            <a:off x="658368" y="1883664"/>
+            <a:ext cx="10874959" cy="1060704"/>
           </a:xfrm>
           <a:prstGeom prst="roundRect">
             <a:avLst>
@@ -34314,7 +36000,7 @@
         </p:nvSpPr>
         <p:spPr>
           <a:xfrm>
-            <a:off x="932688" y="2322576"/>
+            <a:off x="932688" y="2121408"/>
             <a:ext cx="384048" cy="384048"/>
           </a:xfrm>
           <a:prstGeom prst="ellipse">
@@ -34358,7 +36044,7 @@
         </p:nvSpPr>
         <p:spPr>
           <a:xfrm>
-            <a:off x="1499616" y="2286000"/>
+            <a:off x="1499616" y="2084832"/>
             <a:ext cx="3840480" cy="274320"/>
           </a:xfrm>
           <a:prstGeom prst="rect">
@@ -34381,7 +36067,7 @@
               </a:spcAft>
             </a:pPr>
             <a:r>
-              <a:rPr sz="1350" b="1" i="0">
+              <a:rPr sz="1300" b="1" i="0">
                 <a:solidFill>
                   <a:srgbClr val="1A2435"/>
                 </a:solidFill>
@@ -34402,30 +36088,30 @@
         </p:nvSpPr>
         <p:spPr>
           <a:xfrm>
-            <a:off x="1499616" y="2615184"/>
-            <a:ext cx="3840480" cy="256032"/>
-          </a:xfrm>
-          <a:prstGeom prst="rect">
-            <a:avLst/>
-          </a:prstGeom>
-          <a:noFill/>
-        </p:spPr>
-        <p:txBody>
-          <a:bodyPr wrap="square" lIns="0" rIns="0" tIns="0" bIns="0" anchor="t">
-            <a:spAutoFit/>
-          </a:bodyPr>
-          <a:lstStyle/>
-          <a:p>
-            <a:pPr algn="l">
-              <a:spcBef>
-                <a:spcPts val="0"/>
-              </a:spcBef>
-              <a:spcAft>
-                <a:spcPts val="0"/>
-              </a:spcAft>
-            </a:pPr>
-            <a:r>
-              <a:rPr sz="1050" b="0" i="0">
+            <a:off x="1499616" y="2395728"/>
+            <a:ext cx="3840480" cy="237744"/>
+          </a:xfrm>
+          <a:prstGeom prst="rect">
+            <a:avLst/>
+          </a:prstGeom>
+          <a:noFill/>
+        </p:spPr>
+        <p:txBody>
+          <a:bodyPr wrap="square" lIns="0" rIns="0" tIns="0" bIns="0" anchor="t">
+            <a:spAutoFit/>
+          </a:bodyPr>
+          <a:lstStyle/>
+          <a:p>
+            <a:pPr algn="l">
+              <a:spcBef>
+                <a:spcPts val="0"/>
+              </a:spcBef>
+              <a:spcAft>
+                <a:spcPts val="0"/>
+              </a:spcAft>
+            </a:pPr>
+            <a:r>
+              <a:rPr sz="1000" b="0" i="0">
                 <a:solidFill>
                   <a:srgbClr val="E4572E"/>
                 </a:solidFill>
@@ -34446,8 +36132,8 @@
         </p:nvSpPr>
         <p:spPr>
           <a:xfrm>
-            <a:off x="5550407" y="2267712"/>
-            <a:ext cx="3931920" cy="932688"/>
+            <a:off x="5550407" y="2066544"/>
+            <a:ext cx="4206240" cy="694944"/>
           </a:xfrm>
           <a:prstGeom prst="rect">
             <a:avLst/>
@@ -34468,7 +36154,7 @@
                 <a:spcPts val="0"/>
               </a:spcBef>
               <a:spcAft>
-                <a:spcPts val="400"/>
+                <a:spcPts val="300"/>
               </a:spcAft>
             </a:pPr>
             <a:r>
@@ -34492,7 +36178,7 @@
                 <a:spcPts val="0"/>
               </a:spcBef>
               <a:spcAft>
-                <a:spcPts val="400"/>
+                <a:spcPts val="300"/>
               </a:spcAft>
             </a:pPr>
             <a:r>
@@ -34516,7 +36202,7 @@
                 <a:spcPts val="0"/>
               </a:spcBef>
               <a:spcAft>
-                <a:spcPts val="400"/>
+                <a:spcPts val="300"/>
               </a:spcAft>
             </a:pPr>
             <a:r>
@@ -34541,8 +36227,8 @@
         </p:nvSpPr>
         <p:spPr>
           <a:xfrm>
-            <a:off x="1499616" y="2907792"/>
-            <a:ext cx="3931920" cy="457200"/>
+            <a:off x="1499616" y="2633472"/>
+            <a:ext cx="3931920" cy="292608"/>
           </a:xfrm>
           <a:prstGeom prst="rect">
             <a:avLst/>
@@ -34557,7 +36243,7 @@
           <a:p>
             <a:pPr algn="l">
               <a:lnSpc>
-                <a:spcPct val="120000"/>
+                <a:spcPct val="115000"/>
               </a:lnSpc>
               <a:spcBef>
                 <a:spcPts val="0"/>
@@ -34567,7 +36253,7 @@
               </a:spcAft>
             </a:pPr>
             <a:r>
-              <a:rPr sz="1050" b="0" i="0">
+              <a:rPr sz="1000" b="0" i="0">
                 <a:solidFill>
                   <a:srgbClr val="667085"/>
                 </a:solidFill>
@@ -34588,8 +36274,8 @@
         </p:nvSpPr>
         <p:spPr>
           <a:xfrm>
-            <a:off x="658368" y="3529584"/>
-            <a:ext cx="10874959" cy="1298448"/>
+            <a:off x="658368" y="3054096"/>
+            <a:ext cx="10874959" cy="1060704"/>
           </a:xfrm>
           <a:prstGeom prst="roundRect">
             <a:avLst>
@@ -34632,7 +36318,7 @@
         </p:nvSpPr>
         <p:spPr>
           <a:xfrm>
-            <a:off x="932688" y="3803904"/>
+            <a:off x="932688" y="3291839"/>
             <a:ext cx="384048" cy="384048"/>
           </a:xfrm>
           <a:prstGeom prst="ellipse">
@@ -34676,7 +36362,7 @@
         </p:nvSpPr>
         <p:spPr>
           <a:xfrm>
-            <a:off x="1499616" y="3767328"/>
+            <a:off x="1499616" y="3255264"/>
             <a:ext cx="3840480" cy="274320"/>
           </a:xfrm>
           <a:prstGeom prst="rect">
@@ -34699,7 +36385,7 @@
               </a:spcAft>
             </a:pPr>
             <a:r>
-              <a:rPr sz="1350" b="1" i="0">
+              <a:rPr sz="1300" b="1" i="0">
                 <a:solidFill>
                   <a:srgbClr val="1A2435"/>
                 </a:solidFill>
@@ -34720,30 +36406,30 @@
         </p:nvSpPr>
         <p:spPr>
           <a:xfrm>
-            <a:off x="1499616" y="4096512"/>
-            <a:ext cx="3840480" cy="256032"/>
-          </a:xfrm>
-          <a:prstGeom prst="rect">
-            <a:avLst/>
-          </a:prstGeom>
-          <a:noFill/>
-        </p:spPr>
-        <p:txBody>
-          <a:bodyPr wrap="square" lIns="0" rIns="0" tIns="0" bIns="0" anchor="t">
-            <a:spAutoFit/>
-          </a:bodyPr>
-          <a:lstStyle/>
-          <a:p>
-            <a:pPr algn="l">
-              <a:spcBef>
-                <a:spcPts val="0"/>
-              </a:spcBef>
-              <a:spcAft>
-                <a:spcPts val="0"/>
-              </a:spcAft>
-            </a:pPr>
-            <a:r>
-              <a:rPr sz="1050" b="0" i="0">
+            <a:off x="1499616" y="3566160"/>
+            <a:ext cx="3840480" cy="237744"/>
+          </a:xfrm>
+          <a:prstGeom prst="rect">
+            <a:avLst/>
+          </a:prstGeom>
+          <a:noFill/>
+        </p:spPr>
+        <p:txBody>
+          <a:bodyPr wrap="square" lIns="0" rIns="0" tIns="0" bIns="0" anchor="t">
+            <a:spAutoFit/>
+          </a:bodyPr>
+          <a:lstStyle/>
+          <a:p>
+            <a:pPr algn="l">
+              <a:spcBef>
+                <a:spcPts val="0"/>
+              </a:spcBef>
+              <a:spcAft>
+                <a:spcPts val="0"/>
+              </a:spcAft>
+            </a:pPr>
+            <a:r>
+              <a:rPr sz="1000" b="0" i="0">
                 <a:solidFill>
                   <a:srgbClr val="F4A261"/>
                 </a:solidFill>
@@ -34751,7 +36437,7 @@
                 <a:ea typeface="맑은 고딕"/>
                 <a:cs typeface="맑은 고딕"/>
               </a:rPr>
-              <a:t>현장 고유  ·  현장 폴더</a:t>
+              <a:t>설치할 때 정함  ·  현장 폴더</a:t>
             </a:r>
           </a:p>
         </p:txBody>
@@ -34764,8 +36450,8 @@
         </p:nvSpPr>
         <p:spPr>
           <a:xfrm>
-            <a:off x="5550407" y="3749040"/>
-            <a:ext cx="3931920" cy="932688"/>
+            <a:off x="5550407" y="3236976"/>
+            <a:ext cx="4206240" cy="694944"/>
           </a:xfrm>
           <a:prstGeom prst="rect">
             <a:avLst/>
@@ -34786,7 +36472,7 @@
                 <a:spcPts val="0"/>
               </a:spcBef>
               <a:spcAft>
-                <a:spcPts val="400"/>
+                <a:spcPts val="300"/>
               </a:spcAft>
             </a:pPr>
             <a:r>
@@ -34810,7 +36496,7 @@
                 <a:spcPts val="0"/>
               </a:spcBef>
               <a:spcAft>
-                <a:spcPts val="400"/>
+                <a:spcPts val="300"/>
               </a:spcAft>
             </a:pPr>
             <a:r>
@@ -34834,7 +36520,7 @@
                 <a:spcPts val="0"/>
               </a:spcBef>
               <a:spcAft>
-                <a:spcPts val="400"/>
+                <a:spcPts val="300"/>
               </a:spcAft>
             </a:pPr>
             <a:r>
@@ -34846,7 +36532,7 @@
                 <a:ea typeface="Consolas"/>
                 <a:cs typeface="Consolas"/>
               </a:rPr>
-              <a:t>[CONSTANTS] 임계값 · 격자 크기</a:t>
+              <a:t>[CONSTANTS] 격자 크기 · 카메라 해상도</a:t>
             </a:r>
           </a:p>
         </p:txBody>
@@ -34859,8 +36545,8 @@
         </p:nvSpPr>
         <p:spPr>
           <a:xfrm>
-            <a:off x="1499616" y="4389120"/>
-            <a:ext cx="3931920" cy="457200"/>
+            <a:off x="1499616" y="3803904"/>
+            <a:ext cx="3931920" cy="292608"/>
           </a:xfrm>
           <a:prstGeom prst="rect">
             <a:avLst/>
@@ -34875,7 +36561,7 @@
           <a:p>
             <a:pPr algn="l">
               <a:lnSpc>
-                <a:spcPct val="120000"/>
+                <a:spcPct val="115000"/>
               </a:lnSpc>
               <a:spcBef>
                 <a:spcPts val="0"/>
@@ -34885,7 +36571,7 @@
               </a:spcAft>
             </a:pPr>
             <a:r>
-              <a:rPr sz="1050" b="0" i="0">
+              <a:rPr sz="1000" b="0" i="0">
                 <a:solidFill>
                   <a:srgbClr val="667085"/>
                 </a:solidFill>
@@ -34893,7 +36579,7 @@
                 <a:ea typeface="맑은 고딕"/>
                 <a:cs typeface="맑은 고딕"/>
               </a:rPr>
-              <a:t>현장마다 다른 값. 비밀번호는 여기에 두지 않습니다.</a:t>
+              <a:t>한 번 정하면 거의 바꾸지 않는 값입니다.</a:t>
             </a:r>
           </a:p>
         </p:txBody>
@@ -34906,8 +36592,8 @@
         </p:nvSpPr>
         <p:spPr>
           <a:xfrm>
-            <a:off x="658368" y="5010912"/>
-            <a:ext cx="10874959" cy="1133856"/>
+            <a:off x="658368" y="4224527"/>
+            <a:ext cx="10874959" cy="1060704"/>
           </a:xfrm>
           <a:prstGeom prst="roundRect">
             <a:avLst>
@@ -34950,7 +36636,7 @@
         </p:nvSpPr>
         <p:spPr>
           <a:xfrm>
-            <a:off x="932688" y="5285232"/>
+            <a:off x="932688" y="4462271"/>
             <a:ext cx="384048" cy="384048"/>
           </a:xfrm>
           <a:prstGeom prst="ellipse">
@@ -34994,7 +36680,7 @@
         </p:nvSpPr>
         <p:spPr>
           <a:xfrm>
-            <a:off x="1499616" y="5248656"/>
+            <a:off x="1499616" y="4425695"/>
             <a:ext cx="3840480" cy="274320"/>
           </a:xfrm>
           <a:prstGeom prst="rect">
@@ -35017,7 +36703,7 @@
               </a:spcAft>
             </a:pPr>
             <a:r>
-              <a:rPr sz="1350" b="1" i="0">
+              <a:rPr sz="1300" b="1" i="0">
                 <a:solidFill>
                   <a:srgbClr val="1A2435"/>
                 </a:solidFill>
@@ -35025,7 +36711,7 @@
                 <a:ea typeface="Consolas"/>
                 <a:cs typeface="Consolas"/>
               </a:rPr>
-              <a:t>users\&lt;user&gt;\secrets.ini</a:t>
+              <a:t>users\&lt;user&gt;\continual_learning.ini</a:t>
             </a:r>
           </a:p>
         </p:txBody>
@@ -35038,30 +36724,30 @@
         </p:nvSpPr>
         <p:spPr>
           <a:xfrm>
-            <a:off x="1499616" y="5577840"/>
-            <a:ext cx="3840480" cy="256032"/>
-          </a:xfrm>
-          <a:prstGeom prst="rect">
-            <a:avLst/>
-          </a:prstGeom>
-          <a:noFill/>
-        </p:spPr>
-        <p:txBody>
-          <a:bodyPr wrap="square" lIns="0" rIns="0" tIns="0" bIns="0" anchor="t">
-            <a:spAutoFit/>
-          </a:bodyPr>
-          <a:lstStyle/>
-          <a:p>
-            <a:pPr algn="l">
-              <a:spcBef>
-                <a:spcPts val="0"/>
-              </a:spcBef>
-              <a:spcAft>
-                <a:spcPts val="0"/>
-              </a:spcAft>
-            </a:pPr>
-            <a:r>
-              <a:rPr sz="1050" b="0" i="0">
+            <a:off x="1499616" y="4736592"/>
+            <a:ext cx="3840480" cy="237744"/>
+          </a:xfrm>
+          <a:prstGeom prst="rect">
+            <a:avLst/>
+          </a:prstGeom>
+          <a:noFill/>
+        </p:spPr>
+        <p:txBody>
+          <a:bodyPr wrap="square" lIns="0" rIns="0" tIns="0" bIns="0" anchor="t">
+            <a:spAutoFit/>
+          </a:bodyPr>
+          <a:lstStyle/>
+          <a:p>
+            <a:pPr algn="l">
+              <a:spcBef>
+                <a:spcPts val="0"/>
+              </a:spcBef>
+              <a:spcAft>
+                <a:spcPts val="0"/>
+              </a:spcAft>
+            </a:pPr>
+            <a:r>
+              <a:rPr sz="1000" b="0" i="0">
                 <a:solidFill>
                   <a:srgbClr val="2A9D8F"/>
                 </a:solidFill>
@@ -35069,7 +36755,7 @@
                 <a:ea typeface="맑은 고딕"/>
                 <a:cs typeface="맑은 고딕"/>
               </a:rPr>
-              <a:t>비밀 정보  ·  현장 폴더</a:t>
+              <a:t>운영 중 조정  ·  현장 폴더</a:t>
             </a:r>
           </a:p>
         </p:txBody>
@@ -35082,8 +36768,8 @@
         </p:nvSpPr>
         <p:spPr>
           <a:xfrm>
-            <a:off x="5550407" y="5230368"/>
-            <a:ext cx="3931920" cy="768096"/>
+            <a:off x="5550407" y="4407407"/>
+            <a:ext cx="4206240" cy="694944"/>
           </a:xfrm>
           <a:prstGeom prst="rect">
             <a:avLst/>
@@ -35104,7 +36790,7 @@
                 <a:spcPts val="0"/>
               </a:spcBef>
               <a:spcAft>
-                <a:spcPts val="400"/>
+                <a:spcPts val="300"/>
               </a:spcAft>
             </a:pPr>
             <a:r>
@@ -35116,7 +36802,7 @@
                 <a:ea typeface="Consolas"/>
                 <a:cs typeface="Consolas"/>
               </a:rPr>
-              <a:t>[DB_RUNTIME] DB_PASSWORD = ...</a:t>
+              <a:t>[CONSTANTS] 절대 임계값 · 단계 전환 조건</a:t>
             </a:r>
           </a:p>
           <a:p>
@@ -35128,7 +36814,7 @@
                 <a:spcPts val="0"/>
               </a:spcBef>
               <a:spcAft>
-                <a:spcPts val="400"/>
+                <a:spcPts val="300"/>
               </a:spcAft>
             </a:pPr>
             <a:r>
@@ -35140,6 +36826,300 @@
                 <a:ea typeface="Consolas"/>
                 <a:cs typeface="Consolas"/>
               </a:rPr>
+              <a:t>[CONSTANTS] 기여도 판단 · 학습 표본</a:t>
+            </a:r>
+          </a:p>
+        </p:txBody>
+      </p:sp>
+      <p:sp>
+        <p:nvSpPr>
+          <p:cNvPr id="22" name="TextBox 21"/>
+          <p:cNvSpPr txBox="1"/>
+          <p:nvPr/>
+        </p:nvSpPr>
+        <p:spPr>
+          <a:xfrm>
+            <a:off x="1499616" y="4974336"/>
+            <a:ext cx="3931920" cy="292608"/>
+          </a:xfrm>
+          <a:prstGeom prst="rect">
+            <a:avLst/>
+          </a:prstGeom>
+          <a:noFill/>
+        </p:spPr>
+        <p:txBody>
+          <a:bodyPr wrap="square" lIns="0" rIns="0" tIns="0" bIns="0" anchor="t">
+            <a:spAutoFit/>
+          </a:bodyPr>
+          <a:lstStyle/>
+          <a:p>
+            <a:pPr algn="l">
+              <a:lnSpc>
+                <a:spcPct val="115000"/>
+              </a:lnSpc>
+              <a:spcBef>
+                <a:spcPts val="0"/>
+              </a:spcBef>
+              <a:spcAft>
+                <a:spcPts val="0"/>
+              </a:spcAft>
+            </a:pPr>
+            <a:r>
+              <a:rPr sz="1000" b="0" i="0">
+                <a:solidFill>
+                  <a:srgbClr val="667085"/>
+                </a:solidFill>
+                <a:latin typeface="맑은 고딕"/>
+                <a:ea typeface="맑은 고딕"/>
+                <a:cs typeface="맑은 고딕"/>
+              </a:rPr>
+              <a:t>[설정] 창이 읽고 씁니다. env.ini 뒤에 읽어 같은 열쇠면 이깁니다.</a:t>
+            </a:r>
+          </a:p>
+        </p:txBody>
+      </p:sp>
+      <p:sp>
+        <p:nvSpPr>
+          <p:cNvPr id="23" name="Rounded Rectangle 22"/>
+          <p:cNvSpPr/>
+          <p:nvPr/>
+        </p:nvSpPr>
+        <p:spPr>
+          <a:xfrm>
+            <a:off x="658368" y="5394959"/>
+            <a:ext cx="10874959" cy="1060704"/>
+          </a:xfrm>
+          <a:prstGeom prst="roundRect">
+            <a:avLst>
+              <a:gd name="adj" fmla="val 6000"/>
+            </a:avLst>
+          </a:prstGeom>
+          <a:solidFill>
+            <a:srgbClr val="F2F4F7"/>
+          </a:solidFill>
+          <a:ln>
+            <a:noFill/>
+          </a:ln>
+          <a:effectLst/>
+        </p:spPr>
+        <p:style>
+          <a:lnRef idx="1">
+            <a:schemeClr val="accent1"/>
+          </a:lnRef>
+          <a:fillRef idx="3">
+            <a:schemeClr val="accent1"/>
+          </a:fillRef>
+          <a:effectRef idx="2">
+            <a:schemeClr val="accent1"/>
+          </a:effectRef>
+          <a:fontRef idx="minor">
+            <a:schemeClr val="lt1"/>
+          </a:fontRef>
+        </p:style>
+        <p:txBody>
+          <a:bodyPr rtlCol="0" anchor="ctr"/>
+          <a:lstStyle/>
+          <a:p/>
+        </p:txBody>
+      </p:sp>
+      <p:sp>
+        <p:nvSpPr>
+          <p:cNvPr id="24" name="Oval 23"/>
+          <p:cNvSpPr/>
+          <p:nvPr/>
+        </p:nvSpPr>
+        <p:spPr>
+          <a:xfrm>
+            <a:off x="932688" y="5632703"/>
+            <a:ext cx="384048" cy="384048"/>
+          </a:xfrm>
+          <a:prstGeom prst="ellipse">
+            <a:avLst/>
+          </a:prstGeom>
+          <a:solidFill>
+            <a:srgbClr val="E4572E"/>
+          </a:solidFill>
+          <a:ln>
+            <a:noFill/>
+          </a:ln>
+          <a:effectLst/>
+        </p:spPr>
+        <p:style>
+          <a:lnRef idx="1">
+            <a:schemeClr val="accent1"/>
+          </a:lnRef>
+          <a:fillRef idx="3">
+            <a:schemeClr val="accent1"/>
+          </a:fillRef>
+          <a:effectRef idx="2">
+            <a:schemeClr val="accent1"/>
+          </a:effectRef>
+          <a:fontRef idx="minor">
+            <a:schemeClr val="lt1"/>
+          </a:fontRef>
+        </p:style>
+        <p:txBody>
+          <a:bodyPr rtlCol="0" anchor="ctr"/>
+          <a:lstStyle/>
+          <a:p>
+            <a:pPr algn="ctr"/>
+          </a:p>
+        </p:txBody>
+      </p:sp>
+      <p:sp>
+        <p:nvSpPr>
+          <p:cNvPr id="25" name="TextBox 24"/>
+          <p:cNvSpPr txBox="1"/>
+          <p:nvPr/>
+        </p:nvSpPr>
+        <p:spPr>
+          <a:xfrm>
+            <a:off x="1499616" y="5596127"/>
+            <a:ext cx="3840480" cy="274320"/>
+          </a:xfrm>
+          <a:prstGeom prst="rect">
+            <a:avLst/>
+          </a:prstGeom>
+          <a:noFill/>
+        </p:spPr>
+        <p:txBody>
+          <a:bodyPr wrap="square" lIns="0" rIns="0" tIns="0" bIns="0" anchor="t">
+            <a:spAutoFit/>
+          </a:bodyPr>
+          <a:lstStyle/>
+          <a:p>
+            <a:pPr algn="l">
+              <a:spcBef>
+                <a:spcPts val="0"/>
+              </a:spcBef>
+              <a:spcAft>
+                <a:spcPts val="0"/>
+              </a:spcAft>
+            </a:pPr>
+            <a:r>
+              <a:rPr sz="1300" b="1" i="0">
+                <a:solidFill>
+                  <a:srgbClr val="1A2435"/>
+                </a:solidFill>
+                <a:latin typeface="Consolas"/>
+                <a:ea typeface="Consolas"/>
+                <a:cs typeface="Consolas"/>
+              </a:rPr>
+              <a:t>users\&lt;user&gt;\db_secrets.ini</a:t>
+            </a:r>
+          </a:p>
+        </p:txBody>
+      </p:sp>
+      <p:sp>
+        <p:nvSpPr>
+          <p:cNvPr id="26" name="TextBox 25"/>
+          <p:cNvSpPr txBox="1"/>
+          <p:nvPr/>
+        </p:nvSpPr>
+        <p:spPr>
+          <a:xfrm>
+            <a:off x="1499616" y="5907023"/>
+            <a:ext cx="3840480" cy="237744"/>
+          </a:xfrm>
+          <a:prstGeom prst="rect">
+            <a:avLst/>
+          </a:prstGeom>
+          <a:noFill/>
+        </p:spPr>
+        <p:txBody>
+          <a:bodyPr wrap="square" lIns="0" rIns="0" tIns="0" bIns="0" anchor="t">
+            <a:spAutoFit/>
+          </a:bodyPr>
+          <a:lstStyle/>
+          <a:p>
+            <a:pPr algn="l">
+              <a:spcBef>
+                <a:spcPts val="0"/>
+              </a:spcBef>
+              <a:spcAft>
+                <a:spcPts val="0"/>
+              </a:spcAft>
+            </a:pPr>
+            <a:r>
+              <a:rPr sz="1000" b="0" i="0">
+                <a:solidFill>
+                  <a:srgbClr val="E4572E"/>
+                </a:solidFill>
+                <a:latin typeface="맑은 고딕"/>
+                <a:ea typeface="맑은 고딕"/>
+                <a:cs typeface="맑은 고딕"/>
+              </a:rPr>
+              <a:t>비밀 정보  ·  현장 폴더</a:t>
+            </a:r>
+          </a:p>
+        </p:txBody>
+      </p:sp>
+      <p:sp>
+        <p:nvSpPr>
+          <p:cNvPr id="27" name="TextBox 26"/>
+          <p:cNvSpPr txBox="1"/>
+          <p:nvPr/>
+        </p:nvSpPr>
+        <p:spPr>
+          <a:xfrm>
+            <a:off x="5550407" y="5577839"/>
+            <a:ext cx="4206240" cy="694944"/>
+          </a:xfrm>
+          <a:prstGeom prst="rect">
+            <a:avLst/>
+          </a:prstGeom>
+          <a:noFill/>
+        </p:spPr>
+        <p:txBody>
+          <a:bodyPr wrap="square" lIns="0" rIns="0" tIns="0" bIns="0" anchor="t">
+            <a:spAutoFit/>
+          </a:bodyPr>
+          <a:lstStyle/>
+          <a:p>
+            <a:pPr algn="l">
+              <a:lnSpc>
+                <a:spcPct val="110000"/>
+              </a:lnSpc>
+              <a:spcBef>
+                <a:spcPts val="0"/>
+              </a:spcBef>
+              <a:spcAft>
+                <a:spcPts val="300"/>
+              </a:spcAft>
+            </a:pPr>
+            <a:r>
+              <a:rPr sz="950" b="0" i="0">
+                <a:solidFill>
+                  <a:srgbClr val="667085"/>
+                </a:solidFill>
+                <a:latin typeface="Consolas"/>
+                <a:ea typeface="Consolas"/>
+                <a:cs typeface="Consolas"/>
+              </a:rPr>
+              <a:t>[DB_RUNTIME] DB_PASSWORD = ...</a:t>
+            </a:r>
+          </a:p>
+          <a:p>
+            <a:pPr algn="l">
+              <a:lnSpc>
+                <a:spcPct val="110000"/>
+              </a:lnSpc>
+              <a:spcBef>
+                <a:spcPts val="0"/>
+              </a:spcBef>
+              <a:spcAft>
+                <a:spcPts val="300"/>
+              </a:spcAft>
+            </a:pPr>
+            <a:r>
+              <a:rPr sz="950" b="0" i="0">
+                <a:solidFill>
+                  <a:srgbClr val="667085"/>
+                </a:solidFill>
+                <a:latin typeface="Consolas"/>
+                <a:ea typeface="Consolas"/>
+                <a:cs typeface="Consolas"/>
+              </a:rPr>
               <a:t>[DB_ADMIN] DB_ADMIN_PASSWORD = ...</a:t>
             </a:r>
           </a:p>
@@ -35147,14 +37127,14 @@
       </p:sp>
       <p:sp>
         <p:nvSpPr>
-          <p:cNvPr id="22" name="TextBox 21"/>
-          <p:cNvSpPr txBox="1"/>
-          <p:nvPr/>
-        </p:nvSpPr>
-        <p:spPr>
-          <a:xfrm>
-            <a:off x="1499616" y="5870448"/>
-            <a:ext cx="3931920" cy="457200"/>
+          <p:cNvPr id="28" name="TextBox 27"/>
+          <p:cNvSpPr txBox="1"/>
+          <p:nvPr/>
+        </p:nvSpPr>
+        <p:spPr>
+          <a:xfrm>
+            <a:off x="1499616" y="6144767"/>
+            <a:ext cx="3931920" cy="292608"/>
           </a:xfrm>
           <a:prstGeom prst="rect">
             <a:avLst/>
@@ -35169,7 +37149,7 @@
           <a:p>
             <a:pPr algn="l">
               <a:lnSpc>
-                <a:spcPct val="120000"/>
+                <a:spcPct val="115000"/>
               </a:lnSpc>
               <a:spcBef>
                 <a:spcPts val="0"/>
@@ -35179,7 +37159,7 @@
               </a:spcAft>
             </a:pPr>
             <a:r>
-              <a:rPr sz="1050" b="0" i="0">
+              <a:rPr sz="1000" b="0" i="0">
                 <a:solidFill>
                   <a:srgbClr val="667085"/>
                 </a:solidFill>
@@ -35187,14 +37167,14 @@
                 <a:ea typeface="맑은 고딕"/>
                 <a:cs typeface="맑은 고딕"/>
               </a:rPr>
-              <a:t>git 추적 제외. users\secrets.ini.sample 을 복사해 만듭니다.</a:t>
-            </a:r>
-          </a:p>
-        </p:txBody>
-      </p:sp>
-      <p:sp>
-        <p:nvSpPr>
-          <p:cNvPr id="23" name="TextBox 22"/>
+              <a:t>git 추적 제외. users\db_secrets.ini.sample 을 복사해 만듭니다.</a:t>
+            </a:r>
+          </a:p>
+        </p:txBody>
+      </p:sp>
+      <p:sp>
+        <p:nvSpPr>
+          <p:cNvPr id="29" name="TextBox 28"/>
           <p:cNvSpPr txBox="1"/>
           <p:nvPr/>
         </p:nvSpPr>
@@ -39550,7 +41530,7 @@
                 <a:ea typeface="Consolas"/>
                 <a:cs typeface="Consolas"/>
               </a:rPr>
-              <a:t>users\&lt;user&gt;\secrets.ini</a:t>
+              <a:t>users\&lt;user&gt;\db_secrets.ini</a:t>
             </a:r>
           </a:p>
         </p:txBody>

--- a/멀티모달_화재감지_모니터링_설치매뉴얼.pptx
+++ b/멀티모달_화재감지_모니터링_설치매뉴얼.pptx
@@ -23168,7 +23168,7 @@
                 <a:ea typeface="Consolas"/>
                 <a:cs typeface="Consolas"/>
               </a:rPr>
-              <a:t>        [예행연습] [재학습 실행] [닫기]   09-24 12:14  20260924_121452  승격</a:t>
+              <a:t>        [예행연습] [재학습 적용] [닫기]   09-24 12:14  20260924_121452  승격</a:t>
             </a:r>
           </a:p>
           <a:p>
